--- a/Statistique graphique.pptx
+++ b/Statistique graphique.pptx
@@ -5,7 +5,7 @@
     <p:sldMasterId id="2147483718" r:id="rId1"/>
   </p:sldMasterIdLst>
   <p:notesMasterIdLst>
-    <p:notesMasterId r:id="rId28"/>
+    <p:notesMasterId r:id="rId29"/>
   </p:notesMasterIdLst>
   <p:sldIdLst>
     <p:sldId id="256" r:id="rId2"/>
@@ -29,11 +29,12 @@
     <p:sldId id="275" r:id="rId20"/>
     <p:sldId id="281" r:id="rId21"/>
     <p:sldId id="276" r:id="rId22"/>
-    <p:sldId id="277" r:id="rId23"/>
-    <p:sldId id="278" r:id="rId24"/>
-    <p:sldId id="279" r:id="rId25"/>
+    <p:sldId id="278" r:id="rId23"/>
+    <p:sldId id="279" r:id="rId24"/>
+    <p:sldId id="277" r:id="rId25"/>
     <p:sldId id="282" r:id="rId26"/>
     <p:sldId id="280" r:id="rId27"/>
+    <p:sldId id="283" r:id="rId28"/>
   </p:sldIdLst>
   <p:sldSz cx="12192000" cy="6858000"/>
   <p:notesSz cx="6858000" cy="9144000"/>
@@ -1844,7 +1845,7 @@
       <dgm:spPr/>
     </dgm:pt>
     <dgm:pt modelId="{0886CCEB-C6A4-4D67-A943-D55BF8759F66}" type="pres">
-      <dgm:prSet presAssocID="{3FAB6734-7ED4-4A00-A7B4-B8157DF74F46}" presName="tile1" presStyleLbl="node1" presStyleIdx="0" presStyleCnt="4"/>
+      <dgm:prSet presAssocID="{3FAB6734-7ED4-4A00-A7B4-B8157DF74F46}" presName="tile1" presStyleLbl="node1" presStyleIdx="0" presStyleCnt="4" custLinFactNeighborX="-2384" custLinFactNeighborY="0"/>
       <dgm:spPr/>
     </dgm:pt>
     <dgm:pt modelId="{E54EC426-7028-4D88-818D-A36FBCF845C0}" type="pres">
@@ -13236,7 +13237,7 @@
         </p:blipFill>
         <p:spPr>
           <a:xfrm>
-            <a:off x="3299298" y="2566920"/>
+            <a:off x="5231793" y="2566920"/>
             <a:ext cx="5593404" cy="3541780"/>
           </a:xfrm>
         </p:spPr>
@@ -13267,6 +13268,74 @@
               <a:t>10</a:t>
             </a:fld>
             <a:endParaRPr lang="fr-FR"/>
+          </a:p>
+        </p:txBody>
+      </p:sp>
+      <p:sp>
+        <p:nvSpPr>
+          <p:cNvPr id="3" name="ZoneTexte 2">
+            <a:extLst>
+              <a:ext uri="{FF2B5EF4-FFF2-40B4-BE49-F238E27FC236}">
+                <a16:creationId xmlns:a16="http://schemas.microsoft.com/office/drawing/2014/main" id="{9880D4D4-AC28-9ABE-AD1C-7A46C5B15870}"/>
+              </a:ext>
+            </a:extLst>
+          </p:cNvPr>
+          <p:cNvSpPr txBox="1"/>
+          <p:nvPr/>
+        </p:nvSpPr>
+        <p:spPr>
+          <a:xfrm>
+            <a:off x="1112363" y="2650171"/>
+            <a:ext cx="3633250" cy="1477328"/>
+          </a:xfrm>
+          <a:prstGeom prst="rect">
+            <a:avLst/>
+          </a:prstGeom>
+          <a:noFill/>
+        </p:spPr>
+        <p:txBody>
+          <a:bodyPr wrap="square" rtlCol="0">
+            <a:spAutoFit/>
+          </a:bodyPr>
+          <a:lstStyle/>
+          <a:p>
+            <a:r>
+              <a:rPr lang="fr-FR" b="1" dirty="0"/>
+              <a:t>Questions métier associées:</a:t>
+            </a:r>
+          </a:p>
+          <a:p>
+            <a:endParaRPr lang="fr-FR" b="1" dirty="0"/>
+          </a:p>
+          <a:p>
+            <a:pPr marL="285750" indent="-285750">
+              <a:buFontTx/>
+              <a:buChar char="-"/>
+            </a:pPr>
+            <a:r>
+              <a:rPr lang="fr-FR" dirty="0"/>
+              <a:t>Comment se réparti….?</a:t>
+            </a:r>
+          </a:p>
+          <a:p>
+            <a:pPr marL="285750" indent="-285750">
+              <a:buFontTx/>
+              <a:buChar char="-"/>
+            </a:pPr>
+            <a:r>
+              <a:rPr lang="fr-FR" dirty="0"/>
+              <a:t>Quel est le maximum, le minimum?</a:t>
+            </a:r>
+          </a:p>
+          <a:p>
+            <a:pPr marL="285750" indent="-285750">
+              <a:buFontTx/>
+              <a:buChar char="-"/>
+            </a:pPr>
+            <a:r>
+              <a:rPr lang="fr-FR" dirty="0"/>
+              <a:t>Quelle est la progression?</a:t>
+            </a:r>
           </a:p>
         </p:txBody>
       </p:sp>
@@ -13387,11 +13456,52 @@
         </p:blipFill>
         <p:spPr>
           <a:xfrm>
-            <a:off x="749029" y="2836755"/>
-            <a:ext cx="10700425" cy="3411645"/>
+            <a:off x="749029" y="3667027"/>
+            <a:ext cx="10700425" cy="2581373"/>
           </a:xfrm>
         </p:spPr>
       </p:pic>
+      <p:sp>
+        <p:nvSpPr>
+          <p:cNvPr id="3" name="ZoneTexte 2">
+            <a:extLst>
+              <a:ext uri="{FF2B5EF4-FFF2-40B4-BE49-F238E27FC236}">
+                <a16:creationId xmlns:a16="http://schemas.microsoft.com/office/drawing/2014/main" id="{9F9A24FB-BAB8-6EFF-373F-C4E9237C5EAB}"/>
+              </a:ext>
+            </a:extLst>
+          </p:cNvPr>
+          <p:cNvSpPr txBox="1"/>
+          <p:nvPr/>
+        </p:nvSpPr>
+        <p:spPr>
+          <a:xfrm>
+            <a:off x="1112363" y="2650171"/>
+            <a:ext cx="11161336" cy="646331"/>
+          </a:xfrm>
+          <a:prstGeom prst="rect">
+            <a:avLst/>
+          </a:prstGeom>
+          <a:noFill/>
+        </p:spPr>
+        <p:txBody>
+          <a:bodyPr wrap="square" rtlCol="0">
+            <a:spAutoFit/>
+          </a:bodyPr>
+          <a:lstStyle/>
+          <a:p>
+            <a:r>
+              <a:rPr lang="fr-FR" b="1" dirty="0"/>
+              <a:t>Questions métier associées:</a:t>
+            </a:r>
+          </a:p>
+          <a:p>
+            <a:r>
+              <a:rPr lang="fr-FR" dirty="0"/>
+              <a:t>Quel est le groupe le plus/ le moins (grand, favorable, productif….)</a:t>
+            </a:r>
+          </a:p>
+        </p:txBody>
+      </p:sp>
     </p:spTree>
     <p:extLst>
       <p:ext uri="{BB962C8B-B14F-4D97-AF65-F5344CB8AC3E}">
@@ -13509,11 +13619,66 @@
         </p:blipFill>
         <p:spPr>
           <a:xfrm>
-            <a:off x="787940" y="2820793"/>
-            <a:ext cx="10486417" cy="2791215"/>
+            <a:off x="787940" y="3429000"/>
+            <a:ext cx="10486417" cy="2540000"/>
           </a:xfrm>
         </p:spPr>
       </p:pic>
+      <p:sp>
+        <p:nvSpPr>
+          <p:cNvPr id="3" name="ZoneTexte 2">
+            <a:extLst>
+              <a:ext uri="{FF2B5EF4-FFF2-40B4-BE49-F238E27FC236}">
+                <a16:creationId xmlns:a16="http://schemas.microsoft.com/office/drawing/2014/main" id="{79DC614E-DE57-A134-1B5B-165F72E300D5}"/>
+              </a:ext>
+            </a:extLst>
+          </p:cNvPr>
+          <p:cNvSpPr txBox="1"/>
+          <p:nvPr/>
+        </p:nvSpPr>
+        <p:spPr>
+          <a:xfrm>
+            <a:off x="1131217" y="2505670"/>
+            <a:ext cx="11161336" cy="923330"/>
+          </a:xfrm>
+          <a:prstGeom prst="rect">
+            <a:avLst/>
+          </a:prstGeom>
+          <a:noFill/>
+        </p:spPr>
+        <p:txBody>
+          <a:bodyPr wrap="square" rtlCol="0">
+            <a:spAutoFit/>
+          </a:bodyPr>
+          <a:lstStyle/>
+          <a:p>
+            <a:r>
+              <a:rPr lang="fr-FR" b="1" dirty="0"/>
+              <a:t>Questions métier associées:</a:t>
+            </a:r>
+          </a:p>
+          <a:p>
+            <a:pPr marL="285750" indent="-285750">
+              <a:buFontTx/>
+              <a:buChar char="-"/>
+            </a:pPr>
+            <a:r>
+              <a:rPr lang="fr-FR" dirty="0"/>
+              <a:t>Que contient X?</a:t>
+            </a:r>
+          </a:p>
+          <a:p>
+            <a:pPr marL="285750" indent="-285750">
+              <a:buFontTx/>
+              <a:buChar char="-"/>
+            </a:pPr>
+            <a:r>
+              <a:rPr lang="fr-FR" dirty="0"/>
+              <a:t>Qu’est ce qui est inclus/ exclu  de cet ensemble?</a:t>
+            </a:r>
+          </a:p>
+        </p:txBody>
+      </p:sp>
     </p:spTree>
     <p:extLst>
       <p:ext uri="{BB962C8B-B14F-4D97-AF65-F5344CB8AC3E}">
@@ -13596,7 +13761,7 @@
         </p:blipFill>
         <p:spPr>
           <a:xfrm>
-            <a:off x="3900791" y="2597285"/>
+            <a:off x="5861566" y="2690417"/>
             <a:ext cx="4659549" cy="3278583"/>
           </a:xfrm>
         </p:spPr>
@@ -13627,6 +13792,71 @@
               <a:t>13</a:t>
             </a:fld>
             <a:endParaRPr lang="fr-FR"/>
+          </a:p>
+        </p:txBody>
+      </p:sp>
+      <p:sp>
+        <p:nvSpPr>
+          <p:cNvPr id="3" name="ZoneTexte 2">
+            <a:extLst>
+              <a:ext uri="{FF2B5EF4-FFF2-40B4-BE49-F238E27FC236}">
+                <a16:creationId xmlns:a16="http://schemas.microsoft.com/office/drawing/2014/main" id="{9A00B66B-CEB3-0537-92A1-B23419843F03}"/>
+              </a:ext>
+            </a:extLst>
+          </p:cNvPr>
+          <p:cNvSpPr txBox="1"/>
+          <p:nvPr/>
+        </p:nvSpPr>
+        <p:spPr>
+          <a:xfrm>
+            <a:off x="1112363" y="2650171"/>
+            <a:ext cx="3949831" cy="1200329"/>
+          </a:xfrm>
+          <a:prstGeom prst="rect">
+            <a:avLst/>
+          </a:prstGeom>
+          <a:noFill/>
+        </p:spPr>
+        <p:txBody>
+          <a:bodyPr wrap="square" rtlCol="0">
+            <a:spAutoFit/>
+          </a:bodyPr>
+          <a:lstStyle/>
+          <a:p>
+            <a:r>
+              <a:rPr lang="fr-FR" b="1" dirty="0"/>
+              <a:t>Questions métier associées:</a:t>
+            </a:r>
+          </a:p>
+          <a:p>
+            <a:pPr marL="285750" indent="-285750">
+              <a:buFontTx/>
+              <a:buChar char="-"/>
+            </a:pPr>
+            <a:r>
+              <a:rPr lang="fr-FR" dirty="0"/>
+              <a:t>Quel est l’impact ou l’effet de X sur Y?</a:t>
+            </a:r>
+          </a:p>
+          <a:p>
+            <a:pPr marL="285750" indent="-285750">
+              <a:buFontTx/>
+              <a:buChar char="-"/>
+            </a:pPr>
+            <a:r>
+              <a:rPr lang="fr-FR" dirty="0"/>
+              <a:t>Qu’est ce qui entraîne ceci?</a:t>
+            </a:r>
+          </a:p>
+          <a:p>
+            <a:pPr marL="285750" indent="-285750">
+              <a:buFontTx/>
+              <a:buChar char="-"/>
+            </a:pPr>
+            <a:r>
+              <a:rPr lang="fr-FR" dirty="0"/>
+              <a:t>Est-ce que X est lié à Y?</a:t>
+            </a:r>
           </a:p>
         </p:txBody>
       </p:sp>
@@ -14634,7 +14864,7 @@
           <a:p>
             <a:r>
               <a:rPr lang="fr-FR" dirty="0"/>
-              <a:t>Excel, R, Python</a:t>
+              <a:t>Excel, R, Python, les outils de datavisualisation (par exemple Power BI)</a:t>
             </a:r>
           </a:p>
           <a:p>
@@ -14646,7 +14876,7 @@
           <a:p>
             <a:r>
               <a:rPr lang="fr-FR" dirty="0"/>
-              <a:t>Les librairies importantes</a:t>
+              <a:t>Les librairies importantes sous Python</a:t>
             </a:r>
           </a:p>
           <a:p>
@@ -15024,7 +15254,7 @@
           <a:p>
             <a:r>
               <a:rPr lang="fr-FR" dirty="0"/>
-              <a:t>Jeux de données</a:t>
+              <a:t>Jeu de données</a:t>
             </a:r>
           </a:p>
         </p:txBody>
@@ -15058,35 +15288,6 @@
           </a:p>
         </p:txBody>
       </p:sp>
-      <p:pic>
-        <p:nvPicPr>
-          <p:cNvPr id="10" name="Espace réservé du contenu 9">
-            <a:extLst>
-              <a:ext uri="{FF2B5EF4-FFF2-40B4-BE49-F238E27FC236}">
-                <a16:creationId xmlns:a16="http://schemas.microsoft.com/office/drawing/2014/main" id="{C2E3BDFB-B887-4666-A699-FD35755730D5}"/>
-              </a:ext>
-            </a:extLst>
-          </p:cNvPr>
-          <p:cNvPicPr>
-            <a:picLocks noGrp="1" noChangeAspect="1"/>
-          </p:cNvPicPr>
-          <p:nvPr>
-            <p:ph idx="1"/>
-          </p:nvPr>
-        </p:nvPicPr>
-        <p:blipFill>
-          <a:blip r:embed="rId2"/>
-          <a:stretch>
-            <a:fillRect/>
-          </a:stretch>
-        </p:blipFill>
-        <p:spPr>
-          <a:xfrm>
-            <a:off x="2269715" y="2495550"/>
-            <a:ext cx="6000750" cy="1866900"/>
-          </a:xfrm>
-        </p:spPr>
-      </p:pic>
       <p:graphicFrame>
         <p:nvGraphicFramePr>
           <p:cNvPr id="11" name="Tableau 11">
@@ -15102,14 +15303,14 @@
           <p:nvPr>
             <p:extLst>
               <p:ext uri="{D42A27DB-BD31-4B8C-83A1-F6EECF244321}">
-                <p14:modId xmlns:p14="http://schemas.microsoft.com/office/powerpoint/2010/main" val="778444562"/>
+                <p14:modId xmlns:p14="http://schemas.microsoft.com/office/powerpoint/2010/main" val="4077900191"/>
               </p:ext>
             </p:extLst>
           </p:nvPr>
         </p:nvGraphicFramePr>
         <p:xfrm>
-          <a:off x="1560659" y="4394200"/>
-          <a:ext cx="8128000" cy="1854200"/>
+          <a:off x="1466391" y="4625340"/>
+          <a:ext cx="8128000" cy="1483360"/>
         </p:xfrm>
         <a:graphic>
           <a:graphicData uri="http://schemas.openxmlformats.org/drawingml/2006/table">
@@ -15236,7 +15437,7 @@
                     <a:bodyPr/>
                     <a:lstStyle/>
                     <a:p>
-                      <a:endParaRPr lang="fr-FR"/>
+                      <a:endParaRPr lang="fr-FR" dirty="0"/>
                     </a:p>
                   </a:txBody>
                   <a:tcPr/>
@@ -15247,37 +15448,74 @@
                   </a:ext>
                 </a:extLst>
               </a:tr>
-              <a:tr h="370840">
-                <a:tc>
-                  <a:txBody>
-                    <a:bodyPr/>
-                    <a:lstStyle/>
-                    <a:p>
-                      <a:endParaRPr lang="fr-FR"/>
-                    </a:p>
-                  </a:txBody>
-                  <a:tcPr/>
-                </a:tc>
-                <a:tc>
-                  <a:txBody>
-                    <a:bodyPr/>
-                    <a:lstStyle/>
-                    <a:p>
-                      <a:endParaRPr lang="fr-FR" dirty="0"/>
-                    </a:p>
-                  </a:txBody>
-                  <a:tcPr/>
-                </a:tc>
-                <a:extLst>
-                  <a:ext uri="{0D108BD9-81ED-4DB2-BD59-A6C34878D82A}">
-                    <a16:rowId xmlns:a16="http://schemas.microsoft.com/office/drawing/2014/main" val="2228396714"/>
-                  </a:ext>
-                </a:extLst>
-              </a:tr>
             </a:tbl>
           </a:graphicData>
         </a:graphic>
       </p:graphicFrame>
+      <p:pic>
+        <p:nvPicPr>
+          <p:cNvPr id="7" name="Espace réservé du contenu 6">
+            <a:extLst>
+              <a:ext uri="{FF2B5EF4-FFF2-40B4-BE49-F238E27FC236}">
+                <a16:creationId xmlns:a16="http://schemas.microsoft.com/office/drawing/2014/main" id="{EFBDB774-2F83-48E1-6FC2-D8D56228DCD2}"/>
+              </a:ext>
+            </a:extLst>
+          </p:cNvPr>
+          <p:cNvPicPr>
+            <a:picLocks noGrp="1" noChangeAspect="1"/>
+          </p:cNvPicPr>
+          <p:nvPr>
+            <p:ph idx="1"/>
+          </p:nvPr>
+        </p:nvPicPr>
+        <p:blipFill>
+          <a:blip r:embed="rId2"/>
+          <a:stretch>
+            <a:fillRect/>
+          </a:stretch>
+        </p:blipFill>
+        <p:spPr>
+          <a:xfrm>
+            <a:off x="1570086" y="2926384"/>
+            <a:ext cx="6629400" cy="1495425"/>
+          </a:xfrm>
+        </p:spPr>
+      </p:pic>
+      <p:sp>
+        <p:nvSpPr>
+          <p:cNvPr id="8" name="ZoneTexte 7">
+            <a:extLst>
+              <a:ext uri="{FF2B5EF4-FFF2-40B4-BE49-F238E27FC236}">
+                <a16:creationId xmlns:a16="http://schemas.microsoft.com/office/drawing/2014/main" id="{AD7D40A6-201F-927B-8F93-B5E9250E6886}"/>
+              </a:ext>
+            </a:extLst>
+          </p:cNvPr>
+          <p:cNvSpPr txBox="1"/>
+          <p:nvPr/>
+        </p:nvSpPr>
+        <p:spPr>
+          <a:xfrm>
+            <a:off x="1570086" y="2476862"/>
+            <a:ext cx="4434788" cy="369332"/>
+          </a:xfrm>
+          <a:prstGeom prst="rect">
+            <a:avLst/>
+          </a:prstGeom>
+          <a:noFill/>
+        </p:spPr>
+        <p:txBody>
+          <a:bodyPr wrap="square" rtlCol="0">
+            <a:spAutoFit/>
+          </a:bodyPr>
+          <a:lstStyle/>
+          <a:p>
+            <a:r>
+              <a:rPr lang="fr-FR" b="1" dirty="0"/>
+              <a:t>Sujet: Le réchauffement climatique</a:t>
+            </a:r>
+          </a:p>
+        </p:txBody>
+      </p:sp>
     </p:spTree>
     <p:extLst>
       <p:ext uri="{BB962C8B-B14F-4D97-AF65-F5344CB8AC3E}">
@@ -15360,7 +15598,7 @@
         </p:blipFill>
         <p:spPr>
           <a:xfrm>
-            <a:off x="5869858" y="2557463"/>
+            <a:off x="6350412" y="2651125"/>
             <a:ext cx="5026739" cy="3317875"/>
           </a:xfrm>
         </p:spPr>
@@ -15416,14 +15654,125 @@
         </p:blipFill>
         <p:spPr>
           <a:xfrm>
-            <a:off x="847601" y="3091601"/>
-            <a:ext cx="4866968" cy="1866900"/>
+            <a:off x="720581" y="4453194"/>
+            <a:ext cx="4866968" cy="1515806"/>
           </a:xfrm>
           <a:prstGeom prst="rect">
             <a:avLst/>
           </a:prstGeom>
         </p:spPr>
       </p:pic>
+      <p:pic>
+        <p:nvPicPr>
+          <p:cNvPr id="5" name="Image 4">
+            <a:extLst>
+              <a:ext uri="{FF2B5EF4-FFF2-40B4-BE49-F238E27FC236}">
+                <a16:creationId xmlns:a16="http://schemas.microsoft.com/office/drawing/2014/main" id="{18DC0F9D-7648-5544-4337-20B12280CCD5}"/>
+              </a:ext>
+            </a:extLst>
+          </p:cNvPr>
+          <p:cNvPicPr>
+            <a:picLocks noChangeAspect="1"/>
+          </p:cNvPicPr>
+          <p:nvPr/>
+        </p:nvPicPr>
+        <p:blipFill>
+          <a:blip r:embed="rId4"/>
+          <a:stretch>
+            <a:fillRect/>
+          </a:stretch>
+        </p:blipFill>
+        <p:spPr>
+          <a:xfrm>
+            <a:off x="814849" y="2749550"/>
+            <a:ext cx="4866968" cy="1180512"/>
+          </a:xfrm>
+          <a:prstGeom prst="rect">
+            <a:avLst/>
+          </a:prstGeom>
+        </p:spPr>
+      </p:pic>
+      <p:sp>
+        <p:nvSpPr>
+          <p:cNvPr id="8" name="Flèche : bas 7">
+            <a:extLst>
+              <a:ext uri="{FF2B5EF4-FFF2-40B4-BE49-F238E27FC236}">
+                <a16:creationId xmlns:a16="http://schemas.microsoft.com/office/drawing/2014/main" id="{773453F0-FD69-995A-927A-401239181778}"/>
+              </a:ext>
+            </a:extLst>
+          </p:cNvPr>
+          <p:cNvSpPr/>
+          <p:nvPr/>
+        </p:nvSpPr>
+        <p:spPr>
+          <a:xfrm>
+            <a:off x="2764790" y="3964971"/>
+            <a:ext cx="263139" cy="403122"/>
+          </a:xfrm>
+          <a:prstGeom prst="downArrow">
+            <a:avLst/>
+          </a:prstGeom>
+        </p:spPr>
+        <p:style>
+          <a:lnRef idx="2">
+            <a:schemeClr val="accent1">
+              <a:shade val="50000"/>
+            </a:schemeClr>
+          </a:lnRef>
+          <a:fillRef idx="1">
+            <a:schemeClr val="accent1"/>
+          </a:fillRef>
+          <a:effectRef idx="0">
+            <a:schemeClr val="accent1"/>
+          </a:effectRef>
+          <a:fontRef idx="minor">
+            <a:schemeClr val="lt1"/>
+          </a:fontRef>
+        </p:style>
+        <p:txBody>
+          <a:bodyPr rtlCol="0" anchor="ctr"/>
+          <a:lstStyle/>
+          <a:p>
+            <a:pPr algn="ctr"/>
+            <a:endParaRPr lang="fr-FR"/>
+          </a:p>
+        </p:txBody>
+      </p:sp>
+      <p:sp>
+        <p:nvSpPr>
+          <p:cNvPr id="9" name="ZoneTexte 8">
+            <a:extLst>
+              <a:ext uri="{FF2B5EF4-FFF2-40B4-BE49-F238E27FC236}">
+                <a16:creationId xmlns:a16="http://schemas.microsoft.com/office/drawing/2014/main" id="{1206D630-B18B-8993-78FD-3E27ECB5B2DE}"/>
+              </a:ext>
+            </a:extLst>
+          </p:cNvPr>
+          <p:cNvSpPr txBox="1"/>
+          <p:nvPr/>
+        </p:nvSpPr>
+        <p:spPr>
+          <a:xfrm>
+            <a:off x="936671" y="2362899"/>
+            <a:ext cx="4434788" cy="369332"/>
+          </a:xfrm>
+          <a:prstGeom prst="rect">
+            <a:avLst/>
+          </a:prstGeom>
+          <a:noFill/>
+        </p:spPr>
+        <p:txBody>
+          <a:bodyPr wrap="square" rtlCol="0">
+            <a:spAutoFit/>
+          </a:bodyPr>
+          <a:lstStyle/>
+          <a:p>
+            <a:r>
+              <a:rPr lang="fr-FR" b="1" dirty="0"/>
+              <a:t>Sujet: Le réchauffement climatique</a:t>
+            </a:r>
+          </a:p>
+        </p:txBody>
+      </p:sp>
     </p:spTree>
     <p:extLst>
       <p:ext uri="{BB962C8B-B14F-4D97-AF65-F5344CB8AC3E}">
@@ -15459,7 +15808,7 @@
           <p:cNvPr id="2" name="Titre 1">
             <a:extLst>
               <a:ext uri="{FF2B5EF4-FFF2-40B4-BE49-F238E27FC236}">
-                <a16:creationId xmlns:a16="http://schemas.microsoft.com/office/drawing/2014/main" id="{1B329B3F-455A-A466-BF82-01CD2DE5AD5C}"/>
+                <a16:creationId xmlns:a16="http://schemas.microsoft.com/office/drawing/2014/main" id="{0C8C0EB2-11F3-97D9-0392-7216AAEFFAED}"/>
               </a:ext>
             </a:extLst>
           </p:cNvPr>
@@ -15477,26 +15826,53 @@
           <a:p>
             <a:r>
               <a:rPr lang="fr-FR" dirty="0"/>
-              <a:t>Nuage de points</a:t>
-            </a:r>
+              <a:t>Diagramme circulaire</a:t>
+            </a:r>
+          </a:p>
+        </p:txBody>
+      </p:sp>
+      <p:sp>
+        <p:nvSpPr>
+          <p:cNvPr id="4" name="Espace réservé du numéro de diapositive 3">
+            <a:extLst>
+              <a:ext uri="{FF2B5EF4-FFF2-40B4-BE49-F238E27FC236}">
+                <a16:creationId xmlns:a16="http://schemas.microsoft.com/office/drawing/2014/main" id="{344F43CD-9516-1D98-3B2C-CE73AE054174}"/>
+              </a:ext>
+            </a:extLst>
+          </p:cNvPr>
+          <p:cNvSpPr>
+            <a:spLocks noGrp="1"/>
+          </p:cNvSpPr>
+          <p:nvPr>
+            <p:ph type="sldNum" sz="quarter" idx="12"/>
+          </p:nvPr>
+        </p:nvSpPr>
+        <p:spPr/>
+        <p:txBody>
+          <a:bodyPr/>
+          <a:lstStyle/>
+          <a:p>
+            <a:fld id="{0BD8DA86-C09D-401C-842D-741E230745B4}" type="slidenum">
+              <a:rPr lang="fr-FR" smtClean="0"/>
+              <a:t>22</a:t>
+            </a:fld>
+            <a:endParaRPr lang="fr-FR"/>
           </a:p>
         </p:txBody>
       </p:sp>
       <p:pic>
         <p:nvPicPr>
-          <p:cNvPr id="6" name="Espace réservé du contenu 5">
+          <p:cNvPr id="10" name="Image 9">
             <a:extLst>
               <a:ext uri="{FF2B5EF4-FFF2-40B4-BE49-F238E27FC236}">
-                <a16:creationId xmlns:a16="http://schemas.microsoft.com/office/drawing/2014/main" id="{C689B516-3DF0-7701-28A9-FB2E9E9BF361}"/>
+                <a16:creationId xmlns:a16="http://schemas.microsoft.com/office/drawing/2014/main" id="{22C1DA7E-F0C0-A02C-A405-FAE7C514E96E}"/>
               </a:ext>
             </a:extLst>
           </p:cNvPr>
           <p:cNvPicPr>
-            <a:picLocks noGrp="1" noChangeAspect="1"/>
+            <a:picLocks noChangeAspect="1"/>
           </p:cNvPicPr>
-          <p:nvPr>
-            <p:ph idx="1"/>
-          </p:nvPr>
+          <p:nvPr/>
         </p:nvPicPr>
         <p:blipFill>
           <a:blip r:embed="rId2"/>
@@ -15506,46 +15882,66 @@
         </p:blipFill>
         <p:spPr>
           <a:xfrm>
-            <a:off x="6648409" y="2732298"/>
-            <a:ext cx="4334224" cy="2632266"/>
+            <a:off x="749402" y="2920183"/>
+            <a:ext cx="5204817" cy="1400175"/>
           </a:xfrm>
+          <a:prstGeom prst="rect">
+            <a:avLst/>
+          </a:prstGeom>
         </p:spPr>
       </p:pic>
       <p:sp>
         <p:nvSpPr>
-          <p:cNvPr id="4" name="Espace réservé du numéro de diapositive 3">
+          <p:cNvPr id="11" name="Flèche : bas 10">
             <a:extLst>
               <a:ext uri="{FF2B5EF4-FFF2-40B4-BE49-F238E27FC236}">
-                <a16:creationId xmlns:a16="http://schemas.microsoft.com/office/drawing/2014/main" id="{5379963E-3CCD-9CE1-0DAD-78D7172527CB}"/>
+                <a16:creationId xmlns:a16="http://schemas.microsoft.com/office/drawing/2014/main" id="{E8DF8678-2556-2CF5-2628-06F2963B16D0}"/>
               </a:ext>
             </a:extLst>
           </p:cNvPr>
-          <p:cNvSpPr>
-            <a:spLocks noGrp="1"/>
-          </p:cNvSpPr>
-          <p:nvPr>
-            <p:ph type="sldNum" sz="quarter" idx="12"/>
-          </p:nvPr>
-        </p:nvSpPr>
-        <p:spPr/>
-        <p:txBody>
-          <a:bodyPr/>
+          <p:cNvSpPr/>
+          <p:nvPr/>
+        </p:nvSpPr>
+        <p:spPr>
+          <a:xfrm>
+            <a:off x="3147529" y="4427482"/>
+            <a:ext cx="264974" cy="370658"/>
+          </a:xfrm>
+          <a:prstGeom prst="downArrow">
+            <a:avLst/>
+          </a:prstGeom>
+        </p:spPr>
+        <p:style>
+          <a:lnRef idx="2">
+            <a:schemeClr val="accent1">
+              <a:shade val="50000"/>
+            </a:schemeClr>
+          </a:lnRef>
+          <a:fillRef idx="1">
+            <a:schemeClr val="accent1"/>
+          </a:fillRef>
+          <a:effectRef idx="0">
+            <a:schemeClr val="accent1"/>
+          </a:effectRef>
+          <a:fontRef idx="minor">
+            <a:schemeClr val="lt1"/>
+          </a:fontRef>
+        </p:style>
+        <p:txBody>
+          <a:bodyPr rtlCol="0" anchor="ctr"/>
           <a:lstStyle/>
           <a:p>
-            <a:fld id="{0BD8DA86-C09D-401C-842D-741E230745B4}" type="slidenum">
-              <a:rPr lang="fr-FR" smtClean="0"/>
-              <a:t>22</a:t>
-            </a:fld>
+            <a:pPr algn="ctr"/>
             <a:endParaRPr lang="fr-FR"/>
           </a:p>
         </p:txBody>
       </p:sp>
       <p:pic>
         <p:nvPicPr>
-          <p:cNvPr id="8" name="Image 7">
+          <p:cNvPr id="13" name="Image 12">
             <a:extLst>
               <a:ext uri="{FF2B5EF4-FFF2-40B4-BE49-F238E27FC236}">
-                <a16:creationId xmlns:a16="http://schemas.microsoft.com/office/drawing/2014/main" id="{E2C1DF42-0B80-565A-913A-E44D3133ACFD}"/>
+                <a16:creationId xmlns:a16="http://schemas.microsoft.com/office/drawing/2014/main" id="{6C093A22-4030-BAE1-DFE1-D5A80D89BA5D}"/>
               </a:ext>
             </a:extLst>
           </p:cNvPr>
@@ -15562,18 +15958,117 @@
         </p:blipFill>
         <p:spPr>
           <a:xfrm>
-            <a:off x="1295402" y="2643494"/>
-            <a:ext cx="5191125" cy="2809875"/>
+            <a:off x="648794" y="5168900"/>
+            <a:ext cx="5305425" cy="800100"/>
           </a:xfrm>
           <a:prstGeom prst="rect">
             <a:avLst/>
           </a:prstGeom>
         </p:spPr>
       </p:pic>
+      <p:sp>
+        <p:nvSpPr>
+          <p:cNvPr id="14" name="ZoneTexte 13">
+            <a:extLst>
+              <a:ext uri="{FF2B5EF4-FFF2-40B4-BE49-F238E27FC236}">
+                <a16:creationId xmlns:a16="http://schemas.microsoft.com/office/drawing/2014/main" id="{ABA80269-BA42-B9F5-5F12-BACD53E514A3}"/>
+              </a:ext>
+            </a:extLst>
+          </p:cNvPr>
+          <p:cNvSpPr txBox="1"/>
+          <p:nvPr/>
+        </p:nvSpPr>
+        <p:spPr>
+          <a:xfrm>
+            <a:off x="771217" y="4778680"/>
+            <a:ext cx="3761295" cy="370657"/>
+          </a:xfrm>
+          <a:prstGeom prst="rect">
+            <a:avLst/>
+          </a:prstGeom>
+          <a:noFill/>
+        </p:spPr>
+        <p:txBody>
+          <a:bodyPr wrap="square" rtlCol="0">
+            <a:spAutoFit/>
+          </a:bodyPr>
+          <a:lstStyle/>
+          <a:p>
+            <a:r>
+              <a:rPr lang="fr-FR" b="1" dirty="0"/>
+              <a:t>Tableau croisé dynamique</a:t>
+            </a:r>
+          </a:p>
+        </p:txBody>
+      </p:sp>
+      <p:sp>
+        <p:nvSpPr>
+          <p:cNvPr id="3" name="ZoneTexte 2">
+            <a:extLst>
+              <a:ext uri="{FF2B5EF4-FFF2-40B4-BE49-F238E27FC236}">
+                <a16:creationId xmlns:a16="http://schemas.microsoft.com/office/drawing/2014/main" id="{7BBBF6B4-94D8-B7A5-F65F-1DCE06CF8CEE}"/>
+              </a:ext>
+            </a:extLst>
+          </p:cNvPr>
+          <p:cNvSpPr txBox="1"/>
+          <p:nvPr/>
+        </p:nvSpPr>
+        <p:spPr>
+          <a:xfrm>
+            <a:off x="749402" y="2492666"/>
+            <a:ext cx="4434788" cy="369332"/>
+          </a:xfrm>
+          <a:prstGeom prst="rect">
+            <a:avLst/>
+          </a:prstGeom>
+          <a:noFill/>
+        </p:spPr>
+        <p:txBody>
+          <a:bodyPr wrap="square" rtlCol="0">
+            <a:spAutoFit/>
+          </a:bodyPr>
+          <a:lstStyle/>
+          <a:p>
+            <a:r>
+              <a:rPr lang="fr-FR" b="1" dirty="0"/>
+              <a:t>Sujet: La qualité du sommeil</a:t>
+            </a:r>
+          </a:p>
+        </p:txBody>
+      </p:sp>
+      <p:pic>
+        <p:nvPicPr>
+          <p:cNvPr id="9" name="Espace réservé du contenu 8">
+            <a:extLst>
+              <a:ext uri="{FF2B5EF4-FFF2-40B4-BE49-F238E27FC236}">
+                <a16:creationId xmlns:a16="http://schemas.microsoft.com/office/drawing/2014/main" id="{815C02A8-C94D-5813-D23F-1C51D82283B3}"/>
+              </a:ext>
+            </a:extLst>
+          </p:cNvPr>
+          <p:cNvPicPr>
+            <a:picLocks noGrp="1" noChangeAspect="1"/>
+          </p:cNvPicPr>
+          <p:nvPr>
+            <p:ph idx="1"/>
+          </p:nvPr>
+        </p:nvPicPr>
+        <p:blipFill>
+          <a:blip r:embed="rId4"/>
+          <a:stretch>
+            <a:fillRect/>
+          </a:stretch>
+        </p:blipFill>
+        <p:spPr>
+          <a:xfrm>
+            <a:off x="6276380" y="2712545"/>
+            <a:ext cx="4620218" cy="3317875"/>
+          </a:xfrm>
+        </p:spPr>
+      </p:pic>
     </p:spTree>
     <p:extLst>
       <p:ext uri="{BB962C8B-B14F-4D97-AF65-F5344CB8AC3E}">
-        <p14:creationId xmlns:p14="http://schemas.microsoft.com/office/powerpoint/2010/main" val="1443565408"/>
+        <p14:creationId xmlns:p14="http://schemas.microsoft.com/office/powerpoint/2010/main" val="3639770790"/>
       </p:ext>
     </p:extLst>
   </p:cSld>
@@ -15605,263 +16100,6 @@
           <p:cNvPr id="2" name="Titre 1">
             <a:extLst>
               <a:ext uri="{FF2B5EF4-FFF2-40B4-BE49-F238E27FC236}">
-                <a16:creationId xmlns:a16="http://schemas.microsoft.com/office/drawing/2014/main" id="{0C8C0EB2-11F3-97D9-0392-7216AAEFFAED}"/>
-              </a:ext>
-            </a:extLst>
-          </p:cNvPr>
-          <p:cNvSpPr>
-            <a:spLocks noGrp="1"/>
-          </p:cNvSpPr>
-          <p:nvPr>
-            <p:ph type="title"/>
-          </p:nvPr>
-        </p:nvSpPr>
-        <p:spPr/>
-        <p:txBody>
-          <a:bodyPr/>
-          <a:lstStyle/>
-          <a:p>
-            <a:r>
-              <a:rPr lang="fr-FR" dirty="0"/>
-              <a:t>Diagramme circulaire</a:t>
-            </a:r>
-          </a:p>
-        </p:txBody>
-      </p:sp>
-      <p:pic>
-        <p:nvPicPr>
-          <p:cNvPr id="6" name="Espace réservé du contenu 5">
-            <a:extLst>
-              <a:ext uri="{FF2B5EF4-FFF2-40B4-BE49-F238E27FC236}">
-                <a16:creationId xmlns:a16="http://schemas.microsoft.com/office/drawing/2014/main" id="{A610C439-16D4-1ABB-2E3D-A591DA5256DA}"/>
-              </a:ext>
-            </a:extLst>
-          </p:cNvPr>
-          <p:cNvPicPr>
-            <a:picLocks noGrp="1" noChangeAspect="1"/>
-          </p:cNvPicPr>
-          <p:nvPr>
-            <p:ph idx="1"/>
-          </p:nvPr>
-        </p:nvPicPr>
-        <p:blipFill>
-          <a:blip r:embed="rId2"/>
-          <a:stretch>
-            <a:fillRect/>
-          </a:stretch>
-        </p:blipFill>
-        <p:spPr>
-          <a:xfrm>
-            <a:off x="6096000" y="2651125"/>
-            <a:ext cx="4658817" cy="3317875"/>
-          </a:xfrm>
-        </p:spPr>
-      </p:pic>
-      <p:sp>
-        <p:nvSpPr>
-          <p:cNvPr id="4" name="Espace réservé du numéro de diapositive 3">
-            <a:extLst>
-              <a:ext uri="{FF2B5EF4-FFF2-40B4-BE49-F238E27FC236}">
-                <a16:creationId xmlns:a16="http://schemas.microsoft.com/office/drawing/2014/main" id="{344F43CD-9516-1D98-3B2C-CE73AE054174}"/>
-              </a:ext>
-            </a:extLst>
-          </p:cNvPr>
-          <p:cNvSpPr>
-            <a:spLocks noGrp="1"/>
-          </p:cNvSpPr>
-          <p:nvPr>
-            <p:ph type="sldNum" sz="quarter" idx="12"/>
-          </p:nvPr>
-        </p:nvSpPr>
-        <p:spPr/>
-        <p:txBody>
-          <a:bodyPr/>
-          <a:lstStyle/>
-          <a:p>
-            <a:fld id="{0BD8DA86-C09D-401C-842D-741E230745B4}" type="slidenum">
-              <a:rPr lang="fr-FR" smtClean="0"/>
-              <a:t>23</a:t>
-            </a:fld>
-            <a:endParaRPr lang="fr-FR"/>
-          </a:p>
-        </p:txBody>
-      </p:sp>
-      <p:pic>
-        <p:nvPicPr>
-          <p:cNvPr id="10" name="Image 9">
-            <a:extLst>
-              <a:ext uri="{FF2B5EF4-FFF2-40B4-BE49-F238E27FC236}">
-                <a16:creationId xmlns:a16="http://schemas.microsoft.com/office/drawing/2014/main" id="{22C1DA7E-F0C0-A02C-A405-FAE7C514E96E}"/>
-              </a:ext>
-            </a:extLst>
-          </p:cNvPr>
-          <p:cNvPicPr>
-            <a:picLocks noChangeAspect="1"/>
-          </p:cNvPicPr>
-          <p:nvPr/>
-        </p:nvPicPr>
-        <p:blipFill>
-          <a:blip r:embed="rId3"/>
-          <a:stretch>
-            <a:fillRect/>
-          </a:stretch>
-        </p:blipFill>
-        <p:spPr>
-          <a:xfrm>
-            <a:off x="771217" y="2571595"/>
-            <a:ext cx="5204817" cy="1400175"/>
-          </a:xfrm>
-          <a:prstGeom prst="rect">
-            <a:avLst/>
-          </a:prstGeom>
-        </p:spPr>
-      </p:pic>
-      <p:sp>
-        <p:nvSpPr>
-          <p:cNvPr id="11" name="Flèche : bas 10">
-            <a:extLst>
-              <a:ext uri="{FF2B5EF4-FFF2-40B4-BE49-F238E27FC236}">
-                <a16:creationId xmlns:a16="http://schemas.microsoft.com/office/drawing/2014/main" id="{E8DF8678-2556-2CF5-2628-06F2963B16D0}"/>
-              </a:ext>
-            </a:extLst>
-          </p:cNvPr>
-          <p:cNvSpPr/>
-          <p:nvPr/>
-        </p:nvSpPr>
-        <p:spPr>
-          <a:xfrm>
-            <a:off x="3119156" y="4083225"/>
-            <a:ext cx="324465" cy="540774"/>
-          </a:xfrm>
-          <a:prstGeom prst="downArrow">
-            <a:avLst/>
-          </a:prstGeom>
-        </p:spPr>
-        <p:style>
-          <a:lnRef idx="2">
-            <a:schemeClr val="accent1">
-              <a:shade val="50000"/>
-            </a:schemeClr>
-          </a:lnRef>
-          <a:fillRef idx="1">
-            <a:schemeClr val="accent1"/>
-          </a:fillRef>
-          <a:effectRef idx="0">
-            <a:schemeClr val="accent1"/>
-          </a:effectRef>
-          <a:fontRef idx="minor">
-            <a:schemeClr val="lt1"/>
-          </a:fontRef>
-        </p:style>
-        <p:txBody>
-          <a:bodyPr rtlCol="0" anchor="ctr"/>
-          <a:lstStyle/>
-          <a:p>
-            <a:pPr algn="ctr"/>
-            <a:endParaRPr lang="fr-FR"/>
-          </a:p>
-        </p:txBody>
-      </p:sp>
-      <p:pic>
-        <p:nvPicPr>
-          <p:cNvPr id="13" name="Image 12">
-            <a:extLst>
-              <a:ext uri="{FF2B5EF4-FFF2-40B4-BE49-F238E27FC236}">
-                <a16:creationId xmlns:a16="http://schemas.microsoft.com/office/drawing/2014/main" id="{6C093A22-4030-BAE1-DFE1-D5A80D89BA5D}"/>
-              </a:ext>
-            </a:extLst>
-          </p:cNvPr>
-          <p:cNvPicPr>
-            <a:picLocks noChangeAspect="1"/>
-          </p:cNvPicPr>
-          <p:nvPr/>
-        </p:nvPicPr>
-        <p:blipFill>
-          <a:blip r:embed="rId4"/>
-          <a:stretch>
-            <a:fillRect/>
-          </a:stretch>
-        </p:blipFill>
-        <p:spPr>
-          <a:xfrm>
-            <a:off x="648794" y="5168900"/>
-            <a:ext cx="5305425" cy="800100"/>
-          </a:xfrm>
-          <a:prstGeom prst="rect">
-            <a:avLst/>
-          </a:prstGeom>
-        </p:spPr>
-      </p:pic>
-      <p:sp>
-        <p:nvSpPr>
-          <p:cNvPr id="14" name="ZoneTexte 13">
-            <a:extLst>
-              <a:ext uri="{FF2B5EF4-FFF2-40B4-BE49-F238E27FC236}">
-                <a16:creationId xmlns:a16="http://schemas.microsoft.com/office/drawing/2014/main" id="{ABA80269-BA42-B9F5-5F12-BACD53E514A3}"/>
-              </a:ext>
-            </a:extLst>
-          </p:cNvPr>
-          <p:cNvSpPr txBox="1"/>
-          <p:nvPr/>
-        </p:nvSpPr>
-        <p:spPr>
-          <a:xfrm>
-            <a:off x="771217" y="4778680"/>
-            <a:ext cx="3761295" cy="370657"/>
-          </a:xfrm>
-          <a:prstGeom prst="rect">
-            <a:avLst/>
-          </a:prstGeom>
-          <a:noFill/>
-        </p:spPr>
-        <p:txBody>
-          <a:bodyPr wrap="square" rtlCol="0">
-            <a:spAutoFit/>
-          </a:bodyPr>
-          <a:lstStyle/>
-          <a:p>
-            <a:r>
-              <a:rPr lang="fr-FR" b="1" dirty="0"/>
-              <a:t>Tableau croisé dynamique</a:t>
-            </a:r>
-          </a:p>
-        </p:txBody>
-      </p:sp>
-    </p:spTree>
-    <p:extLst>
-      <p:ext uri="{BB962C8B-B14F-4D97-AF65-F5344CB8AC3E}">
-        <p14:creationId xmlns:p14="http://schemas.microsoft.com/office/powerpoint/2010/main" val="3639770790"/>
-      </p:ext>
-    </p:extLst>
-  </p:cSld>
-  <p:clrMapOvr>
-    <a:masterClrMapping/>
-  </p:clrMapOvr>
-</p:sld>
-</file>
-
-<file path=ppt/slides/slide24.xml><?xml version="1.0" encoding="utf-8"?>
-<p:sld xmlns:a="http://schemas.openxmlformats.org/drawingml/2006/main" xmlns:r="http://schemas.openxmlformats.org/officeDocument/2006/relationships" xmlns:p="http://schemas.openxmlformats.org/presentationml/2006/main">
-  <p:cSld>
-    <p:spTree>
-      <p:nvGrpSpPr>
-        <p:cNvPr id="1" name=""/>
-        <p:cNvGrpSpPr/>
-        <p:nvPr/>
-      </p:nvGrpSpPr>
-      <p:grpSpPr>
-        <a:xfrm>
-          <a:off x="0" y="0"/>
-          <a:ext cx="0" cy="0"/>
-          <a:chOff x="0" y="0"/>
-          <a:chExt cx="0" cy="0"/>
-        </a:xfrm>
-      </p:grpSpPr>
-      <p:sp>
-        <p:nvSpPr>
-          <p:cNvPr id="2" name="Titre 1">
-            <a:extLst>
-              <a:ext uri="{FF2B5EF4-FFF2-40B4-BE49-F238E27FC236}">
                 <a16:creationId xmlns:a16="http://schemas.microsoft.com/office/drawing/2014/main" id="{64DC11C1-8B0E-6D49-76E0-FEBB43B535C3}"/>
               </a:ext>
             </a:extLst>
@@ -15909,7 +16147,7 @@
         </p:blipFill>
         <p:spPr>
           <a:xfrm>
-            <a:off x="5967326" y="2612872"/>
+            <a:off x="6238675" y="2651125"/>
             <a:ext cx="4657923" cy="3317875"/>
           </a:xfrm>
         </p:spPr>
@@ -15937,7 +16175,7 @@
           <a:p>
             <a:fld id="{0BD8DA86-C09D-401C-842D-741E230745B4}" type="slidenum">
               <a:rPr lang="fr-FR" smtClean="0"/>
-              <a:t>24</a:t>
+              <a:t>23</a:t>
             </a:fld>
             <a:endParaRPr lang="fr-FR"/>
           </a:p>
@@ -15965,7 +16203,7 @@
         </p:blipFill>
         <p:spPr>
           <a:xfrm>
-            <a:off x="771217" y="2571595"/>
+            <a:off x="748509" y="3046908"/>
             <a:ext cx="5204817" cy="1400175"/>
           </a:xfrm>
           <a:prstGeom prst="rect">
@@ -15987,7 +16225,7 @@
         </p:nvSpPr>
         <p:spPr>
           <a:xfrm>
-            <a:off x="3119156" y="4083225"/>
+            <a:off x="3139273" y="4507431"/>
             <a:ext cx="324465" cy="540774"/>
           </a:xfrm>
           <a:prstGeom prst="downArrow">
@@ -16049,10 +16287,226 @@
           </a:prstGeom>
         </p:spPr>
       </p:pic>
+      <p:sp>
+        <p:nvSpPr>
+          <p:cNvPr id="3" name="ZoneTexte 2">
+            <a:extLst>
+              <a:ext uri="{FF2B5EF4-FFF2-40B4-BE49-F238E27FC236}">
+                <a16:creationId xmlns:a16="http://schemas.microsoft.com/office/drawing/2014/main" id="{7A292962-8C1A-751C-F748-B1B1E6995CF2}"/>
+              </a:ext>
+            </a:extLst>
+          </p:cNvPr>
+          <p:cNvSpPr txBox="1"/>
+          <p:nvPr/>
+        </p:nvSpPr>
+        <p:spPr>
+          <a:xfrm>
+            <a:off x="749402" y="2492666"/>
+            <a:ext cx="4434788" cy="369332"/>
+          </a:xfrm>
+          <a:prstGeom prst="rect">
+            <a:avLst/>
+          </a:prstGeom>
+          <a:noFill/>
+        </p:spPr>
+        <p:txBody>
+          <a:bodyPr wrap="square" rtlCol="0">
+            <a:spAutoFit/>
+          </a:bodyPr>
+          <a:lstStyle/>
+          <a:p>
+            <a:r>
+              <a:rPr lang="fr-FR" b="1" dirty="0"/>
+              <a:t>Sujet: La qualité du sommeil</a:t>
+            </a:r>
+          </a:p>
+        </p:txBody>
+      </p:sp>
     </p:spTree>
     <p:extLst>
       <p:ext uri="{BB962C8B-B14F-4D97-AF65-F5344CB8AC3E}">
         <p14:creationId xmlns:p14="http://schemas.microsoft.com/office/powerpoint/2010/main" val="1826639219"/>
+      </p:ext>
+    </p:extLst>
+  </p:cSld>
+  <p:clrMapOvr>
+    <a:masterClrMapping/>
+  </p:clrMapOvr>
+</p:sld>
+</file>
+
+<file path=ppt/slides/slide24.xml><?xml version="1.0" encoding="utf-8"?>
+<p:sld xmlns:a="http://schemas.openxmlformats.org/drawingml/2006/main" xmlns:r="http://schemas.openxmlformats.org/officeDocument/2006/relationships" xmlns:p="http://schemas.openxmlformats.org/presentationml/2006/main">
+  <p:cSld>
+    <p:spTree>
+      <p:nvGrpSpPr>
+        <p:cNvPr id="1" name=""/>
+        <p:cNvGrpSpPr/>
+        <p:nvPr/>
+      </p:nvGrpSpPr>
+      <p:grpSpPr>
+        <a:xfrm>
+          <a:off x="0" y="0"/>
+          <a:ext cx="0" cy="0"/>
+          <a:chOff x="0" y="0"/>
+          <a:chExt cx="0" cy="0"/>
+        </a:xfrm>
+      </p:grpSpPr>
+      <p:sp>
+        <p:nvSpPr>
+          <p:cNvPr id="2" name="Titre 1">
+            <a:extLst>
+              <a:ext uri="{FF2B5EF4-FFF2-40B4-BE49-F238E27FC236}">
+                <a16:creationId xmlns:a16="http://schemas.microsoft.com/office/drawing/2014/main" id="{1B329B3F-455A-A466-BF82-01CD2DE5AD5C}"/>
+              </a:ext>
+            </a:extLst>
+          </p:cNvPr>
+          <p:cNvSpPr>
+            <a:spLocks noGrp="1"/>
+          </p:cNvSpPr>
+          <p:nvPr>
+            <p:ph type="title"/>
+          </p:nvPr>
+        </p:nvSpPr>
+        <p:spPr/>
+        <p:txBody>
+          <a:bodyPr/>
+          <a:lstStyle/>
+          <a:p>
+            <a:r>
+              <a:rPr lang="fr-FR" dirty="0"/>
+              <a:t>Nuage de points</a:t>
+            </a:r>
+          </a:p>
+        </p:txBody>
+      </p:sp>
+      <p:sp>
+        <p:nvSpPr>
+          <p:cNvPr id="4" name="Espace réservé du numéro de diapositive 3">
+            <a:extLst>
+              <a:ext uri="{FF2B5EF4-FFF2-40B4-BE49-F238E27FC236}">
+                <a16:creationId xmlns:a16="http://schemas.microsoft.com/office/drawing/2014/main" id="{5379963E-3CCD-9CE1-0DAD-78D7172527CB}"/>
+              </a:ext>
+            </a:extLst>
+          </p:cNvPr>
+          <p:cNvSpPr>
+            <a:spLocks noGrp="1"/>
+          </p:cNvSpPr>
+          <p:nvPr>
+            <p:ph type="sldNum" sz="quarter" idx="12"/>
+          </p:nvPr>
+        </p:nvSpPr>
+        <p:spPr/>
+        <p:txBody>
+          <a:bodyPr/>
+          <a:lstStyle/>
+          <a:p>
+            <a:fld id="{0BD8DA86-C09D-401C-842D-741E230745B4}" type="slidenum">
+              <a:rPr lang="fr-FR" smtClean="0"/>
+              <a:t>24</a:t>
+            </a:fld>
+            <a:endParaRPr lang="fr-FR"/>
+          </a:p>
+        </p:txBody>
+      </p:sp>
+      <p:pic>
+        <p:nvPicPr>
+          <p:cNvPr id="8" name="Image 7">
+            <a:extLst>
+              <a:ext uri="{FF2B5EF4-FFF2-40B4-BE49-F238E27FC236}">
+                <a16:creationId xmlns:a16="http://schemas.microsoft.com/office/drawing/2014/main" id="{E2C1DF42-0B80-565A-913A-E44D3133ACFD}"/>
+              </a:ext>
+            </a:extLst>
+          </p:cNvPr>
+          <p:cNvPicPr>
+            <a:picLocks noChangeAspect="1"/>
+          </p:cNvPicPr>
+          <p:nvPr/>
+        </p:nvPicPr>
+        <p:blipFill>
+          <a:blip r:embed="rId2"/>
+          <a:stretch>
+            <a:fillRect/>
+          </a:stretch>
+        </p:blipFill>
+        <p:spPr>
+          <a:xfrm>
+            <a:off x="1012598" y="2926299"/>
+            <a:ext cx="5191125" cy="2809875"/>
+          </a:xfrm>
+          <a:prstGeom prst="rect">
+            <a:avLst/>
+          </a:prstGeom>
+        </p:spPr>
+      </p:pic>
+      <p:sp>
+        <p:nvSpPr>
+          <p:cNvPr id="3" name="ZoneTexte 2">
+            <a:extLst>
+              <a:ext uri="{FF2B5EF4-FFF2-40B4-BE49-F238E27FC236}">
+                <a16:creationId xmlns:a16="http://schemas.microsoft.com/office/drawing/2014/main" id="{B16D048C-E4FE-C9D4-21BA-DB7E0FF2C8B3}"/>
+              </a:ext>
+            </a:extLst>
+          </p:cNvPr>
+          <p:cNvSpPr txBox="1"/>
+          <p:nvPr/>
+        </p:nvSpPr>
+        <p:spPr>
+          <a:xfrm>
+            <a:off x="1570086" y="2476862"/>
+            <a:ext cx="4434788" cy="369332"/>
+          </a:xfrm>
+          <a:prstGeom prst="rect">
+            <a:avLst/>
+          </a:prstGeom>
+          <a:noFill/>
+        </p:spPr>
+        <p:txBody>
+          <a:bodyPr wrap="square" rtlCol="0">
+            <a:spAutoFit/>
+          </a:bodyPr>
+          <a:lstStyle/>
+          <a:p>
+            <a:r>
+              <a:rPr lang="fr-FR" b="1" dirty="0"/>
+              <a:t>Sujet: La qualité du sommeil</a:t>
+            </a:r>
+          </a:p>
+        </p:txBody>
+      </p:sp>
+      <p:pic>
+        <p:nvPicPr>
+          <p:cNvPr id="10" name="Espace réservé du contenu 9">
+            <a:extLst>
+              <a:ext uri="{FF2B5EF4-FFF2-40B4-BE49-F238E27FC236}">
+                <a16:creationId xmlns:a16="http://schemas.microsoft.com/office/drawing/2014/main" id="{137450E1-AD44-4B08-2535-2A35931A0034}"/>
+              </a:ext>
+            </a:extLst>
+          </p:cNvPr>
+          <p:cNvPicPr>
+            <a:picLocks noGrp="1" noChangeAspect="1"/>
+          </p:cNvPicPr>
+          <p:nvPr>
+            <p:ph idx="1"/>
+          </p:nvPr>
+        </p:nvPicPr>
+        <p:blipFill>
+          <a:blip r:embed="rId3"/>
+          <a:stretch>
+            <a:fillRect/>
+          </a:stretch>
+        </p:blipFill>
+        <p:spPr>
+          <a:xfrm>
+            <a:off x="6361918" y="2476862"/>
+            <a:ext cx="5025661" cy="3317875"/>
+          </a:xfrm>
+        </p:spPr>
+      </p:pic>
+    </p:spTree>
+    <p:extLst>
+      <p:ext uri="{BB962C8B-B14F-4D97-AF65-F5344CB8AC3E}">
+        <p14:creationId xmlns:p14="http://schemas.microsoft.com/office/powerpoint/2010/main" val="1443565408"/>
       </p:ext>
     </p:extLst>
   </p:cSld>
@@ -16158,7 +16612,7 @@
         </p:blipFill>
         <p:spPr>
           <a:xfrm>
-            <a:off x="1483190" y="2528887"/>
+            <a:off x="1417202" y="2832402"/>
             <a:ext cx="2762250" cy="1190625"/>
           </a:xfrm>
           <a:prstGeom prst="rect">
@@ -16180,8 +16634,8 @@
         </p:nvSpPr>
         <p:spPr>
           <a:xfrm>
-            <a:off x="2864315" y="3857112"/>
-            <a:ext cx="361462" cy="540774"/>
+            <a:off x="2864315" y="4110086"/>
+            <a:ext cx="180543" cy="287799"/>
           </a:xfrm>
           <a:prstGeom prst="downArrow">
             <a:avLst/>
@@ -16271,6 +16725,41 @@
           </a:xfrm>
         </p:spPr>
       </p:pic>
+      <p:sp>
+        <p:nvSpPr>
+          <p:cNvPr id="3" name="ZoneTexte 2">
+            <a:extLst>
+              <a:ext uri="{FF2B5EF4-FFF2-40B4-BE49-F238E27FC236}">
+                <a16:creationId xmlns:a16="http://schemas.microsoft.com/office/drawing/2014/main" id="{03A13F57-AF39-7AA4-DB44-76CFC4AF64E2}"/>
+              </a:ext>
+            </a:extLst>
+          </p:cNvPr>
+          <p:cNvSpPr txBox="1"/>
+          <p:nvPr/>
+        </p:nvSpPr>
+        <p:spPr>
+          <a:xfrm>
+            <a:off x="749402" y="2492666"/>
+            <a:ext cx="4434788" cy="369332"/>
+          </a:xfrm>
+          <a:prstGeom prst="rect">
+            <a:avLst/>
+          </a:prstGeom>
+          <a:noFill/>
+        </p:spPr>
+        <p:txBody>
+          <a:bodyPr wrap="square" rtlCol="0">
+            <a:spAutoFit/>
+          </a:bodyPr>
+          <a:lstStyle/>
+          <a:p>
+            <a:r>
+              <a:rPr lang="fr-FR" b="1" dirty="0"/>
+              <a:t>Sujet: La qualité du sommeil</a:t>
+            </a:r>
+          </a:p>
+        </p:txBody>
+      </p:sp>
     </p:spTree>
     <p:extLst>
       <p:ext uri="{BB962C8B-B14F-4D97-AF65-F5344CB8AC3E}">
@@ -16396,6 +16885,187 @@
 </p:sld>
 </file>
 
+<file path=ppt/slides/slide27.xml><?xml version="1.0" encoding="utf-8"?>
+<p:sld xmlns:a="http://schemas.openxmlformats.org/drawingml/2006/main" xmlns:r="http://schemas.openxmlformats.org/officeDocument/2006/relationships" xmlns:p="http://schemas.openxmlformats.org/presentationml/2006/main">
+  <p:cSld>
+    <p:spTree>
+      <p:nvGrpSpPr>
+        <p:cNvPr id="1" name=""/>
+        <p:cNvGrpSpPr/>
+        <p:nvPr/>
+      </p:nvGrpSpPr>
+      <p:grpSpPr>
+        <a:xfrm>
+          <a:off x="0" y="0"/>
+          <a:ext cx="0" cy="0"/>
+          <a:chOff x="0" y="0"/>
+          <a:chExt cx="0" cy="0"/>
+        </a:xfrm>
+      </p:grpSpPr>
+      <p:sp>
+        <p:nvSpPr>
+          <p:cNvPr id="2" name="Titre 1">
+            <a:extLst>
+              <a:ext uri="{FF2B5EF4-FFF2-40B4-BE49-F238E27FC236}">
+                <a16:creationId xmlns:a16="http://schemas.microsoft.com/office/drawing/2014/main" id="{19218EA3-296B-D1CA-D61C-40ACA59C7980}"/>
+              </a:ext>
+            </a:extLst>
+          </p:cNvPr>
+          <p:cNvSpPr>
+            <a:spLocks noGrp="1"/>
+          </p:cNvSpPr>
+          <p:nvPr>
+            <p:ph type="title"/>
+          </p:nvPr>
+        </p:nvSpPr>
+        <p:spPr/>
+        <p:txBody>
+          <a:bodyPr/>
+          <a:lstStyle/>
+          <a:p>
+            <a:r>
+              <a:rPr lang="fr-FR" dirty="0"/>
+              <a:t>Boite à moustaches</a:t>
+            </a:r>
+          </a:p>
+        </p:txBody>
+      </p:sp>
+      <p:sp>
+        <p:nvSpPr>
+          <p:cNvPr id="4" name="Espace réservé du numéro de diapositive 3">
+            <a:extLst>
+              <a:ext uri="{FF2B5EF4-FFF2-40B4-BE49-F238E27FC236}">
+                <a16:creationId xmlns:a16="http://schemas.microsoft.com/office/drawing/2014/main" id="{348923B3-08CB-437C-70F1-4185B371117C}"/>
+              </a:ext>
+            </a:extLst>
+          </p:cNvPr>
+          <p:cNvSpPr>
+            <a:spLocks noGrp="1"/>
+          </p:cNvSpPr>
+          <p:nvPr>
+            <p:ph type="sldNum" sz="quarter" idx="12"/>
+          </p:nvPr>
+        </p:nvSpPr>
+        <p:spPr/>
+        <p:txBody>
+          <a:bodyPr/>
+          <a:lstStyle/>
+          <a:p>
+            <a:fld id="{0BD8DA86-C09D-401C-842D-741E230745B4}" type="slidenum">
+              <a:rPr lang="fr-FR" smtClean="0"/>
+              <a:t>27</a:t>
+            </a:fld>
+            <a:endParaRPr lang="fr-FR"/>
+          </a:p>
+        </p:txBody>
+      </p:sp>
+      <p:pic>
+        <p:nvPicPr>
+          <p:cNvPr id="15" name="Espace réservé du contenu 14">
+            <a:extLst>
+              <a:ext uri="{FF2B5EF4-FFF2-40B4-BE49-F238E27FC236}">
+                <a16:creationId xmlns:a16="http://schemas.microsoft.com/office/drawing/2014/main" id="{C70D772B-20DF-D250-463C-8E1E3B20F55F}"/>
+              </a:ext>
+            </a:extLst>
+          </p:cNvPr>
+          <p:cNvPicPr>
+            <a:picLocks noGrp="1" noChangeAspect="1"/>
+          </p:cNvPicPr>
+          <p:nvPr>
+            <p:ph idx="1"/>
+          </p:nvPr>
+        </p:nvPicPr>
+        <p:blipFill>
+          <a:blip r:embed="rId2"/>
+          <a:stretch>
+            <a:fillRect/>
+          </a:stretch>
+        </p:blipFill>
+        <p:spPr>
+          <a:xfrm>
+            <a:off x="901151" y="2913064"/>
+            <a:ext cx="5493231" cy="3317875"/>
+          </a:xfrm>
+        </p:spPr>
+      </p:pic>
+      <p:pic>
+        <p:nvPicPr>
+          <p:cNvPr id="17" name="Image 16">
+            <a:extLst>
+              <a:ext uri="{FF2B5EF4-FFF2-40B4-BE49-F238E27FC236}">
+                <a16:creationId xmlns:a16="http://schemas.microsoft.com/office/drawing/2014/main" id="{3176286B-8E51-5FFE-E83E-24814A3EBFDF}"/>
+              </a:ext>
+            </a:extLst>
+          </p:cNvPr>
+          <p:cNvPicPr>
+            <a:picLocks noChangeAspect="1"/>
+          </p:cNvPicPr>
+          <p:nvPr/>
+        </p:nvPicPr>
+        <p:blipFill>
+          <a:blip r:embed="rId3"/>
+          <a:stretch>
+            <a:fillRect/>
+          </a:stretch>
+        </p:blipFill>
+        <p:spPr>
+          <a:xfrm>
+            <a:off x="6877276" y="3206750"/>
+            <a:ext cx="3476625" cy="2762250"/>
+          </a:xfrm>
+          <a:prstGeom prst="rect">
+            <a:avLst/>
+          </a:prstGeom>
+        </p:spPr>
+      </p:pic>
+      <p:sp>
+        <p:nvSpPr>
+          <p:cNvPr id="18" name="ZoneTexte 17">
+            <a:extLst>
+              <a:ext uri="{FF2B5EF4-FFF2-40B4-BE49-F238E27FC236}">
+                <a16:creationId xmlns:a16="http://schemas.microsoft.com/office/drawing/2014/main" id="{6C5455DA-DC13-D994-8149-A60F466CC040}"/>
+              </a:ext>
+            </a:extLst>
+          </p:cNvPr>
+          <p:cNvSpPr txBox="1"/>
+          <p:nvPr/>
+        </p:nvSpPr>
+        <p:spPr>
+          <a:xfrm>
+            <a:off x="749402" y="2492666"/>
+            <a:ext cx="4434788" cy="369332"/>
+          </a:xfrm>
+          <a:prstGeom prst="rect">
+            <a:avLst/>
+          </a:prstGeom>
+          <a:noFill/>
+        </p:spPr>
+        <p:txBody>
+          <a:bodyPr wrap="square" rtlCol="0">
+            <a:spAutoFit/>
+          </a:bodyPr>
+          <a:lstStyle/>
+          <a:p>
+            <a:r>
+              <a:rPr lang="fr-FR" b="1" dirty="0"/>
+              <a:t>Sujet: La qualité du sommeil</a:t>
+            </a:r>
+          </a:p>
+        </p:txBody>
+      </p:sp>
+    </p:spTree>
+    <p:extLst>
+      <p:ext uri="{BB962C8B-B14F-4D97-AF65-F5344CB8AC3E}">
+        <p14:creationId xmlns:p14="http://schemas.microsoft.com/office/powerpoint/2010/main" val="3014649751"/>
+      </p:ext>
+    </p:extLst>
+  </p:cSld>
+  <p:clrMapOvr>
+    <a:masterClrMapping/>
+  </p:clrMapOvr>
+</p:sld>
+</file>
+
 <file path=ppt/slides/slide3.xml><?xml version="1.0" encoding="utf-8"?>
 <p:sld xmlns:a="http://schemas.openxmlformats.org/drawingml/2006/main" xmlns:r="http://schemas.openxmlformats.org/officeDocument/2006/relationships" xmlns:p="http://schemas.openxmlformats.org/presentationml/2006/main">
   <p:cSld>
@@ -16623,13 +17293,13 @@
           <p:nvPr>
             <p:extLst>
               <p:ext uri="{D42A27DB-BD31-4B8C-83A1-F6EECF244321}">
-                <p14:modId xmlns:p14="http://schemas.microsoft.com/office/powerpoint/2010/main" val="1149368658"/>
+                <p14:modId xmlns:p14="http://schemas.microsoft.com/office/powerpoint/2010/main" val="2502089517"/>
               </p:ext>
             </p:extLst>
           </p:nvPr>
         </p:nvGraphicFramePr>
         <p:xfrm>
-          <a:off x="6312332" y="2455757"/>
+          <a:off x="6764818" y="2455756"/>
           <a:ext cx="4041569" cy="3652943"/>
         </p:xfrm>
         <a:graphic>
@@ -18793,7 +19463,7 @@
         </p:blipFill>
         <p:spPr>
           <a:xfrm>
-            <a:off x="6611489" y="2772384"/>
+            <a:off x="7063976" y="2756495"/>
             <a:ext cx="1170269" cy="672505"/>
           </a:xfrm>
           <a:prstGeom prst="rect">
@@ -18823,7 +19493,7 @@
         </p:blipFill>
         <p:spPr>
           <a:xfrm>
-            <a:off x="8155879" y="2804888"/>
+            <a:off x="8497156" y="2761858"/>
             <a:ext cx="1392883" cy="812514"/>
           </a:xfrm>
           <a:prstGeom prst="rect">
@@ -18883,7 +19553,7 @@
         </p:blipFill>
         <p:spPr>
           <a:xfrm>
-            <a:off x="8707126" y="3640478"/>
+            <a:off x="9282161" y="3640656"/>
             <a:ext cx="1215756" cy="757392"/>
           </a:xfrm>
           <a:prstGeom prst="rect">
@@ -18913,7 +19583,7 @@
         </p:blipFill>
         <p:spPr>
           <a:xfrm>
-            <a:off x="7266387" y="3721201"/>
+            <a:off x="7311346" y="3682150"/>
             <a:ext cx="1197393" cy="757214"/>
           </a:xfrm>
           <a:prstGeom prst="rect">
@@ -18943,7 +19613,7 @@
         </p:blipFill>
         <p:spPr>
           <a:xfrm>
-            <a:off x="6435398" y="4590956"/>
+            <a:off x="6124590" y="4698805"/>
             <a:ext cx="1148906" cy="814523"/>
           </a:xfrm>
           <a:prstGeom prst="rect">
@@ -18973,7 +19643,7 @@
         </p:blipFill>
         <p:spPr>
           <a:xfrm>
-            <a:off x="7978162" y="4520994"/>
+            <a:off x="7910043" y="4707917"/>
             <a:ext cx="1889192" cy="939350"/>
           </a:xfrm>
           <a:prstGeom prst="rect">
@@ -19003,7 +19673,7 @@
         </p:blipFill>
         <p:spPr>
           <a:xfrm flipV="1">
-            <a:off x="6131025" y="3840762"/>
+            <a:off x="5871556" y="3861692"/>
             <a:ext cx="861999" cy="536356"/>
           </a:xfrm>
           <a:prstGeom prst="rect">

--- a/Statistique graphique.pptx
+++ b/Statistique graphique.pptx
@@ -5,7 +5,7 @@
     <p:sldMasterId id="2147483718" r:id="rId1"/>
   </p:sldMasterIdLst>
   <p:notesMasterIdLst>
-    <p:notesMasterId r:id="rId29"/>
+    <p:notesMasterId r:id="rId35"/>
   </p:notesMasterIdLst>
   <p:sldIdLst>
     <p:sldId id="256" r:id="rId2"/>
@@ -22,19 +22,25 @@
     <p:sldId id="273" r:id="rId13"/>
     <p:sldId id="274" r:id="rId14"/>
     <p:sldId id="268" r:id="rId15"/>
-    <p:sldId id="269" r:id="rId16"/>
-    <p:sldId id="267" r:id="rId17"/>
-    <p:sldId id="266" r:id="rId18"/>
-    <p:sldId id="263" r:id="rId19"/>
-    <p:sldId id="275" r:id="rId20"/>
-    <p:sldId id="281" r:id="rId21"/>
-    <p:sldId id="276" r:id="rId22"/>
-    <p:sldId id="278" r:id="rId23"/>
-    <p:sldId id="279" r:id="rId24"/>
-    <p:sldId id="277" r:id="rId25"/>
-    <p:sldId id="282" r:id="rId26"/>
-    <p:sldId id="280" r:id="rId27"/>
-    <p:sldId id="283" r:id="rId28"/>
+    <p:sldId id="284" r:id="rId16"/>
+    <p:sldId id="285" r:id="rId17"/>
+    <p:sldId id="286" r:id="rId18"/>
+    <p:sldId id="287" r:id="rId19"/>
+    <p:sldId id="288" r:id="rId20"/>
+    <p:sldId id="269" r:id="rId21"/>
+    <p:sldId id="267" r:id="rId22"/>
+    <p:sldId id="289" r:id="rId23"/>
+    <p:sldId id="266" r:id="rId24"/>
+    <p:sldId id="263" r:id="rId25"/>
+    <p:sldId id="275" r:id="rId26"/>
+    <p:sldId id="281" r:id="rId27"/>
+    <p:sldId id="276" r:id="rId28"/>
+    <p:sldId id="278" r:id="rId29"/>
+    <p:sldId id="279" r:id="rId30"/>
+    <p:sldId id="277" r:id="rId31"/>
+    <p:sldId id="282" r:id="rId32"/>
+    <p:sldId id="280" r:id="rId33"/>
+    <p:sldId id="283" r:id="rId34"/>
   </p:sldIdLst>
   <p:sldSz cx="12192000" cy="6858000"/>
   <p:notesSz cx="6858000" cy="9144000"/>
@@ -142,11 +148,11 @@
 </file>
 
 <file path=ppt/diagrams/colors1.xml><?xml version="1.0" encoding="utf-8"?>
-<dgm:colorsDef xmlns:dgm="http://schemas.openxmlformats.org/drawingml/2006/diagram" xmlns:a="http://schemas.openxmlformats.org/drawingml/2006/main" uniqueId="urn:microsoft.com/office/officeart/2005/8/colors/accent1_2">
+<dgm:colorsDef xmlns:dgm="http://schemas.openxmlformats.org/drawingml/2006/diagram" xmlns:a="http://schemas.openxmlformats.org/drawingml/2006/main" uniqueId="urn:microsoft.com/office/officeart/2005/8/colors/colorful2">
   <dgm:title val=""/>
   <dgm:desc val=""/>
   <dgm:catLst>
-    <dgm:cat type="accent1" pri="11200"/>
+    <dgm:cat type="colorful" pri="10200"/>
   </dgm:catLst>
   <dgm:styleLbl name="node0">
     <dgm:fillClrLst meth="repeat">
@@ -160,21 +166,10 @@
     <dgm:txFillClrLst/>
     <dgm:txEffectClrLst/>
   </dgm:styleLbl>
-  <dgm:styleLbl name="alignNode1">
-    <dgm:fillClrLst meth="repeat">
-      <a:schemeClr val="accent1"/>
-    </dgm:fillClrLst>
-    <dgm:linClrLst meth="repeat">
-      <a:schemeClr val="accent1"/>
-    </dgm:linClrLst>
-    <dgm:effectClrLst/>
-    <dgm:txLinClrLst/>
-    <dgm:txFillClrLst/>
-    <dgm:txEffectClrLst/>
-  </dgm:styleLbl>
   <dgm:styleLbl name="node1">
-    <dgm:fillClrLst meth="repeat">
-      <a:schemeClr val="accent1"/>
+    <dgm:fillClrLst>
+      <a:schemeClr val="accent2"/>
+      <a:schemeClr val="accent3"/>
     </dgm:fillClrLst>
     <dgm:linClrLst meth="repeat">
       <a:schemeClr val="lt1"/>
@@ -184,9 +179,24 @@
     <dgm:txFillClrLst/>
     <dgm:txEffectClrLst/>
   </dgm:styleLbl>
+  <dgm:styleLbl name="alignNode1">
+    <dgm:fillClrLst>
+      <a:schemeClr val="accent2"/>
+      <a:schemeClr val="accent3"/>
+    </dgm:fillClrLst>
+    <dgm:linClrLst>
+      <a:schemeClr val="accent2"/>
+      <a:schemeClr val="accent3"/>
+    </dgm:linClrLst>
+    <dgm:effectClrLst/>
+    <dgm:txLinClrLst/>
+    <dgm:txFillClrLst/>
+    <dgm:txEffectClrLst/>
+  </dgm:styleLbl>
   <dgm:styleLbl name="lnNode1">
-    <dgm:fillClrLst meth="repeat">
-      <a:schemeClr val="accent1"/>
+    <dgm:fillClrLst>
+      <a:schemeClr val="accent2"/>
+      <a:schemeClr val="accent3"/>
     </dgm:fillClrLst>
     <dgm:linClrLst meth="repeat">
       <a:schemeClr val="lt1"/>
@@ -197,8 +207,11 @@
     <dgm:txEffectClrLst/>
   </dgm:styleLbl>
   <dgm:styleLbl name="vennNode1">
-    <dgm:fillClrLst meth="repeat">
-      <a:schemeClr val="accent1">
+    <dgm:fillClrLst>
+      <a:schemeClr val="accent2">
+        <a:alpha val="50000"/>
+      </a:schemeClr>
+      <a:schemeClr val="accent3">
         <a:alpha val="50000"/>
       </a:schemeClr>
     </dgm:fillClrLst>
@@ -211,8 +224,8 @@
     <dgm:txEffectClrLst/>
   </dgm:styleLbl>
   <dgm:styleLbl name="node2">
-    <dgm:fillClrLst meth="repeat">
-      <a:schemeClr val="accent1"/>
+    <dgm:fillClrLst>
+      <a:schemeClr val="accent3"/>
     </dgm:fillClrLst>
     <dgm:linClrLst meth="repeat">
       <a:schemeClr val="lt1"/>
@@ -223,8 +236,8 @@
     <dgm:txEffectClrLst/>
   </dgm:styleLbl>
   <dgm:styleLbl name="node3">
-    <dgm:fillClrLst meth="repeat">
-      <a:schemeClr val="accent1"/>
+    <dgm:fillClrLst>
+      <a:schemeClr val="accent4"/>
     </dgm:fillClrLst>
     <dgm:linClrLst meth="repeat">
       <a:schemeClr val="lt1"/>
@@ -235,8 +248,8 @@
     <dgm:txEffectClrLst/>
   </dgm:styleLbl>
   <dgm:styleLbl name="node4">
-    <dgm:fillClrLst meth="repeat">
-      <a:schemeClr val="accent1"/>
+    <dgm:fillClrLst>
+      <a:schemeClr val="accent5"/>
     </dgm:fillClrLst>
     <dgm:linClrLst meth="repeat">
       <a:schemeClr val="lt1"/>
@@ -247,8 +260,11 @@
     <dgm:txEffectClrLst/>
   </dgm:styleLbl>
   <dgm:styleLbl name="fgImgPlace1">
-    <dgm:fillClrLst meth="repeat">
-      <a:schemeClr val="accent1">
+    <dgm:fillClrLst>
+      <a:schemeClr val="accent2">
+        <a:tint val="50000"/>
+      </a:schemeClr>
+      <a:schemeClr val="accent3">
         <a:tint val="50000"/>
       </a:schemeClr>
     </dgm:fillClrLst>
@@ -263,9 +279,12 @@
     <dgm:txEffectClrLst/>
   </dgm:styleLbl>
   <dgm:styleLbl name="alignImgPlace1">
-    <dgm:fillClrLst meth="repeat">
-      <a:schemeClr val="accent1">
+    <dgm:fillClrLst>
+      <a:schemeClr val="accent2">
         <a:tint val="50000"/>
+      </a:schemeClr>
+      <a:schemeClr val="accent3">
+        <a:tint val="20000"/>
       </a:schemeClr>
     </dgm:fillClrLst>
     <dgm:linClrLst meth="repeat">
@@ -279,9 +298,12 @@
     <dgm:txEffectClrLst/>
   </dgm:styleLbl>
   <dgm:styleLbl name="bgImgPlace1">
-    <dgm:fillClrLst meth="repeat">
-      <a:schemeClr val="accent1">
+    <dgm:fillClrLst>
+      <a:schemeClr val="accent2">
         <a:tint val="50000"/>
+      </a:schemeClr>
+      <a:schemeClr val="accent3">
+        <a:tint val="20000"/>
       </a:schemeClr>
     </dgm:fillClrLst>
     <dgm:linClrLst meth="repeat">
@@ -295,15 +317,12 @@
     <dgm:txEffectClrLst/>
   </dgm:styleLbl>
   <dgm:styleLbl name="sibTrans2D1">
-    <dgm:fillClrLst meth="repeat">
-      <a:schemeClr val="accent1">
-        <a:tint val="60000"/>
-      </a:schemeClr>
+    <dgm:fillClrLst>
+      <a:schemeClr val="accent2"/>
+      <a:schemeClr val="accent3"/>
     </dgm:fillClrLst>
     <dgm:linClrLst meth="repeat">
-      <a:schemeClr val="accent1">
-        <a:tint val="60000"/>
-      </a:schemeClr>
+      <a:schemeClr val="lt1"/>
     </dgm:linClrLst>
     <dgm:effectClrLst/>
     <dgm:txLinClrLst/>
@@ -311,43 +330,40 @@
     <dgm:txEffectClrLst/>
   </dgm:styleLbl>
   <dgm:styleLbl name="fgSibTrans2D1">
-    <dgm:fillClrLst meth="repeat">
-      <a:schemeClr val="accent1">
-        <a:tint val="60000"/>
-      </a:schemeClr>
+    <dgm:fillClrLst>
+      <a:schemeClr val="accent2"/>
+      <a:schemeClr val="accent3"/>
     </dgm:fillClrLst>
     <dgm:linClrLst meth="repeat">
-      <a:schemeClr val="accent1">
-        <a:tint val="60000"/>
-      </a:schemeClr>
+      <a:schemeClr val="lt1"/>
     </dgm:linClrLst>
     <dgm:effectClrLst/>
     <dgm:txLinClrLst/>
-    <dgm:txFillClrLst/>
+    <dgm:txFillClrLst meth="repeat">
+      <a:schemeClr val="lt1"/>
+    </dgm:txFillClrLst>
     <dgm:txEffectClrLst/>
   </dgm:styleLbl>
   <dgm:styleLbl name="bgSibTrans2D1">
-    <dgm:fillClrLst meth="repeat">
-      <a:schemeClr val="accent1">
-        <a:tint val="60000"/>
-      </a:schemeClr>
+    <dgm:fillClrLst>
+      <a:schemeClr val="accent2"/>
+      <a:schemeClr val="accent3"/>
     </dgm:fillClrLst>
     <dgm:linClrLst meth="repeat">
-      <a:schemeClr val="accent1">
-        <a:tint val="60000"/>
-      </a:schemeClr>
+      <a:schemeClr val="lt1"/>
     </dgm:linClrLst>
     <dgm:effectClrLst/>
     <dgm:txLinClrLst/>
-    <dgm:txFillClrLst/>
+    <dgm:txFillClrLst meth="repeat">
+      <a:schemeClr val="lt1"/>
+    </dgm:txFillClrLst>
     <dgm:txEffectClrLst/>
   </dgm:styleLbl>
   <dgm:styleLbl name="sibTrans1D1">
-    <dgm:fillClrLst meth="repeat">
-      <a:schemeClr val="accent1"/>
-    </dgm:fillClrLst>
-    <dgm:linClrLst meth="repeat">
-      <a:schemeClr val="accent1"/>
+    <dgm:fillClrLst/>
+    <dgm:linClrLst>
+      <a:schemeClr val="accent2"/>
+      <a:schemeClr val="accent3"/>
     </dgm:linClrLst>
     <dgm:effectClrLst/>
     <dgm:txLinClrLst/>
@@ -358,10 +374,10 @@
   </dgm:styleLbl>
   <dgm:styleLbl name="callout">
     <dgm:fillClrLst meth="repeat">
-      <a:schemeClr val="accent1"/>
+      <a:schemeClr val="accent2"/>
     </dgm:fillClrLst>
     <dgm:linClrLst meth="repeat">
-      <a:schemeClr val="accent1">
+      <a:schemeClr val="accent2">
         <a:tint val="50000"/>
       </a:schemeClr>
     </dgm:linClrLst>
@@ -374,7 +390,35 @@
   </dgm:styleLbl>
   <dgm:styleLbl name="asst0">
     <dgm:fillClrLst meth="repeat">
-      <a:schemeClr val="accent1"/>
+      <a:schemeClr val="accent2"/>
+    </dgm:fillClrLst>
+    <dgm:linClrLst meth="repeat">
+      <a:schemeClr val="lt1">
+        <a:shade val="80000"/>
+      </a:schemeClr>
+    </dgm:linClrLst>
+    <dgm:effectClrLst/>
+    <dgm:txLinClrLst/>
+    <dgm:txFillClrLst/>
+    <dgm:txEffectClrLst/>
+  </dgm:styleLbl>
+  <dgm:styleLbl name="asst1">
+    <dgm:fillClrLst meth="repeat">
+      <a:schemeClr val="accent3"/>
+    </dgm:fillClrLst>
+    <dgm:linClrLst meth="repeat">
+      <a:schemeClr val="lt1">
+        <a:shade val="80000"/>
+      </a:schemeClr>
+    </dgm:linClrLst>
+    <dgm:effectClrLst/>
+    <dgm:txLinClrLst/>
+    <dgm:txFillClrLst/>
+    <dgm:txEffectClrLst/>
+  </dgm:styleLbl>
+  <dgm:styleLbl name="asst2">
+    <dgm:fillClrLst>
+      <a:schemeClr val="accent4"/>
     </dgm:fillClrLst>
     <dgm:linClrLst meth="repeat">
       <a:schemeClr val="lt1"/>
@@ -384,9 +428,9 @@
     <dgm:txFillClrLst/>
     <dgm:txEffectClrLst/>
   </dgm:styleLbl>
-  <dgm:styleLbl name="asst1">
-    <dgm:fillClrLst meth="repeat">
-      <a:schemeClr val="accent1"/>
+  <dgm:styleLbl name="asst3">
+    <dgm:fillClrLst>
+      <a:schemeClr val="accent5"/>
     </dgm:fillClrLst>
     <dgm:linClrLst meth="repeat">
       <a:schemeClr val="lt1"/>
@@ -396,9 +440,9 @@
     <dgm:txFillClrLst/>
     <dgm:txEffectClrLst/>
   </dgm:styleLbl>
-  <dgm:styleLbl name="asst2">
-    <dgm:fillClrLst meth="repeat">
-      <a:schemeClr val="accent1"/>
+  <dgm:styleLbl name="asst4">
+    <dgm:fillClrLst>
+      <a:schemeClr val="accent6"/>
     </dgm:fillClrLst>
     <dgm:linClrLst meth="repeat">
       <a:schemeClr val="lt1"/>
@@ -408,9 +452,23 @@
     <dgm:txFillClrLst/>
     <dgm:txEffectClrLst/>
   </dgm:styleLbl>
-  <dgm:styleLbl name="asst3">
+  <dgm:styleLbl name="parChTrans2D1">
     <dgm:fillClrLst meth="repeat">
-      <a:schemeClr val="accent1"/>
+      <a:schemeClr val="accent2"/>
+    </dgm:fillClrLst>
+    <dgm:linClrLst meth="repeat">
+      <a:schemeClr val="lt1"/>
+    </dgm:linClrLst>
+    <dgm:effectClrLst/>
+    <dgm:txLinClrLst/>
+    <dgm:txFillClrLst meth="repeat">
+      <a:schemeClr val="lt1"/>
+    </dgm:txFillClrLst>
+    <dgm:txEffectClrLst/>
+  </dgm:styleLbl>
+  <dgm:styleLbl name="parChTrans2D2">
+    <dgm:fillClrLst meth="repeat">
+      <a:schemeClr val="accent3"/>
     </dgm:fillClrLst>
     <dgm:linClrLst meth="repeat">
       <a:schemeClr val="lt1"/>
@@ -420,9 +478,9 @@
     <dgm:txFillClrLst/>
     <dgm:txEffectClrLst/>
   </dgm:styleLbl>
-  <dgm:styleLbl name="asst4">
+  <dgm:styleLbl name="parChTrans2D3">
     <dgm:fillClrLst meth="repeat">
-      <a:schemeClr val="accent1"/>
+      <a:schemeClr val="accent4"/>
     </dgm:fillClrLst>
     <dgm:linClrLst meth="repeat">
       <a:schemeClr val="lt1"/>
@@ -432,16 +490,12 @@
     <dgm:txFillClrLst/>
     <dgm:txEffectClrLst/>
   </dgm:styleLbl>
-  <dgm:styleLbl name="parChTrans2D1">
+  <dgm:styleLbl name="parChTrans2D4">
     <dgm:fillClrLst meth="repeat">
-      <a:schemeClr val="accent1">
-        <a:tint val="60000"/>
-      </a:schemeClr>
+      <a:schemeClr val="accent5"/>
     </dgm:fillClrLst>
     <dgm:linClrLst meth="repeat">
-      <a:schemeClr val="accent1">
-        <a:tint val="60000"/>
-      </a:schemeClr>
+      <a:schemeClr val="lt1"/>
     </dgm:linClrLst>
     <dgm:effectClrLst/>
     <dgm:txLinClrLst/>
@@ -450,56 +504,12 @@
     </dgm:txFillClrLst>
     <dgm:txEffectClrLst/>
   </dgm:styleLbl>
-  <dgm:styleLbl name="parChTrans2D2">
+  <dgm:styleLbl name="parChTrans1D1">
     <dgm:fillClrLst meth="repeat">
-      <a:schemeClr val="accent1"/>
+      <a:schemeClr val="accent2"/>
     </dgm:fillClrLst>
     <dgm:linClrLst meth="repeat">
-      <a:schemeClr val="accent1"/>
-    </dgm:linClrLst>
-    <dgm:effectClrLst/>
-    <dgm:txLinClrLst/>
-    <dgm:txFillClrLst meth="repeat">
-      <a:schemeClr val="lt1"/>
-    </dgm:txFillClrLst>
-    <dgm:txEffectClrLst/>
-  </dgm:styleLbl>
-  <dgm:styleLbl name="parChTrans2D3">
-    <dgm:fillClrLst meth="repeat">
-      <a:schemeClr val="accent1"/>
-    </dgm:fillClrLst>
-    <dgm:linClrLst meth="repeat">
-      <a:schemeClr val="accent1"/>
-    </dgm:linClrLst>
-    <dgm:effectClrLst/>
-    <dgm:txLinClrLst/>
-    <dgm:txFillClrLst meth="repeat">
-      <a:schemeClr val="lt1"/>
-    </dgm:txFillClrLst>
-    <dgm:txEffectClrLst/>
-  </dgm:styleLbl>
-  <dgm:styleLbl name="parChTrans2D4">
-    <dgm:fillClrLst meth="repeat">
-      <a:schemeClr val="accent1"/>
-    </dgm:fillClrLst>
-    <dgm:linClrLst meth="repeat">
-      <a:schemeClr val="accent1"/>
-    </dgm:linClrLst>
-    <dgm:effectClrLst/>
-    <dgm:txLinClrLst/>
-    <dgm:txFillClrLst meth="repeat">
-      <a:schemeClr val="lt1"/>
-    </dgm:txFillClrLst>
-    <dgm:txEffectClrLst/>
-  </dgm:styleLbl>
-  <dgm:styleLbl name="parChTrans1D1">
-    <dgm:fillClrLst meth="repeat">
-      <a:schemeClr val="accent1"/>
-    </dgm:fillClrLst>
-    <dgm:linClrLst meth="repeat">
-      <a:schemeClr val="accent1">
-        <a:shade val="60000"/>
-      </a:schemeClr>
+      <a:schemeClr val="accent2"/>
     </dgm:linClrLst>
     <dgm:effectClrLst/>
     <dgm:txLinClrLst/>
@@ -510,12 +520,12 @@
   </dgm:styleLbl>
   <dgm:styleLbl name="parChTrans1D2">
     <dgm:fillClrLst meth="repeat">
-      <a:schemeClr val="accent1"/>
+      <a:schemeClr val="accent2">
+        <a:tint val="90000"/>
+      </a:schemeClr>
     </dgm:fillClrLst>
     <dgm:linClrLst meth="repeat">
-      <a:schemeClr val="accent1">
-        <a:shade val="60000"/>
-      </a:schemeClr>
+      <a:schemeClr val="accent3"/>
     </dgm:linClrLst>
     <dgm:effectClrLst/>
     <dgm:txLinClrLst/>
@@ -526,12 +536,12 @@
   </dgm:styleLbl>
   <dgm:styleLbl name="parChTrans1D3">
     <dgm:fillClrLst meth="repeat">
-      <a:schemeClr val="accent1"/>
+      <a:schemeClr val="accent2">
+        <a:tint val="70000"/>
+      </a:schemeClr>
     </dgm:fillClrLst>
     <dgm:linClrLst meth="repeat">
-      <a:schemeClr val="accent1">
-        <a:shade val="80000"/>
-      </a:schemeClr>
+      <a:schemeClr val="accent4"/>
     </dgm:linClrLst>
     <dgm:effectClrLst/>
     <dgm:txLinClrLst/>
@@ -542,12 +552,12 @@
   </dgm:styleLbl>
   <dgm:styleLbl name="parChTrans1D4">
     <dgm:fillClrLst meth="repeat">
-      <a:schemeClr val="accent1"/>
+      <a:schemeClr val="accent2">
+        <a:tint val="50000"/>
+      </a:schemeClr>
     </dgm:fillClrLst>
     <dgm:linClrLst meth="repeat">
-      <a:schemeClr val="accent1">
-        <a:shade val="80000"/>
-      </a:schemeClr>
+      <a:schemeClr val="accent5"/>
     </dgm:linClrLst>
     <dgm:effectClrLst/>
     <dgm:txLinClrLst/>
@@ -562,7 +572,220 @@
         <a:alpha val="90000"/>
       </a:schemeClr>
     </dgm:fillClrLst>
+    <dgm:linClrLst>
+      <a:schemeClr val="accent2"/>
+      <a:schemeClr val="accent3"/>
+    </dgm:linClrLst>
+    <dgm:effectClrLst/>
+    <dgm:txLinClrLst/>
+    <dgm:txFillClrLst meth="repeat">
+      <a:schemeClr val="dk1"/>
+    </dgm:txFillClrLst>
+    <dgm:txEffectClrLst/>
+  </dgm:styleLbl>
+  <dgm:styleLbl name="conFgAcc1">
+    <dgm:fillClrLst meth="repeat">
+      <a:schemeClr val="lt1">
+        <a:alpha val="90000"/>
+      </a:schemeClr>
+    </dgm:fillClrLst>
+    <dgm:linClrLst>
+      <a:schemeClr val="accent2"/>
+      <a:schemeClr val="accent3"/>
+    </dgm:linClrLst>
+    <dgm:effectClrLst/>
+    <dgm:txLinClrLst/>
+    <dgm:txFillClrLst meth="repeat">
+      <a:schemeClr val="dk1"/>
+    </dgm:txFillClrLst>
+    <dgm:txEffectClrLst/>
+  </dgm:styleLbl>
+  <dgm:styleLbl name="alignAcc1">
+    <dgm:fillClrLst meth="repeat">
+      <a:schemeClr val="lt1">
+        <a:alpha val="90000"/>
+      </a:schemeClr>
+    </dgm:fillClrLst>
+    <dgm:linClrLst>
+      <a:schemeClr val="accent2"/>
+      <a:schemeClr val="accent3"/>
+    </dgm:linClrLst>
+    <dgm:effectClrLst/>
+    <dgm:txLinClrLst/>
+    <dgm:txFillClrLst meth="repeat">
+      <a:schemeClr val="dk1"/>
+    </dgm:txFillClrLst>
+    <dgm:txEffectClrLst/>
+  </dgm:styleLbl>
+  <dgm:styleLbl name="trAlignAcc1">
+    <dgm:fillClrLst meth="repeat">
+      <a:schemeClr val="lt1">
+        <a:alpha val="40000"/>
+      </a:schemeClr>
+    </dgm:fillClrLst>
     <dgm:linClrLst meth="repeat">
+      <a:schemeClr val="accent2"/>
+    </dgm:linClrLst>
+    <dgm:effectClrLst/>
+    <dgm:txLinClrLst/>
+    <dgm:txFillClrLst meth="repeat">
+      <a:schemeClr val="dk1"/>
+    </dgm:txFillClrLst>
+    <dgm:txEffectClrLst/>
+  </dgm:styleLbl>
+  <dgm:styleLbl name="bgAcc1">
+    <dgm:fillClrLst meth="repeat">
+      <a:schemeClr val="lt1">
+        <a:alpha val="90000"/>
+      </a:schemeClr>
+    </dgm:fillClrLst>
+    <dgm:linClrLst>
+      <a:schemeClr val="accent2"/>
+      <a:schemeClr val="accent3"/>
+    </dgm:linClrLst>
+    <dgm:effectClrLst/>
+    <dgm:txLinClrLst/>
+    <dgm:txFillClrLst meth="repeat">
+      <a:schemeClr val="dk1"/>
+    </dgm:txFillClrLst>
+    <dgm:txEffectClrLst/>
+  </dgm:styleLbl>
+  <dgm:styleLbl name="solidFgAcc1">
+    <dgm:fillClrLst meth="repeat">
+      <a:schemeClr val="lt1"/>
+    </dgm:fillClrLst>
+    <dgm:linClrLst>
+      <a:schemeClr val="accent2"/>
+      <a:schemeClr val="accent3"/>
+    </dgm:linClrLst>
+    <dgm:effectClrLst/>
+    <dgm:txLinClrLst/>
+    <dgm:txFillClrLst meth="repeat">
+      <a:schemeClr val="dk1"/>
+    </dgm:txFillClrLst>
+    <dgm:txEffectClrLst/>
+  </dgm:styleLbl>
+  <dgm:styleLbl name="solidAlignAcc1">
+    <dgm:fillClrLst meth="repeat">
+      <a:schemeClr val="lt1"/>
+    </dgm:fillClrLst>
+    <dgm:linClrLst>
+      <a:schemeClr val="accent2"/>
+      <a:schemeClr val="accent3"/>
+    </dgm:linClrLst>
+    <dgm:effectClrLst/>
+    <dgm:txLinClrLst/>
+    <dgm:txFillClrLst meth="repeat">
+      <a:schemeClr val="dk1"/>
+    </dgm:txFillClrLst>
+    <dgm:txEffectClrLst/>
+  </dgm:styleLbl>
+  <dgm:styleLbl name="solidBgAcc1">
+    <dgm:fillClrLst meth="repeat">
+      <a:schemeClr val="lt1"/>
+    </dgm:fillClrLst>
+    <dgm:linClrLst>
+      <a:schemeClr val="accent2"/>
+      <a:schemeClr val="accent3"/>
+    </dgm:linClrLst>
+    <dgm:effectClrLst/>
+    <dgm:txLinClrLst/>
+    <dgm:txFillClrLst meth="repeat">
+      <a:schemeClr val="dk1"/>
+    </dgm:txFillClrLst>
+    <dgm:txEffectClrLst/>
+  </dgm:styleLbl>
+  <dgm:styleLbl name="fgAccFollowNode1">
+    <dgm:fillClrLst>
+      <a:schemeClr val="accent2">
+        <a:tint val="40000"/>
+        <a:alpha val="90000"/>
+      </a:schemeClr>
+      <a:schemeClr val="accent3">
+        <a:tint val="40000"/>
+        <a:alpha val="90000"/>
+      </a:schemeClr>
+    </dgm:fillClrLst>
+    <dgm:linClrLst>
+      <a:schemeClr val="accent2">
+        <a:tint val="40000"/>
+        <a:alpha val="90000"/>
+      </a:schemeClr>
+      <a:schemeClr val="accent3">
+        <a:tint val="40000"/>
+        <a:alpha val="90000"/>
+      </a:schemeClr>
+    </dgm:linClrLst>
+    <dgm:effectClrLst/>
+    <dgm:txLinClrLst/>
+    <dgm:txFillClrLst meth="repeat">
+      <a:schemeClr val="dk1"/>
+    </dgm:txFillClrLst>
+    <dgm:txEffectClrLst/>
+  </dgm:styleLbl>
+  <dgm:styleLbl name="alignAccFollowNode1">
+    <dgm:fillClrLst>
+      <a:schemeClr val="accent2">
+        <a:tint val="40000"/>
+        <a:alpha val="90000"/>
+      </a:schemeClr>
+      <a:schemeClr val="accent3">
+        <a:tint val="40000"/>
+        <a:alpha val="90000"/>
+      </a:schemeClr>
+    </dgm:fillClrLst>
+    <dgm:linClrLst>
+      <a:schemeClr val="accent2">
+        <a:tint val="40000"/>
+        <a:alpha val="90000"/>
+      </a:schemeClr>
+      <a:schemeClr val="accent3">
+        <a:tint val="40000"/>
+        <a:alpha val="90000"/>
+      </a:schemeClr>
+    </dgm:linClrLst>
+    <dgm:effectClrLst/>
+    <dgm:txLinClrLst/>
+    <dgm:txFillClrLst meth="repeat">
+      <a:schemeClr val="dk1"/>
+    </dgm:txFillClrLst>
+    <dgm:txEffectClrLst/>
+  </dgm:styleLbl>
+  <dgm:styleLbl name="bgAccFollowNode1">
+    <dgm:fillClrLst>
+      <a:schemeClr val="accent2">
+        <a:tint val="40000"/>
+        <a:alpha val="90000"/>
+      </a:schemeClr>
+      <a:schemeClr val="accent3">
+        <a:tint val="40000"/>
+        <a:alpha val="90000"/>
+      </a:schemeClr>
+    </dgm:fillClrLst>
+    <dgm:linClrLst>
+      <a:schemeClr val="accent2">
+        <a:tint val="40000"/>
+        <a:alpha val="90000"/>
+      </a:schemeClr>
+      <a:schemeClr val="accent3">
+        <a:tint val="40000"/>
+        <a:alpha val="90000"/>
+      </a:schemeClr>
+    </dgm:linClrLst>
+    <dgm:effectClrLst/>
+    <dgm:txLinClrLst/>
+    <dgm:txFillClrLst meth="repeat">
+      <a:schemeClr val="dk1"/>
+    </dgm:txFillClrLst>
+    <dgm:txEffectClrLst/>
+  </dgm:styleLbl>
+  <dgm:styleLbl name="fgAcc0">
+    <dgm:fillClrLst meth="repeat">
+      <a:schemeClr val="lt1">
+        <a:alpha val="90000"/>
+      </a:schemeClr>
+    </dgm:fillClrLst>
+    <dgm:linClrLst>
       <a:schemeClr val="accent1"/>
     </dgm:linClrLst>
     <dgm:effectClrLst/>
@@ -572,14 +795,14 @@
     </dgm:txFillClrLst>
     <dgm:txEffectClrLst/>
   </dgm:styleLbl>
-  <dgm:styleLbl name="conFgAcc1">
+  <dgm:styleLbl name="fgAcc2">
     <dgm:fillClrLst meth="repeat">
       <a:schemeClr val="lt1">
         <a:alpha val="90000"/>
       </a:schemeClr>
     </dgm:fillClrLst>
-    <dgm:linClrLst meth="repeat">
-      <a:schemeClr val="accent1"/>
+    <dgm:linClrLst>
+      <a:schemeClr val="accent3"/>
     </dgm:linClrLst>
     <dgm:effectClrLst/>
     <dgm:txLinClrLst/>
@@ -588,14 +811,14 @@
     </dgm:txFillClrLst>
     <dgm:txEffectClrLst/>
   </dgm:styleLbl>
-  <dgm:styleLbl name="alignAcc1">
+  <dgm:styleLbl name="fgAcc3">
     <dgm:fillClrLst meth="repeat">
       <a:schemeClr val="lt1">
         <a:alpha val="90000"/>
       </a:schemeClr>
     </dgm:fillClrLst>
-    <dgm:linClrLst meth="repeat">
-      <a:schemeClr val="accent1"/>
+    <dgm:linClrLst>
+      <a:schemeClr val="accent4"/>
     </dgm:linClrLst>
     <dgm:effectClrLst/>
     <dgm:txLinClrLst/>
@@ -604,14 +827,14 @@
     </dgm:txFillClrLst>
     <dgm:txEffectClrLst/>
   </dgm:styleLbl>
-  <dgm:styleLbl name="trAlignAcc1">
+  <dgm:styleLbl name="fgAcc4">
     <dgm:fillClrLst meth="repeat">
       <a:schemeClr val="lt1">
-        <a:alpha val="40000"/>
+        <a:alpha val="90000"/>
       </a:schemeClr>
     </dgm:fillClrLst>
-    <dgm:linClrLst meth="repeat">
-      <a:schemeClr val="accent1"/>
+    <dgm:linClrLst>
+      <a:schemeClr val="accent5"/>
     </dgm:linClrLst>
     <dgm:effectClrLst/>
     <dgm:txLinClrLst/>
@@ -620,14 +843,14 @@
     </dgm:txFillClrLst>
     <dgm:txEffectClrLst/>
   </dgm:styleLbl>
-  <dgm:styleLbl name="bgAcc1">
+  <dgm:styleLbl name="bgShp">
     <dgm:fillClrLst meth="repeat">
-      <a:schemeClr val="lt1">
-        <a:alpha val="90000"/>
+      <a:schemeClr val="accent2">
+        <a:tint val="40000"/>
       </a:schemeClr>
     </dgm:fillClrLst>
     <dgm:linClrLst meth="repeat">
-      <a:schemeClr val="accent1"/>
+      <a:schemeClr val="dk1"/>
     </dgm:linClrLst>
     <dgm:effectClrLst/>
     <dgm:txLinClrLst/>
@@ -636,196 +859,14 @@
     </dgm:txFillClrLst>
     <dgm:txEffectClrLst/>
   </dgm:styleLbl>
-  <dgm:styleLbl name="solidFgAcc1">
+  <dgm:styleLbl name="dkBgShp">
     <dgm:fillClrLst meth="repeat">
-      <a:schemeClr val="lt1"/>
-    </dgm:fillClrLst>
-    <dgm:linClrLst meth="repeat">
-      <a:schemeClr val="accent1"/>
-    </dgm:linClrLst>
-    <dgm:effectClrLst/>
-    <dgm:txLinClrLst/>
-    <dgm:txFillClrLst meth="repeat">
-      <a:schemeClr val="dk1"/>
-    </dgm:txFillClrLst>
-    <dgm:txEffectClrLst/>
-  </dgm:styleLbl>
-  <dgm:styleLbl name="solidAlignAcc1">
-    <dgm:fillClrLst meth="repeat">
-      <a:schemeClr val="lt1"/>
-    </dgm:fillClrLst>
-    <dgm:linClrLst meth="repeat">
-      <a:schemeClr val="accent1"/>
-    </dgm:linClrLst>
-    <dgm:effectClrLst/>
-    <dgm:txLinClrLst/>
-    <dgm:txFillClrLst meth="repeat">
-      <a:schemeClr val="dk1"/>
-    </dgm:txFillClrLst>
-    <dgm:txEffectClrLst/>
-  </dgm:styleLbl>
-  <dgm:styleLbl name="solidBgAcc1">
-    <dgm:fillClrLst meth="repeat">
-      <a:schemeClr val="lt1"/>
-    </dgm:fillClrLst>
-    <dgm:linClrLst meth="repeat">
-      <a:schemeClr val="accent1"/>
-    </dgm:linClrLst>
-    <dgm:effectClrLst/>
-    <dgm:txLinClrLst/>
-    <dgm:txFillClrLst meth="repeat">
-      <a:schemeClr val="dk1"/>
-    </dgm:txFillClrLst>
-    <dgm:txEffectClrLst/>
-  </dgm:styleLbl>
-  <dgm:styleLbl name="fgAccFollowNode1">
-    <dgm:fillClrLst meth="repeat">
-      <a:schemeClr val="accent1">
-        <a:alpha val="90000"/>
-        <a:tint val="40000"/>
+      <a:schemeClr val="accent2">
+        <a:shade val="90000"/>
       </a:schemeClr>
     </dgm:fillClrLst>
     <dgm:linClrLst meth="repeat">
-      <a:schemeClr val="accent1">
-        <a:alpha val="90000"/>
-        <a:tint val="40000"/>
-      </a:schemeClr>
-    </dgm:linClrLst>
-    <dgm:effectClrLst/>
-    <dgm:txLinClrLst/>
-    <dgm:txFillClrLst meth="repeat">
       <a:schemeClr val="dk1"/>
-    </dgm:txFillClrLst>
-    <dgm:txEffectClrLst/>
-  </dgm:styleLbl>
-  <dgm:styleLbl name="alignAccFollowNode1">
-    <dgm:fillClrLst meth="repeat">
-      <a:schemeClr val="accent1">
-        <a:alpha val="90000"/>
-        <a:tint val="40000"/>
-      </a:schemeClr>
-    </dgm:fillClrLst>
-    <dgm:linClrLst meth="repeat">
-      <a:schemeClr val="accent1">
-        <a:alpha val="90000"/>
-        <a:tint val="40000"/>
-      </a:schemeClr>
-    </dgm:linClrLst>
-    <dgm:effectClrLst/>
-    <dgm:txLinClrLst/>
-    <dgm:txFillClrLst meth="repeat">
-      <a:schemeClr val="dk1"/>
-    </dgm:txFillClrLst>
-    <dgm:txEffectClrLst/>
-  </dgm:styleLbl>
-  <dgm:styleLbl name="bgAccFollowNode1">
-    <dgm:fillClrLst meth="repeat">
-      <a:schemeClr val="accent1">
-        <a:alpha val="90000"/>
-        <a:tint val="40000"/>
-      </a:schemeClr>
-    </dgm:fillClrLst>
-    <dgm:linClrLst meth="repeat">
-      <a:schemeClr val="accent1">
-        <a:alpha val="90000"/>
-        <a:tint val="40000"/>
-      </a:schemeClr>
-    </dgm:linClrLst>
-    <dgm:effectClrLst/>
-    <dgm:txLinClrLst/>
-    <dgm:txFillClrLst meth="repeat">
-      <a:schemeClr val="dk1"/>
-    </dgm:txFillClrLst>
-    <dgm:txEffectClrLst/>
-  </dgm:styleLbl>
-  <dgm:styleLbl name="fgAcc0">
-    <dgm:fillClrLst meth="repeat">
-      <a:schemeClr val="lt1">
-        <a:alpha val="90000"/>
-      </a:schemeClr>
-    </dgm:fillClrLst>
-    <dgm:linClrLst meth="repeat">
-      <a:schemeClr val="accent1"/>
-    </dgm:linClrLst>
-    <dgm:effectClrLst/>
-    <dgm:txLinClrLst/>
-    <dgm:txFillClrLst meth="repeat">
-      <a:schemeClr val="dk1"/>
-    </dgm:txFillClrLst>
-    <dgm:txEffectClrLst/>
-  </dgm:styleLbl>
-  <dgm:styleLbl name="fgAcc2">
-    <dgm:fillClrLst meth="repeat">
-      <a:schemeClr val="lt1">
-        <a:alpha val="90000"/>
-      </a:schemeClr>
-    </dgm:fillClrLst>
-    <dgm:linClrLst meth="repeat">
-      <a:schemeClr val="accent1"/>
-    </dgm:linClrLst>
-    <dgm:effectClrLst/>
-    <dgm:txLinClrLst/>
-    <dgm:txFillClrLst meth="repeat">
-      <a:schemeClr val="dk1"/>
-    </dgm:txFillClrLst>
-    <dgm:txEffectClrLst/>
-  </dgm:styleLbl>
-  <dgm:styleLbl name="fgAcc3">
-    <dgm:fillClrLst meth="repeat">
-      <a:schemeClr val="lt1">
-        <a:alpha val="90000"/>
-      </a:schemeClr>
-    </dgm:fillClrLst>
-    <dgm:linClrLst meth="repeat">
-      <a:schemeClr val="accent1"/>
-    </dgm:linClrLst>
-    <dgm:effectClrLst/>
-    <dgm:txLinClrLst/>
-    <dgm:txFillClrLst meth="repeat">
-      <a:schemeClr val="dk1"/>
-    </dgm:txFillClrLst>
-    <dgm:txEffectClrLst/>
-  </dgm:styleLbl>
-  <dgm:styleLbl name="fgAcc4">
-    <dgm:fillClrLst meth="repeat">
-      <a:schemeClr val="lt1">
-        <a:alpha val="90000"/>
-      </a:schemeClr>
-    </dgm:fillClrLst>
-    <dgm:linClrLst meth="repeat">
-      <a:schemeClr val="accent1"/>
-    </dgm:linClrLst>
-    <dgm:effectClrLst/>
-    <dgm:txLinClrLst/>
-    <dgm:txFillClrLst meth="repeat">
-      <a:schemeClr val="dk1"/>
-    </dgm:txFillClrLst>
-    <dgm:txEffectClrLst/>
-  </dgm:styleLbl>
-  <dgm:styleLbl name="bgShp">
-    <dgm:fillClrLst meth="repeat">
-      <a:schemeClr val="accent1">
-        <a:tint val="40000"/>
-      </a:schemeClr>
-    </dgm:fillClrLst>
-    <dgm:linClrLst meth="repeat">
-      <a:schemeClr val="accent1"/>
-    </dgm:linClrLst>
-    <dgm:effectClrLst/>
-    <dgm:txLinClrLst/>
-    <dgm:txFillClrLst meth="repeat">
-      <a:schemeClr val="dk1"/>
-    </dgm:txFillClrLst>
-    <dgm:txEffectClrLst/>
-  </dgm:styleLbl>
-  <dgm:styleLbl name="dkBgShp">
-    <dgm:fillClrLst meth="repeat">
-      <a:schemeClr val="accent1">
-        <a:shade val="80000"/>
-      </a:schemeClr>
-    </dgm:fillClrLst>
-    <dgm:linClrLst meth="repeat">
-      <a:schemeClr val="accent1"/>
     </dgm:linClrLst>
     <dgm:effectClrLst/>
     <dgm:txLinClrLst/>
@@ -836,13 +877,13 @@
   </dgm:styleLbl>
   <dgm:styleLbl name="trBgShp">
     <dgm:fillClrLst meth="repeat">
-      <a:schemeClr val="accent1">
+      <a:schemeClr val="accent2">
         <a:tint val="50000"/>
         <a:alpha val="40000"/>
       </a:schemeClr>
     </dgm:fillClrLst>
     <dgm:linClrLst meth="repeat">
-      <a:schemeClr val="accent1"/>
+      <a:schemeClr val="accent2"/>
     </dgm:linClrLst>
     <dgm:effectClrLst/>
     <dgm:txLinClrLst/>
@@ -853,8 +894,8 @@
   </dgm:styleLbl>
   <dgm:styleLbl name="fgShp">
     <dgm:fillClrLst meth="repeat">
-      <a:schemeClr val="accent1">
-        <a:tint val="60000"/>
+      <a:schemeClr val="accent2">
+        <a:tint val="40000"/>
       </a:schemeClr>
     </dgm:fillClrLst>
     <dgm:linClrLst meth="repeat">
@@ -1635,7 +1676,1323 @@
 </dgm:colorsDef>
 </file>
 
+<file path=ppt/diagrams/colors3.xml><?xml version="1.0" encoding="utf-8"?>
+<dgm:colorsDef xmlns:dgm="http://schemas.openxmlformats.org/drawingml/2006/diagram" xmlns:a="http://schemas.openxmlformats.org/drawingml/2006/main" uniqueId="urn:microsoft.com/office/officeart/2005/8/colors/accent1_2">
+  <dgm:title val=""/>
+  <dgm:desc val=""/>
+  <dgm:catLst>
+    <dgm:cat type="accent1" pri="11200"/>
+  </dgm:catLst>
+  <dgm:styleLbl name="node0">
+    <dgm:fillClrLst meth="repeat">
+      <a:schemeClr val="accent1"/>
+    </dgm:fillClrLst>
+    <dgm:linClrLst meth="repeat">
+      <a:schemeClr val="lt1"/>
+    </dgm:linClrLst>
+    <dgm:effectClrLst/>
+    <dgm:txLinClrLst/>
+    <dgm:txFillClrLst/>
+    <dgm:txEffectClrLst/>
+  </dgm:styleLbl>
+  <dgm:styleLbl name="alignNode1">
+    <dgm:fillClrLst meth="repeat">
+      <a:schemeClr val="accent1"/>
+    </dgm:fillClrLst>
+    <dgm:linClrLst meth="repeat">
+      <a:schemeClr val="accent1"/>
+    </dgm:linClrLst>
+    <dgm:effectClrLst/>
+    <dgm:txLinClrLst/>
+    <dgm:txFillClrLst/>
+    <dgm:txEffectClrLst/>
+  </dgm:styleLbl>
+  <dgm:styleLbl name="node1">
+    <dgm:fillClrLst meth="repeat">
+      <a:schemeClr val="accent1"/>
+    </dgm:fillClrLst>
+    <dgm:linClrLst meth="repeat">
+      <a:schemeClr val="lt1"/>
+    </dgm:linClrLst>
+    <dgm:effectClrLst/>
+    <dgm:txLinClrLst/>
+    <dgm:txFillClrLst/>
+    <dgm:txEffectClrLst/>
+  </dgm:styleLbl>
+  <dgm:styleLbl name="lnNode1">
+    <dgm:fillClrLst meth="repeat">
+      <a:schemeClr val="accent1"/>
+    </dgm:fillClrLst>
+    <dgm:linClrLst meth="repeat">
+      <a:schemeClr val="lt1"/>
+    </dgm:linClrLst>
+    <dgm:effectClrLst/>
+    <dgm:txLinClrLst/>
+    <dgm:txFillClrLst/>
+    <dgm:txEffectClrLst/>
+  </dgm:styleLbl>
+  <dgm:styleLbl name="vennNode1">
+    <dgm:fillClrLst meth="repeat">
+      <a:schemeClr val="accent1">
+        <a:alpha val="50000"/>
+      </a:schemeClr>
+    </dgm:fillClrLst>
+    <dgm:linClrLst meth="repeat">
+      <a:schemeClr val="lt1"/>
+    </dgm:linClrLst>
+    <dgm:effectClrLst/>
+    <dgm:txLinClrLst/>
+    <dgm:txFillClrLst/>
+    <dgm:txEffectClrLst/>
+  </dgm:styleLbl>
+  <dgm:styleLbl name="node2">
+    <dgm:fillClrLst meth="repeat">
+      <a:schemeClr val="accent1"/>
+    </dgm:fillClrLst>
+    <dgm:linClrLst meth="repeat">
+      <a:schemeClr val="lt1"/>
+    </dgm:linClrLst>
+    <dgm:effectClrLst/>
+    <dgm:txLinClrLst/>
+    <dgm:txFillClrLst/>
+    <dgm:txEffectClrLst/>
+  </dgm:styleLbl>
+  <dgm:styleLbl name="node3">
+    <dgm:fillClrLst meth="repeat">
+      <a:schemeClr val="accent1"/>
+    </dgm:fillClrLst>
+    <dgm:linClrLst meth="repeat">
+      <a:schemeClr val="lt1"/>
+    </dgm:linClrLst>
+    <dgm:effectClrLst/>
+    <dgm:txLinClrLst/>
+    <dgm:txFillClrLst/>
+    <dgm:txEffectClrLst/>
+  </dgm:styleLbl>
+  <dgm:styleLbl name="node4">
+    <dgm:fillClrLst meth="repeat">
+      <a:schemeClr val="accent1"/>
+    </dgm:fillClrLst>
+    <dgm:linClrLst meth="repeat">
+      <a:schemeClr val="lt1"/>
+    </dgm:linClrLst>
+    <dgm:effectClrLst/>
+    <dgm:txLinClrLst/>
+    <dgm:txFillClrLst/>
+    <dgm:txEffectClrLst/>
+  </dgm:styleLbl>
+  <dgm:styleLbl name="fgImgPlace1">
+    <dgm:fillClrLst meth="repeat">
+      <a:schemeClr val="accent1">
+        <a:tint val="50000"/>
+      </a:schemeClr>
+    </dgm:fillClrLst>
+    <dgm:linClrLst meth="repeat">
+      <a:schemeClr val="lt1"/>
+    </dgm:linClrLst>
+    <dgm:effectClrLst/>
+    <dgm:txLinClrLst/>
+    <dgm:txFillClrLst meth="repeat">
+      <a:schemeClr val="lt1"/>
+    </dgm:txFillClrLst>
+    <dgm:txEffectClrLst/>
+  </dgm:styleLbl>
+  <dgm:styleLbl name="alignImgPlace1">
+    <dgm:fillClrLst meth="repeat">
+      <a:schemeClr val="accent1">
+        <a:tint val="50000"/>
+      </a:schemeClr>
+    </dgm:fillClrLst>
+    <dgm:linClrLst meth="repeat">
+      <a:schemeClr val="lt1"/>
+    </dgm:linClrLst>
+    <dgm:effectClrLst/>
+    <dgm:txLinClrLst/>
+    <dgm:txFillClrLst meth="repeat">
+      <a:schemeClr val="lt1"/>
+    </dgm:txFillClrLst>
+    <dgm:txEffectClrLst/>
+  </dgm:styleLbl>
+  <dgm:styleLbl name="bgImgPlace1">
+    <dgm:fillClrLst meth="repeat">
+      <a:schemeClr val="accent1">
+        <a:tint val="50000"/>
+      </a:schemeClr>
+    </dgm:fillClrLst>
+    <dgm:linClrLst meth="repeat">
+      <a:schemeClr val="lt1"/>
+    </dgm:linClrLst>
+    <dgm:effectClrLst/>
+    <dgm:txLinClrLst/>
+    <dgm:txFillClrLst meth="repeat">
+      <a:schemeClr val="lt1"/>
+    </dgm:txFillClrLst>
+    <dgm:txEffectClrLst/>
+  </dgm:styleLbl>
+  <dgm:styleLbl name="sibTrans2D1">
+    <dgm:fillClrLst meth="repeat">
+      <a:schemeClr val="accent1">
+        <a:tint val="60000"/>
+      </a:schemeClr>
+    </dgm:fillClrLst>
+    <dgm:linClrLst meth="repeat">
+      <a:schemeClr val="accent1">
+        <a:tint val="60000"/>
+      </a:schemeClr>
+    </dgm:linClrLst>
+    <dgm:effectClrLst/>
+    <dgm:txLinClrLst/>
+    <dgm:txFillClrLst/>
+    <dgm:txEffectClrLst/>
+  </dgm:styleLbl>
+  <dgm:styleLbl name="fgSibTrans2D1">
+    <dgm:fillClrLst meth="repeat">
+      <a:schemeClr val="accent1">
+        <a:tint val="60000"/>
+      </a:schemeClr>
+    </dgm:fillClrLst>
+    <dgm:linClrLst meth="repeat">
+      <a:schemeClr val="accent1">
+        <a:tint val="60000"/>
+      </a:schemeClr>
+    </dgm:linClrLst>
+    <dgm:effectClrLst/>
+    <dgm:txLinClrLst/>
+    <dgm:txFillClrLst/>
+    <dgm:txEffectClrLst/>
+  </dgm:styleLbl>
+  <dgm:styleLbl name="bgSibTrans2D1">
+    <dgm:fillClrLst meth="repeat">
+      <a:schemeClr val="accent1">
+        <a:tint val="60000"/>
+      </a:schemeClr>
+    </dgm:fillClrLst>
+    <dgm:linClrLst meth="repeat">
+      <a:schemeClr val="accent1">
+        <a:tint val="60000"/>
+      </a:schemeClr>
+    </dgm:linClrLst>
+    <dgm:effectClrLst/>
+    <dgm:txLinClrLst/>
+    <dgm:txFillClrLst/>
+    <dgm:txEffectClrLst/>
+  </dgm:styleLbl>
+  <dgm:styleLbl name="sibTrans1D1">
+    <dgm:fillClrLst meth="repeat">
+      <a:schemeClr val="accent1"/>
+    </dgm:fillClrLst>
+    <dgm:linClrLst meth="repeat">
+      <a:schemeClr val="accent1"/>
+    </dgm:linClrLst>
+    <dgm:effectClrLst/>
+    <dgm:txLinClrLst/>
+    <dgm:txFillClrLst meth="repeat">
+      <a:schemeClr val="tx1"/>
+    </dgm:txFillClrLst>
+    <dgm:txEffectClrLst/>
+  </dgm:styleLbl>
+  <dgm:styleLbl name="callout">
+    <dgm:fillClrLst meth="repeat">
+      <a:schemeClr val="accent1"/>
+    </dgm:fillClrLst>
+    <dgm:linClrLst meth="repeat">
+      <a:schemeClr val="accent1">
+        <a:tint val="50000"/>
+      </a:schemeClr>
+    </dgm:linClrLst>
+    <dgm:effectClrLst/>
+    <dgm:txLinClrLst/>
+    <dgm:txFillClrLst meth="repeat">
+      <a:schemeClr val="tx1"/>
+    </dgm:txFillClrLst>
+    <dgm:txEffectClrLst/>
+  </dgm:styleLbl>
+  <dgm:styleLbl name="asst0">
+    <dgm:fillClrLst meth="repeat">
+      <a:schemeClr val="accent1"/>
+    </dgm:fillClrLst>
+    <dgm:linClrLst meth="repeat">
+      <a:schemeClr val="lt1"/>
+    </dgm:linClrLst>
+    <dgm:effectClrLst/>
+    <dgm:txLinClrLst/>
+    <dgm:txFillClrLst/>
+    <dgm:txEffectClrLst/>
+  </dgm:styleLbl>
+  <dgm:styleLbl name="asst1">
+    <dgm:fillClrLst meth="repeat">
+      <a:schemeClr val="accent1"/>
+    </dgm:fillClrLst>
+    <dgm:linClrLst meth="repeat">
+      <a:schemeClr val="lt1"/>
+    </dgm:linClrLst>
+    <dgm:effectClrLst/>
+    <dgm:txLinClrLst/>
+    <dgm:txFillClrLst/>
+    <dgm:txEffectClrLst/>
+  </dgm:styleLbl>
+  <dgm:styleLbl name="asst2">
+    <dgm:fillClrLst meth="repeat">
+      <a:schemeClr val="accent1"/>
+    </dgm:fillClrLst>
+    <dgm:linClrLst meth="repeat">
+      <a:schemeClr val="lt1"/>
+    </dgm:linClrLst>
+    <dgm:effectClrLst/>
+    <dgm:txLinClrLst/>
+    <dgm:txFillClrLst/>
+    <dgm:txEffectClrLst/>
+  </dgm:styleLbl>
+  <dgm:styleLbl name="asst3">
+    <dgm:fillClrLst meth="repeat">
+      <a:schemeClr val="accent1"/>
+    </dgm:fillClrLst>
+    <dgm:linClrLst meth="repeat">
+      <a:schemeClr val="lt1"/>
+    </dgm:linClrLst>
+    <dgm:effectClrLst/>
+    <dgm:txLinClrLst/>
+    <dgm:txFillClrLst/>
+    <dgm:txEffectClrLst/>
+  </dgm:styleLbl>
+  <dgm:styleLbl name="asst4">
+    <dgm:fillClrLst meth="repeat">
+      <a:schemeClr val="accent1"/>
+    </dgm:fillClrLst>
+    <dgm:linClrLst meth="repeat">
+      <a:schemeClr val="lt1"/>
+    </dgm:linClrLst>
+    <dgm:effectClrLst/>
+    <dgm:txLinClrLst/>
+    <dgm:txFillClrLst/>
+    <dgm:txEffectClrLst/>
+  </dgm:styleLbl>
+  <dgm:styleLbl name="parChTrans2D1">
+    <dgm:fillClrLst meth="repeat">
+      <a:schemeClr val="accent1">
+        <a:tint val="60000"/>
+      </a:schemeClr>
+    </dgm:fillClrLst>
+    <dgm:linClrLst meth="repeat">
+      <a:schemeClr val="accent1">
+        <a:tint val="60000"/>
+      </a:schemeClr>
+    </dgm:linClrLst>
+    <dgm:effectClrLst/>
+    <dgm:txLinClrLst/>
+    <dgm:txFillClrLst meth="repeat">
+      <a:schemeClr val="lt1"/>
+    </dgm:txFillClrLst>
+    <dgm:txEffectClrLst/>
+  </dgm:styleLbl>
+  <dgm:styleLbl name="parChTrans2D2">
+    <dgm:fillClrLst meth="repeat">
+      <a:schemeClr val="accent1"/>
+    </dgm:fillClrLst>
+    <dgm:linClrLst meth="repeat">
+      <a:schemeClr val="accent1"/>
+    </dgm:linClrLst>
+    <dgm:effectClrLst/>
+    <dgm:txLinClrLst/>
+    <dgm:txFillClrLst meth="repeat">
+      <a:schemeClr val="lt1"/>
+    </dgm:txFillClrLst>
+    <dgm:txEffectClrLst/>
+  </dgm:styleLbl>
+  <dgm:styleLbl name="parChTrans2D3">
+    <dgm:fillClrLst meth="repeat">
+      <a:schemeClr val="accent1"/>
+    </dgm:fillClrLst>
+    <dgm:linClrLst meth="repeat">
+      <a:schemeClr val="accent1"/>
+    </dgm:linClrLst>
+    <dgm:effectClrLst/>
+    <dgm:txLinClrLst/>
+    <dgm:txFillClrLst meth="repeat">
+      <a:schemeClr val="lt1"/>
+    </dgm:txFillClrLst>
+    <dgm:txEffectClrLst/>
+  </dgm:styleLbl>
+  <dgm:styleLbl name="parChTrans2D4">
+    <dgm:fillClrLst meth="repeat">
+      <a:schemeClr val="accent1"/>
+    </dgm:fillClrLst>
+    <dgm:linClrLst meth="repeat">
+      <a:schemeClr val="accent1"/>
+    </dgm:linClrLst>
+    <dgm:effectClrLst/>
+    <dgm:txLinClrLst/>
+    <dgm:txFillClrLst meth="repeat">
+      <a:schemeClr val="lt1"/>
+    </dgm:txFillClrLst>
+    <dgm:txEffectClrLst/>
+  </dgm:styleLbl>
+  <dgm:styleLbl name="parChTrans1D1">
+    <dgm:fillClrLst meth="repeat">
+      <a:schemeClr val="accent1"/>
+    </dgm:fillClrLst>
+    <dgm:linClrLst meth="repeat">
+      <a:schemeClr val="accent1">
+        <a:shade val="60000"/>
+      </a:schemeClr>
+    </dgm:linClrLst>
+    <dgm:effectClrLst/>
+    <dgm:txLinClrLst/>
+    <dgm:txFillClrLst meth="repeat">
+      <a:schemeClr val="tx1"/>
+    </dgm:txFillClrLst>
+    <dgm:txEffectClrLst/>
+  </dgm:styleLbl>
+  <dgm:styleLbl name="parChTrans1D2">
+    <dgm:fillClrLst meth="repeat">
+      <a:schemeClr val="accent1"/>
+    </dgm:fillClrLst>
+    <dgm:linClrLst meth="repeat">
+      <a:schemeClr val="accent1">
+        <a:shade val="60000"/>
+      </a:schemeClr>
+    </dgm:linClrLst>
+    <dgm:effectClrLst/>
+    <dgm:txLinClrLst/>
+    <dgm:txFillClrLst meth="repeat">
+      <a:schemeClr val="tx1"/>
+    </dgm:txFillClrLst>
+    <dgm:txEffectClrLst/>
+  </dgm:styleLbl>
+  <dgm:styleLbl name="parChTrans1D3">
+    <dgm:fillClrLst meth="repeat">
+      <a:schemeClr val="accent1"/>
+    </dgm:fillClrLst>
+    <dgm:linClrLst meth="repeat">
+      <a:schemeClr val="accent1">
+        <a:shade val="80000"/>
+      </a:schemeClr>
+    </dgm:linClrLst>
+    <dgm:effectClrLst/>
+    <dgm:txLinClrLst/>
+    <dgm:txFillClrLst meth="repeat">
+      <a:schemeClr val="tx1"/>
+    </dgm:txFillClrLst>
+    <dgm:txEffectClrLst/>
+  </dgm:styleLbl>
+  <dgm:styleLbl name="parChTrans1D4">
+    <dgm:fillClrLst meth="repeat">
+      <a:schemeClr val="accent1"/>
+    </dgm:fillClrLst>
+    <dgm:linClrLst meth="repeat">
+      <a:schemeClr val="accent1">
+        <a:shade val="80000"/>
+      </a:schemeClr>
+    </dgm:linClrLst>
+    <dgm:effectClrLst/>
+    <dgm:txLinClrLst/>
+    <dgm:txFillClrLst meth="repeat">
+      <a:schemeClr val="tx1"/>
+    </dgm:txFillClrLst>
+    <dgm:txEffectClrLst/>
+  </dgm:styleLbl>
+  <dgm:styleLbl name="fgAcc1">
+    <dgm:fillClrLst meth="repeat">
+      <a:schemeClr val="lt1">
+        <a:alpha val="90000"/>
+      </a:schemeClr>
+    </dgm:fillClrLst>
+    <dgm:linClrLst meth="repeat">
+      <a:schemeClr val="accent1"/>
+    </dgm:linClrLst>
+    <dgm:effectClrLst/>
+    <dgm:txLinClrLst/>
+    <dgm:txFillClrLst meth="repeat">
+      <a:schemeClr val="dk1"/>
+    </dgm:txFillClrLst>
+    <dgm:txEffectClrLst/>
+  </dgm:styleLbl>
+  <dgm:styleLbl name="conFgAcc1">
+    <dgm:fillClrLst meth="repeat">
+      <a:schemeClr val="lt1">
+        <a:alpha val="90000"/>
+      </a:schemeClr>
+    </dgm:fillClrLst>
+    <dgm:linClrLst meth="repeat">
+      <a:schemeClr val="accent1"/>
+    </dgm:linClrLst>
+    <dgm:effectClrLst/>
+    <dgm:txLinClrLst/>
+    <dgm:txFillClrLst meth="repeat">
+      <a:schemeClr val="dk1"/>
+    </dgm:txFillClrLst>
+    <dgm:txEffectClrLst/>
+  </dgm:styleLbl>
+  <dgm:styleLbl name="alignAcc1">
+    <dgm:fillClrLst meth="repeat">
+      <a:schemeClr val="lt1">
+        <a:alpha val="90000"/>
+      </a:schemeClr>
+    </dgm:fillClrLst>
+    <dgm:linClrLst meth="repeat">
+      <a:schemeClr val="accent1"/>
+    </dgm:linClrLst>
+    <dgm:effectClrLst/>
+    <dgm:txLinClrLst/>
+    <dgm:txFillClrLst meth="repeat">
+      <a:schemeClr val="dk1"/>
+    </dgm:txFillClrLst>
+    <dgm:txEffectClrLst/>
+  </dgm:styleLbl>
+  <dgm:styleLbl name="trAlignAcc1">
+    <dgm:fillClrLst meth="repeat">
+      <a:schemeClr val="lt1">
+        <a:alpha val="40000"/>
+      </a:schemeClr>
+    </dgm:fillClrLst>
+    <dgm:linClrLst meth="repeat">
+      <a:schemeClr val="accent1"/>
+    </dgm:linClrLst>
+    <dgm:effectClrLst/>
+    <dgm:txLinClrLst/>
+    <dgm:txFillClrLst meth="repeat">
+      <a:schemeClr val="dk1"/>
+    </dgm:txFillClrLst>
+    <dgm:txEffectClrLst/>
+  </dgm:styleLbl>
+  <dgm:styleLbl name="bgAcc1">
+    <dgm:fillClrLst meth="repeat">
+      <a:schemeClr val="lt1">
+        <a:alpha val="90000"/>
+      </a:schemeClr>
+    </dgm:fillClrLst>
+    <dgm:linClrLst meth="repeat">
+      <a:schemeClr val="accent1"/>
+    </dgm:linClrLst>
+    <dgm:effectClrLst/>
+    <dgm:txLinClrLst/>
+    <dgm:txFillClrLst meth="repeat">
+      <a:schemeClr val="dk1"/>
+    </dgm:txFillClrLst>
+    <dgm:txEffectClrLst/>
+  </dgm:styleLbl>
+  <dgm:styleLbl name="solidFgAcc1">
+    <dgm:fillClrLst meth="repeat">
+      <a:schemeClr val="lt1"/>
+    </dgm:fillClrLst>
+    <dgm:linClrLst meth="repeat">
+      <a:schemeClr val="accent1"/>
+    </dgm:linClrLst>
+    <dgm:effectClrLst/>
+    <dgm:txLinClrLst/>
+    <dgm:txFillClrLst meth="repeat">
+      <a:schemeClr val="dk1"/>
+    </dgm:txFillClrLst>
+    <dgm:txEffectClrLst/>
+  </dgm:styleLbl>
+  <dgm:styleLbl name="solidAlignAcc1">
+    <dgm:fillClrLst meth="repeat">
+      <a:schemeClr val="lt1"/>
+    </dgm:fillClrLst>
+    <dgm:linClrLst meth="repeat">
+      <a:schemeClr val="accent1"/>
+    </dgm:linClrLst>
+    <dgm:effectClrLst/>
+    <dgm:txLinClrLst/>
+    <dgm:txFillClrLst meth="repeat">
+      <a:schemeClr val="dk1"/>
+    </dgm:txFillClrLst>
+    <dgm:txEffectClrLst/>
+  </dgm:styleLbl>
+  <dgm:styleLbl name="solidBgAcc1">
+    <dgm:fillClrLst meth="repeat">
+      <a:schemeClr val="lt1"/>
+    </dgm:fillClrLst>
+    <dgm:linClrLst meth="repeat">
+      <a:schemeClr val="accent1"/>
+    </dgm:linClrLst>
+    <dgm:effectClrLst/>
+    <dgm:txLinClrLst/>
+    <dgm:txFillClrLst meth="repeat">
+      <a:schemeClr val="dk1"/>
+    </dgm:txFillClrLst>
+    <dgm:txEffectClrLst/>
+  </dgm:styleLbl>
+  <dgm:styleLbl name="fgAccFollowNode1">
+    <dgm:fillClrLst meth="repeat">
+      <a:schemeClr val="accent1">
+        <a:alpha val="90000"/>
+        <a:tint val="40000"/>
+      </a:schemeClr>
+    </dgm:fillClrLst>
+    <dgm:linClrLst meth="repeat">
+      <a:schemeClr val="accent1">
+        <a:alpha val="90000"/>
+        <a:tint val="40000"/>
+      </a:schemeClr>
+    </dgm:linClrLst>
+    <dgm:effectClrLst/>
+    <dgm:txLinClrLst/>
+    <dgm:txFillClrLst meth="repeat">
+      <a:schemeClr val="dk1"/>
+    </dgm:txFillClrLst>
+    <dgm:txEffectClrLst/>
+  </dgm:styleLbl>
+  <dgm:styleLbl name="alignAccFollowNode1">
+    <dgm:fillClrLst meth="repeat">
+      <a:schemeClr val="accent1">
+        <a:alpha val="90000"/>
+        <a:tint val="40000"/>
+      </a:schemeClr>
+    </dgm:fillClrLst>
+    <dgm:linClrLst meth="repeat">
+      <a:schemeClr val="accent1">
+        <a:alpha val="90000"/>
+        <a:tint val="40000"/>
+      </a:schemeClr>
+    </dgm:linClrLst>
+    <dgm:effectClrLst/>
+    <dgm:txLinClrLst/>
+    <dgm:txFillClrLst meth="repeat">
+      <a:schemeClr val="dk1"/>
+    </dgm:txFillClrLst>
+    <dgm:txEffectClrLst/>
+  </dgm:styleLbl>
+  <dgm:styleLbl name="bgAccFollowNode1">
+    <dgm:fillClrLst meth="repeat">
+      <a:schemeClr val="accent1">
+        <a:alpha val="90000"/>
+        <a:tint val="40000"/>
+      </a:schemeClr>
+    </dgm:fillClrLst>
+    <dgm:linClrLst meth="repeat">
+      <a:schemeClr val="accent1">
+        <a:alpha val="90000"/>
+        <a:tint val="40000"/>
+      </a:schemeClr>
+    </dgm:linClrLst>
+    <dgm:effectClrLst/>
+    <dgm:txLinClrLst/>
+    <dgm:txFillClrLst meth="repeat">
+      <a:schemeClr val="dk1"/>
+    </dgm:txFillClrLst>
+    <dgm:txEffectClrLst/>
+  </dgm:styleLbl>
+  <dgm:styleLbl name="fgAcc0">
+    <dgm:fillClrLst meth="repeat">
+      <a:schemeClr val="lt1">
+        <a:alpha val="90000"/>
+      </a:schemeClr>
+    </dgm:fillClrLst>
+    <dgm:linClrLst meth="repeat">
+      <a:schemeClr val="accent1"/>
+    </dgm:linClrLst>
+    <dgm:effectClrLst/>
+    <dgm:txLinClrLst/>
+    <dgm:txFillClrLst meth="repeat">
+      <a:schemeClr val="dk1"/>
+    </dgm:txFillClrLst>
+    <dgm:txEffectClrLst/>
+  </dgm:styleLbl>
+  <dgm:styleLbl name="fgAcc2">
+    <dgm:fillClrLst meth="repeat">
+      <a:schemeClr val="lt1">
+        <a:alpha val="90000"/>
+      </a:schemeClr>
+    </dgm:fillClrLst>
+    <dgm:linClrLst meth="repeat">
+      <a:schemeClr val="accent1"/>
+    </dgm:linClrLst>
+    <dgm:effectClrLst/>
+    <dgm:txLinClrLst/>
+    <dgm:txFillClrLst meth="repeat">
+      <a:schemeClr val="dk1"/>
+    </dgm:txFillClrLst>
+    <dgm:txEffectClrLst/>
+  </dgm:styleLbl>
+  <dgm:styleLbl name="fgAcc3">
+    <dgm:fillClrLst meth="repeat">
+      <a:schemeClr val="lt1">
+        <a:alpha val="90000"/>
+      </a:schemeClr>
+    </dgm:fillClrLst>
+    <dgm:linClrLst meth="repeat">
+      <a:schemeClr val="accent1"/>
+    </dgm:linClrLst>
+    <dgm:effectClrLst/>
+    <dgm:txLinClrLst/>
+    <dgm:txFillClrLst meth="repeat">
+      <a:schemeClr val="dk1"/>
+    </dgm:txFillClrLst>
+    <dgm:txEffectClrLst/>
+  </dgm:styleLbl>
+  <dgm:styleLbl name="fgAcc4">
+    <dgm:fillClrLst meth="repeat">
+      <a:schemeClr val="lt1">
+        <a:alpha val="90000"/>
+      </a:schemeClr>
+    </dgm:fillClrLst>
+    <dgm:linClrLst meth="repeat">
+      <a:schemeClr val="accent1"/>
+    </dgm:linClrLst>
+    <dgm:effectClrLst/>
+    <dgm:txLinClrLst/>
+    <dgm:txFillClrLst meth="repeat">
+      <a:schemeClr val="dk1"/>
+    </dgm:txFillClrLst>
+    <dgm:txEffectClrLst/>
+  </dgm:styleLbl>
+  <dgm:styleLbl name="bgShp">
+    <dgm:fillClrLst meth="repeat">
+      <a:schemeClr val="accent1">
+        <a:tint val="40000"/>
+      </a:schemeClr>
+    </dgm:fillClrLst>
+    <dgm:linClrLst meth="repeat">
+      <a:schemeClr val="accent1"/>
+    </dgm:linClrLst>
+    <dgm:effectClrLst/>
+    <dgm:txLinClrLst/>
+    <dgm:txFillClrLst meth="repeat">
+      <a:schemeClr val="dk1"/>
+    </dgm:txFillClrLst>
+    <dgm:txEffectClrLst/>
+  </dgm:styleLbl>
+  <dgm:styleLbl name="dkBgShp">
+    <dgm:fillClrLst meth="repeat">
+      <a:schemeClr val="accent1">
+        <a:shade val="80000"/>
+      </a:schemeClr>
+    </dgm:fillClrLst>
+    <dgm:linClrLst meth="repeat">
+      <a:schemeClr val="accent1"/>
+    </dgm:linClrLst>
+    <dgm:effectClrLst/>
+    <dgm:txLinClrLst/>
+    <dgm:txFillClrLst meth="repeat">
+      <a:schemeClr val="lt1"/>
+    </dgm:txFillClrLst>
+    <dgm:txEffectClrLst/>
+  </dgm:styleLbl>
+  <dgm:styleLbl name="trBgShp">
+    <dgm:fillClrLst meth="repeat">
+      <a:schemeClr val="accent1">
+        <a:tint val="50000"/>
+        <a:alpha val="40000"/>
+      </a:schemeClr>
+    </dgm:fillClrLst>
+    <dgm:linClrLst meth="repeat">
+      <a:schemeClr val="accent1"/>
+    </dgm:linClrLst>
+    <dgm:effectClrLst/>
+    <dgm:txLinClrLst/>
+    <dgm:txFillClrLst meth="repeat">
+      <a:schemeClr val="lt1"/>
+    </dgm:txFillClrLst>
+    <dgm:txEffectClrLst/>
+  </dgm:styleLbl>
+  <dgm:styleLbl name="fgShp">
+    <dgm:fillClrLst meth="repeat">
+      <a:schemeClr val="accent1">
+        <a:tint val="60000"/>
+      </a:schemeClr>
+    </dgm:fillClrLst>
+    <dgm:linClrLst meth="repeat">
+      <a:schemeClr val="lt1"/>
+    </dgm:linClrLst>
+    <dgm:effectClrLst/>
+    <dgm:txLinClrLst/>
+    <dgm:txFillClrLst meth="repeat">
+      <a:schemeClr val="dk1"/>
+    </dgm:txFillClrLst>
+    <dgm:txEffectClrLst/>
+  </dgm:styleLbl>
+  <dgm:styleLbl name="revTx">
+    <dgm:fillClrLst meth="repeat">
+      <a:schemeClr val="lt1">
+        <a:alpha val="0"/>
+      </a:schemeClr>
+    </dgm:fillClrLst>
+    <dgm:linClrLst meth="repeat">
+      <a:schemeClr val="dk1">
+        <a:alpha val="0"/>
+      </a:schemeClr>
+    </dgm:linClrLst>
+    <dgm:effectClrLst/>
+    <dgm:txLinClrLst/>
+    <dgm:txFillClrLst meth="repeat">
+      <a:schemeClr val="tx1"/>
+    </dgm:txFillClrLst>
+    <dgm:txEffectClrLst/>
+  </dgm:styleLbl>
+</dgm:colorsDef>
+</file>
+
 <file path=ppt/diagrams/data1.xml><?xml version="1.0" encoding="utf-8"?>
+<dgm:dataModel xmlns:dgm="http://schemas.openxmlformats.org/drawingml/2006/diagram" xmlns:a="http://schemas.openxmlformats.org/drawingml/2006/main">
+  <dgm:ptLst>
+    <dgm:pt modelId="{26837F25-E275-4C2E-9B76-8DC9F144F9E8}" type="doc">
+      <dgm:prSet loTypeId="urn:microsoft.com/office/officeart/2008/layout/LinedList" loCatId="list" qsTypeId="urn:microsoft.com/office/officeart/2005/8/quickstyle/simple4" qsCatId="simple" csTypeId="urn:microsoft.com/office/officeart/2005/8/colors/colorful2" csCatId="colorful"/>
+      <dgm:spPr/>
+      <dgm:t>
+        <a:bodyPr/>
+        <a:lstStyle/>
+        <a:p>
+          <a:endParaRPr lang="en-US"/>
+        </a:p>
+      </dgm:t>
+    </dgm:pt>
+    <dgm:pt modelId="{83394971-7BB8-4862-B6A9-AB8BE3272157}">
+      <dgm:prSet/>
+      <dgm:spPr/>
+      <dgm:t>
+        <a:bodyPr/>
+        <a:lstStyle/>
+        <a:p>
+          <a:r>
+            <a:rPr lang="fr-FR"/>
+            <a:t>1- Qu’est-ce-que la statistique graphique?</a:t>
+          </a:r>
+          <a:endParaRPr lang="en-US"/>
+        </a:p>
+      </dgm:t>
+    </dgm:pt>
+    <dgm:pt modelId="{B21D0C32-3E1B-476A-AFEF-6C36AB915AF0}" type="parTrans" cxnId="{9E37A7F7-B6C5-4D5F-BD94-7B65766DD2A4}">
+      <dgm:prSet/>
+      <dgm:spPr/>
+      <dgm:t>
+        <a:bodyPr/>
+        <a:lstStyle/>
+        <a:p>
+          <a:endParaRPr lang="en-US"/>
+        </a:p>
+      </dgm:t>
+    </dgm:pt>
+    <dgm:pt modelId="{CEFF215C-9855-4ABB-A164-80B08E9B46DA}" type="sibTrans" cxnId="{9E37A7F7-B6C5-4D5F-BD94-7B65766DD2A4}">
+      <dgm:prSet/>
+      <dgm:spPr/>
+      <dgm:t>
+        <a:bodyPr/>
+        <a:lstStyle/>
+        <a:p>
+          <a:endParaRPr lang="en-US"/>
+        </a:p>
+      </dgm:t>
+    </dgm:pt>
+    <dgm:pt modelId="{3CE4A483-4CB4-4640-A6AA-3E24D33244BA}">
+      <dgm:prSet/>
+      <dgm:spPr/>
+      <dgm:t>
+        <a:bodyPr/>
+        <a:lstStyle/>
+        <a:p>
+          <a:r>
+            <a:rPr lang="fr-FR"/>
+            <a:t>2-  Objectifs de la statistique graphique</a:t>
+          </a:r>
+          <a:endParaRPr lang="en-US"/>
+        </a:p>
+      </dgm:t>
+    </dgm:pt>
+    <dgm:pt modelId="{7DBA6EDA-B806-47D1-9E87-28744E2C207E}" type="parTrans" cxnId="{DBE6A81D-6254-4791-86E0-AEA213A29B3E}">
+      <dgm:prSet/>
+      <dgm:spPr/>
+      <dgm:t>
+        <a:bodyPr/>
+        <a:lstStyle/>
+        <a:p>
+          <a:endParaRPr lang="en-US"/>
+        </a:p>
+      </dgm:t>
+    </dgm:pt>
+    <dgm:pt modelId="{19F66103-0D0D-4C27-AF45-C5BB9C9B6AA0}" type="sibTrans" cxnId="{DBE6A81D-6254-4791-86E0-AEA213A29B3E}">
+      <dgm:prSet/>
+      <dgm:spPr/>
+      <dgm:t>
+        <a:bodyPr/>
+        <a:lstStyle/>
+        <a:p>
+          <a:endParaRPr lang="en-US"/>
+        </a:p>
+      </dgm:t>
+    </dgm:pt>
+    <dgm:pt modelId="{CBAAC3A1-F831-4312-AEE0-1EE102D64961}">
+      <dgm:prSet/>
+      <dgm:spPr/>
+      <dgm:t>
+        <a:bodyPr/>
+        <a:lstStyle/>
+        <a:p>
+          <a:r>
+            <a:rPr lang="fr-FR"/>
+            <a:t>3- Notions importantes pour lire, interpréter ou construire les graphiques</a:t>
+          </a:r>
+          <a:endParaRPr lang="en-US"/>
+        </a:p>
+      </dgm:t>
+    </dgm:pt>
+    <dgm:pt modelId="{8039CE98-075A-47E2-9E71-9553C7829003}" type="parTrans" cxnId="{2EFB14C8-D6A2-4E38-8623-E14AEB1B72FC}">
+      <dgm:prSet/>
+      <dgm:spPr/>
+      <dgm:t>
+        <a:bodyPr/>
+        <a:lstStyle/>
+        <a:p>
+          <a:endParaRPr lang="en-US"/>
+        </a:p>
+      </dgm:t>
+    </dgm:pt>
+    <dgm:pt modelId="{4D3428E3-668A-41A0-BFFD-B71661276041}" type="sibTrans" cxnId="{2EFB14C8-D6A2-4E38-8623-E14AEB1B72FC}">
+      <dgm:prSet/>
+      <dgm:spPr/>
+      <dgm:t>
+        <a:bodyPr/>
+        <a:lstStyle/>
+        <a:p>
+          <a:endParaRPr lang="en-US"/>
+        </a:p>
+      </dgm:t>
+    </dgm:pt>
+    <dgm:pt modelId="{9C97E2AB-9626-42F7-BFBC-C46E627D80EA}">
+      <dgm:prSet/>
+      <dgm:spPr/>
+      <dgm:t>
+        <a:bodyPr/>
+        <a:lstStyle/>
+        <a:p>
+          <a:r>
+            <a:rPr lang="fr-FR"/>
+            <a:t>4- Eléments de décision</a:t>
+          </a:r>
+          <a:endParaRPr lang="en-US"/>
+        </a:p>
+      </dgm:t>
+    </dgm:pt>
+    <dgm:pt modelId="{685A7401-9447-48F0-937D-D6423E5357A6}" type="parTrans" cxnId="{B776646A-DB5A-4BA1-BB9A-4FD426D6091D}">
+      <dgm:prSet/>
+      <dgm:spPr/>
+      <dgm:t>
+        <a:bodyPr/>
+        <a:lstStyle/>
+        <a:p>
+          <a:endParaRPr lang="en-US"/>
+        </a:p>
+      </dgm:t>
+    </dgm:pt>
+    <dgm:pt modelId="{76765CD8-2C4F-42C7-B1A4-B9EB1A01422A}" type="sibTrans" cxnId="{B776646A-DB5A-4BA1-BB9A-4FD426D6091D}">
+      <dgm:prSet/>
+      <dgm:spPr/>
+      <dgm:t>
+        <a:bodyPr/>
+        <a:lstStyle/>
+        <a:p>
+          <a:endParaRPr lang="en-US"/>
+        </a:p>
+      </dgm:t>
+    </dgm:pt>
+    <dgm:pt modelId="{55E3677F-631A-4721-B0C6-5DC12CFDC1E5}">
+      <dgm:prSet/>
+      <dgm:spPr/>
+      <dgm:t>
+        <a:bodyPr/>
+        <a:lstStyle/>
+        <a:p>
+          <a:r>
+            <a:rPr lang="fr-FR"/>
+            <a:t>5- Quelle histoire souhaite t-on raconter? </a:t>
+          </a:r>
+          <a:endParaRPr lang="en-US"/>
+        </a:p>
+      </dgm:t>
+    </dgm:pt>
+    <dgm:pt modelId="{B5072A76-87C7-458B-A0AE-206D18D5BA5D}" type="parTrans" cxnId="{8B3629DC-A93D-46FD-96EB-EA126FB597BD}">
+      <dgm:prSet/>
+      <dgm:spPr/>
+      <dgm:t>
+        <a:bodyPr/>
+        <a:lstStyle/>
+        <a:p>
+          <a:endParaRPr lang="en-US"/>
+        </a:p>
+      </dgm:t>
+    </dgm:pt>
+    <dgm:pt modelId="{399A401D-DCB4-46D6-82B4-263AC68B72E7}" type="sibTrans" cxnId="{8B3629DC-A93D-46FD-96EB-EA126FB597BD}">
+      <dgm:prSet/>
+      <dgm:spPr/>
+      <dgm:t>
+        <a:bodyPr/>
+        <a:lstStyle/>
+        <a:p>
+          <a:endParaRPr lang="en-US"/>
+        </a:p>
+      </dgm:t>
+    </dgm:pt>
+    <dgm:pt modelId="{8A5743BE-58A0-4E04-A9EB-F589C10543BC}">
+      <dgm:prSet/>
+      <dgm:spPr/>
+      <dgm:t>
+        <a:bodyPr/>
+        <a:lstStyle/>
+        <a:p>
+          <a:r>
+            <a:rPr lang="fr-FR"/>
+            <a:t>6- Cas d’utilisation particuliers des graphiques</a:t>
+          </a:r>
+          <a:endParaRPr lang="en-US"/>
+        </a:p>
+      </dgm:t>
+    </dgm:pt>
+    <dgm:pt modelId="{23DC5F43-BB7F-4369-B25C-85A0A32FB355}" type="parTrans" cxnId="{23EB5B7E-9705-463B-BDF6-BAA60C544870}">
+      <dgm:prSet/>
+      <dgm:spPr/>
+      <dgm:t>
+        <a:bodyPr/>
+        <a:lstStyle/>
+        <a:p>
+          <a:endParaRPr lang="en-US"/>
+        </a:p>
+      </dgm:t>
+    </dgm:pt>
+    <dgm:pt modelId="{579E0F0C-4625-4403-8C73-70A083FC53EC}" type="sibTrans" cxnId="{23EB5B7E-9705-463B-BDF6-BAA60C544870}">
+      <dgm:prSet/>
+      <dgm:spPr/>
+      <dgm:t>
+        <a:bodyPr/>
+        <a:lstStyle/>
+        <a:p>
+          <a:endParaRPr lang="en-US"/>
+        </a:p>
+      </dgm:t>
+    </dgm:pt>
+    <dgm:pt modelId="{CD7996E9-C5F4-4CE7-848B-7451DAE98603}">
+      <dgm:prSet/>
+      <dgm:spPr/>
+      <dgm:t>
+        <a:bodyPr/>
+        <a:lstStyle/>
+        <a:p>
+          <a:r>
+            <a:rPr lang="fr-FR"/>
+            <a:t>7- Qu’est ce qu’on peut faire avec un graphique?</a:t>
+          </a:r>
+          <a:endParaRPr lang="en-US"/>
+        </a:p>
+      </dgm:t>
+    </dgm:pt>
+    <dgm:pt modelId="{1A68639A-1C16-495C-9901-A7C0A2D314E4}" type="parTrans" cxnId="{CCD23DB1-739A-4E34-8BA7-A2C63B1DBF49}">
+      <dgm:prSet/>
+      <dgm:spPr/>
+      <dgm:t>
+        <a:bodyPr/>
+        <a:lstStyle/>
+        <a:p>
+          <a:endParaRPr lang="en-US"/>
+        </a:p>
+      </dgm:t>
+    </dgm:pt>
+    <dgm:pt modelId="{687C0A5D-877D-4B1F-B62B-08E4F921B689}" type="sibTrans" cxnId="{CCD23DB1-739A-4E34-8BA7-A2C63B1DBF49}">
+      <dgm:prSet/>
+      <dgm:spPr/>
+      <dgm:t>
+        <a:bodyPr/>
+        <a:lstStyle/>
+        <a:p>
+          <a:endParaRPr lang="en-US"/>
+        </a:p>
+      </dgm:t>
+    </dgm:pt>
+    <dgm:pt modelId="{582B6C4C-249A-444F-8BF7-29A39F012216}">
+      <dgm:prSet/>
+      <dgm:spPr/>
+      <dgm:t>
+        <a:bodyPr/>
+        <a:lstStyle/>
+        <a:p>
+          <a:r>
+            <a:rPr lang="fr-FR"/>
+            <a:t>8- Quelques bonnes pratiques</a:t>
+          </a:r>
+          <a:endParaRPr lang="en-US"/>
+        </a:p>
+      </dgm:t>
+    </dgm:pt>
+    <dgm:pt modelId="{5B66BDDC-F5A0-498B-8737-56EEE5CFC294}" type="parTrans" cxnId="{2D6CAC8F-4DE8-4D1C-870F-2F6775C03538}">
+      <dgm:prSet/>
+      <dgm:spPr/>
+      <dgm:t>
+        <a:bodyPr/>
+        <a:lstStyle/>
+        <a:p>
+          <a:endParaRPr lang="en-US"/>
+        </a:p>
+      </dgm:t>
+    </dgm:pt>
+    <dgm:pt modelId="{EBCDFF7D-97E5-4688-9F73-E4E1408174A2}" type="sibTrans" cxnId="{2D6CAC8F-4DE8-4D1C-870F-2F6775C03538}">
+      <dgm:prSet/>
+      <dgm:spPr/>
+      <dgm:t>
+        <a:bodyPr/>
+        <a:lstStyle/>
+        <a:p>
+          <a:endParaRPr lang="en-US"/>
+        </a:p>
+      </dgm:t>
+    </dgm:pt>
+    <dgm:pt modelId="{6B16A341-DBE6-4C84-8976-9C89DD5707D9}">
+      <dgm:prSet/>
+      <dgm:spPr/>
+      <dgm:t>
+        <a:bodyPr/>
+        <a:lstStyle/>
+        <a:p>
+          <a:r>
+            <a:rPr lang="fr-FR"/>
+            <a:t>9- Quels outils &amp; comment ?</a:t>
+          </a:r>
+          <a:endParaRPr lang="en-US"/>
+        </a:p>
+      </dgm:t>
+    </dgm:pt>
+    <dgm:pt modelId="{15A4E791-BA6D-44B7-9703-2EBCA31F85A8}" type="parTrans" cxnId="{E298FEEE-6E09-4C03-BA60-46B36B7A0A36}">
+      <dgm:prSet/>
+      <dgm:spPr/>
+      <dgm:t>
+        <a:bodyPr/>
+        <a:lstStyle/>
+        <a:p>
+          <a:endParaRPr lang="en-US"/>
+        </a:p>
+      </dgm:t>
+    </dgm:pt>
+    <dgm:pt modelId="{0C1927A2-400F-4FFF-B5CB-1CD9B14DDFC2}" type="sibTrans" cxnId="{E298FEEE-6E09-4C03-BA60-46B36B7A0A36}">
+      <dgm:prSet/>
+      <dgm:spPr/>
+      <dgm:t>
+        <a:bodyPr/>
+        <a:lstStyle/>
+        <a:p>
+          <a:endParaRPr lang="en-US"/>
+        </a:p>
+      </dgm:t>
+    </dgm:pt>
+    <dgm:pt modelId="{1917605B-2510-4807-BBAB-C20293E68CE1}" type="pres">
+      <dgm:prSet presAssocID="{26837F25-E275-4C2E-9B76-8DC9F144F9E8}" presName="vert0" presStyleCnt="0">
+        <dgm:presLayoutVars>
+          <dgm:dir/>
+          <dgm:animOne val="branch"/>
+          <dgm:animLvl val="lvl"/>
+        </dgm:presLayoutVars>
+      </dgm:prSet>
+      <dgm:spPr/>
+    </dgm:pt>
+    <dgm:pt modelId="{BEA7A494-F117-4C3F-8F51-D459DB3EBF9E}" type="pres">
+      <dgm:prSet presAssocID="{83394971-7BB8-4862-B6A9-AB8BE3272157}" presName="thickLine" presStyleLbl="alignNode1" presStyleIdx="0" presStyleCnt="9"/>
+      <dgm:spPr/>
+    </dgm:pt>
+    <dgm:pt modelId="{BACB492F-3596-493F-8F57-2A66085C51EB}" type="pres">
+      <dgm:prSet presAssocID="{83394971-7BB8-4862-B6A9-AB8BE3272157}" presName="horz1" presStyleCnt="0"/>
+      <dgm:spPr/>
+    </dgm:pt>
+    <dgm:pt modelId="{FB75638C-6E80-420D-B2EC-776A15479F6D}" type="pres">
+      <dgm:prSet presAssocID="{83394971-7BB8-4862-B6A9-AB8BE3272157}" presName="tx1" presStyleLbl="revTx" presStyleIdx="0" presStyleCnt="9"/>
+      <dgm:spPr/>
+    </dgm:pt>
+    <dgm:pt modelId="{26750B6F-B313-483C-A651-2805101F3F69}" type="pres">
+      <dgm:prSet presAssocID="{83394971-7BB8-4862-B6A9-AB8BE3272157}" presName="vert1" presStyleCnt="0"/>
+      <dgm:spPr/>
+    </dgm:pt>
+    <dgm:pt modelId="{BDF4AF07-EEBF-4586-9437-279CE877CC81}" type="pres">
+      <dgm:prSet presAssocID="{3CE4A483-4CB4-4640-A6AA-3E24D33244BA}" presName="thickLine" presStyleLbl="alignNode1" presStyleIdx="1" presStyleCnt="9"/>
+      <dgm:spPr/>
+    </dgm:pt>
+    <dgm:pt modelId="{D02CFF42-0654-4C54-93B4-48E9E4DECDC9}" type="pres">
+      <dgm:prSet presAssocID="{3CE4A483-4CB4-4640-A6AA-3E24D33244BA}" presName="horz1" presStyleCnt="0"/>
+      <dgm:spPr/>
+    </dgm:pt>
+    <dgm:pt modelId="{CED0977C-39D6-4934-B911-BF0FD884EB89}" type="pres">
+      <dgm:prSet presAssocID="{3CE4A483-4CB4-4640-A6AA-3E24D33244BA}" presName="tx1" presStyleLbl="revTx" presStyleIdx="1" presStyleCnt="9"/>
+      <dgm:spPr/>
+    </dgm:pt>
+    <dgm:pt modelId="{33DD4436-D383-4E3C-B01D-AE84CA4A8615}" type="pres">
+      <dgm:prSet presAssocID="{3CE4A483-4CB4-4640-A6AA-3E24D33244BA}" presName="vert1" presStyleCnt="0"/>
+      <dgm:spPr/>
+    </dgm:pt>
+    <dgm:pt modelId="{592B7217-22B0-42ED-B635-E1D2BB4E709D}" type="pres">
+      <dgm:prSet presAssocID="{CBAAC3A1-F831-4312-AEE0-1EE102D64961}" presName="thickLine" presStyleLbl="alignNode1" presStyleIdx="2" presStyleCnt="9"/>
+      <dgm:spPr/>
+    </dgm:pt>
+    <dgm:pt modelId="{08E926EA-0BE3-41F9-8E02-C66A3589B389}" type="pres">
+      <dgm:prSet presAssocID="{CBAAC3A1-F831-4312-AEE0-1EE102D64961}" presName="horz1" presStyleCnt="0"/>
+      <dgm:spPr/>
+    </dgm:pt>
+    <dgm:pt modelId="{FEED728A-F9B7-4415-8AE4-0C89BD3B47BE}" type="pres">
+      <dgm:prSet presAssocID="{CBAAC3A1-F831-4312-AEE0-1EE102D64961}" presName="tx1" presStyleLbl="revTx" presStyleIdx="2" presStyleCnt="9"/>
+      <dgm:spPr/>
+    </dgm:pt>
+    <dgm:pt modelId="{89F92E42-A737-4A9F-8A29-B31F554E2674}" type="pres">
+      <dgm:prSet presAssocID="{CBAAC3A1-F831-4312-AEE0-1EE102D64961}" presName="vert1" presStyleCnt="0"/>
+      <dgm:spPr/>
+    </dgm:pt>
+    <dgm:pt modelId="{24100CEB-9F68-4189-9CA7-C06A811C04C5}" type="pres">
+      <dgm:prSet presAssocID="{9C97E2AB-9626-42F7-BFBC-C46E627D80EA}" presName="thickLine" presStyleLbl="alignNode1" presStyleIdx="3" presStyleCnt="9"/>
+      <dgm:spPr/>
+    </dgm:pt>
+    <dgm:pt modelId="{09C3FC24-EE11-4969-A680-4DB5610CF8D2}" type="pres">
+      <dgm:prSet presAssocID="{9C97E2AB-9626-42F7-BFBC-C46E627D80EA}" presName="horz1" presStyleCnt="0"/>
+      <dgm:spPr/>
+    </dgm:pt>
+    <dgm:pt modelId="{BC8B0E96-8367-429A-BFE5-DAA05195DD0A}" type="pres">
+      <dgm:prSet presAssocID="{9C97E2AB-9626-42F7-BFBC-C46E627D80EA}" presName="tx1" presStyleLbl="revTx" presStyleIdx="3" presStyleCnt="9"/>
+      <dgm:spPr/>
+    </dgm:pt>
+    <dgm:pt modelId="{D87DCA95-0439-4FCF-BE8F-C1D69FC7F9DB}" type="pres">
+      <dgm:prSet presAssocID="{9C97E2AB-9626-42F7-BFBC-C46E627D80EA}" presName="vert1" presStyleCnt="0"/>
+      <dgm:spPr/>
+    </dgm:pt>
+    <dgm:pt modelId="{6614BBB5-CE1F-4466-8547-05F31EA3D19B}" type="pres">
+      <dgm:prSet presAssocID="{55E3677F-631A-4721-B0C6-5DC12CFDC1E5}" presName="thickLine" presStyleLbl="alignNode1" presStyleIdx="4" presStyleCnt="9"/>
+      <dgm:spPr/>
+    </dgm:pt>
+    <dgm:pt modelId="{0A3F8F4E-E397-4EAC-9EAC-D4CA88DCADE2}" type="pres">
+      <dgm:prSet presAssocID="{55E3677F-631A-4721-B0C6-5DC12CFDC1E5}" presName="horz1" presStyleCnt="0"/>
+      <dgm:spPr/>
+    </dgm:pt>
+    <dgm:pt modelId="{45202C9B-0414-4D3F-9D58-1836F7E35227}" type="pres">
+      <dgm:prSet presAssocID="{55E3677F-631A-4721-B0C6-5DC12CFDC1E5}" presName="tx1" presStyleLbl="revTx" presStyleIdx="4" presStyleCnt="9"/>
+      <dgm:spPr/>
+    </dgm:pt>
+    <dgm:pt modelId="{7EB4EE16-C8C6-4954-90E1-611369374E0D}" type="pres">
+      <dgm:prSet presAssocID="{55E3677F-631A-4721-B0C6-5DC12CFDC1E5}" presName="vert1" presStyleCnt="0"/>
+      <dgm:spPr/>
+    </dgm:pt>
+    <dgm:pt modelId="{648C9BD4-B480-4B41-8563-F7B3331ADF8E}" type="pres">
+      <dgm:prSet presAssocID="{8A5743BE-58A0-4E04-A9EB-F589C10543BC}" presName="thickLine" presStyleLbl="alignNode1" presStyleIdx="5" presStyleCnt="9"/>
+      <dgm:spPr/>
+    </dgm:pt>
+    <dgm:pt modelId="{3C0F39A2-2257-4BB3-B485-C204976C1B5E}" type="pres">
+      <dgm:prSet presAssocID="{8A5743BE-58A0-4E04-A9EB-F589C10543BC}" presName="horz1" presStyleCnt="0"/>
+      <dgm:spPr/>
+    </dgm:pt>
+    <dgm:pt modelId="{4264CBA9-5173-4FAA-874E-586DBEF52337}" type="pres">
+      <dgm:prSet presAssocID="{8A5743BE-58A0-4E04-A9EB-F589C10543BC}" presName="tx1" presStyleLbl="revTx" presStyleIdx="5" presStyleCnt="9"/>
+      <dgm:spPr/>
+    </dgm:pt>
+    <dgm:pt modelId="{0BEDC1DC-D7D2-40C7-A080-13554EB3D924}" type="pres">
+      <dgm:prSet presAssocID="{8A5743BE-58A0-4E04-A9EB-F589C10543BC}" presName="vert1" presStyleCnt="0"/>
+      <dgm:spPr/>
+    </dgm:pt>
+    <dgm:pt modelId="{013C0107-6908-4215-974A-AA318C1A7FFE}" type="pres">
+      <dgm:prSet presAssocID="{CD7996E9-C5F4-4CE7-848B-7451DAE98603}" presName="thickLine" presStyleLbl="alignNode1" presStyleIdx="6" presStyleCnt="9"/>
+      <dgm:spPr/>
+    </dgm:pt>
+    <dgm:pt modelId="{4CDA21E7-86ED-4775-904E-3CA236AB81AC}" type="pres">
+      <dgm:prSet presAssocID="{CD7996E9-C5F4-4CE7-848B-7451DAE98603}" presName="horz1" presStyleCnt="0"/>
+      <dgm:spPr/>
+    </dgm:pt>
+    <dgm:pt modelId="{B983A3EE-F717-4BD4-87A0-C63E83AB7553}" type="pres">
+      <dgm:prSet presAssocID="{CD7996E9-C5F4-4CE7-848B-7451DAE98603}" presName="tx1" presStyleLbl="revTx" presStyleIdx="6" presStyleCnt="9"/>
+      <dgm:spPr/>
+    </dgm:pt>
+    <dgm:pt modelId="{B0EF7DB0-367D-4A03-A641-528CBBE6DFDA}" type="pres">
+      <dgm:prSet presAssocID="{CD7996E9-C5F4-4CE7-848B-7451DAE98603}" presName="vert1" presStyleCnt="0"/>
+      <dgm:spPr/>
+    </dgm:pt>
+    <dgm:pt modelId="{75009C20-6521-4FF9-A41B-383686B9A813}" type="pres">
+      <dgm:prSet presAssocID="{582B6C4C-249A-444F-8BF7-29A39F012216}" presName="thickLine" presStyleLbl="alignNode1" presStyleIdx="7" presStyleCnt="9"/>
+      <dgm:spPr/>
+    </dgm:pt>
+    <dgm:pt modelId="{83365010-4778-4394-BCB5-B4D6B74AA141}" type="pres">
+      <dgm:prSet presAssocID="{582B6C4C-249A-444F-8BF7-29A39F012216}" presName="horz1" presStyleCnt="0"/>
+      <dgm:spPr/>
+    </dgm:pt>
+    <dgm:pt modelId="{F84F5DCF-A456-4F40-BA85-E039ABD3EFF5}" type="pres">
+      <dgm:prSet presAssocID="{582B6C4C-249A-444F-8BF7-29A39F012216}" presName="tx1" presStyleLbl="revTx" presStyleIdx="7" presStyleCnt="9"/>
+      <dgm:spPr/>
+    </dgm:pt>
+    <dgm:pt modelId="{7B6BA529-F020-4E18-AE99-A61E2E125968}" type="pres">
+      <dgm:prSet presAssocID="{582B6C4C-249A-444F-8BF7-29A39F012216}" presName="vert1" presStyleCnt="0"/>
+      <dgm:spPr/>
+    </dgm:pt>
+    <dgm:pt modelId="{D7F2DD8E-C64A-40C8-B864-23CC8B5D9164}" type="pres">
+      <dgm:prSet presAssocID="{6B16A341-DBE6-4C84-8976-9C89DD5707D9}" presName="thickLine" presStyleLbl="alignNode1" presStyleIdx="8" presStyleCnt="9"/>
+      <dgm:spPr/>
+    </dgm:pt>
+    <dgm:pt modelId="{B787DDED-948A-4D90-9DC9-B009F56B34B9}" type="pres">
+      <dgm:prSet presAssocID="{6B16A341-DBE6-4C84-8976-9C89DD5707D9}" presName="horz1" presStyleCnt="0"/>
+      <dgm:spPr/>
+    </dgm:pt>
+    <dgm:pt modelId="{EACCD8D9-0A27-4FD9-8C15-63771A7842C5}" type="pres">
+      <dgm:prSet presAssocID="{6B16A341-DBE6-4C84-8976-9C89DD5707D9}" presName="tx1" presStyleLbl="revTx" presStyleIdx="8" presStyleCnt="9"/>
+      <dgm:spPr/>
+    </dgm:pt>
+    <dgm:pt modelId="{D5B21F85-6DD4-4E0A-96A2-42D38A6840AA}" type="pres">
+      <dgm:prSet presAssocID="{6B16A341-DBE6-4C84-8976-9C89DD5707D9}" presName="vert1" presStyleCnt="0"/>
+      <dgm:spPr/>
+    </dgm:pt>
+  </dgm:ptLst>
+  <dgm:cxnLst>
+    <dgm:cxn modelId="{FBB2FD03-7B15-4297-84A6-E9F3699DAB31}" type="presOf" srcId="{9C97E2AB-9626-42F7-BFBC-C46E627D80EA}" destId="{BC8B0E96-8367-429A-BFE5-DAA05195DD0A}" srcOrd="0" destOrd="0" presId="urn:microsoft.com/office/officeart/2008/layout/LinedList"/>
+    <dgm:cxn modelId="{41AAD80B-49F7-46A3-960C-0E70EDF48356}" type="presOf" srcId="{3CE4A483-4CB4-4640-A6AA-3E24D33244BA}" destId="{CED0977C-39D6-4934-B911-BF0FD884EB89}" srcOrd="0" destOrd="0" presId="urn:microsoft.com/office/officeart/2008/layout/LinedList"/>
+    <dgm:cxn modelId="{DBE6A81D-6254-4791-86E0-AEA213A29B3E}" srcId="{26837F25-E275-4C2E-9B76-8DC9F144F9E8}" destId="{3CE4A483-4CB4-4640-A6AA-3E24D33244BA}" srcOrd="1" destOrd="0" parTransId="{7DBA6EDA-B806-47D1-9E87-28744E2C207E}" sibTransId="{19F66103-0D0D-4C27-AF45-C5BB9C9B6AA0}"/>
+    <dgm:cxn modelId="{9439093A-4960-4C6E-A948-B05E90263EA3}" type="presOf" srcId="{8A5743BE-58A0-4E04-A9EB-F589C10543BC}" destId="{4264CBA9-5173-4FAA-874E-586DBEF52337}" srcOrd="0" destOrd="0" presId="urn:microsoft.com/office/officeart/2008/layout/LinedList"/>
+    <dgm:cxn modelId="{CFD0F961-E9D0-41E0-A603-BACCE4D54B6B}" type="presOf" srcId="{CD7996E9-C5F4-4CE7-848B-7451DAE98603}" destId="{B983A3EE-F717-4BD4-87A0-C63E83AB7553}" srcOrd="0" destOrd="0" presId="urn:microsoft.com/office/officeart/2008/layout/LinedList"/>
+    <dgm:cxn modelId="{B776646A-DB5A-4BA1-BB9A-4FD426D6091D}" srcId="{26837F25-E275-4C2E-9B76-8DC9F144F9E8}" destId="{9C97E2AB-9626-42F7-BFBC-C46E627D80EA}" srcOrd="3" destOrd="0" parTransId="{685A7401-9447-48F0-937D-D6423E5357A6}" sibTransId="{76765CD8-2C4F-42C7-B1A4-B9EB1A01422A}"/>
+    <dgm:cxn modelId="{23EB5B7E-9705-463B-BDF6-BAA60C544870}" srcId="{26837F25-E275-4C2E-9B76-8DC9F144F9E8}" destId="{8A5743BE-58A0-4E04-A9EB-F589C10543BC}" srcOrd="5" destOrd="0" parTransId="{23DC5F43-BB7F-4369-B25C-85A0A32FB355}" sibTransId="{579E0F0C-4625-4403-8C73-70A083FC53EC}"/>
+    <dgm:cxn modelId="{D8D1028A-5374-4912-98F4-FC37AE003DFB}" type="presOf" srcId="{6B16A341-DBE6-4C84-8976-9C89DD5707D9}" destId="{EACCD8D9-0A27-4FD9-8C15-63771A7842C5}" srcOrd="0" destOrd="0" presId="urn:microsoft.com/office/officeart/2008/layout/LinedList"/>
+    <dgm:cxn modelId="{F492878C-5859-49CC-87A1-63A05D9C761F}" type="presOf" srcId="{83394971-7BB8-4862-B6A9-AB8BE3272157}" destId="{FB75638C-6E80-420D-B2EC-776A15479F6D}" srcOrd="0" destOrd="0" presId="urn:microsoft.com/office/officeart/2008/layout/LinedList"/>
+    <dgm:cxn modelId="{2D6CAC8F-4DE8-4D1C-870F-2F6775C03538}" srcId="{26837F25-E275-4C2E-9B76-8DC9F144F9E8}" destId="{582B6C4C-249A-444F-8BF7-29A39F012216}" srcOrd="7" destOrd="0" parTransId="{5B66BDDC-F5A0-498B-8737-56EEE5CFC294}" sibTransId="{EBCDFF7D-97E5-4688-9F73-E4E1408174A2}"/>
+    <dgm:cxn modelId="{C826F396-E1AD-49F6-8996-CAB5824C771C}" type="presOf" srcId="{55E3677F-631A-4721-B0C6-5DC12CFDC1E5}" destId="{45202C9B-0414-4D3F-9D58-1836F7E35227}" srcOrd="0" destOrd="0" presId="urn:microsoft.com/office/officeart/2008/layout/LinedList"/>
+    <dgm:cxn modelId="{CCD23DB1-739A-4E34-8BA7-A2C63B1DBF49}" srcId="{26837F25-E275-4C2E-9B76-8DC9F144F9E8}" destId="{CD7996E9-C5F4-4CE7-848B-7451DAE98603}" srcOrd="6" destOrd="0" parTransId="{1A68639A-1C16-495C-9901-A7C0A2D314E4}" sibTransId="{687C0A5D-877D-4B1F-B62B-08E4F921B689}"/>
+    <dgm:cxn modelId="{1FA262C5-2119-4906-B4A5-47D8E32E7B70}" type="presOf" srcId="{582B6C4C-249A-444F-8BF7-29A39F012216}" destId="{F84F5DCF-A456-4F40-BA85-E039ABD3EFF5}" srcOrd="0" destOrd="0" presId="urn:microsoft.com/office/officeart/2008/layout/LinedList"/>
+    <dgm:cxn modelId="{2EFB14C8-D6A2-4E38-8623-E14AEB1B72FC}" srcId="{26837F25-E275-4C2E-9B76-8DC9F144F9E8}" destId="{CBAAC3A1-F831-4312-AEE0-1EE102D64961}" srcOrd="2" destOrd="0" parTransId="{8039CE98-075A-47E2-9E71-9553C7829003}" sibTransId="{4D3428E3-668A-41A0-BFFD-B71661276041}"/>
+    <dgm:cxn modelId="{8B3629DC-A93D-46FD-96EB-EA126FB597BD}" srcId="{26837F25-E275-4C2E-9B76-8DC9F144F9E8}" destId="{55E3677F-631A-4721-B0C6-5DC12CFDC1E5}" srcOrd="4" destOrd="0" parTransId="{B5072A76-87C7-458B-A0AE-206D18D5BA5D}" sibTransId="{399A401D-DCB4-46D6-82B4-263AC68B72E7}"/>
+    <dgm:cxn modelId="{51EBB8E9-5693-434D-9AAA-87822C45A0C7}" type="presOf" srcId="{CBAAC3A1-F831-4312-AEE0-1EE102D64961}" destId="{FEED728A-F9B7-4415-8AE4-0C89BD3B47BE}" srcOrd="0" destOrd="0" presId="urn:microsoft.com/office/officeart/2008/layout/LinedList"/>
+    <dgm:cxn modelId="{E298FEEE-6E09-4C03-BA60-46B36B7A0A36}" srcId="{26837F25-E275-4C2E-9B76-8DC9F144F9E8}" destId="{6B16A341-DBE6-4C84-8976-9C89DD5707D9}" srcOrd="8" destOrd="0" parTransId="{15A4E791-BA6D-44B7-9703-2EBCA31F85A8}" sibTransId="{0C1927A2-400F-4FFF-B5CB-1CD9B14DDFC2}"/>
+    <dgm:cxn modelId="{AF473AEF-E80F-4F4B-8097-7F5AD1F0EFEC}" type="presOf" srcId="{26837F25-E275-4C2E-9B76-8DC9F144F9E8}" destId="{1917605B-2510-4807-BBAB-C20293E68CE1}" srcOrd="0" destOrd="0" presId="urn:microsoft.com/office/officeart/2008/layout/LinedList"/>
+    <dgm:cxn modelId="{9E37A7F7-B6C5-4D5F-BD94-7B65766DD2A4}" srcId="{26837F25-E275-4C2E-9B76-8DC9F144F9E8}" destId="{83394971-7BB8-4862-B6A9-AB8BE3272157}" srcOrd="0" destOrd="0" parTransId="{B21D0C32-3E1B-476A-AFEF-6C36AB915AF0}" sibTransId="{CEFF215C-9855-4ABB-A164-80B08E9B46DA}"/>
+    <dgm:cxn modelId="{1B829D99-CD7D-49EE-A4B6-6ECC38D27E77}" type="presParOf" srcId="{1917605B-2510-4807-BBAB-C20293E68CE1}" destId="{BEA7A494-F117-4C3F-8F51-D459DB3EBF9E}" srcOrd="0" destOrd="0" presId="urn:microsoft.com/office/officeart/2008/layout/LinedList"/>
+    <dgm:cxn modelId="{89484EF4-C7E4-4C50-B2DC-81AB3DAE0A13}" type="presParOf" srcId="{1917605B-2510-4807-BBAB-C20293E68CE1}" destId="{BACB492F-3596-493F-8F57-2A66085C51EB}" srcOrd="1" destOrd="0" presId="urn:microsoft.com/office/officeart/2008/layout/LinedList"/>
+    <dgm:cxn modelId="{F4D81F76-968F-4D00-A90E-F25237A4AC5C}" type="presParOf" srcId="{BACB492F-3596-493F-8F57-2A66085C51EB}" destId="{FB75638C-6E80-420D-B2EC-776A15479F6D}" srcOrd="0" destOrd="0" presId="urn:microsoft.com/office/officeart/2008/layout/LinedList"/>
+    <dgm:cxn modelId="{352C551F-DEB5-43C0-B44E-41FA6F174117}" type="presParOf" srcId="{BACB492F-3596-493F-8F57-2A66085C51EB}" destId="{26750B6F-B313-483C-A651-2805101F3F69}" srcOrd="1" destOrd="0" presId="urn:microsoft.com/office/officeart/2008/layout/LinedList"/>
+    <dgm:cxn modelId="{D8AF3741-DD7D-4994-9055-E35478084A25}" type="presParOf" srcId="{1917605B-2510-4807-BBAB-C20293E68CE1}" destId="{BDF4AF07-EEBF-4586-9437-279CE877CC81}" srcOrd="2" destOrd="0" presId="urn:microsoft.com/office/officeart/2008/layout/LinedList"/>
+    <dgm:cxn modelId="{0343B157-3E67-4E17-8E7D-96EE362690EB}" type="presParOf" srcId="{1917605B-2510-4807-BBAB-C20293E68CE1}" destId="{D02CFF42-0654-4C54-93B4-48E9E4DECDC9}" srcOrd="3" destOrd="0" presId="urn:microsoft.com/office/officeart/2008/layout/LinedList"/>
+    <dgm:cxn modelId="{AF39F095-07D1-4F1C-B95E-5C1FFA758400}" type="presParOf" srcId="{D02CFF42-0654-4C54-93B4-48E9E4DECDC9}" destId="{CED0977C-39D6-4934-B911-BF0FD884EB89}" srcOrd="0" destOrd="0" presId="urn:microsoft.com/office/officeart/2008/layout/LinedList"/>
+    <dgm:cxn modelId="{9E6D1890-CCE2-4141-BDA1-7E658ECCA991}" type="presParOf" srcId="{D02CFF42-0654-4C54-93B4-48E9E4DECDC9}" destId="{33DD4436-D383-4E3C-B01D-AE84CA4A8615}" srcOrd="1" destOrd="0" presId="urn:microsoft.com/office/officeart/2008/layout/LinedList"/>
+    <dgm:cxn modelId="{AE849B38-7104-4B23-A660-892EF6A4513A}" type="presParOf" srcId="{1917605B-2510-4807-BBAB-C20293E68CE1}" destId="{592B7217-22B0-42ED-B635-E1D2BB4E709D}" srcOrd="4" destOrd="0" presId="urn:microsoft.com/office/officeart/2008/layout/LinedList"/>
+    <dgm:cxn modelId="{A1D34FC2-1D9C-47BA-A708-5FF19E803A6E}" type="presParOf" srcId="{1917605B-2510-4807-BBAB-C20293E68CE1}" destId="{08E926EA-0BE3-41F9-8E02-C66A3589B389}" srcOrd="5" destOrd="0" presId="urn:microsoft.com/office/officeart/2008/layout/LinedList"/>
+    <dgm:cxn modelId="{40491CBD-6372-4C58-8986-20D7FBE00EF1}" type="presParOf" srcId="{08E926EA-0BE3-41F9-8E02-C66A3589B389}" destId="{FEED728A-F9B7-4415-8AE4-0C89BD3B47BE}" srcOrd="0" destOrd="0" presId="urn:microsoft.com/office/officeart/2008/layout/LinedList"/>
+    <dgm:cxn modelId="{A9969640-42CD-4923-91E9-05BE9BA18606}" type="presParOf" srcId="{08E926EA-0BE3-41F9-8E02-C66A3589B389}" destId="{89F92E42-A737-4A9F-8A29-B31F554E2674}" srcOrd="1" destOrd="0" presId="urn:microsoft.com/office/officeart/2008/layout/LinedList"/>
+    <dgm:cxn modelId="{288920EC-8220-4DFD-86CB-2E66B316C480}" type="presParOf" srcId="{1917605B-2510-4807-BBAB-C20293E68CE1}" destId="{24100CEB-9F68-4189-9CA7-C06A811C04C5}" srcOrd="6" destOrd="0" presId="urn:microsoft.com/office/officeart/2008/layout/LinedList"/>
+    <dgm:cxn modelId="{9509011B-0666-46B2-A5F1-912B3D6574E0}" type="presParOf" srcId="{1917605B-2510-4807-BBAB-C20293E68CE1}" destId="{09C3FC24-EE11-4969-A680-4DB5610CF8D2}" srcOrd="7" destOrd="0" presId="urn:microsoft.com/office/officeart/2008/layout/LinedList"/>
+    <dgm:cxn modelId="{6E5397B5-8659-4F18-8D17-BA4B345E3F4D}" type="presParOf" srcId="{09C3FC24-EE11-4969-A680-4DB5610CF8D2}" destId="{BC8B0E96-8367-429A-BFE5-DAA05195DD0A}" srcOrd="0" destOrd="0" presId="urn:microsoft.com/office/officeart/2008/layout/LinedList"/>
+    <dgm:cxn modelId="{D3E64EF4-72A1-45A3-B4BC-29D0B4A9C06A}" type="presParOf" srcId="{09C3FC24-EE11-4969-A680-4DB5610CF8D2}" destId="{D87DCA95-0439-4FCF-BE8F-C1D69FC7F9DB}" srcOrd="1" destOrd="0" presId="urn:microsoft.com/office/officeart/2008/layout/LinedList"/>
+    <dgm:cxn modelId="{00F32465-5E94-4CE0-A36E-3C3F9FADA661}" type="presParOf" srcId="{1917605B-2510-4807-BBAB-C20293E68CE1}" destId="{6614BBB5-CE1F-4466-8547-05F31EA3D19B}" srcOrd="8" destOrd="0" presId="urn:microsoft.com/office/officeart/2008/layout/LinedList"/>
+    <dgm:cxn modelId="{2F584F77-A2DE-43F8-9DA1-9BCBBA252365}" type="presParOf" srcId="{1917605B-2510-4807-BBAB-C20293E68CE1}" destId="{0A3F8F4E-E397-4EAC-9EAC-D4CA88DCADE2}" srcOrd="9" destOrd="0" presId="urn:microsoft.com/office/officeart/2008/layout/LinedList"/>
+    <dgm:cxn modelId="{E6B461F3-00ED-458D-8823-A62C18ED2198}" type="presParOf" srcId="{0A3F8F4E-E397-4EAC-9EAC-D4CA88DCADE2}" destId="{45202C9B-0414-4D3F-9D58-1836F7E35227}" srcOrd="0" destOrd="0" presId="urn:microsoft.com/office/officeart/2008/layout/LinedList"/>
+    <dgm:cxn modelId="{4F3063FD-8CC0-4AA4-B4EE-FE6394EE19D1}" type="presParOf" srcId="{0A3F8F4E-E397-4EAC-9EAC-D4CA88DCADE2}" destId="{7EB4EE16-C8C6-4954-90E1-611369374E0D}" srcOrd="1" destOrd="0" presId="urn:microsoft.com/office/officeart/2008/layout/LinedList"/>
+    <dgm:cxn modelId="{0D2DE747-EECB-4CDE-9BC4-0016D52B87EB}" type="presParOf" srcId="{1917605B-2510-4807-BBAB-C20293E68CE1}" destId="{648C9BD4-B480-4B41-8563-F7B3331ADF8E}" srcOrd="10" destOrd="0" presId="urn:microsoft.com/office/officeart/2008/layout/LinedList"/>
+    <dgm:cxn modelId="{44BB344C-FF65-4D21-AA01-14861FBADD70}" type="presParOf" srcId="{1917605B-2510-4807-BBAB-C20293E68CE1}" destId="{3C0F39A2-2257-4BB3-B485-C204976C1B5E}" srcOrd="11" destOrd="0" presId="urn:microsoft.com/office/officeart/2008/layout/LinedList"/>
+    <dgm:cxn modelId="{F06FEC0B-6BE1-4121-8B33-F147347925B2}" type="presParOf" srcId="{3C0F39A2-2257-4BB3-B485-C204976C1B5E}" destId="{4264CBA9-5173-4FAA-874E-586DBEF52337}" srcOrd="0" destOrd="0" presId="urn:microsoft.com/office/officeart/2008/layout/LinedList"/>
+    <dgm:cxn modelId="{A8744EDD-8721-4F75-8371-9A6641C6B5B0}" type="presParOf" srcId="{3C0F39A2-2257-4BB3-B485-C204976C1B5E}" destId="{0BEDC1DC-D7D2-40C7-A080-13554EB3D924}" srcOrd="1" destOrd="0" presId="urn:microsoft.com/office/officeart/2008/layout/LinedList"/>
+    <dgm:cxn modelId="{44ED7D8A-C1C7-49B2-977D-D615D6916441}" type="presParOf" srcId="{1917605B-2510-4807-BBAB-C20293E68CE1}" destId="{013C0107-6908-4215-974A-AA318C1A7FFE}" srcOrd="12" destOrd="0" presId="urn:microsoft.com/office/officeart/2008/layout/LinedList"/>
+    <dgm:cxn modelId="{AFC60953-8188-4A1E-B8C7-F9F0CB5A8DF3}" type="presParOf" srcId="{1917605B-2510-4807-BBAB-C20293E68CE1}" destId="{4CDA21E7-86ED-4775-904E-3CA236AB81AC}" srcOrd="13" destOrd="0" presId="urn:microsoft.com/office/officeart/2008/layout/LinedList"/>
+    <dgm:cxn modelId="{EE618E12-6518-47FB-94EE-E7CCBB9E5CF1}" type="presParOf" srcId="{4CDA21E7-86ED-4775-904E-3CA236AB81AC}" destId="{B983A3EE-F717-4BD4-87A0-C63E83AB7553}" srcOrd="0" destOrd="0" presId="urn:microsoft.com/office/officeart/2008/layout/LinedList"/>
+    <dgm:cxn modelId="{A09E2B9B-CFA9-4E19-B412-E40EC85CB9A2}" type="presParOf" srcId="{4CDA21E7-86ED-4775-904E-3CA236AB81AC}" destId="{B0EF7DB0-367D-4A03-A641-528CBBE6DFDA}" srcOrd="1" destOrd="0" presId="urn:microsoft.com/office/officeart/2008/layout/LinedList"/>
+    <dgm:cxn modelId="{7E378F10-9A3A-4C80-9147-055D171A778B}" type="presParOf" srcId="{1917605B-2510-4807-BBAB-C20293E68CE1}" destId="{75009C20-6521-4FF9-A41B-383686B9A813}" srcOrd="14" destOrd="0" presId="urn:microsoft.com/office/officeart/2008/layout/LinedList"/>
+    <dgm:cxn modelId="{F2F4FE23-A129-4645-B1A5-9D6CC28D5B35}" type="presParOf" srcId="{1917605B-2510-4807-BBAB-C20293E68CE1}" destId="{83365010-4778-4394-BCB5-B4D6B74AA141}" srcOrd="15" destOrd="0" presId="urn:microsoft.com/office/officeart/2008/layout/LinedList"/>
+    <dgm:cxn modelId="{C4449F27-F778-428F-9393-2060F3782BC5}" type="presParOf" srcId="{83365010-4778-4394-BCB5-B4D6B74AA141}" destId="{F84F5DCF-A456-4F40-BA85-E039ABD3EFF5}" srcOrd="0" destOrd="0" presId="urn:microsoft.com/office/officeart/2008/layout/LinedList"/>
+    <dgm:cxn modelId="{A8A007C8-E5E8-4831-B4C4-06D3B18D56CE}" type="presParOf" srcId="{83365010-4778-4394-BCB5-B4D6B74AA141}" destId="{7B6BA529-F020-4E18-AE99-A61E2E125968}" srcOrd="1" destOrd="0" presId="urn:microsoft.com/office/officeart/2008/layout/LinedList"/>
+    <dgm:cxn modelId="{E9A44D78-0688-446B-B03F-16D9DFE9BD43}" type="presParOf" srcId="{1917605B-2510-4807-BBAB-C20293E68CE1}" destId="{D7F2DD8E-C64A-40C8-B864-23CC8B5D9164}" srcOrd="16" destOrd="0" presId="urn:microsoft.com/office/officeart/2008/layout/LinedList"/>
+    <dgm:cxn modelId="{4DE43DAA-68FC-42DD-9852-D0DC6D1A1D94}" type="presParOf" srcId="{1917605B-2510-4807-BBAB-C20293E68CE1}" destId="{B787DDED-948A-4D90-9DC9-B009F56B34B9}" srcOrd="17" destOrd="0" presId="urn:microsoft.com/office/officeart/2008/layout/LinedList"/>
+    <dgm:cxn modelId="{E9C72CD4-04CA-4A15-9BA7-3E7154512544}" type="presParOf" srcId="{B787DDED-948A-4D90-9DC9-B009F56B34B9}" destId="{EACCD8D9-0A27-4FD9-8C15-63771A7842C5}" srcOrd="0" destOrd="0" presId="urn:microsoft.com/office/officeart/2008/layout/LinedList"/>
+    <dgm:cxn modelId="{8EBE12FD-6BD3-4958-8202-93E6A42795FA}" type="presParOf" srcId="{B787DDED-948A-4D90-9DC9-B009F56B34B9}" destId="{D5B21F85-6DD4-4E0A-96A2-42D38A6840AA}" srcOrd="1" destOrd="0" presId="urn:microsoft.com/office/officeart/2008/layout/LinedList"/>
+  </dgm:cxnLst>
+  <dgm:bg/>
+  <dgm:whole/>
+  <dgm:extLst>
+    <a:ext uri="http://schemas.microsoft.com/office/drawing/2008/diagram">
+      <dsp:dataModelExt xmlns:dsp="http://schemas.microsoft.com/office/drawing/2008/diagram" relId="rId7" minVer="http://schemas.openxmlformats.org/drawingml/2006/diagram"/>
+    </a:ext>
+  </dgm:extLst>
+</dgm:dataModel>
+</file>
+
+<file path=ppt/diagrams/data2.xml><?xml version="1.0" encoding="utf-8"?>
 <dgm:dataModel xmlns:dgm="http://schemas.openxmlformats.org/drawingml/2006/diagram" xmlns:a="http://schemas.openxmlformats.org/drawingml/2006/main">
   <dgm:ptLst>
     <dgm:pt modelId="{3FAB6734-7ED4-4A00-A7B4-B8157DF74F46}" type="doc">
@@ -1657,7 +3014,11 @@
         <a:lstStyle/>
         <a:p>
           <a:r>
-            <a:rPr lang="fr-FR" dirty="0"/>
+            <a:rPr lang="fr-FR" dirty="0">
+              <a:solidFill>
+                <a:schemeClr val="tx1"/>
+              </a:solidFill>
+            </a:rPr>
             <a:t>Variation intéressante pour le lecteur</a:t>
           </a:r>
         </a:p>
@@ -1670,7 +3031,11 @@
         <a:bodyPr/>
         <a:lstStyle/>
         <a:p>
-          <a:endParaRPr lang="fr-FR"/>
+          <a:endParaRPr lang="fr-FR">
+            <a:solidFill>
+              <a:schemeClr val="tx1"/>
+            </a:solidFill>
+          </a:endParaRPr>
         </a:p>
       </dgm:t>
     </dgm:pt>
@@ -1681,19 +3046,33 @@
         <a:bodyPr/>
         <a:lstStyle/>
         <a:p>
-          <a:endParaRPr lang="fr-FR"/>
+          <a:endParaRPr lang="fr-FR">
+            <a:solidFill>
+              <a:schemeClr val="tx1"/>
+            </a:solidFill>
+          </a:endParaRPr>
         </a:p>
       </dgm:t>
     </dgm:pt>
     <dgm:pt modelId="{1F5CC216-8CA8-40D2-A7F1-5786F7B22964}">
       <dgm:prSet phldrT="[Texte]"/>
-      <dgm:spPr/>
+      <dgm:spPr>
+        <a:solidFill>
+          <a:schemeClr val="bg2"/>
+        </a:solidFill>
+      </dgm:spPr>
       <dgm:t>
         <a:bodyPr/>
         <a:lstStyle/>
         <a:p>
           <a:r>
-            <a:rPr lang="fr-FR" dirty="0"/>
+            <a:rPr lang="fr-FR" b="1" dirty="0">
+              <a:solidFill>
+                <a:schemeClr val="accent1">
+                  <a:lumMod val="75000"/>
+                </a:schemeClr>
+              </a:solidFill>
+            </a:rPr>
             <a:t>Forme de la distribution</a:t>
           </a:r>
         </a:p>
@@ -1706,7 +3085,11 @@
         <a:bodyPr/>
         <a:lstStyle/>
         <a:p>
-          <a:endParaRPr lang="fr-FR"/>
+          <a:endParaRPr lang="fr-FR">
+            <a:solidFill>
+              <a:schemeClr val="tx1"/>
+            </a:solidFill>
+          </a:endParaRPr>
         </a:p>
       </dgm:t>
     </dgm:pt>
@@ -1717,19 +3100,33 @@
         <a:bodyPr/>
         <a:lstStyle/>
         <a:p>
-          <a:endParaRPr lang="fr-FR"/>
+          <a:endParaRPr lang="fr-FR">
+            <a:solidFill>
+              <a:schemeClr val="tx1"/>
+            </a:solidFill>
+          </a:endParaRPr>
         </a:p>
       </dgm:t>
     </dgm:pt>
     <dgm:pt modelId="{351C8843-F886-4891-848C-0177EC91ACA0}">
       <dgm:prSet phldrT="[Texte]"/>
-      <dgm:spPr/>
+      <dgm:spPr>
+        <a:solidFill>
+          <a:schemeClr val="bg2"/>
+        </a:solidFill>
+      </dgm:spPr>
       <dgm:t>
         <a:bodyPr/>
         <a:lstStyle/>
         <a:p>
           <a:r>
-            <a:rPr lang="fr-FR" dirty="0"/>
+            <a:rPr lang="fr-FR" b="1" dirty="0">
+              <a:solidFill>
+                <a:schemeClr val="accent1">
+                  <a:lumMod val="75000"/>
+                </a:schemeClr>
+              </a:solidFill>
+            </a:rPr>
             <a:t>Différence entre plusieurs groupes</a:t>
           </a:r>
         </a:p>
@@ -1742,7 +3139,11 @@
         <a:bodyPr/>
         <a:lstStyle/>
         <a:p>
-          <a:endParaRPr lang="fr-FR"/>
+          <a:endParaRPr lang="fr-FR">
+            <a:solidFill>
+              <a:schemeClr val="tx1"/>
+            </a:solidFill>
+          </a:endParaRPr>
         </a:p>
       </dgm:t>
     </dgm:pt>
@@ -1753,19 +3154,33 @@
         <a:bodyPr/>
         <a:lstStyle/>
         <a:p>
-          <a:endParaRPr lang="fr-FR"/>
+          <a:endParaRPr lang="fr-FR">
+            <a:solidFill>
+              <a:schemeClr val="tx1"/>
+            </a:solidFill>
+          </a:endParaRPr>
         </a:p>
       </dgm:t>
     </dgm:pt>
     <dgm:pt modelId="{4B2AC8A3-443A-472F-8820-0FD1FD156E72}">
       <dgm:prSet phldrT="[Texte]"/>
-      <dgm:spPr/>
+      <dgm:spPr>
+        <a:solidFill>
+          <a:schemeClr val="bg2"/>
+        </a:solidFill>
+      </dgm:spPr>
       <dgm:t>
         <a:bodyPr/>
         <a:lstStyle/>
         <a:p>
           <a:r>
-            <a:rPr lang="fr-FR" dirty="0"/>
+            <a:rPr lang="fr-FR" b="1" dirty="0">
+              <a:solidFill>
+                <a:schemeClr val="accent1">
+                  <a:lumMod val="75000"/>
+                </a:schemeClr>
+              </a:solidFill>
+            </a:rPr>
             <a:t>Evolution dans le temps</a:t>
           </a:r>
         </a:p>
@@ -1778,7 +3193,11 @@
         <a:bodyPr/>
         <a:lstStyle/>
         <a:p>
-          <a:endParaRPr lang="fr-FR"/>
+          <a:endParaRPr lang="fr-FR">
+            <a:solidFill>
+              <a:schemeClr val="tx1"/>
+            </a:solidFill>
+          </a:endParaRPr>
         </a:p>
       </dgm:t>
     </dgm:pt>
@@ -1789,19 +3208,33 @@
         <a:bodyPr/>
         <a:lstStyle/>
         <a:p>
-          <a:endParaRPr lang="fr-FR"/>
+          <a:endParaRPr lang="fr-FR">
+            <a:solidFill>
+              <a:schemeClr val="tx1"/>
+            </a:solidFill>
+          </a:endParaRPr>
         </a:p>
       </dgm:t>
     </dgm:pt>
     <dgm:pt modelId="{CE68408F-53DC-4464-8887-5602A865A9B7}">
       <dgm:prSet phldrT="[Texte]"/>
-      <dgm:spPr/>
+      <dgm:spPr>
+        <a:solidFill>
+          <a:schemeClr val="bg2"/>
+        </a:solidFill>
+      </dgm:spPr>
       <dgm:t>
         <a:bodyPr/>
         <a:lstStyle/>
         <a:p>
           <a:r>
-            <a:rPr lang="fr-FR" dirty="0"/>
+            <a:rPr lang="fr-FR" b="1" dirty="0">
+              <a:solidFill>
+                <a:schemeClr val="accent1">
+                  <a:lumMod val="75000"/>
+                </a:schemeClr>
+              </a:solidFill>
+            </a:rPr>
             <a:t>Relation entre des données </a:t>
           </a:r>
         </a:p>
@@ -1814,7 +3247,11 @@
         <a:bodyPr/>
         <a:lstStyle/>
         <a:p>
-          <a:endParaRPr lang="fr-FR"/>
+          <a:endParaRPr lang="fr-FR">
+            <a:solidFill>
+              <a:schemeClr val="tx1"/>
+            </a:solidFill>
+          </a:endParaRPr>
         </a:p>
       </dgm:t>
     </dgm:pt>
@@ -1825,7 +3262,11 @@
         <a:bodyPr/>
         <a:lstStyle/>
         <a:p>
-          <a:endParaRPr lang="fr-FR"/>
+          <a:endParaRPr lang="fr-FR">
+            <a:solidFill>
+              <a:schemeClr val="tx1"/>
+            </a:solidFill>
+          </a:endParaRPr>
         </a:p>
       </dgm:t>
     </dgm:pt>
@@ -1937,7 +3378,11 @@
     <dgm:cxn modelId="{E4032647-D8AA-424B-91BD-28D8320BD185}" type="presParOf" srcId="{9526BB79-C388-43B4-9B77-219B5F717FB6}" destId="{393BE3DE-B822-4D18-88AB-C23B7726BEED}" srcOrd="7" destOrd="0" presId="urn:microsoft.com/office/officeart/2005/8/layout/matrix1"/>
     <dgm:cxn modelId="{D1DBE2FC-D682-49CE-86EE-56BD75C6B036}" type="presParOf" srcId="{66760727-DDD5-4F0B-A1AF-6853AD8FE376}" destId="{9D051DEE-3FC7-4A37-8363-892C1E6853C7}" srcOrd="1" destOrd="0" presId="urn:microsoft.com/office/officeart/2005/8/layout/matrix1"/>
   </dgm:cxnLst>
-  <dgm:bg/>
+  <dgm:bg>
+    <a:solidFill>
+      <a:schemeClr val="bg2"/>
+    </a:solidFill>
+  </dgm:bg>
   <dgm:whole/>
   <dgm:extLst>
     <a:ext uri="http://schemas.microsoft.com/office/drawing/2008/diagram">
@@ -1947,7 +3392,7 @@
 </dgm:dataModel>
 </file>
 
-<file path=ppt/diagrams/data2.xml><?xml version="1.0" encoding="utf-8"?>
+<file path=ppt/diagrams/data3.xml><?xml version="1.0" encoding="utf-8"?>
 <dgm:dataModel xmlns:dgm="http://schemas.openxmlformats.org/drawingml/2006/diagram" xmlns:a="http://schemas.openxmlformats.org/drawingml/2006/main">
   <dgm:ptLst>
     <dgm:pt modelId="{01BC27C3-A1E4-49D5-ABC9-728FBC7382BF}" type="doc">
@@ -2620,6 +4065,1215 @@
       <dsp:cNvGrpSpPr/>
     </dsp:nvGrpSpPr>
     <dsp:grpSpPr/>
+    <dsp:sp modelId="{BEA7A494-F117-4C3F-8F51-D459DB3EBF9E}">
+      <dsp:nvSpPr>
+        <dsp:cNvPr id="0" name=""/>
+        <dsp:cNvSpPr/>
+      </dsp:nvSpPr>
+      <dsp:spPr>
+        <a:xfrm>
+          <a:off x="0" y="640"/>
+          <a:ext cx="5914209" cy="0"/>
+        </a:xfrm>
+        <a:prstGeom prst="line">
+          <a:avLst/>
+        </a:prstGeom>
+        <a:blipFill>
+          <a:blip xmlns:r="http://schemas.openxmlformats.org/officeDocument/2006/relationships" r:embed="rId1">
+            <a:duotone>
+              <a:schemeClr val="accent2">
+                <a:hueOff val="0"/>
+                <a:satOff val="0"/>
+                <a:lumOff val="0"/>
+                <a:alphaOff val="0"/>
+                <a:shade val="74000"/>
+                <a:satMod val="130000"/>
+                <a:lumMod val="90000"/>
+              </a:schemeClr>
+              <a:schemeClr val="accent2">
+                <a:hueOff val="0"/>
+                <a:satOff val="0"/>
+                <a:lumOff val="0"/>
+                <a:alphaOff val="0"/>
+                <a:tint val="94000"/>
+                <a:satMod val="120000"/>
+                <a:lumMod val="104000"/>
+              </a:schemeClr>
+            </a:duotone>
+          </a:blip>
+          <a:tile tx="0" ty="0" sx="100000" sy="100000" flip="none" algn="tl"/>
+        </a:blipFill>
+        <a:ln w="9525" cap="flat" cmpd="sng" algn="ctr">
+          <a:solidFill>
+            <a:schemeClr val="accent2">
+              <a:hueOff val="0"/>
+              <a:satOff val="0"/>
+              <a:lumOff val="0"/>
+              <a:alphaOff val="0"/>
+            </a:schemeClr>
+          </a:solidFill>
+          <a:prstDash val="solid"/>
+        </a:ln>
+        <a:effectLst>
+          <a:innerShdw blurRad="25400" dist="12700" dir="13500000">
+            <a:srgbClr val="000000">
+              <a:alpha val="45000"/>
+            </a:srgbClr>
+          </a:innerShdw>
+        </a:effectLst>
+      </dsp:spPr>
+      <dsp:style>
+        <a:lnRef idx="1">
+          <a:scrgbClr r="0" g="0" b="0"/>
+        </a:lnRef>
+        <a:fillRef idx="3">
+          <a:scrgbClr r="0" g="0" b="0"/>
+        </a:fillRef>
+        <a:effectRef idx="2">
+          <a:scrgbClr r="0" g="0" b="0"/>
+        </a:effectRef>
+        <a:fontRef idx="minor">
+          <a:schemeClr val="lt1"/>
+        </a:fontRef>
+      </dsp:style>
+    </dsp:sp>
+    <dsp:sp modelId="{FB75638C-6E80-420D-B2EC-776A15479F6D}">
+      <dsp:nvSpPr>
+        <dsp:cNvPr id="0" name=""/>
+        <dsp:cNvSpPr/>
+      </dsp:nvSpPr>
+      <dsp:spPr>
+        <a:xfrm>
+          <a:off x="0" y="640"/>
+          <a:ext cx="5914209" cy="583041"/>
+        </a:xfrm>
+        <a:prstGeom prst="rect">
+          <a:avLst/>
+        </a:prstGeom>
+        <a:noFill/>
+        <a:ln>
+          <a:noFill/>
+        </a:ln>
+        <a:effectLst/>
+      </dsp:spPr>
+      <dsp:style>
+        <a:lnRef idx="0">
+          <a:scrgbClr r="0" g="0" b="0"/>
+        </a:lnRef>
+        <a:fillRef idx="0">
+          <a:scrgbClr r="0" g="0" b="0"/>
+        </a:fillRef>
+        <a:effectRef idx="0">
+          <a:scrgbClr r="0" g="0" b="0"/>
+        </a:effectRef>
+        <a:fontRef idx="minor"/>
+      </dsp:style>
+      <dsp:txBody>
+        <a:bodyPr spcFirstLastPara="0" vert="horz" wrap="square" lIns="64770" tIns="64770" rIns="64770" bIns="64770" numCol="1" spcCol="1270" anchor="t" anchorCtr="0">
+          <a:noAutofit/>
+        </a:bodyPr>
+        <a:lstStyle/>
+        <a:p>
+          <a:pPr marL="0" lvl="0" indent="0" algn="l" defTabSz="755650">
+            <a:lnSpc>
+              <a:spcPct val="90000"/>
+            </a:lnSpc>
+            <a:spcBef>
+              <a:spcPct val="0"/>
+            </a:spcBef>
+            <a:spcAft>
+              <a:spcPct val="35000"/>
+            </a:spcAft>
+            <a:buNone/>
+          </a:pPr>
+          <a:r>
+            <a:rPr lang="fr-FR" sz="1700" kern="1200"/>
+            <a:t>1- Qu’est-ce-que la statistique graphique?</a:t>
+          </a:r>
+          <a:endParaRPr lang="en-US" sz="1700" kern="1200"/>
+        </a:p>
+      </dsp:txBody>
+      <dsp:txXfrm>
+        <a:off x="0" y="640"/>
+        <a:ext cx="5914209" cy="583041"/>
+      </dsp:txXfrm>
+    </dsp:sp>
+    <dsp:sp modelId="{BDF4AF07-EEBF-4586-9437-279CE877CC81}">
+      <dsp:nvSpPr>
+        <dsp:cNvPr id="0" name=""/>
+        <dsp:cNvSpPr/>
+      </dsp:nvSpPr>
+      <dsp:spPr>
+        <a:xfrm>
+          <a:off x="0" y="583682"/>
+          <a:ext cx="5914209" cy="0"/>
+        </a:xfrm>
+        <a:prstGeom prst="line">
+          <a:avLst/>
+        </a:prstGeom>
+        <a:blipFill>
+          <a:blip xmlns:r="http://schemas.openxmlformats.org/officeDocument/2006/relationships" r:embed="rId1">
+            <a:duotone>
+              <a:schemeClr val="accent2">
+                <a:hueOff val="420394"/>
+                <a:satOff val="-446"/>
+                <a:lumOff val="343"/>
+                <a:alphaOff val="0"/>
+                <a:shade val="74000"/>
+                <a:satMod val="130000"/>
+                <a:lumMod val="90000"/>
+              </a:schemeClr>
+              <a:schemeClr val="accent2">
+                <a:hueOff val="420394"/>
+                <a:satOff val="-446"/>
+                <a:lumOff val="343"/>
+                <a:alphaOff val="0"/>
+                <a:tint val="94000"/>
+                <a:satMod val="120000"/>
+                <a:lumMod val="104000"/>
+              </a:schemeClr>
+            </a:duotone>
+          </a:blip>
+          <a:tile tx="0" ty="0" sx="100000" sy="100000" flip="none" algn="tl"/>
+        </a:blipFill>
+        <a:ln w="9525" cap="flat" cmpd="sng" algn="ctr">
+          <a:solidFill>
+            <a:schemeClr val="accent2">
+              <a:hueOff val="420394"/>
+              <a:satOff val="-446"/>
+              <a:lumOff val="343"/>
+              <a:alphaOff val="0"/>
+            </a:schemeClr>
+          </a:solidFill>
+          <a:prstDash val="solid"/>
+        </a:ln>
+        <a:effectLst>
+          <a:innerShdw blurRad="25400" dist="12700" dir="13500000">
+            <a:srgbClr val="000000">
+              <a:alpha val="45000"/>
+            </a:srgbClr>
+          </a:innerShdw>
+        </a:effectLst>
+      </dsp:spPr>
+      <dsp:style>
+        <a:lnRef idx="1">
+          <a:scrgbClr r="0" g="0" b="0"/>
+        </a:lnRef>
+        <a:fillRef idx="3">
+          <a:scrgbClr r="0" g="0" b="0"/>
+        </a:fillRef>
+        <a:effectRef idx="2">
+          <a:scrgbClr r="0" g="0" b="0"/>
+        </a:effectRef>
+        <a:fontRef idx="minor">
+          <a:schemeClr val="lt1"/>
+        </a:fontRef>
+      </dsp:style>
+    </dsp:sp>
+    <dsp:sp modelId="{CED0977C-39D6-4934-B911-BF0FD884EB89}">
+      <dsp:nvSpPr>
+        <dsp:cNvPr id="0" name=""/>
+        <dsp:cNvSpPr/>
+      </dsp:nvSpPr>
+      <dsp:spPr>
+        <a:xfrm>
+          <a:off x="0" y="583682"/>
+          <a:ext cx="5914209" cy="583041"/>
+        </a:xfrm>
+        <a:prstGeom prst="rect">
+          <a:avLst/>
+        </a:prstGeom>
+        <a:noFill/>
+        <a:ln>
+          <a:noFill/>
+        </a:ln>
+        <a:effectLst/>
+      </dsp:spPr>
+      <dsp:style>
+        <a:lnRef idx="0">
+          <a:scrgbClr r="0" g="0" b="0"/>
+        </a:lnRef>
+        <a:fillRef idx="0">
+          <a:scrgbClr r="0" g="0" b="0"/>
+        </a:fillRef>
+        <a:effectRef idx="0">
+          <a:scrgbClr r="0" g="0" b="0"/>
+        </a:effectRef>
+        <a:fontRef idx="minor"/>
+      </dsp:style>
+      <dsp:txBody>
+        <a:bodyPr spcFirstLastPara="0" vert="horz" wrap="square" lIns="64770" tIns="64770" rIns="64770" bIns="64770" numCol="1" spcCol="1270" anchor="t" anchorCtr="0">
+          <a:noAutofit/>
+        </a:bodyPr>
+        <a:lstStyle/>
+        <a:p>
+          <a:pPr marL="0" lvl="0" indent="0" algn="l" defTabSz="755650">
+            <a:lnSpc>
+              <a:spcPct val="90000"/>
+            </a:lnSpc>
+            <a:spcBef>
+              <a:spcPct val="0"/>
+            </a:spcBef>
+            <a:spcAft>
+              <a:spcPct val="35000"/>
+            </a:spcAft>
+            <a:buNone/>
+          </a:pPr>
+          <a:r>
+            <a:rPr lang="fr-FR" sz="1700" kern="1200"/>
+            <a:t>2-  Objectifs de la statistique graphique</a:t>
+          </a:r>
+          <a:endParaRPr lang="en-US" sz="1700" kern="1200"/>
+        </a:p>
+      </dsp:txBody>
+      <dsp:txXfrm>
+        <a:off x="0" y="583682"/>
+        <a:ext cx="5914209" cy="583041"/>
+      </dsp:txXfrm>
+    </dsp:sp>
+    <dsp:sp modelId="{592B7217-22B0-42ED-B635-E1D2BB4E709D}">
+      <dsp:nvSpPr>
+        <dsp:cNvPr id="0" name=""/>
+        <dsp:cNvSpPr/>
+      </dsp:nvSpPr>
+      <dsp:spPr>
+        <a:xfrm>
+          <a:off x="0" y="1166724"/>
+          <a:ext cx="5914209" cy="0"/>
+        </a:xfrm>
+        <a:prstGeom prst="line">
+          <a:avLst/>
+        </a:prstGeom>
+        <a:blipFill>
+          <a:blip xmlns:r="http://schemas.openxmlformats.org/officeDocument/2006/relationships" r:embed="rId1">
+            <a:duotone>
+              <a:schemeClr val="accent2">
+                <a:hueOff val="840789"/>
+                <a:satOff val="-893"/>
+                <a:lumOff val="686"/>
+                <a:alphaOff val="0"/>
+                <a:shade val="74000"/>
+                <a:satMod val="130000"/>
+                <a:lumMod val="90000"/>
+              </a:schemeClr>
+              <a:schemeClr val="accent2">
+                <a:hueOff val="840789"/>
+                <a:satOff val="-893"/>
+                <a:lumOff val="686"/>
+                <a:alphaOff val="0"/>
+                <a:tint val="94000"/>
+                <a:satMod val="120000"/>
+                <a:lumMod val="104000"/>
+              </a:schemeClr>
+            </a:duotone>
+          </a:blip>
+          <a:tile tx="0" ty="0" sx="100000" sy="100000" flip="none" algn="tl"/>
+        </a:blipFill>
+        <a:ln w="9525" cap="flat" cmpd="sng" algn="ctr">
+          <a:solidFill>
+            <a:schemeClr val="accent2">
+              <a:hueOff val="840789"/>
+              <a:satOff val="-893"/>
+              <a:lumOff val="686"/>
+              <a:alphaOff val="0"/>
+            </a:schemeClr>
+          </a:solidFill>
+          <a:prstDash val="solid"/>
+        </a:ln>
+        <a:effectLst>
+          <a:innerShdw blurRad="25400" dist="12700" dir="13500000">
+            <a:srgbClr val="000000">
+              <a:alpha val="45000"/>
+            </a:srgbClr>
+          </a:innerShdw>
+        </a:effectLst>
+      </dsp:spPr>
+      <dsp:style>
+        <a:lnRef idx="1">
+          <a:scrgbClr r="0" g="0" b="0"/>
+        </a:lnRef>
+        <a:fillRef idx="3">
+          <a:scrgbClr r="0" g="0" b="0"/>
+        </a:fillRef>
+        <a:effectRef idx="2">
+          <a:scrgbClr r="0" g="0" b="0"/>
+        </a:effectRef>
+        <a:fontRef idx="minor">
+          <a:schemeClr val="lt1"/>
+        </a:fontRef>
+      </dsp:style>
+    </dsp:sp>
+    <dsp:sp modelId="{FEED728A-F9B7-4415-8AE4-0C89BD3B47BE}">
+      <dsp:nvSpPr>
+        <dsp:cNvPr id="0" name=""/>
+        <dsp:cNvSpPr/>
+      </dsp:nvSpPr>
+      <dsp:spPr>
+        <a:xfrm>
+          <a:off x="0" y="1166724"/>
+          <a:ext cx="5914209" cy="583041"/>
+        </a:xfrm>
+        <a:prstGeom prst="rect">
+          <a:avLst/>
+        </a:prstGeom>
+        <a:noFill/>
+        <a:ln>
+          <a:noFill/>
+        </a:ln>
+        <a:effectLst/>
+      </dsp:spPr>
+      <dsp:style>
+        <a:lnRef idx="0">
+          <a:scrgbClr r="0" g="0" b="0"/>
+        </a:lnRef>
+        <a:fillRef idx="0">
+          <a:scrgbClr r="0" g="0" b="0"/>
+        </a:fillRef>
+        <a:effectRef idx="0">
+          <a:scrgbClr r="0" g="0" b="0"/>
+        </a:effectRef>
+        <a:fontRef idx="minor"/>
+      </dsp:style>
+      <dsp:txBody>
+        <a:bodyPr spcFirstLastPara="0" vert="horz" wrap="square" lIns="64770" tIns="64770" rIns="64770" bIns="64770" numCol="1" spcCol="1270" anchor="t" anchorCtr="0">
+          <a:noAutofit/>
+        </a:bodyPr>
+        <a:lstStyle/>
+        <a:p>
+          <a:pPr marL="0" lvl="0" indent="0" algn="l" defTabSz="755650">
+            <a:lnSpc>
+              <a:spcPct val="90000"/>
+            </a:lnSpc>
+            <a:spcBef>
+              <a:spcPct val="0"/>
+            </a:spcBef>
+            <a:spcAft>
+              <a:spcPct val="35000"/>
+            </a:spcAft>
+            <a:buNone/>
+          </a:pPr>
+          <a:r>
+            <a:rPr lang="fr-FR" sz="1700" kern="1200"/>
+            <a:t>3- Notions importantes pour lire, interpréter ou construire les graphiques</a:t>
+          </a:r>
+          <a:endParaRPr lang="en-US" sz="1700" kern="1200"/>
+        </a:p>
+      </dsp:txBody>
+      <dsp:txXfrm>
+        <a:off x="0" y="1166724"/>
+        <a:ext cx="5914209" cy="583041"/>
+      </dsp:txXfrm>
+    </dsp:sp>
+    <dsp:sp modelId="{24100CEB-9F68-4189-9CA7-C06A811C04C5}">
+      <dsp:nvSpPr>
+        <dsp:cNvPr id="0" name=""/>
+        <dsp:cNvSpPr/>
+      </dsp:nvSpPr>
+      <dsp:spPr>
+        <a:xfrm>
+          <a:off x="0" y="1749765"/>
+          <a:ext cx="5914209" cy="0"/>
+        </a:xfrm>
+        <a:prstGeom prst="line">
+          <a:avLst/>
+        </a:prstGeom>
+        <a:blipFill>
+          <a:blip xmlns:r="http://schemas.openxmlformats.org/officeDocument/2006/relationships" r:embed="rId1">
+            <a:duotone>
+              <a:schemeClr val="accent2">
+                <a:hueOff val="1261183"/>
+                <a:satOff val="-1339"/>
+                <a:lumOff val="1029"/>
+                <a:alphaOff val="0"/>
+                <a:shade val="74000"/>
+                <a:satMod val="130000"/>
+                <a:lumMod val="90000"/>
+              </a:schemeClr>
+              <a:schemeClr val="accent2">
+                <a:hueOff val="1261183"/>
+                <a:satOff val="-1339"/>
+                <a:lumOff val="1029"/>
+                <a:alphaOff val="0"/>
+                <a:tint val="94000"/>
+                <a:satMod val="120000"/>
+                <a:lumMod val="104000"/>
+              </a:schemeClr>
+            </a:duotone>
+          </a:blip>
+          <a:tile tx="0" ty="0" sx="100000" sy="100000" flip="none" algn="tl"/>
+        </a:blipFill>
+        <a:ln w="9525" cap="flat" cmpd="sng" algn="ctr">
+          <a:solidFill>
+            <a:schemeClr val="accent2">
+              <a:hueOff val="1261183"/>
+              <a:satOff val="-1339"/>
+              <a:lumOff val="1029"/>
+              <a:alphaOff val="0"/>
+            </a:schemeClr>
+          </a:solidFill>
+          <a:prstDash val="solid"/>
+        </a:ln>
+        <a:effectLst>
+          <a:innerShdw blurRad="25400" dist="12700" dir="13500000">
+            <a:srgbClr val="000000">
+              <a:alpha val="45000"/>
+            </a:srgbClr>
+          </a:innerShdw>
+        </a:effectLst>
+      </dsp:spPr>
+      <dsp:style>
+        <a:lnRef idx="1">
+          <a:scrgbClr r="0" g="0" b="0"/>
+        </a:lnRef>
+        <a:fillRef idx="3">
+          <a:scrgbClr r="0" g="0" b="0"/>
+        </a:fillRef>
+        <a:effectRef idx="2">
+          <a:scrgbClr r="0" g="0" b="0"/>
+        </a:effectRef>
+        <a:fontRef idx="minor">
+          <a:schemeClr val="lt1"/>
+        </a:fontRef>
+      </dsp:style>
+    </dsp:sp>
+    <dsp:sp modelId="{BC8B0E96-8367-429A-BFE5-DAA05195DD0A}">
+      <dsp:nvSpPr>
+        <dsp:cNvPr id="0" name=""/>
+        <dsp:cNvSpPr/>
+      </dsp:nvSpPr>
+      <dsp:spPr>
+        <a:xfrm>
+          <a:off x="0" y="1749765"/>
+          <a:ext cx="5914209" cy="583041"/>
+        </a:xfrm>
+        <a:prstGeom prst="rect">
+          <a:avLst/>
+        </a:prstGeom>
+        <a:noFill/>
+        <a:ln>
+          <a:noFill/>
+        </a:ln>
+        <a:effectLst/>
+      </dsp:spPr>
+      <dsp:style>
+        <a:lnRef idx="0">
+          <a:scrgbClr r="0" g="0" b="0"/>
+        </a:lnRef>
+        <a:fillRef idx="0">
+          <a:scrgbClr r="0" g="0" b="0"/>
+        </a:fillRef>
+        <a:effectRef idx="0">
+          <a:scrgbClr r="0" g="0" b="0"/>
+        </a:effectRef>
+        <a:fontRef idx="minor"/>
+      </dsp:style>
+      <dsp:txBody>
+        <a:bodyPr spcFirstLastPara="0" vert="horz" wrap="square" lIns="64770" tIns="64770" rIns="64770" bIns="64770" numCol="1" spcCol="1270" anchor="t" anchorCtr="0">
+          <a:noAutofit/>
+        </a:bodyPr>
+        <a:lstStyle/>
+        <a:p>
+          <a:pPr marL="0" lvl="0" indent="0" algn="l" defTabSz="755650">
+            <a:lnSpc>
+              <a:spcPct val="90000"/>
+            </a:lnSpc>
+            <a:spcBef>
+              <a:spcPct val="0"/>
+            </a:spcBef>
+            <a:spcAft>
+              <a:spcPct val="35000"/>
+            </a:spcAft>
+            <a:buNone/>
+          </a:pPr>
+          <a:r>
+            <a:rPr lang="fr-FR" sz="1700" kern="1200"/>
+            <a:t>4- Eléments de décision</a:t>
+          </a:r>
+          <a:endParaRPr lang="en-US" sz="1700" kern="1200"/>
+        </a:p>
+      </dsp:txBody>
+      <dsp:txXfrm>
+        <a:off x="0" y="1749765"/>
+        <a:ext cx="5914209" cy="583041"/>
+      </dsp:txXfrm>
+    </dsp:sp>
+    <dsp:sp modelId="{6614BBB5-CE1F-4466-8547-05F31EA3D19B}">
+      <dsp:nvSpPr>
+        <dsp:cNvPr id="0" name=""/>
+        <dsp:cNvSpPr/>
+      </dsp:nvSpPr>
+      <dsp:spPr>
+        <a:xfrm>
+          <a:off x="0" y="2332807"/>
+          <a:ext cx="5914209" cy="0"/>
+        </a:xfrm>
+        <a:prstGeom prst="line">
+          <a:avLst/>
+        </a:prstGeom>
+        <a:blipFill>
+          <a:blip xmlns:r="http://schemas.openxmlformats.org/officeDocument/2006/relationships" r:embed="rId1">
+            <a:duotone>
+              <a:schemeClr val="accent2">
+                <a:hueOff val="1681577"/>
+                <a:satOff val="-1786"/>
+                <a:lumOff val="1372"/>
+                <a:alphaOff val="0"/>
+                <a:shade val="74000"/>
+                <a:satMod val="130000"/>
+                <a:lumMod val="90000"/>
+              </a:schemeClr>
+              <a:schemeClr val="accent2">
+                <a:hueOff val="1681577"/>
+                <a:satOff val="-1786"/>
+                <a:lumOff val="1372"/>
+                <a:alphaOff val="0"/>
+                <a:tint val="94000"/>
+                <a:satMod val="120000"/>
+                <a:lumMod val="104000"/>
+              </a:schemeClr>
+            </a:duotone>
+          </a:blip>
+          <a:tile tx="0" ty="0" sx="100000" sy="100000" flip="none" algn="tl"/>
+        </a:blipFill>
+        <a:ln w="9525" cap="flat" cmpd="sng" algn="ctr">
+          <a:solidFill>
+            <a:schemeClr val="accent2">
+              <a:hueOff val="1681577"/>
+              <a:satOff val="-1786"/>
+              <a:lumOff val="1372"/>
+              <a:alphaOff val="0"/>
+            </a:schemeClr>
+          </a:solidFill>
+          <a:prstDash val="solid"/>
+        </a:ln>
+        <a:effectLst>
+          <a:innerShdw blurRad="25400" dist="12700" dir="13500000">
+            <a:srgbClr val="000000">
+              <a:alpha val="45000"/>
+            </a:srgbClr>
+          </a:innerShdw>
+        </a:effectLst>
+      </dsp:spPr>
+      <dsp:style>
+        <a:lnRef idx="1">
+          <a:scrgbClr r="0" g="0" b="0"/>
+        </a:lnRef>
+        <a:fillRef idx="3">
+          <a:scrgbClr r="0" g="0" b="0"/>
+        </a:fillRef>
+        <a:effectRef idx="2">
+          <a:scrgbClr r="0" g="0" b="0"/>
+        </a:effectRef>
+        <a:fontRef idx="minor">
+          <a:schemeClr val="lt1"/>
+        </a:fontRef>
+      </dsp:style>
+    </dsp:sp>
+    <dsp:sp modelId="{45202C9B-0414-4D3F-9D58-1836F7E35227}">
+      <dsp:nvSpPr>
+        <dsp:cNvPr id="0" name=""/>
+        <dsp:cNvSpPr/>
+      </dsp:nvSpPr>
+      <dsp:spPr>
+        <a:xfrm>
+          <a:off x="0" y="2332807"/>
+          <a:ext cx="5914209" cy="583041"/>
+        </a:xfrm>
+        <a:prstGeom prst="rect">
+          <a:avLst/>
+        </a:prstGeom>
+        <a:noFill/>
+        <a:ln>
+          <a:noFill/>
+        </a:ln>
+        <a:effectLst/>
+      </dsp:spPr>
+      <dsp:style>
+        <a:lnRef idx="0">
+          <a:scrgbClr r="0" g="0" b="0"/>
+        </a:lnRef>
+        <a:fillRef idx="0">
+          <a:scrgbClr r="0" g="0" b="0"/>
+        </a:fillRef>
+        <a:effectRef idx="0">
+          <a:scrgbClr r="0" g="0" b="0"/>
+        </a:effectRef>
+        <a:fontRef idx="minor"/>
+      </dsp:style>
+      <dsp:txBody>
+        <a:bodyPr spcFirstLastPara="0" vert="horz" wrap="square" lIns="64770" tIns="64770" rIns="64770" bIns="64770" numCol="1" spcCol="1270" anchor="t" anchorCtr="0">
+          <a:noAutofit/>
+        </a:bodyPr>
+        <a:lstStyle/>
+        <a:p>
+          <a:pPr marL="0" lvl="0" indent="0" algn="l" defTabSz="755650">
+            <a:lnSpc>
+              <a:spcPct val="90000"/>
+            </a:lnSpc>
+            <a:spcBef>
+              <a:spcPct val="0"/>
+            </a:spcBef>
+            <a:spcAft>
+              <a:spcPct val="35000"/>
+            </a:spcAft>
+            <a:buNone/>
+          </a:pPr>
+          <a:r>
+            <a:rPr lang="fr-FR" sz="1700" kern="1200"/>
+            <a:t>5- Quelle histoire souhaite t-on raconter? </a:t>
+          </a:r>
+          <a:endParaRPr lang="en-US" sz="1700" kern="1200"/>
+        </a:p>
+      </dsp:txBody>
+      <dsp:txXfrm>
+        <a:off x="0" y="2332807"/>
+        <a:ext cx="5914209" cy="583041"/>
+      </dsp:txXfrm>
+    </dsp:sp>
+    <dsp:sp modelId="{648C9BD4-B480-4B41-8563-F7B3331ADF8E}">
+      <dsp:nvSpPr>
+        <dsp:cNvPr id="0" name=""/>
+        <dsp:cNvSpPr/>
+      </dsp:nvSpPr>
+      <dsp:spPr>
+        <a:xfrm>
+          <a:off x="0" y="2915849"/>
+          <a:ext cx="5914209" cy="0"/>
+        </a:xfrm>
+        <a:prstGeom prst="line">
+          <a:avLst/>
+        </a:prstGeom>
+        <a:blipFill>
+          <a:blip xmlns:r="http://schemas.openxmlformats.org/officeDocument/2006/relationships" r:embed="rId1">
+            <a:duotone>
+              <a:schemeClr val="accent2">
+                <a:hueOff val="2101972"/>
+                <a:satOff val="-2232"/>
+                <a:lumOff val="1716"/>
+                <a:alphaOff val="0"/>
+                <a:shade val="74000"/>
+                <a:satMod val="130000"/>
+                <a:lumMod val="90000"/>
+              </a:schemeClr>
+              <a:schemeClr val="accent2">
+                <a:hueOff val="2101972"/>
+                <a:satOff val="-2232"/>
+                <a:lumOff val="1716"/>
+                <a:alphaOff val="0"/>
+                <a:tint val="94000"/>
+                <a:satMod val="120000"/>
+                <a:lumMod val="104000"/>
+              </a:schemeClr>
+            </a:duotone>
+          </a:blip>
+          <a:tile tx="0" ty="0" sx="100000" sy="100000" flip="none" algn="tl"/>
+        </a:blipFill>
+        <a:ln w="9525" cap="flat" cmpd="sng" algn="ctr">
+          <a:solidFill>
+            <a:schemeClr val="accent2">
+              <a:hueOff val="2101972"/>
+              <a:satOff val="-2232"/>
+              <a:lumOff val="1716"/>
+              <a:alphaOff val="0"/>
+            </a:schemeClr>
+          </a:solidFill>
+          <a:prstDash val="solid"/>
+        </a:ln>
+        <a:effectLst>
+          <a:innerShdw blurRad="25400" dist="12700" dir="13500000">
+            <a:srgbClr val="000000">
+              <a:alpha val="45000"/>
+            </a:srgbClr>
+          </a:innerShdw>
+        </a:effectLst>
+      </dsp:spPr>
+      <dsp:style>
+        <a:lnRef idx="1">
+          <a:scrgbClr r="0" g="0" b="0"/>
+        </a:lnRef>
+        <a:fillRef idx="3">
+          <a:scrgbClr r="0" g="0" b="0"/>
+        </a:fillRef>
+        <a:effectRef idx="2">
+          <a:scrgbClr r="0" g="0" b="0"/>
+        </a:effectRef>
+        <a:fontRef idx="minor">
+          <a:schemeClr val="lt1"/>
+        </a:fontRef>
+      </dsp:style>
+    </dsp:sp>
+    <dsp:sp modelId="{4264CBA9-5173-4FAA-874E-586DBEF52337}">
+      <dsp:nvSpPr>
+        <dsp:cNvPr id="0" name=""/>
+        <dsp:cNvSpPr/>
+      </dsp:nvSpPr>
+      <dsp:spPr>
+        <a:xfrm>
+          <a:off x="0" y="2915849"/>
+          <a:ext cx="5914209" cy="583041"/>
+        </a:xfrm>
+        <a:prstGeom prst="rect">
+          <a:avLst/>
+        </a:prstGeom>
+        <a:noFill/>
+        <a:ln>
+          <a:noFill/>
+        </a:ln>
+        <a:effectLst/>
+      </dsp:spPr>
+      <dsp:style>
+        <a:lnRef idx="0">
+          <a:scrgbClr r="0" g="0" b="0"/>
+        </a:lnRef>
+        <a:fillRef idx="0">
+          <a:scrgbClr r="0" g="0" b="0"/>
+        </a:fillRef>
+        <a:effectRef idx="0">
+          <a:scrgbClr r="0" g="0" b="0"/>
+        </a:effectRef>
+        <a:fontRef idx="minor"/>
+      </dsp:style>
+      <dsp:txBody>
+        <a:bodyPr spcFirstLastPara="0" vert="horz" wrap="square" lIns="64770" tIns="64770" rIns="64770" bIns="64770" numCol="1" spcCol="1270" anchor="t" anchorCtr="0">
+          <a:noAutofit/>
+        </a:bodyPr>
+        <a:lstStyle/>
+        <a:p>
+          <a:pPr marL="0" lvl="0" indent="0" algn="l" defTabSz="755650">
+            <a:lnSpc>
+              <a:spcPct val="90000"/>
+            </a:lnSpc>
+            <a:spcBef>
+              <a:spcPct val="0"/>
+            </a:spcBef>
+            <a:spcAft>
+              <a:spcPct val="35000"/>
+            </a:spcAft>
+            <a:buNone/>
+          </a:pPr>
+          <a:r>
+            <a:rPr lang="fr-FR" sz="1700" kern="1200"/>
+            <a:t>6- Cas d’utilisation particuliers des graphiques</a:t>
+          </a:r>
+          <a:endParaRPr lang="en-US" sz="1700" kern="1200"/>
+        </a:p>
+      </dsp:txBody>
+      <dsp:txXfrm>
+        <a:off x="0" y="2915849"/>
+        <a:ext cx="5914209" cy="583041"/>
+      </dsp:txXfrm>
+    </dsp:sp>
+    <dsp:sp modelId="{013C0107-6908-4215-974A-AA318C1A7FFE}">
+      <dsp:nvSpPr>
+        <dsp:cNvPr id="0" name=""/>
+        <dsp:cNvSpPr/>
+      </dsp:nvSpPr>
+      <dsp:spPr>
+        <a:xfrm>
+          <a:off x="0" y="3498891"/>
+          <a:ext cx="5914209" cy="0"/>
+        </a:xfrm>
+        <a:prstGeom prst="line">
+          <a:avLst/>
+        </a:prstGeom>
+        <a:blipFill>
+          <a:blip xmlns:r="http://schemas.openxmlformats.org/officeDocument/2006/relationships" r:embed="rId1">
+            <a:duotone>
+              <a:schemeClr val="accent2">
+                <a:hueOff val="2522366"/>
+                <a:satOff val="-2679"/>
+                <a:lumOff val="2059"/>
+                <a:alphaOff val="0"/>
+                <a:shade val="74000"/>
+                <a:satMod val="130000"/>
+                <a:lumMod val="90000"/>
+              </a:schemeClr>
+              <a:schemeClr val="accent2">
+                <a:hueOff val="2522366"/>
+                <a:satOff val="-2679"/>
+                <a:lumOff val="2059"/>
+                <a:alphaOff val="0"/>
+                <a:tint val="94000"/>
+                <a:satMod val="120000"/>
+                <a:lumMod val="104000"/>
+              </a:schemeClr>
+            </a:duotone>
+          </a:blip>
+          <a:tile tx="0" ty="0" sx="100000" sy="100000" flip="none" algn="tl"/>
+        </a:blipFill>
+        <a:ln w="9525" cap="flat" cmpd="sng" algn="ctr">
+          <a:solidFill>
+            <a:schemeClr val="accent2">
+              <a:hueOff val="2522366"/>
+              <a:satOff val="-2679"/>
+              <a:lumOff val="2059"/>
+              <a:alphaOff val="0"/>
+            </a:schemeClr>
+          </a:solidFill>
+          <a:prstDash val="solid"/>
+        </a:ln>
+        <a:effectLst>
+          <a:innerShdw blurRad="25400" dist="12700" dir="13500000">
+            <a:srgbClr val="000000">
+              <a:alpha val="45000"/>
+            </a:srgbClr>
+          </a:innerShdw>
+        </a:effectLst>
+      </dsp:spPr>
+      <dsp:style>
+        <a:lnRef idx="1">
+          <a:scrgbClr r="0" g="0" b="0"/>
+        </a:lnRef>
+        <a:fillRef idx="3">
+          <a:scrgbClr r="0" g="0" b="0"/>
+        </a:fillRef>
+        <a:effectRef idx="2">
+          <a:scrgbClr r="0" g="0" b="0"/>
+        </a:effectRef>
+        <a:fontRef idx="minor">
+          <a:schemeClr val="lt1"/>
+        </a:fontRef>
+      </dsp:style>
+    </dsp:sp>
+    <dsp:sp modelId="{B983A3EE-F717-4BD4-87A0-C63E83AB7553}">
+      <dsp:nvSpPr>
+        <dsp:cNvPr id="0" name=""/>
+        <dsp:cNvSpPr/>
+      </dsp:nvSpPr>
+      <dsp:spPr>
+        <a:xfrm>
+          <a:off x="0" y="3498891"/>
+          <a:ext cx="5914209" cy="583041"/>
+        </a:xfrm>
+        <a:prstGeom prst="rect">
+          <a:avLst/>
+        </a:prstGeom>
+        <a:noFill/>
+        <a:ln>
+          <a:noFill/>
+        </a:ln>
+        <a:effectLst/>
+      </dsp:spPr>
+      <dsp:style>
+        <a:lnRef idx="0">
+          <a:scrgbClr r="0" g="0" b="0"/>
+        </a:lnRef>
+        <a:fillRef idx="0">
+          <a:scrgbClr r="0" g="0" b="0"/>
+        </a:fillRef>
+        <a:effectRef idx="0">
+          <a:scrgbClr r="0" g="0" b="0"/>
+        </a:effectRef>
+        <a:fontRef idx="minor"/>
+      </dsp:style>
+      <dsp:txBody>
+        <a:bodyPr spcFirstLastPara="0" vert="horz" wrap="square" lIns="64770" tIns="64770" rIns="64770" bIns="64770" numCol="1" spcCol="1270" anchor="t" anchorCtr="0">
+          <a:noAutofit/>
+        </a:bodyPr>
+        <a:lstStyle/>
+        <a:p>
+          <a:pPr marL="0" lvl="0" indent="0" algn="l" defTabSz="755650">
+            <a:lnSpc>
+              <a:spcPct val="90000"/>
+            </a:lnSpc>
+            <a:spcBef>
+              <a:spcPct val="0"/>
+            </a:spcBef>
+            <a:spcAft>
+              <a:spcPct val="35000"/>
+            </a:spcAft>
+            <a:buNone/>
+          </a:pPr>
+          <a:r>
+            <a:rPr lang="fr-FR" sz="1700" kern="1200"/>
+            <a:t>7- Qu’est ce qu’on peut faire avec un graphique?</a:t>
+          </a:r>
+          <a:endParaRPr lang="en-US" sz="1700" kern="1200"/>
+        </a:p>
+      </dsp:txBody>
+      <dsp:txXfrm>
+        <a:off x="0" y="3498891"/>
+        <a:ext cx="5914209" cy="583041"/>
+      </dsp:txXfrm>
+    </dsp:sp>
+    <dsp:sp modelId="{75009C20-6521-4FF9-A41B-383686B9A813}">
+      <dsp:nvSpPr>
+        <dsp:cNvPr id="0" name=""/>
+        <dsp:cNvSpPr/>
+      </dsp:nvSpPr>
+      <dsp:spPr>
+        <a:xfrm>
+          <a:off x="0" y="4081932"/>
+          <a:ext cx="5914209" cy="0"/>
+        </a:xfrm>
+        <a:prstGeom prst="line">
+          <a:avLst/>
+        </a:prstGeom>
+        <a:blipFill>
+          <a:blip xmlns:r="http://schemas.openxmlformats.org/officeDocument/2006/relationships" r:embed="rId1">
+            <a:duotone>
+              <a:schemeClr val="accent2">
+                <a:hueOff val="2942761"/>
+                <a:satOff val="-3125"/>
+                <a:lumOff val="2402"/>
+                <a:alphaOff val="0"/>
+                <a:shade val="74000"/>
+                <a:satMod val="130000"/>
+                <a:lumMod val="90000"/>
+              </a:schemeClr>
+              <a:schemeClr val="accent2">
+                <a:hueOff val="2942761"/>
+                <a:satOff val="-3125"/>
+                <a:lumOff val="2402"/>
+                <a:alphaOff val="0"/>
+                <a:tint val="94000"/>
+                <a:satMod val="120000"/>
+                <a:lumMod val="104000"/>
+              </a:schemeClr>
+            </a:duotone>
+          </a:blip>
+          <a:tile tx="0" ty="0" sx="100000" sy="100000" flip="none" algn="tl"/>
+        </a:blipFill>
+        <a:ln w="9525" cap="flat" cmpd="sng" algn="ctr">
+          <a:solidFill>
+            <a:schemeClr val="accent2">
+              <a:hueOff val="2942761"/>
+              <a:satOff val="-3125"/>
+              <a:lumOff val="2402"/>
+              <a:alphaOff val="0"/>
+            </a:schemeClr>
+          </a:solidFill>
+          <a:prstDash val="solid"/>
+        </a:ln>
+        <a:effectLst>
+          <a:innerShdw blurRad="25400" dist="12700" dir="13500000">
+            <a:srgbClr val="000000">
+              <a:alpha val="45000"/>
+            </a:srgbClr>
+          </a:innerShdw>
+        </a:effectLst>
+      </dsp:spPr>
+      <dsp:style>
+        <a:lnRef idx="1">
+          <a:scrgbClr r="0" g="0" b="0"/>
+        </a:lnRef>
+        <a:fillRef idx="3">
+          <a:scrgbClr r="0" g="0" b="0"/>
+        </a:fillRef>
+        <a:effectRef idx="2">
+          <a:scrgbClr r="0" g="0" b="0"/>
+        </a:effectRef>
+        <a:fontRef idx="minor">
+          <a:schemeClr val="lt1"/>
+        </a:fontRef>
+      </dsp:style>
+    </dsp:sp>
+    <dsp:sp modelId="{F84F5DCF-A456-4F40-BA85-E039ABD3EFF5}">
+      <dsp:nvSpPr>
+        <dsp:cNvPr id="0" name=""/>
+        <dsp:cNvSpPr/>
+      </dsp:nvSpPr>
+      <dsp:spPr>
+        <a:xfrm>
+          <a:off x="0" y="4081932"/>
+          <a:ext cx="5914209" cy="583041"/>
+        </a:xfrm>
+        <a:prstGeom prst="rect">
+          <a:avLst/>
+        </a:prstGeom>
+        <a:noFill/>
+        <a:ln>
+          <a:noFill/>
+        </a:ln>
+        <a:effectLst/>
+      </dsp:spPr>
+      <dsp:style>
+        <a:lnRef idx="0">
+          <a:scrgbClr r="0" g="0" b="0"/>
+        </a:lnRef>
+        <a:fillRef idx="0">
+          <a:scrgbClr r="0" g="0" b="0"/>
+        </a:fillRef>
+        <a:effectRef idx="0">
+          <a:scrgbClr r="0" g="0" b="0"/>
+        </a:effectRef>
+        <a:fontRef idx="minor"/>
+      </dsp:style>
+      <dsp:txBody>
+        <a:bodyPr spcFirstLastPara="0" vert="horz" wrap="square" lIns="64770" tIns="64770" rIns="64770" bIns="64770" numCol="1" spcCol="1270" anchor="t" anchorCtr="0">
+          <a:noAutofit/>
+        </a:bodyPr>
+        <a:lstStyle/>
+        <a:p>
+          <a:pPr marL="0" lvl="0" indent="0" algn="l" defTabSz="755650">
+            <a:lnSpc>
+              <a:spcPct val="90000"/>
+            </a:lnSpc>
+            <a:spcBef>
+              <a:spcPct val="0"/>
+            </a:spcBef>
+            <a:spcAft>
+              <a:spcPct val="35000"/>
+            </a:spcAft>
+            <a:buNone/>
+          </a:pPr>
+          <a:r>
+            <a:rPr lang="fr-FR" sz="1700" kern="1200"/>
+            <a:t>8- Quelques bonnes pratiques</a:t>
+          </a:r>
+          <a:endParaRPr lang="en-US" sz="1700" kern="1200"/>
+        </a:p>
+      </dsp:txBody>
+      <dsp:txXfrm>
+        <a:off x="0" y="4081932"/>
+        <a:ext cx="5914209" cy="583041"/>
+      </dsp:txXfrm>
+    </dsp:sp>
+    <dsp:sp modelId="{D7F2DD8E-C64A-40C8-B864-23CC8B5D9164}">
+      <dsp:nvSpPr>
+        <dsp:cNvPr id="0" name=""/>
+        <dsp:cNvSpPr/>
+      </dsp:nvSpPr>
+      <dsp:spPr>
+        <a:xfrm>
+          <a:off x="0" y="4664974"/>
+          <a:ext cx="5914209" cy="0"/>
+        </a:xfrm>
+        <a:prstGeom prst="line">
+          <a:avLst/>
+        </a:prstGeom>
+        <a:blipFill>
+          <a:blip xmlns:r="http://schemas.openxmlformats.org/officeDocument/2006/relationships" r:embed="rId1">
+            <a:duotone>
+              <a:schemeClr val="accent2">
+                <a:hueOff val="3363155"/>
+                <a:satOff val="-3572"/>
+                <a:lumOff val="2745"/>
+                <a:alphaOff val="0"/>
+                <a:shade val="74000"/>
+                <a:satMod val="130000"/>
+                <a:lumMod val="90000"/>
+              </a:schemeClr>
+              <a:schemeClr val="accent2">
+                <a:hueOff val="3363155"/>
+                <a:satOff val="-3572"/>
+                <a:lumOff val="2745"/>
+                <a:alphaOff val="0"/>
+                <a:tint val="94000"/>
+                <a:satMod val="120000"/>
+                <a:lumMod val="104000"/>
+              </a:schemeClr>
+            </a:duotone>
+          </a:blip>
+          <a:tile tx="0" ty="0" sx="100000" sy="100000" flip="none" algn="tl"/>
+        </a:blipFill>
+        <a:ln w="9525" cap="flat" cmpd="sng" algn="ctr">
+          <a:solidFill>
+            <a:schemeClr val="accent2">
+              <a:hueOff val="3363155"/>
+              <a:satOff val="-3572"/>
+              <a:lumOff val="2745"/>
+              <a:alphaOff val="0"/>
+            </a:schemeClr>
+          </a:solidFill>
+          <a:prstDash val="solid"/>
+        </a:ln>
+        <a:effectLst>
+          <a:innerShdw blurRad="25400" dist="12700" dir="13500000">
+            <a:srgbClr val="000000">
+              <a:alpha val="45000"/>
+            </a:srgbClr>
+          </a:innerShdw>
+        </a:effectLst>
+      </dsp:spPr>
+      <dsp:style>
+        <a:lnRef idx="1">
+          <a:scrgbClr r="0" g="0" b="0"/>
+        </a:lnRef>
+        <a:fillRef idx="3">
+          <a:scrgbClr r="0" g="0" b="0"/>
+        </a:fillRef>
+        <a:effectRef idx="2">
+          <a:scrgbClr r="0" g="0" b="0"/>
+        </a:effectRef>
+        <a:fontRef idx="minor">
+          <a:schemeClr val="lt1"/>
+        </a:fontRef>
+      </dsp:style>
+    </dsp:sp>
+    <dsp:sp modelId="{EACCD8D9-0A27-4FD9-8C15-63771A7842C5}">
+      <dsp:nvSpPr>
+        <dsp:cNvPr id="0" name=""/>
+        <dsp:cNvSpPr/>
+      </dsp:nvSpPr>
+      <dsp:spPr>
+        <a:xfrm>
+          <a:off x="0" y="4664974"/>
+          <a:ext cx="5914209" cy="583041"/>
+        </a:xfrm>
+        <a:prstGeom prst="rect">
+          <a:avLst/>
+        </a:prstGeom>
+        <a:noFill/>
+        <a:ln>
+          <a:noFill/>
+        </a:ln>
+        <a:effectLst/>
+      </dsp:spPr>
+      <dsp:style>
+        <a:lnRef idx="0">
+          <a:scrgbClr r="0" g="0" b="0"/>
+        </a:lnRef>
+        <a:fillRef idx="0">
+          <a:scrgbClr r="0" g="0" b="0"/>
+        </a:fillRef>
+        <a:effectRef idx="0">
+          <a:scrgbClr r="0" g="0" b="0"/>
+        </a:effectRef>
+        <a:fontRef idx="minor"/>
+      </dsp:style>
+      <dsp:txBody>
+        <a:bodyPr spcFirstLastPara="0" vert="horz" wrap="square" lIns="64770" tIns="64770" rIns="64770" bIns="64770" numCol="1" spcCol="1270" anchor="t" anchorCtr="0">
+          <a:noAutofit/>
+        </a:bodyPr>
+        <a:lstStyle/>
+        <a:p>
+          <a:pPr marL="0" lvl="0" indent="0" algn="l" defTabSz="755650">
+            <a:lnSpc>
+              <a:spcPct val="90000"/>
+            </a:lnSpc>
+            <a:spcBef>
+              <a:spcPct val="0"/>
+            </a:spcBef>
+            <a:spcAft>
+              <a:spcPct val="35000"/>
+            </a:spcAft>
+            <a:buNone/>
+          </a:pPr>
+          <a:r>
+            <a:rPr lang="fr-FR" sz="1700" kern="1200"/>
+            <a:t>9- Quels outils &amp; comment ?</a:t>
+          </a:r>
+          <a:endParaRPr lang="en-US" sz="1700" kern="1200"/>
+        </a:p>
+      </dsp:txBody>
+      <dsp:txXfrm>
+        <a:off x="0" y="4664974"/>
+        <a:ext cx="5914209" cy="583041"/>
+      </dsp:txXfrm>
+    </dsp:sp>
+  </dsp:spTree>
+</dsp:drawing>
+</file>
+
+<file path=ppt/diagrams/drawing2.xml><?xml version="1.0" encoding="utf-8"?>
+<dsp:drawing xmlns:dgm="http://schemas.openxmlformats.org/drawingml/2006/diagram" xmlns:dsp="http://schemas.microsoft.com/office/drawing/2008/diagram" xmlns:a="http://schemas.openxmlformats.org/drawingml/2006/main">
+  <dsp:spTree>
+    <dsp:nvGrpSpPr>
+      <dsp:cNvPr id="0" name=""/>
+      <dsp:cNvGrpSpPr/>
+    </dsp:nvGrpSpPr>
+    <dsp:grpSpPr/>
     <dsp:sp modelId="{0886CCEB-C6A4-4D67-A943-D55BF8759F66}">
       <dsp:nvSpPr>
         <dsp:cNvPr id="0" name=""/>
@@ -2634,12 +5288,7 @@
           <a:avLst/>
         </a:prstGeom>
         <a:solidFill>
-          <a:schemeClr val="accent1">
-            <a:hueOff val="0"/>
-            <a:satOff val="0"/>
-            <a:lumOff val="0"/>
-            <a:alphaOff val="0"/>
-          </a:schemeClr>
+          <a:schemeClr val="bg2"/>
         </a:solidFill>
         <a:ln w="15875" cap="flat" cmpd="sng" algn="ctr">
           <a:solidFill>
@@ -2687,7 +5336,13 @@
             <a:buNone/>
           </a:pPr>
           <a:r>
-            <a:rPr lang="fr-FR" sz="1700" kern="1200" dirty="0"/>
+            <a:rPr lang="fr-FR" sz="1700" b="1" kern="1200" dirty="0">
+              <a:solidFill>
+                <a:schemeClr val="accent1">
+                  <a:lumMod val="75000"/>
+                </a:schemeClr>
+              </a:solidFill>
+            </a:rPr>
             <a:t>Forme de la distribution</a:t>
           </a:r>
         </a:p>
@@ -2711,12 +5366,7 @@
           <a:avLst/>
         </a:prstGeom>
         <a:solidFill>
-          <a:schemeClr val="accent1">
-            <a:hueOff val="0"/>
-            <a:satOff val="0"/>
-            <a:lumOff val="0"/>
-            <a:alphaOff val="0"/>
-          </a:schemeClr>
+          <a:schemeClr val="bg2"/>
         </a:solidFill>
         <a:ln w="15875" cap="flat" cmpd="sng" algn="ctr">
           <a:solidFill>
@@ -2764,7 +5414,13 @@
             <a:buNone/>
           </a:pPr>
           <a:r>
-            <a:rPr lang="fr-FR" sz="1700" kern="1200" dirty="0"/>
+            <a:rPr lang="fr-FR" sz="1700" b="1" kern="1200" dirty="0">
+              <a:solidFill>
+                <a:schemeClr val="accent1">
+                  <a:lumMod val="75000"/>
+                </a:schemeClr>
+              </a:solidFill>
+            </a:rPr>
             <a:t>Différence entre plusieurs groupes</a:t>
           </a:r>
         </a:p>
@@ -2788,12 +5444,7 @@
           <a:avLst/>
         </a:prstGeom>
         <a:solidFill>
-          <a:schemeClr val="accent1">
-            <a:hueOff val="0"/>
-            <a:satOff val="0"/>
-            <a:lumOff val="0"/>
-            <a:alphaOff val="0"/>
-          </a:schemeClr>
+          <a:schemeClr val="bg2"/>
         </a:solidFill>
         <a:ln w="15875" cap="flat" cmpd="sng" algn="ctr">
           <a:solidFill>
@@ -2841,7 +5492,13 @@
             <a:buNone/>
           </a:pPr>
           <a:r>
-            <a:rPr lang="fr-FR" sz="1700" kern="1200" dirty="0"/>
+            <a:rPr lang="fr-FR" sz="1700" b="1" kern="1200" dirty="0">
+              <a:solidFill>
+                <a:schemeClr val="accent1">
+                  <a:lumMod val="75000"/>
+                </a:schemeClr>
+              </a:solidFill>
+            </a:rPr>
             <a:t>Evolution dans le temps</a:t>
           </a:r>
         </a:p>
@@ -2865,12 +5522,7 @@
           <a:avLst/>
         </a:prstGeom>
         <a:solidFill>
-          <a:schemeClr val="accent1">
-            <a:hueOff val="0"/>
-            <a:satOff val="0"/>
-            <a:lumOff val="0"/>
-            <a:alphaOff val="0"/>
-          </a:schemeClr>
+          <a:schemeClr val="bg2"/>
         </a:solidFill>
         <a:ln w="15875" cap="flat" cmpd="sng" algn="ctr">
           <a:solidFill>
@@ -2918,7 +5570,13 @@
             <a:buNone/>
           </a:pPr>
           <a:r>
-            <a:rPr lang="fr-FR" sz="1700" kern="1200" dirty="0"/>
+            <a:rPr lang="fr-FR" sz="1700" b="1" kern="1200" dirty="0">
+              <a:solidFill>
+                <a:schemeClr val="accent1">
+                  <a:lumMod val="75000"/>
+                </a:schemeClr>
+              </a:solidFill>
+            </a:rPr>
             <a:t>Relation entre des données </a:t>
           </a:r>
         </a:p>
@@ -2994,7 +5652,11 @@
             <a:buNone/>
           </a:pPr>
           <a:r>
-            <a:rPr lang="fr-FR" sz="1700" kern="1200" dirty="0"/>
+            <a:rPr lang="fr-FR" sz="1700" kern="1200" dirty="0">
+              <a:solidFill>
+                <a:schemeClr val="tx1"/>
+              </a:solidFill>
+            </a:rPr>
             <a:t>Variation intéressante pour le lecteur</a:t>
           </a:r>
         </a:p>
@@ -3008,7 +5670,7 @@
 </dsp:drawing>
 </file>
 
-<file path=ppt/diagrams/drawing2.xml><?xml version="1.0" encoding="utf-8"?>
+<file path=ppt/diagrams/drawing3.xml><?xml version="1.0" encoding="utf-8"?>
 <dsp:drawing xmlns:dgm="http://schemas.openxmlformats.org/drawingml/2006/diagram" xmlns:dsp="http://schemas.microsoft.com/office/drawing/2008/diagram" xmlns:a="http://schemas.openxmlformats.org/drawingml/2006/main">
   <dsp:spTree>
     <dsp:nvGrpSpPr>
@@ -4110,6 +6772,472 @@
 </file>
 
 <file path=ppt/diagrams/layout1.xml><?xml version="1.0" encoding="utf-8"?>
+<dgm:layoutDef xmlns:dgm="http://schemas.openxmlformats.org/drawingml/2006/diagram" xmlns:a="http://schemas.openxmlformats.org/drawingml/2006/main" uniqueId="urn:microsoft.com/office/officeart/2008/layout/LinedList">
+  <dgm:title val=""/>
+  <dgm:desc val=""/>
+  <dgm:catLst>
+    <dgm:cat type="hierarchy" pri="8000"/>
+    <dgm:cat type="list" pri="2500"/>
+  </dgm:catLst>
+  <dgm:sampData>
+    <dgm:dataModel>
+      <dgm:ptLst>
+        <dgm:pt modelId="0" type="doc"/>
+        <dgm:pt modelId="1">
+          <dgm:prSet phldr="1"/>
+        </dgm:pt>
+        <dgm:pt modelId="11">
+          <dgm:prSet phldr="1"/>
+        </dgm:pt>
+        <dgm:pt modelId="12">
+          <dgm:prSet phldr="1"/>
+        </dgm:pt>
+        <dgm:pt modelId="13">
+          <dgm:prSet phldr="1"/>
+        </dgm:pt>
+      </dgm:ptLst>
+      <dgm:cxnLst>
+        <dgm:cxn modelId="2" srcId="0" destId="1" srcOrd="0" destOrd="0"/>
+        <dgm:cxn modelId="3" srcId="1" destId="11" srcOrd="0" destOrd="0"/>
+        <dgm:cxn modelId="4" srcId="1" destId="12" srcOrd="1" destOrd="0"/>
+        <dgm:cxn modelId="5" srcId="1" destId="13" srcOrd="2" destOrd="0"/>
+      </dgm:cxnLst>
+      <dgm:bg/>
+      <dgm:whole/>
+    </dgm:dataModel>
+  </dgm:sampData>
+  <dgm:styleData>
+    <dgm:dataModel>
+      <dgm:ptLst>
+        <dgm:pt modelId="0" type="doc"/>
+        <dgm:pt modelId="1">
+          <dgm:prSet phldr="1"/>
+        </dgm:pt>
+        <dgm:pt modelId="11">
+          <dgm:prSet phldr="1"/>
+        </dgm:pt>
+        <dgm:pt modelId="12">
+          <dgm:prSet phldr="1"/>
+        </dgm:pt>
+      </dgm:ptLst>
+      <dgm:cxnLst>
+        <dgm:cxn modelId="2" srcId="0" destId="1" srcOrd="0" destOrd="0"/>
+        <dgm:cxn modelId="3" srcId="1" destId="11" srcOrd="0" destOrd="0"/>
+        <dgm:cxn modelId="4" srcId="1" destId="12" srcOrd="1" destOrd="0"/>
+      </dgm:cxnLst>
+      <dgm:bg/>
+      <dgm:whole/>
+    </dgm:dataModel>
+  </dgm:styleData>
+  <dgm:clrData>
+    <dgm:dataModel>
+      <dgm:ptLst>
+        <dgm:pt modelId="0" type="doc"/>
+        <dgm:pt modelId="1">
+          <dgm:prSet phldr="1"/>
+        </dgm:pt>
+        <dgm:pt modelId="11">
+          <dgm:prSet phldr="1"/>
+        </dgm:pt>
+        <dgm:pt modelId="12">
+          <dgm:prSet phldr="1"/>
+        </dgm:pt>
+      </dgm:ptLst>
+      <dgm:cxnLst>
+        <dgm:cxn modelId="2" srcId="0" destId="1" srcOrd="0" destOrd="0"/>
+        <dgm:cxn modelId="3" srcId="1" destId="11" srcOrd="0" destOrd="0"/>
+        <dgm:cxn modelId="4" srcId="1" destId="12" srcOrd="1" destOrd="0"/>
+      </dgm:cxnLst>
+      <dgm:bg/>
+      <dgm:whole/>
+    </dgm:dataModel>
+  </dgm:clrData>
+  <dgm:layoutNode name="vert0">
+    <dgm:varLst>
+      <dgm:dir/>
+      <dgm:animOne val="branch"/>
+      <dgm:animLvl val="lvl"/>
+    </dgm:varLst>
+    <dgm:choose name="Name0">
+      <dgm:if name="Name1" func="var" arg="dir" op="equ" val="norm">
+        <dgm:alg type="lin">
+          <dgm:param type="linDir" val="fromT"/>
+          <dgm:param type="nodeHorzAlign" val="l"/>
+        </dgm:alg>
+      </dgm:if>
+      <dgm:else name="Name2">
+        <dgm:alg type="lin">
+          <dgm:param type="linDir" val="fromT"/>
+          <dgm:param type="nodeHorzAlign" val="r"/>
+        </dgm:alg>
+      </dgm:else>
+    </dgm:choose>
+    <dgm:shape xmlns:r="http://schemas.openxmlformats.org/officeDocument/2006/relationships" r:blip="">
+      <dgm:adjLst/>
+    </dgm:shape>
+    <dgm:presOf/>
+    <dgm:constrLst>
+      <dgm:constr type="w" for="ch" forName="horz1" refType="w"/>
+      <dgm:constr type="h" for="ch" forName="horz1" refType="h"/>
+      <dgm:constr type="h" for="des" forName="vert1" refType="h"/>
+      <dgm:constr type="h" for="des" forName="tx1" refType="h"/>
+      <dgm:constr type="h" for="des" forName="horz2" refType="h"/>
+      <dgm:constr type="h" for="des" forName="vert2" refType="h"/>
+      <dgm:constr type="h" for="des" forName="horz3" refType="h"/>
+      <dgm:constr type="h" for="des" forName="vert3" refType="h"/>
+      <dgm:constr type="h" for="des" forName="horz4" refType="h"/>
+      <dgm:constr type="h" for="des" ptType="node" refType="h"/>
+      <dgm:constr type="primFontSz" for="des" forName="tx1" op="equ" val="65"/>
+      <dgm:constr type="primFontSz" for="des" forName="tx2" op="equ" val="65"/>
+      <dgm:constr type="primFontSz" for="des" forName="tx3" op="equ" val="65"/>
+      <dgm:constr type="primFontSz" for="des" forName="tx4" op="equ" val="65"/>
+      <dgm:constr type="w" for="des" forName="thickLine" refType="w"/>
+      <dgm:constr type="h" for="des" forName="thickLine"/>
+      <dgm:constr type="h" for="des" forName="thinLine1"/>
+      <dgm:constr type="h" for="des" forName="thinLine2b"/>
+      <dgm:constr type="h" for="des" forName="thinLine3"/>
+      <dgm:constr type="h" for="des" forName="vertSpace2a" refType="h" fact="0.05"/>
+      <dgm:constr type="h" for="des" forName="vertSpace2b" refType="h" refFor="des" refForName="vertSpace2a"/>
+    </dgm:constrLst>
+    <dgm:forEach name="Name3" axis="ch" ptType="node">
+      <dgm:layoutNode name="thickLine" styleLbl="alignNode1">
+        <dgm:alg type="sp"/>
+        <dgm:shape xmlns:r="http://schemas.openxmlformats.org/officeDocument/2006/relationships" type="line" r:blip="">
+          <dgm:adjLst/>
+        </dgm:shape>
+        <dgm:presOf/>
+      </dgm:layoutNode>
+      <dgm:layoutNode name="horz1">
+        <dgm:choose name="Name4">
+          <dgm:if name="Name5" func="var" arg="dir" op="equ" val="norm">
+            <dgm:alg type="lin">
+              <dgm:param type="linDir" val="fromL"/>
+              <dgm:param type="nodeVertAlign" val="t"/>
+            </dgm:alg>
+          </dgm:if>
+          <dgm:else name="Name6">
+            <dgm:alg type="lin">
+              <dgm:param type="linDir" val="fromR"/>
+              <dgm:param type="nodeVertAlign" val="t"/>
+            </dgm:alg>
+          </dgm:else>
+        </dgm:choose>
+        <dgm:shape xmlns:r="http://schemas.openxmlformats.org/officeDocument/2006/relationships" r:blip="">
+          <dgm:adjLst/>
+        </dgm:shape>
+        <dgm:presOf/>
+        <dgm:choose name="Name7">
+          <dgm:if name="Name8" axis="root des" func="maxDepth" op="equ" val="1">
+            <dgm:constrLst>
+              <dgm:constr type="w" for="ch" forName="tx1" refType="w"/>
+            </dgm:constrLst>
+          </dgm:if>
+          <dgm:if name="Name9" axis="root des" func="maxDepth" op="equ" val="2">
+            <dgm:constrLst>
+              <dgm:constr type="w" for="ch" forName="tx1" refType="w" fact="0.2"/>
+              <dgm:constr type="w" for="des" forName="tx2" refType="w" fact="0.785"/>
+              <dgm:constr type="w" for="des" forName="horzSpace2" refType="w" fact="0.015"/>
+              <dgm:constr type="w" for="des" forName="thinLine2b" refType="w" fact="0.8"/>
+            </dgm:constrLst>
+          </dgm:if>
+          <dgm:if name="Name10" axis="root des" func="maxDepth" op="equ" val="3">
+            <dgm:constrLst>
+              <dgm:constr type="w" for="ch" forName="tx1" refType="w" fact="0.2"/>
+              <dgm:constr type="w" for="des" forName="tx2" refType="w" fact="0.385"/>
+              <dgm:constr type="w" for="des" forName="tx3" refType="w" fact="0.385"/>
+              <dgm:constr type="w" for="des" forName="horzSpace2" refType="w" fact="0.015"/>
+              <dgm:constr type="w" for="des" forName="horzSpace3" refType="w" fact="0.015"/>
+              <dgm:constr type="w" for="des" forName="thinLine2b" refType="w" fact="0.8"/>
+              <dgm:constr type="w" for="des" forName="thinLine3" refType="w" fact="0.385"/>
+            </dgm:constrLst>
+          </dgm:if>
+          <dgm:if name="Name11" axis="root des" func="maxDepth" op="gte" val="4">
+            <dgm:constrLst>
+              <dgm:constr type="w" for="ch" forName="tx1" refType="w" fact="0.2"/>
+              <dgm:constr type="w" for="des" forName="tx2" refType="w" fact="0.2516"/>
+              <dgm:constr type="w" for="des" forName="tx3" refType="w" fact="0.2516"/>
+              <dgm:constr type="w" for="des" forName="tx4" refType="w" fact="0.2516"/>
+              <dgm:constr type="w" for="des" forName="horzSpace2" refType="w" fact="0.015"/>
+              <dgm:constr type="w" for="des" forName="horzSpace3" refType="w" fact="0.015"/>
+              <dgm:constr type="w" for="des" forName="horzSpace4" refType="w" fact="0.015"/>
+              <dgm:constr type="w" for="des" forName="thinLine2b" refType="w" fact="0.8"/>
+              <dgm:constr type="w" for="des" forName="thinLine3" refType="w" fact="0.5332"/>
+            </dgm:constrLst>
+          </dgm:if>
+          <dgm:else name="Name12"/>
+        </dgm:choose>
+        <dgm:layoutNode name="tx1" styleLbl="revTx">
+          <dgm:alg type="tx">
+            <dgm:param type="parTxLTRAlign" val="l"/>
+            <dgm:param type="parTxRTLAlign" val="r"/>
+            <dgm:param type="txAnchorVert" val="t"/>
+          </dgm:alg>
+          <dgm:shape xmlns:r="http://schemas.openxmlformats.org/officeDocument/2006/relationships" type="rect" r:blip="">
+            <dgm:adjLst/>
+          </dgm:shape>
+          <dgm:presOf axis="self"/>
+          <dgm:constrLst>
+            <dgm:constr type="tMarg" refType="primFontSz" fact="0.3"/>
+            <dgm:constr type="bMarg" refType="primFontSz" fact="0.3"/>
+            <dgm:constr type="lMarg" refType="primFontSz" fact="0.3"/>
+            <dgm:constr type="rMarg" refType="primFontSz" fact="0.3"/>
+          </dgm:constrLst>
+          <dgm:ruleLst>
+            <dgm:rule type="primFontSz" val="5" fact="NaN" max="NaN"/>
+          </dgm:ruleLst>
+        </dgm:layoutNode>
+        <dgm:layoutNode name="vert1">
+          <dgm:choose name="Name13">
+            <dgm:if name="Name14" func="var" arg="dir" op="equ" val="norm">
+              <dgm:alg type="lin">
+                <dgm:param type="linDir" val="fromT"/>
+                <dgm:param type="nodeHorzAlign" val="l"/>
+              </dgm:alg>
+            </dgm:if>
+            <dgm:else name="Name15">
+              <dgm:alg type="lin">
+                <dgm:param type="linDir" val="fromT"/>
+                <dgm:param type="nodeHorzAlign" val="r"/>
+              </dgm:alg>
+            </dgm:else>
+          </dgm:choose>
+          <dgm:shape xmlns:r="http://schemas.openxmlformats.org/officeDocument/2006/relationships" r:blip="">
+            <dgm:adjLst/>
+          </dgm:shape>
+          <dgm:presOf/>
+          <dgm:forEach name="Name16" axis="ch" ptType="node">
+            <dgm:choose name="Name17">
+              <dgm:if name="Name18" axis="self" ptType="node" func="pos" op="equ" val="1">
+                <dgm:layoutNode name="vertSpace2a">
+                  <dgm:alg type="sp"/>
+                  <dgm:shape xmlns:r="http://schemas.openxmlformats.org/officeDocument/2006/relationships" r:blip="">
+                    <dgm:adjLst/>
+                  </dgm:shape>
+                  <dgm:presOf/>
+                </dgm:layoutNode>
+              </dgm:if>
+              <dgm:else name="Name19"/>
+            </dgm:choose>
+            <dgm:layoutNode name="horz2">
+              <dgm:choose name="Name20">
+                <dgm:if name="Name21" func="var" arg="dir" op="equ" val="norm">
+                  <dgm:alg type="lin">
+                    <dgm:param type="linDir" val="fromL"/>
+                    <dgm:param type="nodeVertAlign" val="t"/>
+                  </dgm:alg>
+                </dgm:if>
+                <dgm:else name="Name22">
+                  <dgm:alg type="lin">
+                    <dgm:param type="linDir" val="fromR"/>
+                    <dgm:param type="nodeVertAlign" val="t"/>
+                  </dgm:alg>
+                </dgm:else>
+              </dgm:choose>
+              <dgm:shape xmlns:r="http://schemas.openxmlformats.org/officeDocument/2006/relationships" r:blip="">
+                <dgm:adjLst/>
+              </dgm:shape>
+              <dgm:presOf/>
+              <dgm:layoutNode name="horzSpace2">
+                <dgm:alg type="sp"/>
+                <dgm:shape xmlns:r="http://schemas.openxmlformats.org/officeDocument/2006/relationships" r:blip="">
+                  <dgm:adjLst/>
+                </dgm:shape>
+                <dgm:presOf/>
+              </dgm:layoutNode>
+              <dgm:layoutNode name="tx2" styleLbl="revTx">
+                <dgm:alg type="tx">
+                  <dgm:param type="parTxLTRAlign" val="l"/>
+                  <dgm:param type="parTxRTLAlign" val="r"/>
+                  <dgm:param type="txAnchorVert" val="t"/>
+                </dgm:alg>
+                <dgm:shape xmlns:r="http://schemas.openxmlformats.org/officeDocument/2006/relationships" type="rect" r:blip="">
+                  <dgm:adjLst/>
+                </dgm:shape>
+                <dgm:presOf axis="self"/>
+                <dgm:constrLst>
+                  <dgm:constr type="tMarg" refType="primFontSz" fact="0.3"/>
+                  <dgm:constr type="bMarg" refType="primFontSz" fact="0.3"/>
+                  <dgm:constr type="lMarg" refType="primFontSz" fact="0.3"/>
+                  <dgm:constr type="rMarg" refType="primFontSz" fact="0.3"/>
+                </dgm:constrLst>
+                <dgm:ruleLst>
+                  <dgm:rule type="primFontSz" val="5" fact="NaN" max="NaN"/>
+                </dgm:ruleLst>
+              </dgm:layoutNode>
+              <dgm:layoutNode name="vert2">
+                <dgm:choose name="Name23">
+                  <dgm:if name="Name24" func="var" arg="dir" op="equ" val="norm">
+                    <dgm:alg type="lin">
+                      <dgm:param type="linDir" val="fromT"/>
+                      <dgm:param type="nodeHorzAlign" val="l"/>
+                    </dgm:alg>
+                  </dgm:if>
+                  <dgm:else name="Name25">
+                    <dgm:alg type="lin">
+                      <dgm:param type="linDir" val="fromT"/>
+                      <dgm:param type="nodeHorzAlign" val="r"/>
+                    </dgm:alg>
+                  </dgm:else>
+                </dgm:choose>
+                <dgm:shape xmlns:r="http://schemas.openxmlformats.org/officeDocument/2006/relationships" r:blip="">
+                  <dgm:adjLst/>
+                </dgm:shape>
+                <dgm:presOf/>
+                <dgm:forEach name="Name26" axis="ch" ptType="node">
+                  <dgm:layoutNode name="horz3">
+                    <dgm:choose name="Name27">
+                      <dgm:if name="Name28" func="var" arg="dir" op="equ" val="norm">
+                        <dgm:alg type="lin">
+                          <dgm:param type="linDir" val="fromL"/>
+                          <dgm:param type="nodeVertAlign" val="t"/>
+                        </dgm:alg>
+                      </dgm:if>
+                      <dgm:else name="Name29">
+                        <dgm:alg type="lin">
+                          <dgm:param type="linDir" val="fromR"/>
+                          <dgm:param type="nodeVertAlign" val="t"/>
+                        </dgm:alg>
+                      </dgm:else>
+                    </dgm:choose>
+                    <dgm:shape xmlns:r="http://schemas.openxmlformats.org/officeDocument/2006/relationships" r:blip="">
+                      <dgm:adjLst/>
+                    </dgm:shape>
+                    <dgm:presOf/>
+                    <dgm:layoutNode name="horzSpace3">
+                      <dgm:alg type="sp"/>
+                      <dgm:shape xmlns:r="http://schemas.openxmlformats.org/officeDocument/2006/relationships" r:blip="">
+                        <dgm:adjLst/>
+                      </dgm:shape>
+                      <dgm:presOf/>
+                    </dgm:layoutNode>
+                    <dgm:layoutNode name="tx3" styleLbl="revTx">
+                      <dgm:alg type="tx">
+                        <dgm:param type="parTxLTRAlign" val="l"/>
+                        <dgm:param type="parTxRTLAlign" val="r"/>
+                        <dgm:param type="txAnchorVert" val="t"/>
+                      </dgm:alg>
+                      <dgm:shape xmlns:r="http://schemas.openxmlformats.org/officeDocument/2006/relationships" type="rect" r:blip="">
+                        <dgm:adjLst/>
+                      </dgm:shape>
+                      <dgm:presOf axis="self"/>
+                      <dgm:constrLst>
+                        <dgm:constr type="tMarg" refType="primFontSz" fact="0.3"/>
+                        <dgm:constr type="bMarg" refType="primFontSz" fact="0.3"/>
+                        <dgm:constr type="lMarg" refType="primFontSz" fact="0.3"/>
+                        <dgm:constr type="rMarg" refType="primFontSz" fact="0.3"/>
+                      </dgm:constrLst>
+                      <dgm:ruleLst>
+                        <dgm:rule type="primFontSz" val="5" fact="NaN" max="NaN"/>
+                      </dgm:ruleLst>
+                    </dgm:layoutNode>
+                    <dgm:layoutNode name="vert3">
+                      <dgm:choose name="Name30">
+                        <dgm:if name="Name31" func="var" arg="dir" op="equ" val="norm">
+                          <dgm:alg type="lin">
+                            <dgm:param type="linDir" val="fromT"/>
+                            <dgm:param type="nodeHorzAlign" val="l"/>
+                          </dgm:alg>
+                        </dgm:if>
+                        <dgm:else name="Name32">
+                          <dgm:alg type="lin">
+                            <dgm:param type="linDir" val="fromT"/>
+                            <dgm:param type="nodeHorzAlign" val="r"/>
+                          </dgm:alg>
+                        </dgm:else>
+                      </dgm:choose>
+                      <dgm:shape xmlns:r="http://schemas.openxmlformats.org/officeDocument/2006/relationships" r:blip="">
+                        <dgm:adjLst/>
+                      </dgm:shape>
+                      <dgm:presOf/>
+                      <dgm:forEach name="Name33" axis="ch" ptType="node">
+                        <dgm:layoutNode name="horz4">
+                          <dgm:choose name="Name34">
+                            <dgm:if name="Name35" func="var" arg="dir" op="equ" val="norm">
+                              <dgm:alg type="lin">
+                                <dgm:param type="linDir" val="fromL"/>
+                                <dgm:param type="nodeVertAlign" val="t"/>
+                              </dgm:alg>
+                            </dgm:if>
+                            <dgm:else name="Name36">
+                              <dgm:alg type="lin">
+                                <dgm:param type="linDir" val="fromR"/>
+                                <dgm:param type="nodeVertAlign" val="t"/>
+                              </dgm:alg>
+                            </dgm:else>
+                          </dgm:choose>
+                          <dgm:shape xmlns:r="http://schemas.openxmlformats.org/officeDocument/2006/relationships" r:blip="">
+                            <dgm:adjLst/>
+                          </dgm:shape>
+                          <dgm:presOf/>
+                          <dgm:layoutNode name="horzSpace4">
+                            <dgm:alg type="sp"/>
+                            <dgm:shape xmlns:r="http://schemas.openxmlformats.org/officeDocument/2006/relationships" r:blip="">
+                              <dgm:adjLst/>
+                            </dgm:shape>
+                            <dgm:presOf/>
+                          </dgm:layoutNode>
+                          <dgm:layoutNode name="tx4" styleLbl="revTx">
+                            <dgm:varLst>
+                              <dgm:bulletEnabled val="1"/>
+                            </dgm:varLst>
+                            <dgm:alg type="tx">
+                              <dgm:param type="parTxLTRAlign" val="l"/>
+                              <dgm:param type="parTxRTLAlign" val="r"/>
+                              <dgm:param type="txAnchorVert" val="t"/>
+                            </dgm:alg>
+                            <dgm:shape xmlns:r="http://schemas.openxmlformats.org/officeDocument/2006/relationships" type="rect" r:blip="">
+                              <dgm:adjLst/>
+                            </dgm:shape>
+                            <dgm:presOf axis="desOrSelf" ptType="node"/>
+                            <dgm:constrLst>
+                              <dgm:constr type="tMarg" refType="primFontSz" fact="0.3"/>
+                              <dgm:constr type="bMarg" refType="primFontSz" fact="0.3"/>
+                              <dgm:constr type="lMarg" refType="primFontSz" fact="0.3"/>
+                              <dgm:constr type="rMarg" refType="primFontSz" fact="0.3"/>
+                            </dgm:constrLst>
+                            <dgm:ruleLst>
+                              <dgm:rule type="primFontSz" val="5" fact="NaN" max="NaN"/>
+                            </dgm:ruleLst>
+                          </dgm:layoutNode>
+                        </dgm:layoutNode>
+                      </dgm:forEach>
+                    </dgm:layoutNode>
+                  </dgm:layoutNode>
+                  <dgm:forEach name="Name37" axis="followSib" ptType="sibTrans" cnt="1">
+                    <dgm:layoutNode name="thinLine3" styleLbl="callout">
+                      <dgm:alg type="sp"/>
+                      <dgm:shape xmlns:r="http://schemas.openxmlformats.org/officeDocument/2006/relationships" type="line" r:blip="">
+                        <dgm:adjLst/>
+                      </dgm:shape>
+                      <dgm:presOf/>
+                    </dgm:layoutNode>
+                  </dgm:forEach>
+                </dgm:forEach>
+              </dgm:layoutNode>
+            </dgm:layoutNode>
+            <dgm:layoutNode name="thinLine2b" styleLbl="callout">
+              <dgm:alg type="sp"/>
+              <dgm:shape xmlns:r="http://schemas.openxmlformats.org/officeDocument/2006/relationships" type="line" r:blip="">
+                <dgm:adjLst/>
+              </dgm:shape>
+              <dgm:presOf/>
+            </dgm:layoutNode>
+            <dgm:layoutNode name="vertSpace2b">
+              <dgm:alg type="sp"/>
+              <dgm:shape xmlns:r="http://schemas.openxmlformats.org/officeDocument/2006/relationships" r:blip="">
+                <dgm:adjLst/>
+              </dgm:shape>
+              <dgm:presOf/>
+            </dgm:layoutNode>
+          </dgm:forEach>
+        </dgm:layoutNode>
+      </dgm:layoutNode>
+    </dgm:forEach>
+  </dgm:layoutNode>
+</dgm:layoutDef>
+</file>
+
+<file path=ppt/diagrams/layout2.xml><?xml version="1.0" encoding="utf-8"?>
 <dgm:layoutDef xmlns:dgm="http://schemas.openxmlformats.org/drawingml/2006/diagram" xmlns:a="http://schemas.openxmlformats.org/drawingml/2006/main" uniqueId="urn:microsoft.com/office/officeart/2005/8/layout/matrix1">
   <dgm:title val=""/>
   <dgm:desc val=""/>
@@ -4486,7 +7614,7 @@
 </dgm:layoutDef>
 </file>
 
-<file path=ppt/diagrams/layout2.xml><?xml version="1.0" encoding="utf-8"?>
+<file path=ppt/diagrams/layout3.xml><?xml version="1.0" encoding="utf-8"?>
 <dgm:layoutDef xmlns:dgm="http://schemas.openxmlformats.org/drawingml/2006/diagram" xmlns:a="http://schemas.openxmlformats.org/drawingml/2006/main" uniqueId="urn:microsoft.com/office/officeart/2005/8/layout/hierarchy2">
   <dgm:title val=""/>
   <dgm:desc val=""/>
@@ -4807,6 +7935,1040 @@
 </file>
 
 <file path=ppt/diagrams/quickStyle1.xml><?xml version="1.0" encoding="utf-8"?>
+<dgm:styleDef xmlns:dgm="http://schemas.openxmlformats.org/drawingml/2006/diagram" xmlns:a="http://schemas.openxmlformats.org/drawingml/2006/main" uniqueId="urn:microsoft.com/office/officeart/2005/8/quickstyle/simple4">
+  <dgm:title val=""/>
+  <dgm:desc val=""/>
+  <dgm:catLst>
+    <dgm:cat type="simple" pri="10400"/>
+  </dgm:catLst>
+  <dgm:scene3d>
+    <a:camera prst="orthographicFront"/>
+    <a:lightRig rig="threePt" dir="t"/>
+  </dgm:scene3d>
+  <dgm:styleLbl name="node0">
+    <dgm:scene3d>
+      <a:camera prst="orthographicFront"/>
+      <a:lightRig rig="threePt" dir="t"/>
+    </dgm:scene3d>
+    <dgm:sp3d/>
+    <dgm:txPr/>
+    <dgm:style>
+      <a:lnRef idx="0">
+        <a:scrgbClr r="0" g="0" b="0"/>
+      </a:lnRef>
+      <a:fillRef idx="3">
+        <a:scrgbClr r="0" g="0" b="0"/>
+      </a:fillRef>
+      <a:effectRef idx="2">
+        <a:scrgbClr r="0" g="0" b="0"/>
+      </a:effectRef>
+      <a:fontRef idx="minor">
+        <a:schemeClr val="lt1"/>
+      </a:fontRef>
+    </dgm:style>
+  </dgm:styleLbl>
+  <dgm:styleLbl name="lnNode1">
+    <dgm:scene3d>
+      <a:camera prst="orthographicFront"/>
+      <a:lightRig rig="threePt" dir="t"/>
+    </dgm:scene3d>
+    <dgm:sp3d/>
+    <dgm:txPr/>
+    <dgm:style>
+      <a:lnRef idx="1">
+        <a:scrgbClr r="0" g="0" b="0"/>
+      </a:lnRef>
+      <a:fillRef idx="3">
+        <a:scrgbClr r="0" g="0" b="0"/>
+      </a:fillRef>
+      <a:effectRef idx="2">
+        <a:scrgbClr r="0" g="0" b="0"/>
+      </a:effectRef>
+      <a:fontRef idx="minor">
+        <a:schemeClr val="lt1"/>
+      </a:fontRef>
+    </dgm:style>
+  </dgm:styleLbl>
+  <dgm:styleLbl name="vennNode1">
+    <dgm:scene3d>
+      <a:camera prst="orthographicFront"/>
+      <a:lightRig rig="threePt" dir="t"/>
+    </dgm:scene3d>
+    <dgm:sp3d/>
+    <dgm:txPr/>
+    <dgm:style>
+      <a:lnRef idx="0">
+        <a:scrgbClr r="0" g="0" b="0"/>
+      </a:lnRef>
+      <a:fillRef idx="3">
+        <a:scrgbClr r="0" g="0" b="0"/>
+      </a:fillRef>
+      <a:effectRef idx="0">
+        <a:scrgbClr r="0" g="0" b="0"/>
+      </a:effectRef>
+      <a:fontRef idx="minor">
+        <a:schemeClr val="tx1"/>
+      </a:fontRef>
+    </dgm:style>
+  </dgm:styleLbl>
+  <dgm:styleLbl name="alignNode1">
+    <dgm:scene3d>
+      <a:camera prst="orthographicFront"/>
+      <a:lightRig rig="threePt" dir="t"/>
+    </dgm:scene3d>
+    <dgm:sp3d/>
+    <dgm:txPr/>
+    <dgm:style>
+      <a:lnRef idx="1">
+        <a:scrgbClr r="0" g="0" b="0"/>
+      </a:lnRef>
+      <a:fillRef idx="3">
+        <a:scrgbClr r="0" g="0" b="0"/>
+      </a:fillRef>
+      <a:effectRef idx="2">
+        <a:scrgbClr r="0" g="0" b="0"/>
+      </a:effectRef>
+      <a:fontRef idx="minor">
+        <a:schemeClr val="lt1"/>
+      </a:fontRef>
+    </dgm:style>
+  </dgm:styleLbl>
+  <dgm:styleLbl name="node1">
+    <dgm:scene3d>
+      <a:camera prst="orthographicFront"/>
+      <a:lightRig rig="threePt" dir="t"/>
+    </dgm:scene3d>
+    <dgm:sp3d/>
+    <dgm:txPr/>
+    <dgm:style>
+      <a:lnRef idx="0">
+        <a:scrgbClr r="0" g="0" b="0"/>
+      </a:lnRef>
+      <a:fillRef idx="3">
+        <a:scrgbClr r="0" g="0" b="0"/>
+      </a:fillRef>
+      <a:effectRef idx="2">
+        <a:scrgbClr r="0" g="0" b="0"/>
+      </a:effectRef>
+      <a:fontRef idx="minor">
+        <a:schemeClr val="lt1"/>
+      </a:fontRef>
+    </dgm:style>
+  </dgm:styleLbl>
+  <dgm:styleLbl name="node2">
+    <dgm:scene3d>
+      <a:camera prst="orthographicFront"/>
+      <a:lightRig rig="threePt" dir="t"/>
+    </dgm:scene3d>
+    <dgm:sp3d/>
+    <dgm:txPr/>
+    <dgm:style>
+      <a:lnRef idx="0">
+        <a:scrgbClr r="0" g="0" b="0"/>
+      </a:lnRef>
+      <a:fillRef idx="3">
+        <a:scrgbClr r="0" g="0" b="0"/>
+      </a:fillRef>
+      <a:effectRef idx="2">
+        <a:scrgbClr r="0" g="0" b="0"/>
+      </a:effectRef>
+      <a:fontRef idx="minor">
+        <a:schemeClr val="lt1"/>
+      </a:fontRef>
+    </dgm:style>
+  </dgm:styleLbl>
+  <dgm:styleLbl name="node3">
+    <dgm:scene3d>
+      <a:camera prst="orthographicFront"/>
+      <a:lightRig rig="threePt" dir="t"/>
+    </dgm:scene3d>
+    <dgm:sp3d/>
+    <dgm:txPr/>
+    <dgm:style>
+      <a:lnRef idx="0">
+        <a:scrgbClr r="0" g="0" b="0"/>
+      </a:lnRef>
+      <a:fillRef idx="3">
+        <a:scrgbClr r="0" g="0" b="0"/>
+      </a:fillRef>
+      <a:effectRef idx="2">
+        <a:scrgbClr r="0" g="0" b="0"/>
+      </a:effectRef>
+      <a:fontRef idx="minor">
+        <a:schemeClr val="lt1"/>
+      </a:fontRef>
+    </dgm:style>
+  </dgm:styleLbl>
+  <dgm:styleLbl name="node4">
+    <dgm:scene3d>
+      <a:camera prst="orthographicFront"/>
+      <a:lightRig rig="threePt" dir="t"/>
+    </dgm:scene3d>
+    <dgm:sp3d/>
+    <dgm:txPr/>
+    <dgm:style>
+      <a:lnRef idx="0">
+        <a:scrgbClr r="0" g="0" b="0"/>
+      </a:lnRef>
+      <a:fillRef idx="3">
+        <a:scrgbClr r="0" g="0" b="0"/>
+      </a:fillRef>
+      <a:effectRef idx="2">
+        <a:scrgbClr r="0" g="0" b="0"/>
+      </a:effectRef>
+      <a:fontRef idx="minor">
+        <a:schemeClr val="lt1"/>
+      </a:fontRef>
+    </dgm:style>
+  </dgm:styleLbl>
+  <dgm:styleLbl name="fgImgPlace1">
+    <dgm:scene3d>
+      <a:camera prst="orthographicFront"/>
+      <a:lightRig rig="threePt" dir="t"/>
+    </dgm:scene3d>
+    <dgm:sp3d/>
+    <dgm:txPr/>
+    <dgm:style>
+      <a:lnRef idx="0">
+        <a:scrgbClr r="0" g="0" b="0"/>
+      </a:lnRef>
+      <a:fillRef idx="1">
+        <a:scrgbClr r="0" g="0" b="0"/>
+      </a:fillRef>
+      <a:effectRef idx="2">
+        <a:scrgbClr r="0" g="0" b="0"/>
+      </a:effectRef>
+      <a:fontRef idx="minor"/>
+    </dgm:style>
+  </dgm:styleLbl>
+  <dgm:styleLbl name="alignImgPlace1">
+    <dgm:scene3d>
+      <a:camera prst="orthographicFront"/>
+      <a:lightRig rig="threePt" dir="t"/>
+    </dgm:scene3d>
+    <dgm:sp3d/>
+    <dgm:txPr/>
+    <dgm:style>
+      <a:lnRef idx="0">
+        <a:scrgbClr r="0" g="0" b="0"/>
+      </a:lnRef>
+      <a:fillRef idx="1">
+        <a:scrgbClr r="0" g="0" b="0"/>
+      </a:fillRef>
+      <a:effectRef idx="2">
+        <a:scrgbClr r="0" g="0" b="0"/>
+      </a:effectRef>
+      <a:fontRef idx="minor"/>
+    </dgm:style>
+  </dgm:styleLbl>
+  <dgm:styleLbl name="bgImgPlace1">
+    <dgm:scene3d>
+      <a:camera prst="orthographicFront"/>
+      <a:lightRig rig="threePt" dir="t"/>
+    </dgm:scene3d>
+    <dgm:sp3d/>
+    <dgm:txPr/>
+    <dgm:style>
+      <a:lnRef idx="0">
+        <a:scrgbClr r="0" g="0" b="0"/>
+      </a:lnRef>
+      <a:fillRef idx="1">
+        <a:scrgbClr r="0" g="0" b="0"/>
+      </a:fillRef>
+      <a:effectRef idx="2">
+        <a:scrgbClr r="0" g="0" b="0"/>
+      </a:effectRef>
+      <a:fontRef idx="minor"/>
+    </dgm:style>
+  </dgm:styleLbl>
+  <dgm:styleLbl name="sibTrans2D1">
+    <dgm:scene3d>
+      <a:camera prst="orthographicFront"/>
+      <a:lightRig rig="threePt" dir="t"/>
+    </dgm:scene3d>
+    <dgm:sp3d/>
+    <dgm:txPr/>
+    <dgm:style>
+      <a:lnRef idx="0">
+        <a:scrgbClr r="0" g="0" b="0"/>
+      </a:lnRef>
+      <a:fillRef idx="3">
+        <a:scrgbClr r="0" g="0" b="0"/>
+      </a:fillRef>
+      <a:effectRef idx="2">
+        <a:scrgbClr r="0" g="0" b="0"/>
+      </a:effectRef>
+      <a:fontRef idx="minor">
+        <a:schemeClr val="lt1"/>
+      </a:fontRef>
+    </dgm:style>
+  </dgm:styleLbl>
+  <dgm:styleLbl name="fgSibTrans2D1">
+    <dgm:scene3d>
+      <a:camera prst="orthographicFront"/>
+      <a:lightRig rig="threePt" dir="t"/>
+    </dgm:scene3d>
+    <dgm:sp3d/>
+    <dgm:txPr/>
+    <dgm:style>
+      <a:lnRef idx="0">
+        <a:scrgbClr r="0" g="0" b="0"/>
+      </a:lnRef>
+      <a:fillRef idx="3">
+        <a:scrgbClr r="0" g="0" b="0"/>
+      </a:fillRef>
+      <a:effectRef idx="2">
+        <a:scrgbClr r="0" g="0" b="0"/>
+      </a:effectRef>
+      <a:fontRef idx="minor">
+        <a:schemeClr val="lt1"/>
+      </a:fontRef>
+    </dgm:style>
+  </dgm:styleLbl>
+  <dgm:styleLbl name="bgSibTrans2D1">
+    <dgm:scene3d>
+      <a:camera prst="orthographicFront"/>
+      <a:lightRig rig="threePt" dir="t"/>
+    </dgm:scene3d>
+    <dgm:sp3d/>
+    <dgm:txPr/>
+    <dgm:style>
+      <a:lnRef idx="0">
+        <a:scrgbClr r="0" g="0" b="0"/>
+      </a:lnRef>
+      <a:fillRef idx="3">
+        <a:scrgbClr r="0" g="0" b="0"/>
+      </a:fillRef>
+      <a:effectRef idx="2">
+        <a:scrgbClr r="0" g="0" b="0"/>
+      </a:effectRef>
+      <a:fontRef idx="minor">
+        <a:schemeClr val="lt1"/>
+      </a:fontRef>
+    </dgm:style>
+  </dgm:styleLbl>
+  <dgm:styleLbl name="sibTrans1D1">
+    <dgm:scene3d>
+      <a:camera prst="orthographicFront"/>
+      <a:lightRig rig="threePt" dir="t"/>
+    </dgm:scene3d>
+    <dgm:sp3d/>
+    <dgm:txPr/>
+    <dgm:style>
+      <a:lnRef idx="1">
+        <a:scrgbClr r="0" g="0" b="0"/>
+      </a:lnRef>
+      <a:fillRef idx="0">
+        <a:scrgbClr r="0" g="0" b="0"/>
+      </a:fillRef>
+      <a:effectRef idx="0">
+        <a:scrgbClr r="0" g="0" b="0"/>
+      </a:effectRef>
+      <a:fontRef idx="minor"/>
+    </dgm:style>
+  </dgm:styleLbl>
+  <dgm:styleLbl name="callout">
+    <dgm:scene3d>
+      <a:camera prst="orthographicFront"/>
+      <a:lightRig rig="threePt" dir="t"/>
+    </dgm:scene3d>
+    <dgm:sp3d/>
+    <dgm:txPr/>
+    <dgm:style>
+      <a:lnRef idx="2">
+        <a:scrgbClr r="0" g="0" b="0"/>
+      </a:lnRef>
+      <a:fillRef idx="1">
+        <a:scrgbClr r="0" g="0" b="0"/>
+      </a:fillRef>
+      <a:effectRef idx="1">
+        <a:scrgbClr r="0" g="0" b="0"/>
+      </a:effectRef>
+      <a:fontRef idx="minor"/>
+    </dgm:style>
+  </dgm:styleLbl>
+  <dgm:styleLbl name="asst0">
+    <dgm:scene3d>
+      <a:camera prst="orthographicFront"/>
+      <a:lightRig rig="threePt" dir="t"/>
+    </dgm:scene3d>
+    <dgm:sp3d/>
+    <dgm:txPr/>
+    <dgm:style>
+      <a:lnRef idx="0">
+        <a:scrgbClr r="0" g="0" b="0"/>
+      </a:lnRef>
+      <a:fillRef idx="3">
+        <a:scrgbClr r="0" g="0" b="0"/>
+      </a:fillRef>
+      <a:effectRef idx="2">
+        <a:scrgbClr r="0" g="0" b="0"/>
+      </a:effectRef>
+      <a:fontRef idx="minor">
+        <a:schemeClr val="lt1"/>
+      </a:fontRef>
+    </dgm:style>
+  </dgm:styleLbl>
+  <dgm:styleLbl name="asst1">
+    <dgm:scene3d>
+      <a:camera prst="orthographicFront"/>
+      <a:lightRig rig="threePt" dir="t"/>
+    </dgm:scene3d>
+    <dgm:sp3d/>
+    <dgm:txPr/>
+    <dgm:style>
+      <a:lnRef idx="0">
+        <a:scrgbClr r="0" g="0" b="0"/>
+      </a:lnRef>
+      <a:fillRef idx="3">
+        <a:scrgbClr r="0" g="0" b="0"/>
+      </a:fillRef>
+      <a:effectRef idx="2">
+        <a:scrgbClr r="0" g="0" b="0"/>
+      </a:effectRef>
+      <a:fontRef idx="minor">
+        <a:schemeClr val="lt1"/>
+      </a:fontRef>
+    </dgm:style>
+  </dgm:styleLbl>
+  <dgm:styleLbl name="asst2">
+    <dgm:scene3d>
+      <a:camera prst="orthographicFront"/>
+      <a:lightRig rig="threePt" dir="t"/>
+    </dgm:scene3d>
+    <dgm:sp3d/>
+    <dgm:txPr/>
+    <dgm:style>
+      <a:lnRef idx="0">
+        <a:scrgbClr r="0" g="0" b="0"/>
+      </a:lnRef>
+      <a:fillRef idx="3">
+        <a:scrgbClr r="0" g="0" b="0"/>
+      </a:fillRef>
+      <a:effectRef idx="2">
+        <a:scrgbClr r="0" g="0" b="0"/>
+      </a:effectRef>
+      <a:fontRef idx="minor">
+        <a:schemeClr val="lt1"/>
+      </a:fontRef>
+    </dgm:style>
+  </dgm:styleLbl>
+  <dgm:styleLbl name="asst3">
+    <dgm:scene3d>
+      <a:camera prst="orthographicFront"/>
+      <a:lightRig rig="threePt" dir="t"/>
+    </dgm:scene3d>
+    <dgm:sp3d/>
+    <dgm:txPr/>
+    <dgm:style>
+      <a:lnRef idx="0">
+        <a:scrgbClr r="0" g="0" b="0"/>
+      </a:lnRef>
+      <a:fillRef idx="3">
+        <a:scrgbClr r="0" g="0" b="0"/>
+      </a:fillRef>
+      <a:effectRef idx="2">
+        <a:scrgbClr r="0" g="0" b="0"/>
+      </a:effectRef>
+      <a:fontRef idx="minor">
+        <a:schemeClr val="lt1"/>
+      </a:fontRef>
+    </dgm:style>
+  </dgm:styleLbl>
+  <dgm:styleLbl name="asst4">
+    <dgm:scene3d>
+      <a:camera prst="orthographicFront"/>
+      <a:lightRig rig="threePt" dir="t"/>
+    </dgm:scene3d>
+    <dgm:sp3d/>
+    <dgm:txPr/>
+    <dgm:style>
+      <a:lnRef idx="0">
+        <a:scrgbClr r="0" g="0" b="0"/>
+      </a:lnRef>
+      <a:fillRef idx="3">
+        <a:scrgbClr r="0" g="0" b="0"/>
+      </a:fillRef>
+      <a:effectRef idx="2">
+        <a:scrgbClr r="0" g="0" b="0"/>
+      </a:effectRef>
+      <a:fontRef idx="minor">
+        <a:schemeClr val="lt1"/>
+      </a:fontRef>
+    </dgm:style>
+  </dgm:styleLbl>
+  <dgm:styleLbl name="parChTrans2D1">
+    <dgm:scene3d>
+      <a:camera prst="orthographicFront"/>
+      <a:lightRig rig="threePt" dir="t"/>
+    </dgm:scene3d>
+    <dgm:sp3d/>
+    <dgm:txPr/>
+    <dgm:style>
+      <a:lnRef idx="0">
+        <a:scrgbClr r="0" g="0" b="0"/>
+      </a:lnRef>
+      <a:fillRef idx="3">
+        <a:scrgbClr r="0" g="0" b="0"/>
+      </a:fillRef>
+      <a:effectRef idx="2">
+        <a:scrgbClr r="0" g="0" b="0"/>
+      </a:effectRef>
+      <a:fontRef idx="minor">
+        <a:schemeClr val="lt1"/>
+      </a:fontRef>
+    </dgm:style>
+  </dgm:styleLbl>
+  <dgm:styleLbl name="parChTrans2D2">
+    <dgm:scene3d>
+      <a:camera prst="orthographicFront"/>
+      <a:lightRig rig="threePt" dir="t"/>
+    </dgm:scene3d>
+    <dgm:sp3d/>
+    <dgm:txPr/>
+    <dgm:style>
+      <a:lnRef idx="0">
+        <a:scrgbClr r="0" g="0" b="0"/>
+      </a:lnRef>
+      <a:fillRef idx="3">
+        <a:scrgbClr r="0" g="0" b="0"/>
+      </a:fillRef>
+      <a:effectRef idx="2">
+        <a:scrgbClr r="0" g="0" b="0"/>
+      </a:effectRef>
+      <a:fontRef idx="minor">
+        <a:schemeClr val="lt1"/>
+      </a:fontRef>
+    </dgm:style>
+  </dgm:styleLbl>
+  <dgm:styleLbl name="parChTrans2D3">
+    <dgm:scene3d>
+      <a:camera prst="orthographicFront"/>
+      <a:lightRig rig="threePt" dir="t"/>
+    </dgm:scene3d>
+    <dgm:sp3d/>
+    <dgm:txPr/>
+    <dgm:style>
+      <a:lnRef idx="1">
+        <a:scrgbClr r="0" g="0" b="0"/>
+      </a:lnRef>
+      <a:fillRef idx="3">
+        <a:scrgbClr r="0" g="0" b="0"/>
+      </a:fillRef>
+      <a:effectRef idx="2">
+        <a:scrgbClr r="0" g="0" b="0"/>
+      </a:effectRef>
+      <a:fontRef idx="minor">
+        <a:schemeClr val="lt1"/>
+      </a:fontRef>
+    </dgm:style>
+  </dgm:styleLbl>
+  <dgm:styleLbl name="parChTrans2D4">
+    <dgm:scene3d>
+      <a:camera prst="orthographicFront"/>
+      <a:lightRig rig="threePt" dir="t"/>
+    </dgm:scene3d>
+    <dgm:sp3d/>
+    <dgm:txPr/>
+    <dgm:style>
+      <a:lnRef idx="1">
+        <a:scrgbClr r="0" g="0" b="0"/>
+      </a:lnRef>
+      <a:fillRef idx="3">
+        <a:scrgbClr r="0" g="0" b="0"/>
+      </a:fillRef>
+      <a:effectRef idx="2">
+        <a:scrgbClr r="0" g="0" b="0"/>
+      </a:effectRef>
+      <a:fontRef idx="minor">
+        <a:schemeClr val="lt1"/>
+      </a:fontRef>
+    </dgm:style>
+  </dgm:styleLbl>
+  <dgm:styleLbl name="parChTrans1D1">
+    <dgm:scene3d>
+      <a:camera prst="orthographicFront"/>
+      <a:lightRig rig="threePt" dir="t"/>
+    </dgm:scene3d>
+    <dgm:sp3d/>
+    <dgm:txPr/>
+    <dgm:style>
+      <a:lnRef idx="1">
+        <a:scrgbClr r="0" g="0" b="0"/>
+      </a:lnRef>
+      <a:fillRef idx="0">
+        <a:scrgbClr r="0" g="0" b="0"/>
+      </a:fillRef>
+      <a:effectRef idx="0">
+        <a:scrgbClr r="0" g="0" b="0"/>
+      </a:effectRef>
+      <a:fontRef idx="minor"/>
+    </dgm:style>
+  </dgm:styleLbl>
+  <dgm:styleLbl name="parChTrans1D2">
+    <dgm:scene3d>
+      <a:camera prst="orthographicFront"/>
+      <a:lightRig rig="threePt" dir="t"/>
+    </dgm:scene3d>
+    <dgm:sp3d/>
+    <dgm:txPr/>
+    <dgm:style>
+      <a:lnRef idx="1">
+        <a:scrgbClr r="0" g="0" b="0"/>
+      </a:lnRef>
+      <a:fillRef idx="0">
+        <a:scrgbClr r="0" g="0" b="0"/>
+      </a:fillRef>
+      <a:effectRef idx="0">
+        <a:scrgbClr r="0" g="0" b="0"/>
+      </a:effectRef>
+      <a:fontRef idx="minor"/>
+    </dgm:style>
+  </dgm:styleLbl>
+  <dgm:styleLbl name="parChTrans1D3">
+    <dgm:scene3d>
+      <a:camera prst="orthographicFront"/>
+      <a:lightRig rig="threePt" dir="t"/>
+    </dgm:scene3d>
+    <dgm:sp3d/>
+    <dgm:txPr/>
+    <dgm:style>
+      <a:lnRef idx="1">
+        <a:scrgbClr r="0" g="0" b="0"/>
+      </a:lnRef>
+      <a:fillRef idx="0">
+        <a:scrgbClr r="0" g="0" b="0"/>
+      </a:fillRef>
+      <a:effectRef idx="0">
+        <a:scrgbClr r="0" g="0" b="0"/>
+      </a:effectRef>
+      <a:fontRef idx="minor"/>
+    </dgm:style>
+  </dgm:styleLbl>
+  <dgm:styleLbl name="parChTrans1D4">
+    <dgm:scene3d>
+      <a:camera prst="orthographicFront"/>
+      <a:lightRig rig="threePt" dir="t"/>
+    </dgm:scene3d>
+    <dgm:sp3d/>
+    <dgm:txPr/>
+    <dgm:style>
+      <a:lnRef idx="1">
+        <a:scrgbClr r="0" g="0" b="0"/>
+      </a:lnRef>
+      <a:fillRef idx="0">
+        <a:scrgbClr r="0" g="0" b="0"/>
+      </a:fillRef>
+      <a:effectRef idx="0">
+        <a:scrgbClr r="0" g="0" b="0"/>
+      </a:effectRef>
+      <a:fontRef idx="minor"/>
+    </dgm:style>
+  </dgm:styleLbl>
+  <dgm:styleLbl name="fgAcc1">
+    <dgm:scene3d>
+      <a:camera prst="orthographicFront"/>
+      <a:lightRig rig="threePt" dir="t"/>
+    </dgm:scene3d>
+    <dgm:sp3d/>
+    <dgm:txPr/>
+    <dgm:style>
+      <a:lnRef idx="1">
+        <a:scrgbClr r="0" g="0" b="0"/>
+      </a:lnRef>
+      <a:fillRef idx="1">
+        <a:scrgbClr r="0" g="0" b="0"/>
+      </a:fillRef>
+      <a:effectRef idx="0">
+        <a:scrgbClr r="0" g="0" b="0"/>
+      </a:effectRef>
+      <a:fontRef idx="minor"/>
+    </dgm:style>
+  </dgm:styleLbl>
+  <dgm:styleLbl name="conFgAcc1">
+    <dgm:scene3d>
+      <a:camera prst="orthographicFront"/>
+      <a:lightRig rig="threePt" dir="t"/>
+    </dgm:scene3d>
+    <dgm:sp3d/>
+    <dgm:txPr/>
+    <dgm:style>
+      <a:lnRef idx="1">
+        <a:scrgbClr r="0" g="0" b="0"/>
+      </a:lnRef>
+      <a:fillRef idx="1">
+        <a:scrgbClr r="0" g="0" b="0"/>
+      </a:fillRef>
+      <a:effectRef idx="0">
+        <a:scrgbClr r="0" g="0" b="0"/>
+      </a:effectRef>
+      <a:fontRef idx="minor"/>
+    </dgm:style>
+  </dgm:styleLbl>
+  <dgm:styleLbl name="alignAcc1">
+    <dgm:scene3d>
+      <a:camera prst="orthographicFront"/>
+      <a:lightRig rig="threePt" dir="t"/>
+    </dgm:scene3d>
+    <dgm:sp3d/>
+    <dgm:txPr/>
+    <dgm:style>
+      <a:lnRef idx="1">
+        <a:scrgbClr r="0" g="0" b="0"/>
+      </a:lnRef>
+      <a:fillRef idx="1">
+        <a:scrgbClr r="0" g="0" b="0"/>
+      </a:fillRef>
+      <a:effectRef idx="0">
+        <a:scrgbClr r="0" g="0" b="0"/>
+      </a:effectRef>
+      <a:fontRef idx="minor"/>
+    </dgm:style>
+  </dgm:styleLbl>
+  <dgm:styleLbl name="trAlignAcc1">
+    <dgm:scene3d>
+      <a:camera prst="orthographicFront"/>
+      <a:lightRig rig="threePt" dir="t"/>
+    </dgm:scene3d>
+    <dgm:sp3d/>
+    <dgm:txPr/>
+    <dgm:style>
+      <a:lnRef idx="1">
+        <a:scrgbClr r="0" g="0" b="0"/>
+      </a:lnRef>
+      <a:fillRef idx="1">
+        <a:scrgbClr r="0" g="0" b="0"/>
+      </a:fillRef>
+      <a:effectRef idx="0">
+        <a:scrgbClr r="0" g="0" b="0"/>
+      </a:effectRef>
+      <a:fontRef idx="minor"/>
+    </dgm:style>
+  </dgm:styleLbl>
+  <dgm:styleLbl name="bgAcc1">
+    <dgm:scene3d>
+      <a:camera prst="orthographicFront"/>
+      <a:lightRig rig="threePt" dir="t"/>
+    </dgm:scene3d>
+    <dgm:sp3d/>
+    <dgm:txPr/>
+    <dgm:style>
+      <a:lnRef idx="1">
+        <a:scrgbClr r="0" g="0" b="0"/>
+      </a:lnRef>
+      <a:fillRef idx="1">
+        <a:scrgbClr r="0" g="0" b="0"/>
+      </a:fillRef>
+      <a:effectRef idx="0">
+        <a:scrgbClr r="0" g="0" b="0"/>
+      </a:effectRef>
+      <a:fontRef idx="minor"/>
+    </dgm:style>
+  </dgm:styleLbl>
+  <dgm:styleLbl name="solidFgAcc1">
+    <dgm:scene3d>
+      <a:camera prst="orthographicFront"/>
+      <a:lightRig rig="threePt" dir="t"/>
+    </dgm:scene3d>
+    <dgm:sp3d/>
+    <dgm:txPr/>
+    <dgm:style>
+      <a:lnRef idx="1">
+        <a:scrgbClr r="0" g="0" b="0"/>
+      </a:lnRef>
+      <a:fillRef idx="1">
+        <a:scrgbClr r="0" g="0" b="0"/>
+      </a:fillRef>
+      <a:effectRef idx="0">
+        <a:scrgbClr r="0" g="0" b="0"/>
+      </a:effectRef>
+      <a:fontRef idx="minor"/>
+    </dgm:style>
+  </dgm:styleLbl>
+  <dgm:styleLbl name="solidAlignAcc1">
+    <dgm:scene3d>
+      <a:camera prst="orthographicFront"/>
+      <a:lightRig rig="threePt" dir="t"/>
+    </dgm:scene3d>
+    <dgm:sp3d/>
+    <dgm:txPr/>
+    <dgm:style>
+      <a:lnRef idx="1">
+        <a:scrgbClr r="0" g="0" b="0"/>
+      </a:lnRef>
+      <a:fillRef idx="1">
+        <a:scrgbClr r="0" g="0" b="0"/>
+      </a:fillRef>
+      <a:effectRef idx="0">
+        <a:scrgbClr r="0" g="0" b="0"/>
+      </a:effectRef>
+      <a:fontRef idx="minor"/>
+    </dgm:style>
+  </dgm:styleLbl>
+  <dgm:styleLbl name="solidBgAcc1">
+    <dgm:scene3d>
+      <a:camera prst="orthographicFront"/>
+      <a:lightRig rig="threePt" dir="t"/>
+    </dgm:scene3d>
+    <dgm:sp3d/>
+    <dgm:txPr/>
+    <dgm:style>
+      <a:lnRef idx="1">
+        <a:scrgbClr r="0" g="0" b="0"/>
+      </a:lnRef>
+      <a:fillRef idx="1">
+        <a:scrgbClr r="0" g="0" b="0"/>
+      </a:fillRef>
+      <a:effectRef idx="0">
+        <a:scrgbClr r="0" g="0" b="0"/>
+      </a:effectRef>
+      <a:fontRef idx="minor"/>
+    </dgm:style>
+  </dgm:styleLbl>
+  <dgm:styleLbl name="fgAccFollowNode1">
+    <dgm:scene3d>
+      <a:camera prst="orthographicFront"/>
+      <a:lightRig rig="threePt" dir="t"/>
+    </dgm:scene3d>
+    <dgm:sp3d/>
+    <dgm:txPr/>
+    <dgm:style>
+      <a:lnRef idx="1">
+        <a:scrgbClr r="0" g="0" b="0"/>
+      </a:lnRef>
+      <a:fillRef idx="1">
+        <a:scrgbClr r="0" g="0" b="0"/>
+      </a:fillRef>
+      <a:effectRef idx="0">
+        <a:scrgbClr r="0" g="0" b="0"/>
+      </a:effectRef>
+      <a:fontRef idx="minor"/>
+    </dgm:style>
+  </dgm:styleLbl>
+  <dgm:styleLbl name="alignAccFollowNode1">
+    <dgm:scene3d>
+      <a:camera prst="orthographicFront"/>
+      <a:lightRig rig="threePt" dir="t"/>
+    </dgm:scene3d>
+    <dgm:sp3d/>
+    <dgm:txPr/>
+    <dgm:style>
+      <a:lnRef idx="1">
+        <a:scrgbClr r="0" g="0" b="0"/>
+      </a:lnRef>
+      <a:fillRef idx="1">
+        <a:scrgbClr r="0" g="0" b="0"/>
+      </a:fillRef>
+      <a:effectRef idx="0">
+        <a:scrgbClr r="0" g="0" b="0"/>
+      </a:effectRef>
+      <a:fontRef idx="minor"/>
+    </dgm:style>
+  </dgm:styleLbl>
+  <dgm:styleLbl name="bgAccFollowNode1">
+    <dgm:scene3d>
+      <a:camera prst="orthographicFront"/>
+      <a:lightRig rig="threePt" dir="t"/>
+    </dgm:scene3d>
+    <dgm:sp3d/>
+    <dgm:txPr/>
+    <dgm:style>
+      <a:lnRef idx="1">
+        <a:scrgbClr r="0" g="0" b="0"/>
+      </a:lnRef>
+      <a:fillRef idx="1">
+        <a:scrgbClr r="0" g="0" b="0"/>
+      </a:fillRef>
+      <a:effectRef idx="0">
+        <a:scrgbClr r="0" g="0" b="0"/>
+      </a:effectRef>
+      <a:fontRef idx="minor"/>
+    </dgm:style>
+  </dgm:styleLbl>
+  <dgm:styleLbl name="fgAcc0">
+    <dgm:scene3d>
+      <a:camera prst="orthographicFront"/>
+      <a:lightRig rig="threePt" dir="t"/>
+    </dgm:scene3d>
+    <dgm:sp3d/>
+    <dgm:txPr/>
+    <dgm:style>
+      <a:lnRef idx="1">
+        <a:scrgbClr r="0" g="0" b="0"/>
+      </a:lnRef>
+      <a:fillRef idx="1">
+        <a:scrgbClr r="0" g="0" b="0"/>
+      </a:fillRef>
+      <a:effectRef idx="0">
+        <a:scrgbClr r="0" g="0" b="0"/>
+      </a:effectRef>
+      <a:fontRef idx="minor"/>
+    </dgm:style>
+  </dgm:styleLbl>
+  <dgm:styleLbl name="fgAcc2">
+    <dgm:scene3d>
+      <a:camera prst="orthographicFront"/>
+      <a:lightRig rig="threePt" dir="t"/>
+    </dgm:scene3d>
+    <dgm:sp3d/>
+    <dgm:txPr/>
+    <dgm:style>
+      <a:lnRef idx="1">
+        <a:scrgbClr r="0" g="0" b="0"/>
+      </a:lnRef>
+      <a:fillRef idx="1">
+        <a:scrgbClr r="0" g="0" b="0"/>
+      </a:fillRef>
+      <a:effectRef idx="0">
+        <a:scrgbClr r="0" g="0" b="0"/>
+      </a:effectRef>
+      <a:fontRef idx="minor"/>
+    </dgm:style>
+  </dgm:styleLbl>
+  <dgm:styleLbl name="fgAcc3">
+    <dgm:scene3d>
+      <a:camera prst="orthographicFront"/>
+      <a:lightRig rig="threePt" dir="t"/>
+    </dgm:scene3d>
+    <dgm:sp3d/>
+    <dgm:txPr/>
+    <dgm:style>
+      <a:lnRef idx="1">
+        <a:scrgbClr r="0" g="0" b="0"/>
+      </a:lnRef>
+      <a:fillRef idx="1">
+        <a:scrgbClr r="0" g="0" b="0"/>
+      </a:fillRef>
+      <a:effectRef idx="0">
+        <a:scrgbClr r="0" g="0" b="0"/>
+      </a:effectRef>
+      <a:fontRef idx="minor"/>
+    </dgm:style>
+  </dgm:styleLbl>
+  <dgm:styleLbl name="fgAcc4">
+    <dgm:scene3d>
+      <a:camera prst="orthographicFront"/>
+      <a:lightRig rig="threePt" dir="t"/>
+    </dgm:scene3d>
+    <dgm:sp3d/>
+    <dgm:txPr/>
+    <dgm:style>
+      <a:lnRef idx="1">
+        <a:scrgbClr r="0" g="0" b="0"/>
+      </a:lnRef>
+      <a:fillRef idx="1">
+        <a:scrgbClr r="0" g="0" b="0"/>
+      </a:fillRef>
+      <a:effectRef idx="0">
+        <a:scrgbClr r="0" g="0" b="0"/>
+      </a:effectRef>
+      <a:fontRef idx="minor"/>
+    </dgm:style>
+  </dgm:styleLbl>
+  <dgm:styleLbl name="bgShp">
+    <dgm:scene3d>
+      <a:camera prst="orthographicFront"/>
+      <a:lightRig rig="threePt" dir="t"/>
+    </dgm:scene3d>
+    <dgm:sp3d/>
+    <dgm:txPr/>
+    <dgm:style>
+      <a:lnRef idx="0">
+        <a:scrgbClr r="0" g="0" b="0"/>
+      </a:lnRef>
+      <a:fillRef idx="1">
+        <a:scrgbClr r="0" g="0" b="0"/>
+      </a:fillRef>
+      <a:effectRef idx="2">
+        <a:scrgbClr r="0" g="0" b="0"/>
+      </a:effectRef>
+      <a:fontRef idx="minor"/>
+    </dgm:style>
+  </dgm:styleLbl>
+  <dgm:styleLbl name="dkBgShp">
+    <dgm:scene3d>
+      <a:camera prst="orthographicFront"/>
+      <a:lightRig rig="threePt" dir="t"/>
+    </dgm:scene3d>
+    <dgm:sp3d/>
+    <dgm:txPr/>
+    <dgm:style>
+      <a:lnRef idx="0">
+        <a:scrgbClr r="0" g="0" b="0"/>
+      </a:lnRef>
+      <a:fillRef idx="1">
+        <a:scrgbClr r="0" g="0" b="0"/>
+      </a:fillRef>
+      <a:effectRef idx="2">
+        <a:scrgbClr r="0" g="0" b="0"/>
+      </a:effectRef>
+      <a:fontRef idx="minor"/>
+    </dgm:style>
+  </dgm:styleLbl>
+  <dgm:styleLbl name="trBgShp">
+    <dgm:scene3d>
+      <a:camera prst="orthographicFront"/>
+      <a:lightRig rig="threePt" dir="t"/>
+    </dgm:scene3d>
+    <dgm:sp3d/>
+    <dgm:txPr/>
+    <dgm:style>
+      <a:lnRef idx="0">
+        <a:scrgbClr r="0" g="0" b="0"/>
+      </a:lnRef>
+      <a:fillRef idx="1">
+        <a:scrgbClr r="0" g="0" b="0"/>
+      </a:fillRef>
+      <a:effectRef idx="0">
+        <a:scrgbClr r="0" g="0" b="0"/>
+      </a:effectRef>
+      <a:fontRef idx="minor"/>
+    </dgm:style>
+  </dgm:styleLbl>
+  <dgm:styleLbl name="fgShp">
+    <dgm:scene3d>
+      <a:camera prst="orthographicFront"/>
+      <a:lightRig rig="threePt" dir="t"/>
+    </dgm:scene3d>
+    <dgm:sp3d/>
+    <dgm:txPr/>
+    <dgm:style>
+      <a:lnRef idx="0">
+        <a:scrgbClr r="0" g="0" b="0"/>
+      </a:lnRef>
+      <a:fillRef idx="3">
+        <a:scrgbClr r="0" g="0" b="0"/>
+      </a:fillRef>
+      <a:effectRef idx="2">
+        <a:scrgbClr r="0" g="0" b="0"/>
+      </a:effectRef>
+      <a:fontRef idx="minor"/>
+    </dgm:style>
+  </dgm:styleLbl>
+  <dgm:styleLbl name="revTx">
+    <dgm:scene3d>
+      <a:camera prst="orthographicFront"/>
+      <a:lightRig rig="threePt" dir="t"/>
+    </dgm:scene3d>
+    <dgm:sp3d/>
+    <dgm:txPr/>
+    <dgm:style>
+      <a:lnRef idx="0">
+        <a:scrgbClr r="0" g="0" b="0"/>
+      </a:lnRef>
+      <a:fillRef idx="0">
+        <a:scrgbClr r="0" g="0" b="0"/>
+      </a:fillRef>
+      <a:effectRef idx="0">
+        <a:scrgbClr r="0" g="0" b="0"/>
+      </a:effectRef>
+      <a:fontRef idx="minor"/>
+    </dgm:style>
+  </dgm:styleLbl>
+</dgm:styleDef>
+</file>
+
+<file path=ppt/diagrams/quickStyle2.xml><?xml version="1.0" encoding="utf-8"?>
 <dgm:styleDef xmlns:dgm="http://schemas.openxmlformats.org/drawingml/2006/diagram" xmlns:a="http://schemas.openxmlformats.org/drawingml/2006/main" uniqueId="urn:microsoft.com/office/officeart/2005/8/quickstyle/simple1">
   <dgm:title val=""/>
   <dgm:desc val=""/>
@@ -5840,7 +10002,7 @@
 </dgm:styleDef>
 </file>
 
-<file path=ppt/diagrams/quickStyle2.xml><?xml version="1.0" encoding="utf-8"?>
+<file path=ppt/diagrams/quickStyle3.xml><?xml version="1.0" encoding="utf-8"?>
 <dgm:styleDef xmlns:dgm="http://schemas.openxmlformats.org/drawingml/2006/diagram" xmlns:a="http://schemas.openxmlformats.org/drawingml/2006/main" uniqueId="urn:microsoft.com/office/officeart/2005/8/quickstyle/simple1">
   <dgm:title val=""/>
   <dgm:desc val=""/>
@@ -13286,7 +17448,7 @@
         <p:spPr>
           <a:xfrm>
             <a:off x="1112363" y="2650171"/>
-            <a:ext cx="3633250" cy="1477328"/>
+            <a:ext cx="3633250" cy="2585323"/>
           </a:xfrm>
           <a:prstGeom prst="rect">
             <a:avLst/>
@@ -13324,7 +17486,7 @@
             </a:pPr>
             <a:r>
               <a:rPr lang="fr-FR" dirty="0"/>
-              <a:t>Quel est le maximum, le minimum?</a:t>
+              <a:t>Quel est le maximum, le minimum, le mode?</a:t>
             </a:r>
           </a:p>
           <a:p>
@@ -13334,7 +17496,73 @@
             </a:pPr>
             <a:r>
               <a:rPr lang="fr-FR" dirty="0"/>
-              <a:t>Quelle est la progression?</a:t>
+              <a:t>Quelle est la progression de la fréquence de ma grandeur?</a:t>
+            </a:r>
+          </a:p>
+          <a:p>
+            <a:pPr marL="285750" indent="-285750">
+              <a:buFontTx/>
+              <a:buChar char="-"/>
+            </a:pPr>
+            <a:r>
+              <a:rPr lang="fr-FR" dirty="0"/>
+              <a:t>Est-ce –que ma(mes) variable(s) suit (vent) une loi connue?</a:t>
+            </a:r>
+          </a:p>
+        </p:txBody>
+      </p:sp>
+      <p:sp>
+        <p:nvSpPr>
+          <p:cNvPr id="5" name="Rectangle 4">
+            <a:extLst>
+              <a:ext uri="{FF2B5EF4-FFF2-40B4-BE49-F238E27FC236}">
+                <a16:creationId xmlns:a16="http://schemas.microsoft.com/office/drawing/2014/main" id="{D5926034-D9D2-2A7D-F5B7-A52F3DD05632}"/>
+              </a:ext>
+            </a:extLst>
+          </p:cNvPr>
+          <p:cNvSpPr/>
+          <p:nvPr/>
+        </p:nvSpPr>
+        <p:spPr>
+          <a:xfrm>
+            <a:off x="1051384" y="5282029"/>
+            <a:ext cx="3633250" cy="635274"/>
+          </a:xfrm>
+          <a:prstGeom prst="rect">
+            <a:avLst/>
+          </a:prstGeom>
+          <a:solidFill>
+            <a:schemeClr val="bg2"/>
+          </a:solidFill>
+        </p:spPr>
+        <p:style>
+          <a:lnRef idx="2">
+            <a:schemeClr val="accent1">
+              <a:shade val="50000"/>
+            </a:schemeClr>
+          </a:lnRef>
+          <a:fillRef idx="1">
+            <a:schemeClr val="accent1"/>
+          </a:fillRef>
+          <a:effectRef idx="0">
+            <a:schemeClr val="accent1"/>
+          </a:effectRef>
+          <a:fontRef idx="minor">
+            <a:schemeClr val="lt1"/>
+          </a:fontRef>
+        </p:style>
+        <p:txBody>
+          <a:bodyPr rtlCol="0" anchor="ctr"/>
+          <a:lstStyle/>
+          <a:p>
+            <a:pPr algn="ctr"/>
+            <a:r>
+              <a:rPr lang="fr-FR" dirty="0">
+                <a:solidFill>
+                  <a:schemeClr val="tx1"/>
+                </a:solidFill>
+              </a:rPr>
+              <a:t>Variables quantitatives continues</a:t>
             </a:r>
           </a:p>
         </p:txBody>
@@ -13392,7 +17620,7 @@
           <a:p>
             <a:r>
               <a:rPr lang="fr-FR" dirty="0"/>
-              <a:t>5- L’ histoire? – Cas d’une comparaison</a:t>
+              <a:t>5- L’ histoire – Cas d’une comparaison</a:t>
             </a:r>
           </a:p>
         </p:txBody>
@@ -13456,8 +17684,8 @@
         </p:blipFill>
         <p:spPr>
           <a:xfrm>
-            <a:off x="749029" y="3667027"/>
-            <a:ext cx="10700425" cy="2581373"/>
+            <a:off x="745787" y="3450946"/>
+            <a:ext cx="10700425" cy="1830259"/>
           </a:xfrm>
         </p:spPr>
       </p:pic>
@@ -13476,7 +17704,7 @@
         <p:spPr>
           <a:xfrm>
             <a:off x="1112363" y="2650171"/>
-            <a:ext cx="11161336" cy="646331"/>
+            <a:ext cx="9947523" cy="646331"/>
           </a:xfrm>
           <a:prstGeom prst="rect">
             <a:avLst/>
@@ -13497,7 +17725,63 @@
           <a:p>
             <a:r>
               <a:rPr lang="fr-FR" dirty="0"/>
-              <a:t>Quel est le groupe le plus/ le moins (grand, favorable, productif….)</a:t>
+              <a:t>Quel est le groupe ou la période  le (la) plus/ le moins (grand, favorable, productif….)?</a:t>
+            </a:r>
+          </a:p>
+        </p:txBody>
+      </p:sp>
+      <p:sp>
+        <p:nvSpPr>
+          <p:cNvPr id="8" name="Rectangle 7">
+            <a:extLst>
+              <a:ext uri="{FF2B5EF4-FFF2-40B4-BE49-F238E27FC236}">
+                <a16:creationId xmlns:a16="http://schemas.microsoft.com/office/drawing/2014/main" id="{1710F934-6A9F-DAAE-B5F2-E959BE3C0825}"/>
+              </a:ext>
+            </a:extLst>
+          </p:cNvPr>
+          <p:cNvSpPr/>
+          <p:nvPr/>
+        </p:nvSpPr>
+        <p:spPr>
+          <a:xfrm>
+            <a:off x="3310545" y="5307465"/>
+            <a:ext cx="5387140" cy="635274"/>
+          </a:xfrm>
+          <a:prstGeom prst="rect">
+            <a:avLst/>
+          </a:prstGeom>
+          <a:solidFill>
+            <a:schemeClr val="bg2"/>
+          </a:solidFill>
+        </p:spPr>
+        <p:style>
+          <a:lnRef idx="2">
+            <a:schemeClr val="accent1">
+              <a:shade val="50000"/>
+            </a:schemeClr>
+          </a:lnRef>
+          <a:fillRef idx="1">
+            <a:schemeClr val="accent1"/>
+          </a:fillRef>
+          <a:effectRef idx="0">
+            <a:schemeClr val="accent1"/>
+          </a:effectRef>
+          <a:fontRef idx="minor">
+            <a:schemeClr val="lt1"/>
+          </a:fontRef>
+        </p:style>
+        <p:txBody>
+          <a:bodyPr rtlCol="0" anchor="ctr"/>
+          <a:lstStyle/>
+          <a:p>
+            <a:pPr algn="ctr"/>
+            <a:r>
+              <a:rPr lang="fr-FR" dirty="0">
+                <a:solidFill>
+                  <a:schemeClr val="tx1"/>
+                </a:solidFill>
+              </a:rPr>
+              <a:t>Variables qualitatives ou séquences temporelles</a:t>
             </a:r>
           </a:p>
         </p:txBody>
@@ -13555,7 +17839,7 @@
           <a:p>
             <a:r>
               <a:rPr lang="fr-FR" dirty="0"/>
-              <a:t>5- L’histoire? – Cas d’une composition</a:t>
+              <a:t>5- L’histoire – Cas d’une composition</a:t>
             </a:r>
           </a:p>
         </p:txBody>
@@ -13619,7 +17903,7 @@
         </p:blipFill>
         <p:spPr>
           <a:xfrm>
-            <a:off x="787940" y="3429000"/>
+            <a:off x="852791" y="3015343"/>
             <a:ext cx="10486417" cy="2540000"/>
           </a:xfrm>
         </p:spPr>
@@ -13638,7 +17922,7 @@
         </p:nvSpPr>
         <p:spPr>
           <a:xfrm>
-            <a:off x="1131217" y="2505670"/>
+            <a:off x="1030664" y="2395834"/>
             <a:ext cx="11161336" cy="923330"/>
           </a:xfrm>
           <a:prstGeom prst="rect">
@@ -13675,6 +17959,62 @@
             <a:r>
               <a:rPr lang="fr-FR" dirty="0"/>
               <a:t>Qu’est ce qui est inclus/ exclu  de cet ensemble?</a:t>
+            </a:r>
+          </a:p>
+        </p:txBody>
+      </p:sp>
+      <p:sp>
+        <p:nvSpPr>
+          <p:cNvPr id="5" name="Rectangle 4">
+            <a:extLst>
+              <a:ext uri="{FF2B5EF4-FFF2-40B4-BE49-F238E27FC236}">
+                <a16:creationId xmlns:a16="http://schemas.microsoft.com/office/drawing/2014/main" id="{8BC5CDF0-4D4F-9A2B-4D96-1F5EAE939D53}"/>
+              </a:ext>
+            </a:extLst>
+          </p:cNvPr>
+          <p:cNvSpPr/>
+          <p:nvPr/>
+        </p:nvSpPr>
+        <p:spPr>
+          <a:xfrm>
+            <a:off x="3038402" y="5539578"/>
+            <a:ext cx="5387140" cy="635274"/>
+          </a:xfrm>
+          <a:prstGeom prst="rect">
+            <a:avLst/>
+          </a:prstGeom>
+          <a:solidFill>
+            <a:schemeClr val="bg2"/>
+          </a:solidFill>
+        </p:spPr>
+        <p:style>
+          <a:lnRef idx="2">
+            <a:schemeClr val="accent1">
+              <a:shade val="50000"/>
+            </a:schemeClr>
+          </a:lnRef>
+          <a:fillRef idx="1">
+            <a:schemeClr val="accent1"/>
+          </a:fillRef>
+          <a:effectRef idx="0">
+            <a:schemeClr val="accent1"/>
+          </a:effectRef>
+          <a:fontRef idx="minor">
+            <a:schemeClr val="lt1"/>
+          </a:fontRef>
+        </p:style>
+        <p:txBody>
+          <a:bodyPr rtlCol="0" anchor="ctr"/>
+          <a:lstStyle/>
+          <a:p>
+            <a:pPr algn="ctr"/>
+            <a:r>
+              <a:rPr lang="fr-FR" dirty="0">
+                <a:solidFill>
+                  <a:schemeClr val="tx1"/>
+                </a:solidFill>
+              </a:rPr>
+              <a:t>Variables quantitatives</a:t>
             </a:r>
           </a:p>
         </p:txBody>
@@ -13810,7 +18150,7 @@
         <p:spPr>
           <a:xfrm>
             <a:off x="1112363" y="2650171"/>
-            <a:ext cx="3949831" cy="1200329"/>
+            <a:ext cx="3949831" cy="1477328"/>
           </a:xfrm>
           <a:prstGeom prst="rect">
             <a:avLst/>
@@ -13835,7 +18175,7 @@
             </a:pPr>
             <a:r>
               <a:rPr lang="fr-FR" dirty="0"/>
-              <a:t>Quel est l’impact ou l’effet de X sur Y?</a:t>
+              <a:t>Quel est l’impact ou l’effet de X sur Y?(croissance où décroissance)</a:t>
             </a:r>
           </a:p>
           <a:p>
@@ -13856,6 +18196,62 @@
             <a:r>
               <a:rPr lang="fr-FR" dirty="0"/>
               <a:t>Est-ce que X est lié à Y?</a:t>
+            </a:r>
+          </a:p>
+        </p:txBody>
+      </p:sp>
+      <p:sp>
+        <p:nvSpPr>
+          <p:cNvPr id="5" name="Rectangle 4">
+            <a:extLst>
+              <a:ext uri="{FF2B5EF4-FFF2-40B4-BE49-F238E27FC236}">
+                <a16:creationId xmlns:a16="http://schemas.microsoft.com/office/drawing/2014/main" id="{736361B3-9794-0BAA-7B93-10508275C193}"/>
+              </a:ext>
+            </a:extLst>
+          </p:cNvPr>
+          <p:cNvSpPr/>
+          <p:nvPr/>
+        </p:nvSpPr>
+        <p:spPr>
+          <a:xfrm>
+            <a:off x="948346" y="5024436"/>
+            <a:ext cx="3949831" cy="635274"/>
+          </a:xfrm>
+          <a:prstGeom prst="rect">
+            <a:avLst/>
+          </a:prstGeom>
+          <a:solidFill>
+            <a:schemeClr val="bg2"/>
+          </a:solidFill>
+        </p:spPr>
+        <p:style>
+          <a:lnRef idx="2">
+            <a:schemeClr val="accent1">
+              <a:shade val="50000"/>
+            </a:schemeClr>
+          </a:lnRef>
+          <a:fillRef idx="1">
+            <a:schemeClr val="accent1"/>
+          </a:fillRef>
+          <a:effectRef idx="0">
+            <a:schemeClr val="accent1"/>
+          </a:effectRef>
+          <a:fontRef idx="minor">
+            <a:schemeClr val="lt1"/>
+          </a:fontRef>
+        </p:style>
+        <p:txBody>
+          <a:bodyPr rtlCol="0" anchor="ctr"/>
+          <a:lstStyle/>
+          <a:p>
+            <a:pPr algn="ctr"/>
+            <a:r>
+              <a:rPr lang="fr-FR" dirty="0">
+                <a:solidFill>
+                  <a:schemeClr val="tx1"/>
+                </a:solidFill>
+              </a:rPr>
+              <a:t>Variables quantitatives continues et qualitatives </a:t>
             </a:r>
           </a:p>
         </p:txBody>
@@ -13957,7 +18353,27 @@
                 <a:effectLst/>
                 <a:hlinkClick r:id="rId2"/>
               </a:rPr>
-              <a:t> Le graphique en radar</a:t>
+              <a:t> </a:t>
+            </a:r>
+            <a:r>
+              <a:rPr lang="fr-FR" i="0" u="none" strike="noStrike" dirty="0">
+                <a:solidFill>
+                  <a:srgbClr val="CC33CC"/>
+                </a:solidFill>
+                <a:effectLst/>
+                <a:hlinkClick r:id="rId3" action="ppaction://hlinksldjump"/>
+              </a:rPr>
+              <a:t>Le graphique en radar</a:t>
+            </a:r>
+            <a:r>
+              <a:rPr lang="fr-FR" i="0" u="none" strike="noStrike" dirty="0">
+                <a:solidFill>
+                  <a:srgbClr val="000000"/>
+                </a:solidFill>
+                <a:effectLst/>
+                <a:hlinkClick r:id="rId3" action="ppaction://hlinksldjump"/>
+              </a:rPr>
+              <a:t> </a:t>
             </a:r>
             <a:r>
               <a:rPr lang="fr-FR" i="0" u="none" strike="noStrike" dirty="0">
@@ -13966,7 +18382,7 @@
                 </a:solidFill>
                 <a:effectLst/>
               </a:rPr>
-              <a:t> et le </a:t>
+              <a:t>et le </a:t>
             </a:r>
             <a:r>
               <a:rPr lang="fr-FR" i="0" u="none" strike="noStrike" dirty="0">
@@ -13974,7 +18390,7 @@
                   <a:srgbClr val="CC33CC"/>
                 </a:solidFill>
                 <a:effectLst/>
-                <a:hlinkClick r:id="rId3"/>
+                <a:hlinkClick r:id="rId3" action="ppaction://hlinksldjump"/>
               </a:rPr>
               <a:t>graphique sémantique différentiel</a:t>
             </a:r>
@@ -13984,8 +18400,18 @@
                   <a:srgbClr val="000000"/>
                 </a:solidFill>
                 <a:effectLst/>
+                <a:hlinkClick r:id="rId3" action="ppaction://hlinksldjump"/>
               </a:rPr>
-              <a:t> en marketing et en psychologie. </a:t>
+              <a:t> </a:t>
+            </a:r>
+            <a:r>
+              <a:rPr lang="fr-FR" i="0" u="none" strike="noStrike" dirty="0">
+                <a:solidFill>
+                  <a:srgbClr val="000000"/>
+                </a:solidFill>
+                <a:effectLst/>
+              </a:rPr>
+              <a:t>en marketing et en psychologie. </a:t>
             </a:r>
           </a:p>
           <a:p>
@@ -14015,7 +18441,17 @@
                 <a:effectLst/>
                 <a:hlinkClick r:id="rId4"/>
               </a:rPr>
-              <a:t>suivi de la masse salariale</a:t>
+              <a:t>suivi </a:t>
+            </a:r>
+            <a:r>
+              <a:rPr lang="fr-FR" i="0" u="none" strike="noStrike" dirty="0">
+                <a:solidFill>
+                  <a:srgbClr val="CC33CC"/>
+                </a:solidFill>
+                <a:effectLst/>
+                <a:hlinkClick r:id="rId5" action="ppaction://hlinksldjump"/>
+              </a:rPr>
+              <a:t>de la masse salariale</a:t>
             </a:r>
             <a:endParaRPr lang="fr-FR" dirty="0">
               <a:solidFill>
@@ -14036,7 +18472,7 @@
             </a:r>
             <a:r>
               <a:rPr lang="fr-FR" dirty="0">
-                <a:hlinkClick r:id="rId5">
+                <a:hlinkClick r:id="rId6" action="ppaction://hlinksldjump">
                   <a:extLst>
                     <a:ext uri="{A12FA001-AC4F-418D-AE19-62706E023703}">
                       <ahyp:hlinkClr xmlns:ahyp="http://schemas.microsoft.com/office/drawing/2018/hyperlinkcolor" val="tx"/>
@@ -14073,7 +18509,7 @@
                   <a:srgbClr val="CC33CC"/>
                 </a:solidFill>
                 <a:effectLst/>
-                <a:hlinkClick r:id="rId6"/>
+                <a:hlinkClick r:id="rId7" action="ppaction://hlinksldjump"/>
               </a:rPr>
               <a:t>pyramides des âges</a:t>
             </a:r>
@@ -14083,8 +18519,18 @@
                   <a:srgbClr val="000000"/>
                 </a:solidFill>
                 <a:effectLst/>
+                <a:hlinkClick r:id="rId7" action="ppaction://hlinksldjump"/>
               </a:rPr>
-              <a:t> sont des sortes de doubles histogrammes</a:t>
+              <a:t> </a:t>
+            </a:r>
+            <a:r>
+              <a:rPr lang="fr-FR" i="0" u="none" strike="noStrike" dirty="0">
+                <a:solidFill>
+                  <a:srgbClr val="000000"/>
+                </a:solidFill>
+                <a:effectLst/>
+              </a:rPr>
+              <a:t>sont des sortes de doubles histogrammes</a:t>
             </a:r>
           </a:p>
           <a:p>
@@ -14164,6 +18610,1053 @@
 </file>
 
 <file path=ppt/slides/slide15.xml><?xml version="1.0" encoding="utf-8"?>
+<p:sld xmlns:a="http://schemas.openxmlformats.org/drawingml/2006/main" xmlns:r="http://schemas.openxmlformats.org/officeDocument/2006/relationships" xmlns:p="http://schemas.openxmlformats.org/presentationml/2006/main" show="0">
+  <p:cSld>
+    <p:spTree>
+      <p:nvGrpSpPr>
+        <p:cNvPr id="1" name=""/>
+        <p:cNvGrpSpPr/>
+        <p:nvPr/>
+      </p:nvGrpSpPr>
+      <p:grpSpPr>
+        <a:xfrm>
+          <a:off x="0" y="0"/>
+          <a:ext cx="0" cy="0"/>
+          <a:chOff x="0" y="0"/>
+          <a:chExt cx="0" cy="0"/>
+        </a:xfrm>
+      </p:grpSpPr>
+      <p:sp>
+        <p:nvSpPr>
+          <p:cNvPr id="2" name="Titre 1">
+            <a:extLst>
+              <a:ext uri="{FF2B5EF4-FFF2-40B4-BE49-F238E27FC236}">
+                <a16:creationId xmlns:a16="http://schemas.microsoft.com/office/drawing/2014/main" id="{CA839188-4BA0-003F-89AB-BA37FD4746FC}"/>
+              </a:ext>
+            </a:extLst>
+          </p:cNvPr>
+          <p:cNvSpPr>
+            <a:spLocks noGrp="1"/>
+          </p:cNvSpPr>
+          <p:nvPr>
+            <p:ph type="title"/>
+          </p:nvPr>
+        </p:nvSpPr>
+        <p:spPr/>
+        <p:txBody>
+          <a:bodyPr/>
+          <a:lstStyle/>
+          <a:p>
+            <a:r>
+              <a:rPr lang="fr-FR" dirty="0"/>
+              <a:t>Graphique sémantique différentiel</a:t>
+            </a:r>
+          </a:p>
+        </p:txBody>
+      </p:sp>
+      <p:sp>
+        <p:nvSpPr>
+          <p:cNvPr id="4" name="Espace réservé du numéro de diapositive 3">
+            <a:extLst>
+              <a:ext uri="{FF2B5EF4-FFF2-40B4-BE49-F238E27FC236}">
+                <a16:creationId xmlns:a16="http://schemas.microsoft.com/office/drawing/2014/main" id="{5677628B-60D6-21FA-7D26-DDA730113AD3}"/>
+              </a:ext>
+            </a:extLst>
+          </p:cNvPr>
+          <p:cNvSpPr>
+            <a:spLocks noGrp="1"/>
+          </p:cNvSpPr>
+          <p:nvPr>
+            <p:ph type="sldNum" sz="quarter" idx="12"/>
+          </p:nvPr>
+        </p:nvSpPr>
+        <p:spPr/>
+        <p:txBody>
+          <a:bodyPr/>
+          <a:lstStyle/>
+          <a:p>
+            <a:fld id="{0BD8DA86-C09D-401C-842D-741E230745B4}" type="slidenum">
+              <a:rPr lang="fr-FR" smtClean="0"/>
+              <a:t>15</a:t>
+            </a:fld>
+            <a:endParaRPr lang="fr-FR"/>
+          </a:p>
+        </p:txBody>
+      </p:sp>
+      <p:pic>
+        <p:nvPicPr>
+          <p:cNvPr id="2050" name="Picture 2" descr="Graphiques sémantiques différentiels | Logiciel statistique ...">
+            <a:extLst>
+              <a:ext uri="{FF2B5EF4-FFF2-40B4-BE49-F238E27FC236}">
+                <a16:creationId xmlns:a16="http://schemas.microsoft.com/office/drawing/2014/main" id="{DCC99A62-9B50-203A-2192-FD6AAF3E2B21}"/>
+              </a:ext>
+            </a:extLst>
+          </p:cNvPr>
+          <p:cNvPicPr>
+            <a:picLocks noGrp="1" noChangeAspect="1" noChangeArrowheads="1"/>
+          </p:cNvPicPr>
+          <p:nvPr>
+            <p:ph idx="1"/>
+          </p:nvPr>
+        </p:nvPicPr>
+        <p:blipFill>
+          <a:blip r:embed="rId2">
+            <a:extLst>
+              <a:ext uri="{28A0092B-C50C-407E-A947-70E740481C1C}">
+                <a14:useLocalDpi xmlns:a14="http://schemas.microsoft.com/office/drawing/2010/main" val="0"/>
+              </a:ext>
+            </a:extLst>
+          </a:blip>
+          <a:srcRect/>
+          <a:stretch>
+            <a:fillRect/>
+          </a:stretch>
+        </p:blipFill>
+        <p:spPr bwMode="auto">
+          <a:xfrm>
+            <a:off x="4672190" y="2873543"/>
+            <a:ext cx="2847619" cy="2685714"/>
+          </a:xfrm>
+          <a:prstGeom prst="rect">
+            <a:avLst/>
+          </a:prstGeom>
+          <a:noFill/>
+          <a:extLst>
+            <a:ext uri="{909E8E84-426E-40DD-AFC4-6F175D3DCCD1}">
+              <a14:hiddenFill xmlns:a14="http://schemas.microsoft.com/office/drawing/2010/main">
+                <a:solidFill>
+                  <a:srgbClr val="FFFFFF"/>
+                </a:solidFill>
+              </a14:hiddenFill>
+            </a:ext>
+          </a:extLst>
+        </p:spPr>
+      </p:pic>
+    </p:spTree>
+    <p:extLst>
+      <p:ext uri="{BB962C8B-B14F-4D97-AF65-F5344CB8AC3E}">
+        <p14:creationId xmlns:p14="http://schemas.microsoft.com/office/powerpoint/2010/main" val="3618763839"/>
+      </p:ext>
+    </p:extLst>
+  </p:cSld>
+  <p:clrMapOvr>
+    <a:masterClrMapping/>
+  </p:clrMapOvr>
+</p:sld>
+</file>
+
+<file path=ppt/slides/slide16.xml><?xml version="1.0" encoding="utf-8"?>
+<p:sld xmlns:a="http://schemas.openxmlformats.org/drawingml/2006/main" xmlns:r="http://schemas.openxmlformats.org/officeDocument/2006/relationships" xmlns:p="http://schemas.openxmlformats.org/presentationml/2006/main" show="0">
+  <p:cSld>
+    <p:spTree>
+      <p:nvGrpSpPr>
+        <p:cNvPr id="1" name=""/>
+        <p:cNvGrpSpPr/>
+        <p:nvPr/>
+      </p:nvGrpSpPr>
+      <p:grpSpPr>
+        <a:xfrm>
+          <a:off x="0" y="0"/>
+          <a:ext cx="0" cy="0"/>
+          <a:chOff x="0" y="0"/>
+          <a:chExt cx="0" cy="0"/>
+        </a:xfrm>
+      </p:grpSpPr>
+      <p:sp>
+        <p:nvSpPr>
+          <p:cNvPr id="2" name="Titre 1">
+            <a:extLst>
+              <a:ext uri="{FF2B5EF4-FFF2-40B4-BE49-F238E27FC236}">
+                <a16:creationId xmlns:a16="http://schemas.microsoft.com/office/drawing/2014/main" id="{F0819F9D-6B89-8758-CF63-CBDB446E64E7}"/>
+              </a:ext>
+            </a:extLst>
+          </p:cNvPr>
+          <p:cNvSpPr>
+            <a:spLocks noGrp="1"/>
+          </p:cNvSpPr>
+          <p:nvPr>
+            <p:ph type="title"/>
+          </p:nvPr>
+        </p:nvSpPr>
+        <p:spPr/>
+        <p:txBody>
+          <a:bodyPr/>
+          <a:lstStyle/>
+          <a:p>
+            <a:r>
+              <a:rPr lang="fr-FR" dirty="0"/>
+              <a:t>Graphique en radar</a:t>
+            </a:r>
+          </a:p>
+        </p:txBody>
+      </p:sp>
+      <p:sp>
+        <p:nvSpPr>
+          <p:cNvPr id="4" name="Espace réservé du numéro de diapositive 3">
+            <a:extLst>
+              <a:ext uri="{FF2B5EF4-FFF2-40B4-BE49-F238E27FC236}">
+                <a16:creationId xmlns:a16="http://schemas.microsoft.com/office/drawing/2014/main" id="{16F8E252-DF3E-5A69-F64B-8B864058DBD7}"/>
+              </a:ext>
+            </a:extLst>
+          </p:cNvPr>
+          <p:cNvSpPr>
+            <a:spLocks noGrp="1"/>
+          </p:cNvSpPr>
+          <p:nvPr>
+            <p:ph type="sldNum" sz="quarter" idx="12"/>
+          </p:nvPr>
+        </p:nvSpPr>
+        <p:spPr/>
+        <p:txBody>
+          <a:bodyPr/>
+          <a:lstStyle/>
+          <a:p>
+            <a:fld id="{0BD8DA86-C09D-401C-842D-741E230745B4}" type="slidenum">
+              <a:rPr lang="fr-FR" smtClean="0"/>
+              <a:t>16</a:t>
+            </a:fld>
+            <a:endParaRPr lang="fr-FR"/>
+          </a:p>
+        </p:txBody>
+      </p:sp>
+      <p:pic>
+        <p:nvPicPr>
+          <p:cNvPr id="3074" name="Picture 2" descr="Représentation d'un graphique Radar">
+            <a:extLst>
+              <a:ext uri="{FF2B5EF4-FFF2-40B4-BE49-F238E27FC236}">
+                <a16:creationId xmlns:a16="http://schemas.microsoft.com/office/drawing/2014/main" id="{3871F470-737B-225B-A0D8-A5A89D9EA0F0}"/>
+              </a:ext>
+            </a:extLst>
+          </p:cNvPr>
+          <p:cNvPicPr>
+            <a:picLocks noGrp="1" noChangeAspect="1" noChangeArrowheads="1"/>
+          </p:cNvPicPr>
+          <p:nvPr>
+            <p:ph idx="1"/>
+          </p:nvPr>
+        </p:nvPicPr>
+        <p:blipFill>
+          <a:blip r:embed="rId2">
+            <a:extLst>
+              <a:ext uri="{28A0092B-C50C-407E-A947-70E740481C1C}">
+                <a14:useLocalDpi xmlns:a14="http://schemas.microsoft.com/office/drawing/2010/main" val="0"/>
+              </a:ext>
+            </a:extLst>
+          </a:blip>
+          <a:srcRect/>
+          <a:stretch>
+            <a:fillRect/>
+          </a:stretch>
+        </p:blipFill>
+        <p:spPr bwMode="auto">
+          <a:xfrm>
+            <a:off x="4114800" y="2773363"/>
+            <a:ext cx="3962400" cy="2886075"/>
+          </a:xfrm>
+          <a:prstGeom prst="rect">
+            <a:avLst/>
+          </a:prstGeom>
+          <a:noFill/>
+          <a:extLst>
+            <a:ext uri="{909E8E84-426E-40DD-AFC4-6F175D3DCCD1}">
+              <a14:hiddenFill xmlns:a14="http://schemas.microsoft.com/office/drawing/2010/main">
+                <a:solidFill>
+                  <a:srgbClr val="FFFFFF"/>
+                </a:solidFill>
+              </a14:hiddenFill>
+            </a:ext>
+          </a:extLst>
+        </p:spPr>
+      </p:pic>
+    </p:spTree>
+    <p:extLst>
+      <p:ext uri="{BB962C8B-B14F-4D97-AF65-F5344CB8AC3E}">
+        <p14:creationId xmlns:p14="http://schemas.microsoft.com/office/powerpoint/2010/main" val="835723554"/>
+      </p:ext>
+    </p:extLst>
+  </p:cSld>
+  <p:clrMapOvr>
+    <a:masterClrMapping/>
+  </p:clrMapOvr>
+</p:sld>
+</file>
+
+<file path=ppt/slides/slide17.xml><?xml version="1.0" encoding="utf-8"?>
+<p:sld xmlns:a="http://schemas.openxmlformats.org/drawingml/2006/main" xmlns:r="http://schemas.openxmlformats.org/officeDocument/2006/relationships" xmlns:p="http://schemas.openxmlformats.org/presentationml/2006/main" show="0">
+  <p:cSld>
+    <p:spTree>
+      <p:nvGrpSpPr>
+        <p:cNvPr id="1" name=""/>
+        <p:cNvGrpSpPr/>
+        <p:nvPr/>
+      </p:nvGrpSpPr>
+      <p:grpSpPr>
+        <a:xfrm>
+          <a:off x="0" y="0"/>
+          <a:ext cx="0" cy="0"/>
+          <a:chOff x="0" y="0"/>
+          <a:chExt cx="0" cy="0"/>
+        </a:xfrm>
+      </p:grpSpPr>
+      <p:sp>
+        <p:nvSpPr>
+          <p:cNvPr id="2" name="Titre 1">
+            <a:extLst>
+              <a:ext uri="{FF2B5EF4-FFF2-40B4-BE49-F238E27FC236}">
+                <a16:creationId xmlns:a16="http://schemas.microsoft.com/office/drawing/2014/main" id="{0F0DD4A2-3F36-8CF2-B7D7-3BB7DC530A35}"/>
+              </a:ext>
+            </a:extLst>
+          </p:cNvPr>
+          <p:cNvSpPr>
+            <a:spLocks noGrp="1"/>
+          </p:cNvSpPr>
+          <p:nvPr>
+            <p:ph type="title"/>
+          </p:nvPr>
+        </p:nvSpPr>
+        <p:spPr/>
+        <p:txBody>
+          <a:bodyPr/>
+          <a:lstStyle/>
+          <a:p>
+            <a:r>
+              <a:rPr lang="fr-FR" dirty="0"/>
+              <a:t>Graphique en aire (Masse salariale)</a:t>
+            </a:r>
+          </a:p>
+        </p:txBody>
+      </p:sp>
+      <p:pic>
+        <p:nvPicPr>
+          <p:cNvPr id="6" name="Espace réservé du contenu 5">
+            <a:extLst>
+              <a:ext uri="{FF2B5EF4-FFF2-40B4-BE49-F238E27FC236}">
+                <a16:creationId xmlns:a16="http://schemas.microsoft.com/office/drawing/2014/main" id="{3589064C-4331-F49E-D5EF-0E37054E8987}"/>
+              </a:ext>
+            </a:extLst>
+          </p:cNvPr>
+          <p:cNvPicPr>
+            <a:picLocks noGrp="1" noChangeAspect="1"/>
+          </p:cNvPicPr>
+          <p:nvPr>
+            <p:ph idx="1"/>
+          </p:nvPr>
+        </p:nvPicPr>
+        <p:blipFill>
+          <a:blip r:embed="rId2"/>
+          <a:stretch>
+            <a:fillRect/>
+          </a:stretch>
+        </p:blipFill>
+        <p:spPr>
+          <a:xfrm>
+            <a:off x="3355500" y="2557463"/>
+            <a:ext cx="5480999" cy="3317875"/>
+          </a:xfrm>
+        </p:spPr>
+      </p:pic>
+      <p:sp>
+        <p:nvSpPr>
+          <p:cNvPr id="4" name="Espace réservé du numéro de diapositive 3">
+            <a:extLst>
+              <a:ext uri="{FF2B5EF4-FFF2-40B4-BE49-F238E27FC236}">
+                <a16:creationId xmlns:a16="http://schemas.microsoft.com/office/drawing/2014/main" id="{B3D7AEB5-F969-8368-15B9-7465E651FAAA}"/>
+              </a:ext>
+            </a:extLst>
+          </p:cNvPr>
+          <p:cNvSpPr>
+            <a:spLocks noGrp="1"/>
+          </p:cNvSpPr>
+          <p:nvPr>
+            <p:ph type="sldNum" sz="quarter" idx="12"/>
+          </p:nvPr>
+        </p:nvSpPr>
+        <p:spPr/>
+        <p:txBody>
+          <a:bodyPr/>
+          <a:lstStyle/>
+          <a:p>
+            <a:fld id="{0BD8DA86-C09D-401C-842D-741E230745B4}" type="slidenum">
+              <a:rPr lang="fr-FR" smtClean="0"/>
+              <a:t>17</a:t>
+            </a:fld>
+            <a:endParaRPr lang="fr-FR"/>
+          </a:p>
+        </p:txBody>
+      </p:sp>
+    </p:spTree>
+    <p:extLst>
+      <p:ext uri="{BB962C8B-B14F-4D97-AF65-F5344CB8AC3E}">
+        <p14:creationId xmlns:p14="http://schemas.microsoft.com/office/powerpoint/2010/main" val="1984320231"/>
+      </p:ext>
+    </p:extLst>
+  </p:cSld>
+  <p:clrMapOvr>
+    <a:masterClrMapping/>
+  </p:clrMapOvr>
+</p:sld>
+</file>
+
+<file path=ppt/slides/slide18.xml><?xml version="1.0" encoding="utf-8"?>
+<p:sld xmlns:a="http://schemas.openxmlformats.org/drawingml/2006/main" xmlns:r="http://schemas.openxmlformats.org/officeDocument/2006/relationships" xmlns:p="http://schemas.openxmlformats.org/presentationml/2006/main" show="0">
+  <p:cSld>
+    <p:spTree>
+      <p:nvGrpSpPr>
+        <p:cNvPr id="1" name=""/>
+        <p:cNvGrpSpPr/>
+        <p:nvPr/>
+      </p:nvGrpSpPr>
+      <p:grpSpPr>
+        <a:xfrm>
+          <a:off x="0" y="0"/>
+          <a:ext cx="0" cy="0"/>
+          <a:chOff x="0" y="0"/>
+          <a:chExt cx="0" cy="0"/>
+        </a:xfrm>
+      </p:grpSpPr>
+      <p:sp>
+        <p:nvSpPr>
+          <p:cNvPr id="2" name="Titre 1">
+            <a:extLst>
+              <a:ext uri="{FF2B5EF4-FFF2-40B4-BE49-F238E27FC236}">
+                <a16:creationId xmlns:a16="http://schemas.microsoft.com/office/drawing/2014/main" id="{44E903AD-8005-9838-FFC6-8D4844DE4E32}"/>
+              </a:ext>
+            </a:extLst>
+          </p:cNvPr>
+          <p:cNvSpPr>
+            <a:spLocks noGrp="1"/>
+          </p:cNvSpPr>
+          <p:nvPr>
+            <p:ph type="title"/>
+          </p:nvPr>
+        </p:nvSpPr>
+        <p:spPr/>
+        <p:txBody>
+          <a:bodyPr/>
+          <a:lstStyle/>
+          <a:p>
+            <a:r>
+              <a:rPr lang="fr-FR" dirty="0"/>
+              <a:t>Chandeliers japonais</a:t>
+            </a:r>
+          </a:p>
+        </p:txBody>
+      </p:sp>
+      <p:pic>
+        <p:nvPicPr>
+          <p:cNvPr id="6" name="Espace réservé du contenu 5">
+            <a:extLst>
+              <a:ext uri="{FF2B5EF4-FFF2-40B4-BE49-F238E27FC236}">
+                <a16:creationId xmlns:a16="http://schemas.microsoft.com/office/drawing/2014/main" id="{2019D420-8E6B-82C3-9C72-4F9A687EABBB}"/>
+              </a:ext>
+            </a:extLst>
+          </p:cNvPr>
+          <p:cNvPicPr>
+            <a:picLocks noGrp="1" noChangeAspect="1"/>
+          </p:cNvPicPr>
+          <p:nvPr>
+            <p:ph idx="1"/>
+          </p:nvPr>
+        </p:nvPicPr>
+        <p:blipFill>
+          <a:blip r:embed="rId2"/>
+          <a:stretch>
+            <a:fillRect/>
+          </a:stretch>
+        </p:blipFill>
+        <p:spPr>
+          <a:xfrm>
+            <a:off x="2412445" y="2557463"/>
+            <a:ext cx="7367109" cy="3317875"/>
+          </a:xfrm>
+        </p:spPr>
+      </p:pic>
+      <p:sp>
+        <p:nvSpPr>
+          <p:cNvPr id="4" name="Espace réservé du numéro de diapositive 3">
+            <a:extLst>
+              <a:ext uri="{FF2B5EF4-FFF2-40B4-BE49-F238E27FC236}">
+                <a16:creationId xmlns:a16="http://schemas.microsoft.com/office/drawing/2014/main" id="{EF5BC857-ADE6-2E09-5FF4-714BB6B3E67F}"/>
+              </a:ext>
+            </a:extLst>
+          </p:cNvPr>
+          <p:cNvSpPr>
+            <a:spLocks noGrp="1"/>
+          </p:cNvSpPr>
+          <p:nvPr>
+            <p:ph type="sldNum" sz="quarter" idx="12"/>
+          </p:nvPr>
+        </p:nvSpPr>
+        <p:spPr/>
+        <p:txBody>
+          <a:bodyPr/>
+          <a:lstStyle/>
+          <a:p>
+            <a:fld id="{0BD8DA86-C09D-401C-842D-741E230745B4}" type="slidenum">
+              <a:rPr lang="fr-FR" smtClean="0"/>
+              <a:t>18</a:t>
+            </a:fld>
+            <a:endParaRPr lang="fr-FR"/>
+          </a:p>
+        </p:txBody>
+      </p:sp>
+    </p:spTree>
+    <p:extLst>
+      <p:ext uri="{BB962C8B-B14F-4D97-AF65-F5344CB8AC3E}">
+        <p14:creationId xmlns:p14="http://schemas.microsoft.com/office/powerpoint/2010/main" val="1301384582"/>
+      </p:ext>
+    </p:extLst>
+  </p:cSld>
+  <p:clrMapOvr>
+    <a:masterClrMapping/>
+  </p:clrMapOvr>
+</p:sld>
+</file>
+
+<file path=ppt/slides/slide19.xml><?xml version="1.0" encoding="utf-8"?>
+<p:sld xmlns:a="http://schemas.openxmlformats.org/drawingml/2006/main" xmlns:r="http://schemas.openxmlformats.org/officeDocument/2006/relationships" xmlns:p="http://schemas.openxmlformats.org/presentationml/2006/main" show="0">
+  <p:cSld>
+    <p:spTree>
+      <p:nvGrpSpPr>
+        <p:cNvPr id="1" name=""/>
+        <p:cNvGrpSpPr/>
+        <p:nvPr/>
+      </p:nvGrpSpPr>
+      <p:grpSpPr>
+        <a:xfrm>
+          <a:off x="0" y="0"/>
+          <a:ext cx="0" cy="0"/>
+          <a:chOff x="0" y="0"/>
+          <a:chExt cx="0" cy="0"/>
+        </a:xfrm>
+      </p:grpSpPr>
+      <p:sp>
+        <p:nvSpPr>
+          <p:cNvPr id="2" name="Titre 1">
+            <a:extLst>
+              <a:ext uri="{FF2B5EF4-FFF2-40B4-BE49-F238E27FC236}">
+                <a16:creationId xmlns:a16="http://schemas.microsoft.com/office/drawing/2014/main" id="{58D898BB-5EA1-3FAA-50C5-7C73B7806D34}"/>
+              </a:ext>
+            </a:extLst>
+          </p:cNvPr>
+          <p:cNvSpPr>
+            <a:spLocks noGrp="1"/>
+          </p:cNvSpPr>
+          <p:nvPr>
+            <p:ph type="title"/>
+          </p:nvPr>
+        </p:nvSpPr>
+        <p:spPr/>
+        <p:txBody>
+          <a:bodyPr/>
+          <a:lstStyle/>
+          <a:p>
+            <a:r>
+              <a:rPr lang="fr-FR" dirty="0"/>
+              <a:t>Pyramide des âges</a:t>
+            </a:r>
+          </a:p>
+        </p:txBody>
+      </p:sp>
+      <p:sp>
+        <p:nvSpPr>
+          <p:cNvPr id="4" name="Espace réservé du numéro de diapositive 3">
+            <a:extLst>
+              <a:ext uri="{FF2B5EF4-FFF2-40B4-BE49-F238E27FC236}">
+                <a16:creationId xmlns:a16="http://schemas.microsoft.com/office/drawing/2014/main" id="{C03C535D-2C89-0390-C7B5-A08D599B619A}"/>
+              </a:ext>
+            </a:extLst>
+          </p:cNvPr>
+          <p:cNvSpPr>
+            <a:spLocks noGrp="1"/>
+          </p:cNvSpPr>
+          <p:nvPr>
+            <p:ph type="sldNum" sz="quarter" idx="12"/>
+          </p:nvPr>
+        </p:nvSpPr>
+        <p:spPr/>
+        <p:txBody>
+          <a:bodyPr/>
+          <a:lstStyle/>
+          <a:p>
+            <a:fld id="{0BD8DA86-C09D-401C-842D-741E230745B4}" type="slidenum">
+              <a:rPr lang="fr-FR" smtClean="0"/>
+              <a:t>19</a:t>
+            </a:fld>
+            <a:endParaRPr lang="fr-FR"/>
+          </a:p>
+        </p:txBody>
+      </p:sp>
+      <p:pic>
+        <p:nvPicPr>
+          <p:cNvPr id="4098" name="Picture 2" descr="Pyramides des âges : Exemples">
+            <a:extLst>
+              <a:ext uri="{FF2B5EF4-FFF2-40B4-BE49-F238E27FC236}">
+                <a16:creationId xmlns:a16="http://schemas.microsoft.com/office/drawing/2014/main" id="{94CE3687-35C1-A5E6-8642-C0B97AD77D3B}"/>
+              </a:ext>
+            </a:extLst>
+          </p:cNvPr>
+          <p:cNvPicPr>
+            <a:picLocks noGrp="1" noChangeAspect="1" noChangeArrowheads="1"/>
+          </p:cNvPicPr>
+          <p:nvPr>
+            <p:ph idx="1"/>
+          </p:nvPr>
+        </p:nvPicPr>
+        <p:blipFill>
+          <a:blip r:embed="rId2">
+            <a:extLst>
+              <a:ext uri="{28A0092B-C50C-407E-A947-70E740481C1C}">
+                <a14:useLocalDpi xmlns:a14="http://schemas.microsoft.com/office/drawing/2010/main" val="0"/>
+              </a:ext>
+            </a:extLst>
+          </a:blip>
+          <a:srcRect/>
+          <a:stretch>
+            <a:fillRect/>
+          </a:stretch>
+        </p:blipFill>
+        <p:spPr bwMode="auto">
+          <a:xfrm>
+            <a:off x="4424362" y="2635250"/>
+            <a:ext cx="3343275" cy="3162300"/>
+          </a:xfrm>
+          <a:prstGeom prst="rect">
+            <a:avLst/>
+          </a:prstGeom>
+          <a:noFill/>
+          <a:extLst>
+            <a:ext uri="{909E8E84-426E-40DD-AFC4-6F175D3DCCD1}">
+              <a14:hiddenFill xmlns:a14="http://schemas.microsoft.com/office/drawing/2010/main">
+                <a:solidFill>
+                  <a:srgbClr val="FFFFFF"/>
+                </a:solidFill>
+              </a14:hiddenFill>
+            </a:ext>
+          </a:extLst>
+        </p:spPr>
+      </p:pic>
+    </p:spTree>
+    <p:extLst>
+      <p:ext uri="{BB962C8B-B14F-4D97-AF65-F5344CB8AC3E}">
+        <p14:creationId xmlns:p14="http://schemas.microsoft.com/office/powerpoint/2010/main" val="2919490622"/>
+      </p:ext>
+    </p:extLst>
+  </p:cSld>
+  <p:clrMapOvr>
+    <a:masterClrMapping/>
+  </p:clrMapOvr>
+</p:sld>
+</file>
+
+<file path=ppt/slides/slide2.xml><?xml version="1.0" encoding="utf-8"?>
+<p:sld xmlns:a="http://schemas.openxmlformats.org/drawingml/2006/main" xmlns:r="http://schemas.openxmlformats.org/officeDocument/2006/relationships" xmlns:p="http://schemas.openxmlformats.org/presentationml/2006/main">
+  <p:cSld>
+    <p:bg>
+      <p:bgPr>
+        <a:solidFill>
+          <a:schemeClr val="bg1"/>
+        </a:solidFill>
+        <a:effectLst/>
+      </p:bgPr>
+    </p:bg>
+    <p:spTree>
+      <p:nvGrpSpPr>
+        <p:cNvPr id="1" name=""/>
+        <p:cNvGrpSpPr/>
+        <p:nvPr/>
+      </p:nvGrpSpPr>
+      <p:grpSpPr>
+        <a:xfrm>
+          <a:off x="0" y="0"/>
+          <a:ext cx="0" cy="0"/>
+          <a:chOff x="0" y="0"/>
+          <a:chExt cx="0" cy="0"/>
+        </a:xfrm>
+      </p:grpSpPr>
+      <p:sp>
+        <p:nvSpPr>
+          <p:cNvPr id="18" name="Rectangle 9">
+            <a:extLst>
+              <a:ext uri="{FF2B5EF4-FFF2-40B4-BE49-F238E27FC236}">
+                <a16:creationId xmlns:a16="http://schemas.microsoft.com/office/drawing/2014/main" id="{52BE4420-3B5F-4549-8B4A-77855B8215EC}"/>
+              </a:ext>
+              <a:ext uri="{C183D7F6-B498-43B3-948B-1728B52AA6E4}">
+                <adec:decorative xmlns:adec="http://schemas.microsoft.com/office/drawing/2017/decorative" val="1"/>
+              </a:ext>
+            </a:extLst>
+          </p:cNvPr>
+          <p:cNvSpPr>
+            <a:spLocks noGrp="1" noRot="1" noChangeAspect="1" noMove="1" noResize="1" noEditPoints="1" noAdjustHandles="1" noChangeArrowheads="1" noChangeShapeType="1" noTextEdit="1"/>
+          </p:cNvSpPr>
+          <p:nvPr>
+            <p:extLst>
+              <p:ext uri="{386F3935-93C4-4BCD-93E2-E3B085C9AB24}">
+                <p16:designElem xmlns:p16="http://schemas.microsoft.com/office/powerpoint/2015/main" val="1"/>
+              </p:ext>
+            </p:extLst>
+          </p:nvPr>
+        </p:nvSpPr>
+        <p:spPr>
+          <a:xfrm>
+            <a:off x="0" y="0"/>
+            <a:ext cx="12188952" cy="6858000"/>
+          </a:xfrm>
+          <a:prstGeom prst="rect">
+            <a:avLst/>
+          </a:prstGeom>
+          <a:ln>
+            <a:noFill/>
+          </a:ln>
+        </p:spPr>
+        <p:style>
+          <a:lnRef idx="2">
+            <a:schemeClr val="accent1">
+              <a:shade val="50000"/>
+            </a:schemeClr>
+          </a:lnRef>
+          <a:fillRef idx="1003">
+            <a:schemeClr val="lt1"/>
+          </a:fillRef>
+          <a:effectRef idx="0">
+            <a:schemeClr val="accent1"/>
+          </a:effectRef>
+          <a:fontRef idx="minor">
+            <a:schemeClr val="lt1"/>
+          </a:fontRef>
+        </p:style>
+        <p:txBody>
+          <a:bodyPr rtlCol="0" anchor="ctr"/>
+          <a:lstStyle/>
+          <a:p>
+            <a:pPr algn="ctr"/>
+            <a:endParaRPr lang="en-US"/>
+          </a:p>
+        </p:txBody>
+      </p:sp>
+      <p:sp>
+        <p:nvSpPr>
+          <p:cNvPr id="19" name="Rectangle 11">
+            <a:extLst>
+              <a:ext uri="{FF2B5EF4-FFF2-40B4-BE49-F238E27FC236}">
+                <a16:creationId xmlns:a16="http://schemas.microsoft.com/office/drawing/2014/main" id="{A75876F6-95D4-48CB-8E3E-4401A96E25A4}"/>
+              </a:ext>
+              <a:ext uri="{C183D7F6-B498-43B3-948B-1728B52AA6E4}">
+                <adec:decorative xmlns:adec="http://schemas.microsoft.com/office/drawing/2017/decorative" val="1"/>
+              </a:ext>
+            </a:extLst>
+          </p:cNvPr>
+          <p:cNvSpPr>
+            <a:spLocks noGrp="1" noRot="1" noChangeAspect="1" noMove="1" noResize="1" noEditPoints="1" noAdjustHandles="1" noChangeArrowheads="1" noChangeShapeType="1" noTextEdit="1"/>
+          </p:cNvSpPr>
+          <p:nvPr>
+            <p:extLst>
+              <p:ext uri="{386F3935-93C4-4BCD-93E2-E3B085C9AB24}">
+                <p16:designElem xmlns:p16="http://schemas.microsoft.com/office/powerpoint/2015/main" val="1"/>
+              </p:ext>
+            </p:extLst>
+          </p:nvPr>
+        </p:nvSpPr>
+        <p:spPr>
+          <a:xfrm>
+            <a:off x="486138" y="496088"/>
+            <a:ext cx="3823215" cy="5883295"/>
+          </a:xfrm>
+          <a:prstGeom prst="rect">
+            <a:avLst/>
+          </a:prstGeom>
+          <a:blipFill dpi="0" rotWithShape="1">
+            <a:blip r:embed="rId2"/>
+            <a:srcRect/>
+            <a:tile tx="0" ty="0" sx="100000" sy="100000" flip="none" algn="tl"/>
+          </a:blipFill>
+          <a:ln>
+            <a:noFill/>
+          </a:ln>
+          <a:effectLst>
+            <a:outerShdw blurRad="114300" dist="127000" dir="5400000" sx="99000" sy="99000" algn="t" rotWithShape="0">
+              <a:prstClr val="black">
+                <a:alpha val="40000"/>
+              </a:prstClr>
+            </a:outerShdw>
+          </a:effectLst>
+          <a:scene3d>
+            <a:camera prst="orthographicFront"/>
+            <a:lightRig rig="twoPt" dir="t"/>
+          </a:scene3d>
+          <a:sp3d contourW="6350">
+            <a:bevelT w="12700" h="0" prst="coolSlant"/>
+            <a:contourClr>
+              <a:schemeClr val="bg2"/>
+            </a:contourClr>
+          </a:sp3d>
+        </p:spPr>
+        <p:style>
+          <a:lnRef idx="2">
+            <a:schemeClr val="accent1">
+              <a:shade val="50000"/>
+            </a:schemeClr>
+          </a:lnRef>
+          <a:fillRef idx="1">
+            <a:schemeClr val="accent1"/>
+          </a:fillRef>
+          <a:effectRef idx="0">
+            <a:schemeClr val="accent1"/>
+          </a:effectRef>
+          <a:fontRef idx="minor">
+            <a:schemeClr val="lt1"/>
+          </a:fontRef>
+        </p:style>
+        <p:txBody>
+          <a:bodyPr rtlCol="0" anchor="ctr"/>
+          <a:lstStyle/>
+          <a:p>
+            <a:pPr algn="ctr"/>
+            <a:endParaRPr lang="en-US"/>
+          </a:p>
+        </p:txBody>
+      </p:sp>
+      <p:sp>
+        <p:nvSpPr>
+          <p:cNvPr id="20" name="Rectangle 13">
+            <a:extLst>
+              <a:ext uri="{FF2B5EF4-FFF2-40B4-BE49-F238E27FC236}">
+                <a16:creationId xmlns:a16="http://schemas.microsoft.com/office/drawing/2014/main" id="{D1B84719-90BB-4D0C-92D8-61DC5512B34B}"/>
+              </a:ext>
+              <a:ext uri="{C183D7F6-B498-43B3-948B-1728B52AA6E4}">
+                <adec:decorative xmlns:adec="http://schemas.microsoft.com/office/drawing/2017/decorative" val="1"/>
+              </a:ext>
+            </a:extLst>
+          </p:cNvPr>
+          <p:cNvSpPr>
+            <a:spLocks noGrp="1" noRot="1" noChangeAspect="1" noMove="1" noResize="1" noEditPoints="1" noAdjustHandles="1" noChangeArrowheads="1" noChangeShapeType="1" noTextEdit="1"/>
+          </p:cNvSpPr>
+          <p:nvPr>
+            <p:extLst>
+              <p:ext uri="{386F3935-93C4-4BCD-93E2-E3B085C9AB24}">
+                <p16:designElem xmlns:p16="http://schemas.microsoft.com/office/powerpoint/2015/main" val="1"/>
+              </p:ext>
+            </p:extLst>
+          </p:nvPr>
+        </p:nvSpPr>
+        <p:spPr>
+          <a:xfrm>
+            <a:off x="608012" y="609600"/>
+            <a:ext cx="3552006" cy="5638800"/>
+          </a:xfrm>
+          <a:prstGeom prst="rect">
+            <a:avLst/>
+          </a:prstGeom>
+          <a:noFill/>
+          <a:ln w="15875" cap="flat">
+            <a:miter lim="800000"/>
+          </a:ln>
+        </p:spPr>
+        <p:style>
+          <a:lnRef idx="1">
+            <a:schemeClr val="accent1"/>
+          </a:lnRef>
+          <a:fillRef idx="3">
+            <a:schemeClr val="accent1"/>
+          </a:fillRef>
+          <a:effectRef idx="2">
+            <a:schemeClr val="accent1"/>
+          </a:effectRef>
+          <a:fontRef idx="minor">
+            <a:schemeClr val="lt1"/>
+          </a:fontRef>
+        </p:style>
+      </p:sp>
+      <p:sp>
+        <p:nvSpPr>
+          <p:cNvPr id="2" name="Titre 1">
+            <a:extLst>
+              <a:ext uri="{FF2B5EF4-FFF2-40B4-BE49-F238E27FC236}">
+                <a16:creationId xmlns:a16="http://schemas.microsoft.com/office/drawing/2014/main" id="{8F450E75-98DC-7F02-F431-1F99750376B8}"/>
+              </a:ext>
+            </a:extLst>
+          </p:cNvPr>
+          <p:cNvSpPr>
+            <a:spLocks noGrp="1"/>
+          </p:cNvSpPr>
+          <p:nvPr>
+            <p:ph type="title"/>
+          </p:nvPr>
+        </p:nvSpPr>
+        <p:spPr>
+          <a:xfrm>
+            <a:off x="1055599" y="1055077"/>
+            <a:ext cx="2532909" cy="4794578"/>
+          </a:xfrm>
+        </p:spPr>
+        <p:txBody>
+          <a:bodyPr>
+            <a:normAutofit/>
+          </a:bodyPr>
+          <a:lstStyle/>
+          <a:p>
+            <a:r>
+              <a:rPr lang="fr-FR">
+                <a:solidFill>
+                  <a:srgbClr val="262626"/>
+                </a:solidFill>
+              </a:rPr>
+              <a:t>Plan</a:t>
+            </a:r>
+          </a:p>
+        </p:txBody>
+      </p:sp>
+      <p:sp useBgFill="1">
+        <p:nvSpPr>
+          <p:cNvPr id="21" name="Rectangle 15">
+            <a:extLst>
+              <a:ext uri="{FF2B5EF4-FFF2-40B4-BE49-F238E27FC236}">
+                <a16:creationId xmlns:a16="http://schemas.microsoft.com/office/drawing/2014/main" id="{7B407EC4-5D16-4845-9840-4E28622B6568}"/>
+              </a:ext>
+              <a:ext uri="{C183D7F6-B498-43B3-948B-1728B52AA6E4}">
+                <adec:decorative xmlns:adec="http://schemas.microsoft.com/office/drawing/2017/decorative" val="1"/>
+              </a:ext>
+            </a:extLst>
+          </p:cNvPr>
+          <p:cNvSpPr>
+            <a:spLocks noGrp="1" noRot="1" noChangeAspect="1" noMove="1" noResize="1" noEditPoints="1" noAdjustHandles="1" noChangeArrowheads="1" noChangeShapeType="1" noTextEdit="1"/>
+          </p:cNvSpPr>
+          <p:nvPr>
+            <p:extLst>
+              <p:ext uri="{386F3935-93C4-4BCD-93E2-E3B085C9AB24}">
+                <p16:designElem xmlns:p16="http://schemas.microsoft.com/office/powerpoint/2015/main" val="1"/>
+              </p:ext>
+            </p:extLst>
+          </p:nvPr>
+        </p:nvSpPr>
+        <p:spPr>
+          <a:xfrm>
+            <a:off x="4652053" y="-2"/>
+            <a:ext cx="7539947" cy="6858002"/>
+          </a:xfrm>
+          <a:prstGeom prst="rect">
+            <a:avLst/>
+          </a:prstGeom>
+          <a:ln>
+            <a:noFill/>
+          </a:ln>
+        </p:spPr>
+        <p:style>
+          <a:lnRef idx="2">
+            <a:schemeClr val="accent1">
+              <a:shade val="50000"/>
+            </a:schemeClr>
+          </a:lnRef>
+          <a:fillRef idx="1">
+            <a:schemeClr val="accent1"/>
+          </a:fillRef>
+          <a:effectRef idx="0">
+            <a:schemeClr val="accent1"/>
+          </a:effectRef>
+          <a:fontRef idx="minor">
+            <a:schemeClr val="lt1"/>
+          </a:fontRef>
+        </p:style>
+        <p:txBody>
+          <a:bodyPr rtlCol="0" anchor="ctr"/>
+          <a:lstStyle/>
+          <a:p>
+            <a:pPr algn="ctr"/>
+            <a:endParaRPr lang="en-US"/>
+          </a:p>
+        </p:txBody>
+      </p:sp>
+      <p:sp>
+        <p:nvSpPr>
+          <p:cNvPr id="4" name="Espace réservé du numéro de diapositive 3">
+            <a:extLst>
+              <a:ext uri="{FF2B5EF4-FFF2-40B4-BE49-F238E27FC236}">
+                <a16:creationId xmlns:a16="http://schemas.microsoft.com/office/drawing/2014/main" id="{30B90E63-D2D5-6206-AEE8-CEA48CF4FB81}"/>
+              </a:ext>
+            </a:extLst>
+          </p:cNvPr>
+          <p:cNvSpPr>
+            <a:spLocks noGrp="1"/>
+          </p:cNvSpPr>
+          <p:nvPr>
+            <p:ph type="sldNum" sz="quarter" idx="12"/>
+          </p:nvPr>
+        </p:nvSpPr>
+        <p:spPr>
+          <a:xfrm>
+            <a:off x="11049630" y="6379383"/>
+            <a:ext cx="542697" cy="279400"/>
+          </a:xfrm>
+        </p:spPr>
+        <p:txBody>
+          <a:bodyPr>
+            <a:normAutofit/>
+          </a:bodyPr>
+          <a:lstStyle/>
+          <a:p>
+            <a:pPr>
+              <a:spcAft>
+                <a:spcPts val="600"/>
+              </a:spcAft>
+            </a:pPr>
+            <a:fld id="{0BD8DA86-C09D-401C-842D-741E230745B4}" type="slidenum">
+              <a:rPr lang="fr-FR" smtClean="0"/>
+              <a:pPr>
+                <a:spcAft>
+                  <a:spcPts val="600"/>
+                </a:spcAft>
+              </a:pPr>
+              <a:t>2</a:t>
+            </a:fld>
+            <a:endParaRPr lang="fr-FR"/>
+          </a:p>
+        </p:txBody>
+      </p:sp>
+      <p:graphicFrame>
+        <p:nvGraphicFramePr>
+          <p:cNvPr id="22" name="Espace réservé du contenu 2">
+            <a:extLst>
+              <a:ext uri="{FF2B5EF4-FFF2-40B4-BE49-F238E27FC236}">
+                <a16:creationId xmlns:a16="http://schemas.microsoft.com/office/drawing/2014/main" id="{1AC82AA0-E8B1-F9D9-13AB-D4BB4F62126E}"/>
+              </a:ext>
+            </a:extLst>
+          </p:cNvPr>
+          <p:cNvGraphicFramePr>
+            <a:graphicFrameLocks noGrp="1"/>
+          </p:cNvGraphicFramePr>
+          <p:nvPr>
+            <p:ph idx="1"/>
+            <p:extLst>
+              <p:ext uri="{D42A27DB-BD31-4B8C-83A1-F6EECF244321}">
+                <p14:modId xmlns:p14="http://schemas.microsoft.com/office/powerpoint/2010/main" val="831398632"/>
+              </p:ext>
+            </p:extLst>
+          </p:nvPr>
+        </p:nvGraphicFramePr>
+        <p:xfrm>
+          <a:off x="5470072" y="804670"/>
+          <a:ext cx="5914209" cy="5248657"/>
+        </p:xfrm>
+        <a:graphic>
+          <a:graphicData uri="http://schemas.openxmlformats.org/drawingml/2006/diagram">
+            <dgm:relIds xmlns:dgm="http://schemas.openxmlformats.org/drawingml/2006/diagram" xmlns:r="http://schemas.openxmlformats.org/officeDocument/2006/relationships" r:dm="rId3" r:lo="rId4" r:qs="rId5" r:cs="rId6"/>
+          </a:graphicData>
+        </a:graphic>
+      </p:graphicFrame>
+    </p:spTree>
+    <p:extLst>
+      <p:ext uri="{BB962C8B-B14F-4D97-AF65-F5344CB8AC3E}">
+        <p14:creationId xmlns:p14="http://schemas.microsoft.com/office/powerpoint/2010/main" val="364727097"/>
+      </p:ext>
+    </p:extLst>
+  </p:cSld>
+  <p:clrMapOvr>
+    <a:masterClrMapping/>
+  </p:clrMapOvr>
+</p:sld>
+</file>
+
+<file path=ppt/slides/slide20.xml><?xml version="1.0" encoding="utf-8"?>
 <p:sld xmlns:a="http://schemas.openxmlformats.org/drawingml/2006/main" xmlns:r="http://schemas.openxmlformats.org/officeDocument/2006/relationships" xmlns:p="http://schemas.openxmlformats.org/presentationml/2006/main">
   <p:cSld>
     <p:spTree>
@@ -14285,7 +19778,7 @@
           <a:p>
             <a:fld id="{0BD8DA86-C09D-401C-842D-741E230745B4}" type="slidenum">
               <a:rPr lang="fr-FR" smtClean="0"/>
-              <a:t>15</a:t>
+              <a:t>20</a:t>
             </a:fld>
             <a:endParaRPr lang="fr-FR"/>
           </a:p>
@@ -14411,6 +19904,146 @@
           </a:prstGeom>
         </p:spPr>
       </p:pic>
+      <p:sp>
+        <p:nvSpPr>
+          <p:cNvPr id="5" name="ZoneTexte 4">
+            <a:extLst>
+              <a:ext uri="{FF2B5EF4-FFF2-40B4-BE49-F238E27FC236}">
+                <a16:creationId xmlns:a16="http://schemas.microsoft.com/office/drawing/2014/main" id="{D6C9FB08-4405-1950-0B0A-577136D75396}"/>
+              </a:ext>
+            </a:extLst>
+          </p:cNvPr>
+          <p:cNvSpPr txBox="1"/>
+          <p:nvPr/>
+        </p:nvSpPr>
+        <p:spPr>
+          <a:xfrm>
+            <a:off x="7071270" y="2754534"/>
+            <a:ext cx="352845" cy="369332"/>
+          </a:xfrm>
+          <a:prstGeom prst="rect">
+            <a:avLst/>
+          </a:prstGeom>
+          <a:noFill/>
+        </p:spPr>
+        <p:txBody>
+          <a:bodyPr wrap="square" rtlCol="0">
+            <a:spAutoFit/>
+          </a:bodyPr>
+          <a:lstStyle/>
+          <a:p>
+            <a:r>
+              <a:rPr lang="fr-FR" b="1" dirty="0"/>
+              <a:t>A</a:t>
+            </a:r>
+          </a:p>
+        </p:txBody>
+      </p:sp>
+      <p:sp>
+        <p:nvSpPr>
+          <p:cNvPr id="7" name="ZoneTexte 6">
+            <a:extLst>
+              <a:ext uri="{FF2B5EF4-FFF2-40B4-BE49-F238E27FC236}">
+                <a16:creationId xmlns:a16="http://schemas.microsoft.com/office/drawing/2014/main" id="{37334781-97C4-E0E1-C18E-C4ADB465646B}"/>
+              </a:ext>
+            </a:extLst>
+          </p:cNvPr>
+          <p:cNvSpPr txBox="1"/>
+          <p:nvPr/>
+        </p:nvSpPr>
+        <p:spPr>
+          <a:xfrm>
+            <a:off x="10448826" y="2452329"/>
+            <a:ext cx="352845" cy="369332"/>
+          </a:xfrm>
+          <a:prstGeom prst="rect">
+            <a:avLst/>
+          </a:prstGeom>
+          <a:noFill/>
+        </p:spPr>
+        <p:txBody>
+          <a:bodyPr wrap="square" rtlCol="0">
+            <a:spAutoFit/>
+          </a:bodyPr>
+          <a:lstStyle/>
+          <a:p>
+            <a:r>
+              <a:rPr lang="fr-FR" b="1" dirty="0"/>
+              <a:t>B</a:t>
+            </a:r>
+          </a:p>
+        </p:txBody>
+      </p:sp>
+      <p:sp>
+        <p:nvSpPr>
+          <p:cNvPr id="9" name="ZoneTexte 8">
+            <a:extLst>
+              <a:ext uri="{FF2B5EF4-FFF2-40B4-BE49-F238E27FC236}">
+                <a16:creationId xmlns:a16="http://schemas.microsoft.com/office/drawing/2014/main" id="{0FBFCA3A-7B27-4C37-2E8F-23367011238D}"/>
+              </a:ext>
+            </a:extLst>
+          </p:cNvPr>
+          <p:cNvSpPr txBox="1"/>
+          <p:nvPr/>
+        </p:nvSpPr>
+        <p:spPr>
+          <a:xfrm>
+            <a:off x="7220761" y="4397735"/>
+            <a:ext cx="352845" cy="369332"/>
+          </a:xfrm>
+          <a:prstGeom prst="rect">
+            <a:avLst/>
+          </a:prstGeom>
+          <a:noFill/>
+        </p:spPr>
+        <p:txBody>
+          <a:bodyPr wrap="square" rtlCol="0">
+            <a:spAutoFit/>
+          </a:bodyPr>
+          <a:lstStyle/>
+          <a:p>
+            <a:r>
+              <a:rPr lang="fr-FR" b="1" dirty="0"/>
+              <a:t>C</a:t>
+            </a:r>
+          </a:p>
+        </p:txBody>
+      </p:sp>
+      <p:sp>
+        <p:nvSpPr>
+          <p:cNvPr id="11" name="ZoneTexte 10">
+            <a:extLst>
+              <a:ext uri="{FF2B5EF4-FFF2-40B4-BE49-F238E27FC236}">
+                <a16:creationId xmlns:a16="http://schemas.microsoft.com/office/drawing/2014/main" id="{F433FC13-3431-1D45-B1F0-0901C82BBDEE}"/>
+              </a:ext>
+            </a:extLst>
+          </p:cNvPr>
+          <p:cNvSpPr txBox="1"/>
+          <p:nvPr/>
+        </p:nvSpPr>
+        <p:spPr>
+          <a:xfrm>
+            <a:off x="10353901" y="4279185"/>
+            <a:ext cx="352845" cy="369332"/>
+          </a:xfrm>
+          <a:prstGeom prst="rect">
+            <a:avLst/>
+          </a:prstGeom>
+          <a:noFill/>
+        </p:spPr>
+        <p:txBody>
+          <a:bodyPr wrap="square" rtlCol="0">
+            <a:spAutoFit/>
+          </a:bodyPr>
+          <a:lstStyle/>
+          <a:p>
+            <a:r>
+              <a:rPr lang="fr-FR" b="1" dirty="0"/>
+              <a:t>D</a:t>
+            </a:r>
+          </a:p>
+        </p:txBody>
+      </p:sp>
     </p:spTree>
     <p:extLst>
       <p:ext uri="{BB962C8B-B14F-4D97-AF65-F5344CB8AC3E}">
@@ -14424,7 +20057,7 @@
 </p:sld>
 </file>
 
-<file path=ppt/slides/slide16.xml><?xml version="1.0" encoding="utf-8"?>
+<file path=ppt/slides/slide21.xml><?xml version="1.0" encoding="utf-8"?>
 <p:sld xmlns:a="http://schemas.openxmlformats.org/drawingml/2006/main" xmlns:r="http://schemas.openxmlformats.org/officeDocument/2006/relationships" xmlns:p="http://schemas.openxmlformats.org/presentationml/2006/main">
   <p:cSld>
     <p:spTree>
@@ -14534,7 +20167,17 @@
           <a:p>
             <a:r>
               <a:rPr lang="fr-FR" dirty="0"/>
-              <a:t>Déterminer la médiane avec les courbes d’effectifs cumulés croissant et décroissant</a:t>
+              <a:t>Déterminer </a:t>
+            </a:r>
+            <a:r>
+              <a:rPr lang="fr-FR" dirty="0">
+                <a:hlinkClick r:id="rId2" action="ppaction://hlinksldjump"/>
+              </a:rPr>
+              <a:t>la médiane </a:t>
+            </a:r>
+            <a:r>
+              <a:rPr lang="fr-FR" dirty="0"/>
+              <a:t>avec les courbes d’effectifs cumulés croissant et décroissant</a:t>
             </a:r>
           </a:p>
           <a:p>
@@ -14571,7 +20214,7 @@
           <a:p>
             <a:fld id="{0BD8DA86-C09D-401C-842D-741E230745B4}" type="slidenum">
               <a:rPr lang="fr-FR" smtClean="0"/>
-              <a:t>16</a:t>
+              <a:t>21</a:t>
             </a:fld>
             <a:endParaRPr lang="fr-FR"/>
           </a:p>
@@ -14590,7 +20233,143 @@
 </p:sld>
 </file>
 
-<file path=ppt/slides/slide17.xml><?xml version="1.0" encoding="utf-8"?>
+<file path=ppt/slides/slide22.xml><?xml version="1.0" encoding="utf-8"?>
+<p:sld xmlns:a="http://schemas.openxmlformats.org/drawingml/2006/main" xmlns:r="http://schemas.openxmlformats.org/officeDocument/2006/relationships" xmlns:p="http://schemas.openxmlformats.org/presentationml/2006/main" show="0">
+  <p:cSld>
+    <p:spTree>
+      <p:nvGrpSpPr>
+        <p:cNvPr id="1" name=""/>
+        <p:cNvGrpSpPr/>
+        <p:nvPr/>
+      </p:nvGrpSpPr>
+      <p:grpSpPr>
+        <a:xfrm>
+          <a:off x="0" y="0"/>
+          <a:ext cx="0" cy="0"/>
+          <a:chOff x="0" y="0"/>
+          <a:chExt cx="0" cy="0"/>
+        </a:xfrm>
+      </p:grpSpPr>
+      <p:sp>
+        <p:nvSpPr>
+          <p:cNvPr id="2" name="Titre 1">
+            <a:extLst>
+              <a:ext uri="{FF2B5EF4-FFF2-40B4-BE49-F238E27FC236}">
+                <a16:creationId xmlns:a16="http://schemas.microsoft.com/office/drawing/2014/main" id="{7B15BA21-4FC1-9951-FE78-7A08B77C35D9}"/>
+              </a:ext>
+            </a:extLst>
+          </p:cNvPr>
+          <p:cNvSpPr>
+            <a:spLocks noGrp="1"/>
+          </p:cNvSpPr>
+          <p:nvPr>
+            <p:ph type="title"/>
+          </p:nvPr>
+        </p:nvSpPr>
+        <p:spPr/>
+        <p:txBody>
+          <a:bodyPr/>
+          <a:lstStyle/>
+          <a:p>
+            <a:r>
+              <a:rPr lang="fr-FR" dirty="0"/>
+              <a:t>Détermination graphique de la médiane</a:t>
+            </a:r>
+          </a:p>
+        </p:txBody>
+      </p:sp>
+      <p:sp>
+        <p:nvSpPr>
+          <p:cNvPr id="4" name="Espace réservé du numéro de diapositive 3">
+            <a:extLst>
+              <a:ext uri="{FF2B5EF4-FFF2-40B4-BE49-F238E27FC236}">
+                <a16:creationId xmlns:a16="http://schemas.microsoft.com/office/drawing/2014/main" id="{6C5FC973-94E1-2EA6-64E7-7A6ABD28FE84}"/>
+              </a:ext>
+            </a:extLst>
+          </p:cNvPr>
+          <p:cNvSpPr>
+            <a:spLocks noGrp="1"/>
+          </p:cNvSpPr>
+          <p:nvPr>
+            <p:ph type="sldNum" sz="quarter" idx="12"/>
+          </p:nvPr>
+        </p:nvSpPr>
+        <p:spPr/>
+        <p:txBody>
+          <a:bodyPr/>
+          <a:lstStyle/>
+          <a:p>
+            <a:fld id="{0BD8DA86-C09D-401C-842D-741E230745B4}" type="slidenum">
+              <a:rPr lang="fr-FR" smtClean="0"/>
+              <a:t>22</a:t>
+            </a:fld>
+            <a:endParaRPr lang="fr-FR"/>
+          </a:p>
+        </p:txBody>
+      </p:sp>
+      <p:pic>
+        <p:nvPicPr>
+          <p:cNvPr id="6146" name="Picture 2" descr="la médiane en statistique">
+            <a:extLst>
+              <a:ext uri="{FF2B5EF4-FFF2-40B4-BE49-F238E27FC236}">
+                <a16:creationId xmlns:a16="http://schemas.microsoft.com/office/drawing/2014/main" id="{8D47DA9E-EF6C-0C95-8D65-771F704C24F5}"/>
+              </a:ext>
+            </a:extLst>
+          </p:cNvPr>
+          <p:cNvPicPr>
+            <a:picLocks noGrp="1" noChangeAspect="1" noChangeArrowheads="1"/>
+          </p:cNvPicPr>
+          <p:nvPr>
+            <p:ph idx="1"/>
+          </p:nvPr>
+        </p:nvPicPr>
+        <p:blipFill>
+          <a:blip r:embed="rId2">
+            <a:extLst>
+              <a:ext uri="{28A0092B-C50C-407E-A947-70E740481C1C}">
+                <a14:useLocalDpi xmlns:a14="http://schemas.microsoft.com/office/drawing/2010/main" val="0"/>
+              </a:ext>
+            </a:extLst>
+          </a:blip>
+          <a:srcRect/>
+          <a:stretch>
+            <a:fillRect/>
+          </a:stretch>
+        </p:blipFill>
+        <p:spPr bwMode="auto">
+          <a:xfrm>
+            <a:off x="2351314" y="2460171"/>
+            <a:ext cx="7162800" cy="3508829"/>
+          </a:xfrm>
+          <a:prstGeom prst="rect">
+            <a:avLst/>
+          </a:prstGeom>
+          <a:noFill/>
+          <a:extLst>
+            <a:ext uri="{909E8E84-426E-40DD-AFC4-6F175D3DCCD1}">
+              <a14:hiddenFill xmlns:a14="http://schemas.microsoft.com/office/drawing/2010/main">
+                <a:solidFill>
+                  <a:srgbClr val="FFFFFF"/>
+                </a:solidFill>
+              </a14:hiddenFill>
+            </a:ext>
+          </a:extLst>
+        </p:spPr>
+      </p:pic>
+    </p:spTree>
+    <p:extLst>
+      <p:ext uri="{BB962C8B-B14F-4D97-AF65-F5344CB8AC3E}">
+        <p14:creationId xmlns:p14="http://schemas.microsoft.com/office/powerpoint/2010/main" val="3196975071"/>
+      </p:ext>
+    </p:extLst>
+  </p:cSld>
+  <p:clrMapOvr>
+    <a:masterClrMapping/>
+  </p:clrMapOvr>
+</p:sld>
+</file>
+
+<file path=ppt/slides/slide23.xml><?xml version="1.0" encoding="utf-8"?>
 <p:sld xmlns:a="http://schemas.openxmlformats.org/drawingml/2006/main" xmlns:r="http://schemas.openxmlformats.org/officeDocument/2006/relationships" xmlns:p="http://schemas.openxmlformats.org/presentationml/2006/main">
   <p:cSld>
     <p:spTree>
@@ -14653,30 +20432,35 @@
         </p:nvSpPr>
         <p:spPr>
           <a:xfrm>
-            <a:off x="1295401" y="4234903"/>
-            <a:ext cx="9601196" cy="1543728"/>
+            <a:off x="1295401" y="4301303"/>
+            <a:ext cx="9601196" cy="1477328"/>
           </a:xfrm>
+          <a:solidFill>
+            <a:schemeClr val="accent1">
+              <a:alpha val="29000"/>
+            </a:schemeClr>
+          </a:solidFill>
         </p:spPr>
         <p:txBody>
           <a:bodyPr>
-            <a:normAutofit lnSpcReduction="10000"/>
+            <a:normAutofit/>
           </a:bodyPr>
           <a:lstStyle/>
           <a:p>
             <a:r>
-              <a:rPr lang="fr-FR" dirty="0"/>
+              <a:rPr lang="fr-FR" sz="1800" dirty="0"/>
               <a:t>Couleurs</a:t>
             </a:r>
           </a:p>
           <a:p>
             <a:r>
-              <a:rPr lang="fr-FR" dirty="0"/>
+              <a:rPr lang="fr-FR" sz="1800" dirty="0"/>
               <a:t>Annotations</a:t>
             </a:r>
           </a:p>
           <a:p>
             <a:r>
-              <a:rPr lang="fr-FR" dirty="0"/>
+              <a:rPr lang="fr-FR" sz="1800" dirty="0"/>
               <a:t>Unités</a:t>
             </a:r>
           </a:p>
@@ -14708,7 +20492,7 @@
           <a:p>
             <a:fld id="{0BD8DA86-C09D-401C-842D-741E230745B4}" type="slidenum">
               <a:rPr lang="fr-FR" smtClean="0"/>
-              <a:t>17</a:t>
+              <a:t>23</a:t>
             </a:fld>
             <a:endParaRPr lang="fr-FR"/>
           </a:p>
@@ -14729,12 +20513,16 @@
         <p:spPr>
           <a:xfrm>
             <a:off x="1295401" y="2757575"/>
-            <a:ext cx="7918515" cy="1477328"/>
+            <a:ext cx="9601196" cy="1200329"/>
           </a:xfrm>
           <a:prstGeom prst="rect">
             <a:avLst/>
           </a:prstGeom>
-          <a:noFill/>
+          <a:solidFill>
+            <a:schemeClr val="accent1">
+              <a:alpha val="73000"/>
+            </a:schemeClr>
+          </a:solidFill>
         </p:spPr>
         <p:txBody>
           <a:bodyPr wrap="square" rtlCol="0">
@@ -14796,7 +20584,7 @@
 </p:sld>
 </file>
 
-<file path=ppt/slides/slide18.xml><?xml version="1.0" encoding="utf-8"?>
+<file path=ppt/slides/slide24.xml><?xml version="1.0" encoding="utf-8"?>
 <p:sld xmlns:a="http://schemas.openxmlformats.org/drawingml/2006/main" xmlns:r="http://schemas.openxmlformats.org/officeDocument/2006/relationships" xmlns:p="http://schemas.openxmlformats.org/presentationml/2006/main">
   <p:cSld>
     <p:spTree>
@@ -14880,6 +20668,25 @@
             </a:r>
           </a:p>
           <a:p>
+            <a:pPr marL="0" indent="0">
+              <a:buNone/>
+            </a:pPr>
+            <a:r>
+              <a:rPr lang="fr-FR" dirty="0"/>
+              <a:t>Panda, </a:t>
+            </a:r>
+            <a:r>
+              <a:rPr lang="fr-FR" dirty="0" err="1"/>
+              <a:t>Matplotlib</a:t>
+            </a:r>
+            <a:r>
+              <a:rPr lang="fr-FR" dirty="0"/>
+              <a:t>, </a:t>
+            </a:r>
+            <a:r>
+              <a:rPr lang="fr-FR" dirty="0" err="1"/>
+              <a:t>Seaborn</a:t>
+            </a:r>
             <a:endParaRPr lang="fr-FR" dirty="0"/>
           </a:p>
           <a:p>
@@ -14913,7 +20720,7 @@
           <a:p>
             <a:fld id="{0BD8DA86-C09D-401C-842D-741E230745B4}" type="slidenum">
               <a:rPr lang="fr-FR" smtClean="0"/>
-              <a:t>18</a:t>
+              <a:t>24</a:t>
             </a:fld>
             <a:endParaRPr lang="fr-FR"/>
           </a:p>
@@ -14932,7 +20739,7 @@
 </p:sld>
 </file>
 
-<file path=ppt/slides/slide19.xml><?xml version="1.0" encoding="utf-8"?>
+<file path=ppt/slides/slide25.xml><?xml version="1.0" encoding="utf-8"?>
 <p:sld xmlns:a="http://schemas.openxmlformats.org/drawingml/2006/main" xmlns:r="http://schemas.openxmlformats.org/officeDocument/2006/relationships" xmlns:p="http://schemas.openxmlformats.org/presentationml/2006/main">
   <p:cSld>
     <p:spTree>
@@ -15029,7 +20836,7 @@
           <a:p>
             <a:fld id="{0BD8DA86-C09D-401C-842D-741E230745B4}" type="slidenum">
               <a:rPr lang="fr-FR" smtClean="0"/>
-              <a:t>19</a:t>
+              <a:t>25</a:t>
             </a:fld>
             <a:endParaRPr lang="fr-FR"/>
           </a:p>
@@ -15048,173 +20855,7 @@
 </p:sld>
 </file>
 
-<file path=ppt/slides/slide2.xml><?xml version="1.0" encoding="utf-8"?>
-<p:sld xmlns:a="http://schemas.openxmlformats.org/drawingml/2006/main" xmlns:r="http://schemas.openxmlformats.org/officeDocument/2006/relationships" xmlns:p="http://schemas.openxmlformats.org/presentationml/2006/main">
-  <p:cSld>
-    <p:spTree>
-      <p:nvGrpSpPr>
-        <p:cNvPr id="1" name=""/>
-        <p:cNvGrpSpPr/>
-        <p:nvPr/>
-      </p:nvGrpSpPr>
-      <p:grpSpPr>
-        <a:xfrm>
-          <a:off x="0" y="0"/>
-          <a:ext cx="0" cy="0"/>
-          <a:chOff x="0" y="0"/>
-          <a:chExt cx="0" cy="0"/>
-        </a:xfrm>
-      </p:grpSpPr>
-      <p:sp>
-        <p:nvSpPr>
-          <p:cNvPr id="2" name="Titre 1">
-            <a:extLst>
-              <a:ext uri="{FF2B5EF4-FFF2-40B4-BE49-F238E27FC236}">
-                <a16:creationId xmlns:a16="http://schemas.microsoft.com/office/drawing/2014/main" id="{8F450E75-98DC-7F02-F431-1F99750376B8}"/>
-              </a:ext>
-            </a:extLst>
-          </p:cNvPr>
-          <p:cNvSpPr>
-            <a:spLocks noGrp="1"/>
-          </p:cNvSpPr>
-          <p:nvPr>
-            <p:ph type="title"/>
-          </p:nvPr>
-        </p:nvSpPr>
-        <p:spPr/>
-        <p:txBody>
-          <a:bodyPr/>
-          <a:lstStyle/>
-          <a:p>
-            <a:r>
-              <a:rPr lang="fr-FR" dirty="0"/>
-              <a:t>Plan</a:t>
-            </a:r>
-          </a:p>
-        </p:txBody>
-      </p:sp>
-      <p:sp>
-        <p:nvSpPr>
-          <p:cNvPr id="3" name="Espace réservé du contenu 2">
-            <a:extLst>
-              <a:ext uri="{FF2B5EF4-FFF2-40B4-BE49-F238E27FC236}">
-                <a16:creationId xmlns:a16="http://schemas.microsoft.com/office/drawing/2014/main" id="{14D9D0CB-0E4B-338B-D63C-A42BC2FB9AFA}"/>
-              </a:ext>
-            </a:extLst>
-          </p:cNvPr>
-          <p:cNvSpPr>
-            <a:spLocks noGrp="1"/>
-          </p:cNvSpPr>
-          <p:nvPr>
-            <p:ph idx="1"/>
-          </p:nvPr>
-        </p:nvSpPr>
-        <p:spPr/>
-        <p:txBody>
-          <a:bodyPr>
-            <a:normAutofit fontScale="92500" lnSpcReduction="10000"/>
-          </a:bodyPr>
-          <a:lstStyle/>
-          <a:p>
-            <a:r>
-              <a:rPr lang="fr-FR" sz="1800" dirty="0"/>
-              <a:t>1- Qu’est-ce-que la statistique graphique?</a:t>
-            </a:r>
-          </a:p>
-          <a:p>
-            <a:r>
-              <a:rPr lang="fr-FR" sz="1800" dirty="0"/>
-              <a:t>2-  Objectifs de la statistique graphique</a:t>
-            </a:r>
-          </a:p>
-          <a:p>
-            <a:r>
-              <a:rPr lang="fr-FR" sz="1800" dirty="0"/>
-              <a:t>3- Notions importantes pour lire, interpréter ou construire les graphiques</a:t>
-            </a:r>
-          </a:p>
-          <a:p>
-            <a:r>
-              <a:rPr lang="fr-FR" sz="1800" dirty="0"/>
-              <a:t>4- Eléments de décision</a:t>
-            </a:r>
-          </a:p>
-          <a:p>
-            <a:r>
-              <a:rPr lang="fr-FR" sz="1800" dirty="0"/>
-              <a:t>5- Quelle histoire souhaite t-on raconter? </a:t>
-            </a:r>
-          </a:p>
-          <a:p>
-            <a:r>
-              <a:rPr lang="fr-FR" sz="1800" dirty="0"/>
-              <a:t>6- Cas d’utilisation particuliers des graphiques</a:t>
-            </a:r>
-          </a:p>
-          <a:p>
-            <a:r>
-              <a:rPr lang="fr-FR" sz="1800" dirty="0"/>
-              <a:t>7- Qu’est ce qu’on peut faire avec un graphique?</a:t>
-            </a:r>
-          </a:p>
-          <a:p>
-            <a:r>
-              <a:rPr lang="fr-FR" sz="1800" dirty="0"/>
-              <a:t>8- Quelques bonnes pratiques</a:t>
-            </a:r>
-          </a:p>
-          <a:p>
-            <a:r>
-              <a:rPr lang="fr-FR" sz="1800" dirty="0"/>
-              <a:t>9- Quels outils &amp; comment ?</a:t>
-            </a:r>
-            <a:endParaRPr lang="fr-FR" sz="1050" dirty="0"/>
-          </a:p>
-        </p:txBody>
-      </p:sp>
-      <p:sp>
-        <p:nvSpPr>
-          <p:cNvPr id="4" name="Espace réservé du numéro de diapositive 3">
-            <a:extLst>
-              <a:ext uri="{FF2B5EF4-FFF2-40B4-BE49-F238E27FC236}">
-                <a16:creationId xmlns:a16="http://schemas.microsoft.com/office/drawing/2014/main" id="{30B90E63-D2D5-6206-AEE8-CEA48CF4FB81}"/>
-              </a:ext>
-            </a:extLst>
-          </p:cNvPr>
-          <p:cNvSpPr>
-            <a:spLocks noGrp="1"/>
-          </p:cNvSpPr>
-          <p:nvPr>
-            <p:ph type="sldNum" sz="quarter" idx="12"/>
-          </p:nvPr>
-        </p:nvSpPr>
-        <p:spPr/>
-        <p:txBody>
-          <a:bodyPr/>
-          <a:lstStyle/>
-          <a:p>
-            <a:fld id="{0BD8DA86-C09D-401C-842D-741E230745B4}" type="slidenum">
-              <a:rPr lang="fr-FR" smtClean="0"/>
-              <a:t>2</a:t>
-            </a:fld>
-            <a:endParaRPr lang="fr-FR"/>
-          </a:p>
-        </p:txBody>
-      </p:sp>
-    </p:spTree>
-    <p:extLst>
-      <p:ext uri="{BB962C8B-B14F-4D97-AF65-F5344CB8AC3E}">
-        <p14:creationId xmlns:p14="http://schemas.microsoft.com/office/powerpoint/2010/main" val="364727097"/>
-      </p:ext>
-    </p:extLst>
-  </p:cSld>
-  <p:clrMapOvr>
-    <a:masterClrMapping/>
-  </p:clrMapOvr>
-</p:sld>
-</file>
-
-<file path=ppt/slides/slide20.xml><?xml version="1.0" encoding="utf-8"?>
+<file path=ppt/slides/slide26.xml><?xml version="1.0" encoding="utf-8"?>
 <p:sld xmlns:a="http://schemas.openxmlformats.org/drawingml/2006/main" xmlns:r="http://schemas.openxmlformats.org/officeDocument/2006/relationships" xmlns:p="http://schemas.openxmlformats.org/presentationml/2006/main">
   <p:cSld>
     <p:spTree>
@@ -15282,7 +20923,7 @@
           <a:p>
             <a:fld id="{0BD8DA86-C09D-401C-842D-741E230745B4}" type="slidenum">
               <a:rPr lang="fr-FR" smtClean="0"/>
-              <a:t>20</a:t>
+              <a:t>26</a:t>
             </a:fld>
             <a:endParaRPr lang="fr-FR"/>
           </a:p>
@@ -15529,7 +21170,7 @@
 </p:sld>
 </file>
 
-<file path=ppt/slides/slide21.xml><?xml version="1.0" encoding="utf-8"?>
+<file path=ppt/slides/slide27.xml><?xml version="1.0" encoding="utf-8"?>
 <p:sld xmlns:a="http://schemas.openxmlformats.org/drawingml/2006/main" xmlns:r="http://schemas.openxmlformats.org/officeDocument/2006/relationships" xmlns:p="http://schemas.openxmlformats.org/presentationml/2006/main">
   <p:cSld>
     <p:spTree>
@@ -15626,7 +21267,7 @@
           <a:p>
             <a:fld id="{0BD8DA86-C09D-401C-842D-741E230745B4}" type="slidenum">
               <a:rPr lang="fr-FR" smtClean="0"/>
-              <a:t>21</a:t>
+              <a:t>27</a:t>
             </a:fld>
             <a:endParaRPr lang="fr-FR"/>
           </a:p>
@@ -15654,7 +21295,7 @@
         </p:blipFill>
         <p:spPr>
           <a:xfrm>
-            <a:off x="720581" y="4453194"/>
+            <a:off x="814849" y="4453194"/>
             <a:ext cx="4866968" cy="1515806"/>
           </a:xfrm>
           <a:prstGeom prst="rect">
@@ -15786,7 +21427,7 @@
 </p:sld>
 </file>
 
-<file path=ppt/slides/slide22.xml><?xml version="1.0" encoding="utf-8"?>
+<file path=ppt/slides/slide28.xml><?xml version="1.0" encoding="utf-8"?>
 <p:sld xmlns:a="http://schemas.openxmlformats.org/drawingml/2006/main" xmlns:r="http://schemas.openxmlformats.org/officeDocument/2006/relationships" xmlns:p="http://schemas.openxmlformats.org/presentationml/2006/main">
   <p:cSld>
     <p:spTree>
@@ -15854,7 +21495,7 @@
           <a:p>
             <a:fld id="{0BD8DA86-C09D-401C-842D-741E230745B4}" type="slidenum">
               <a:rPr lang="fr-FR" smtClean="0"/>
-              <a:t>22</a:t>
+              <a:t>28</a:t>
             </a:fld>
             <a:endParaRPr lang="fr-FR"/>
           </a:p>
@@ -16078,7 +21719,7 @@
 </p:sld>
 </file>
 
-<file path=ppt/slides/slide23.xml><?xml version="1.0" encoding="utf-8"?>
+<file path=ppt/slides/slide29.xml><?xml version="1.0" encoding="utf-8"?>
 <p:sld xmlns:a="http://schemas.openxmlformats.org/drawingml/2006/main" xmlns:r="http://schemas.openxmlformats.org/officeDocument/2006/relationships" xmlns:p="http://schemas.openxmlformats.org/presentationml/2006/main">
   <p:cSld>
     <p:spTree>
@@ -16175,7 +21816,7 @@
           <a:p>
             <a:fld id="{0BD8DA86-C09D-401C-842D-741E230745B4}" type="slidenum">
               <a:rPr lang="fr-FR" smtClean="0"/>
-              <a:t>23</a:t>
+              <a:t>29</a:t>
             </a:fld>
             <a:endParaRPr lang="fr-FR"/>
           </a:p>
@@ -16335,7 +21976,308 @@
 </p:sld>
 </file>
 
-<file path=ppt/slides/slide24.xml><?xml version="1.0" encoding="utf-8"?>
+<file path=ppt/slides/slide3.xml><?xml version="1.0" encoding="utf-8"?>
+<p:sld xmlns:a="http://schemas.openxmlformats.org/drawingml/2006/main" xmlns:r="http://schemas.openxmlformats.org/officeDocument/2006/relationships" xmlns:p="http://schemas.openxmlformats.org/presentationml/2006/main">
+  <p:cSld>
+    <p:spTree>
+      <p:nvGrpSpPr>
+        <p:cNvPr id="1" name=""/>
+        <p:cNvGrpSpPr/>
+        <p:nvPr/>
+      </p:nvGrpSpPr>
+      <p:grpSpPr>
+        <a:xfrm>
+          <a:off x="0" y="0"/>
+          <a:ext cx="0" cy="0"/>
+          <a:chOff x="0" y="0"/>
+          <a:chExt cx="0" cy="0"/>
+        </a:xfrm>
+      </p:grpSpPr>
+      <p:sp>
+        <p:nvSpPr>
+          <p:cNvPr id="2" name="Titre 1">
+            <a:extLst>
+              <a:ext uri="{FF2B5EF4-FFF2-40B4-BE49-F238E27FC236}">
+                <a16:creationId xmlns:a16="http://schemas.microsoft.com/office/drawing/2014/main" id="{E7825413-839A-F9EC-608A-2947CA5D5C29}"/>
+              </a:ext>
+            </a:extLst>
+          </p:cNvPr>
+          <p:cNvSpPr>
+            <a:spLocks noGrp="1"/>
+          </p:cNvSpPr>
+          <p:nvPr>
+            <p:ph type="title"/>
+          </p:nvPr>
+        </p:nvSpPr>
+        <p:spPr>
+          <a:xfrm>
+            <a:off x="1295402" y="742102"/>
+            <a:ext cx="9601196" cy="1303867"/>
+          </a:xfrm>
+        </p:spPr>
+        <p:txBody>
+          <a:bodyPr/>
+          <a:lstStyle/>
+          <a:p>
+            <a:r>
+              <a:rPr lang="fr-FR" dirty="0"/>
+              <a:t>1- Qu’est-ce-que la statistique graphique?</a:t>
+            </a:r>
+          </a:p>
+        </p:txBody>
+      </p:sp>
+      <p:sp>
+        <p:nvSpPr>
+          <p:cNvPr id="3" name="Espace réservé du contenu 2">
+            <a:extLst>
+              <a:ext uri="{FF2B5EF4-FFF2-40B4-BE49-F238E27FC236}">
+                <a16:creationId xmlns:a16="http://schemas.microsoft.com/office/drawing/2014/main" id="{C3F21858-6694-1DF1-E0E8-96B64E17F0CD}"/>
+              </a:ext>
+            </a:extLst>
+          </p:cNvPr>
+          <p:cNvSpPr>
+            <a:spLocks noGrp="1"/>
+          </p:cNvSpPr>
+          <p:nvPr>
+            <p:ph idx="1"/>
+          </p:nvPr>
+        </p:nvSpPr>
+        <p:spPr>
+          <a:xfrm>
+            <a:off x="817123" y="2578734"/>
+            <a:ext cx="5398851" cy="3406988"/>
+          </a:xfrm>
+        </p:spPr>
+        <p:txBody>
+          <a:bodyPr>
+            <a:noAutofit/>
+          </a:bodyPr>
+          <a:lstStyle/>
+          <a:p>
+            <a:pPr algn="just" fontAlgn="base"/>
+            <a:r>
+              <a:rPr lang="fr-FR" sz="2000" b="1" i="0" dirty="0">
+                <a:solidFill>
+                  <a:srgbClr val="53565A"/>
+                </a:solidFill>
+                <a:effectLst/>
+                <a:latin typeface="nexussans"/>
+              </a:rPr>
+              <a:t>Un graphique statistique </a:t>
+            </a:r>
+            <a:r>
+              <a:rPr lang="fr-FR" sz="2000" b="1" dirty="0">
+                <a:solidFill>
+                  <a:srgbClr val="53565A"/>
+                </a:solidFill>
+                <a:latin typeface="nexussans"/>
+              </a:rPr>
+              <a:t>: </a:t>
+            </a:r>
+            <a:r>
+              <a:rPr lang="fr-FR" sz="2000" i="0" dirty="0">
+                <a:solidFill>
+                  <a:srgbClr val="53565A"/>
+                </a:solidFill>
+                <a:effectLst/>
+                <a:latin typeface="nexussans"/>
+              </a:rPr>
+              <a:t>figure fondée sur des données recueillies </a:t>
+            </a:r>
+            <a:r>
+              <a:rPr lang="fr-FR" sz="2000" dirty="0">
+                <a:solidFill>
+                  <a:srgbClr val="53565A"/>
+                </a:solidFill>
+                <a:latin typeface="nexussans"/>
+              </a:rPr>
+              <a:t>dans</a:t>
+            </a:r>
+            <a:r>
+              <a:rPr lang="fr-FR" sz="2000" i="0" dirty="0">
+                <a:solidFill>
+                  <a:srgbClr val="53565A"/>
+                </a:solidFill>
+                <a:effectLst/>
+                <a:latin typeface="nexussans"/>
+              </a:rPr>
+              <a:t> des populations ou des échantillons – Représentation visuelle des variables d’une population</a:t>
+            </a:r>
+          </a:p>
+          <a:p>
+            <a:pPr marL="0" indent="0" algn="just" fontAlgn="base">
+              <a:buNone/>
+            </a:pPr>
+            <a:endParaRPr lang="fr-FR" sz="2000" i="0" dirty="0">
+              <a:solidFill>
+                <a:srgbClr val="53565A"/>
+              </a:solidFill>
+              <a:effectLst/>
+              <a:latin typeface="nexussans"/>
+            </a:endParaRPr>
+          </a:p>
+          <a:p>
+            <a:pPr algn="just" fontAlgn="base"/>
+            <a:r>
+              <a:rPr lang="fr-FR" sz="2000" dirty="0">
+                <a:solidFill>
+                  <a:srgbClr val="53565A"/>
+                </a:solidFill>
+                <a:latin typeface="nexussans"/>
+              </a:rPr>
+              <a:t>V</a:t>
+            </a:r>
+            <a:r>
+              <a:rPr lang="fr-FR" sz="2000" b="0" i="0" dirty="0">
+                <a:solidFill>
+                  <a:srgbClr val="53565A"/>
+                </a:solidFill>
+                <a:effectLst/>
+                <a:latin typeface="nexussans"/>
+              </a:rPr>
+              <a:t>ariation </a:t>
+            </a:r>
+            <a:r>
+              <a:rPr lang="fr-FR" sz="2000" b="1" i="0" dirty="0">
+                <a:solidFill>
+                  <a:srgbClr val="53565A"/>
+                </a:solidFill>
+                <a:effectLst/>
+                <a:latin typeface="nexussans"/>
+              </a:rPr>
+              <a:t>nouvelle ou inattendue </a:t>
+            </a:r>
+            <a:r>
+              <a:rPr lang="fr-FR" sz="2000" i="0" dirty="0">
+                <a:solidFill>
+                  <a:srgbClr val="53565A"/>
+                </a:solidFill>
+                <a:effectLst/>
+                <a:latin typeface="nexussans"/>
+              </a:rPr>
+              <a:t>mise en lumière par la représentation en partant de données complexes</a:t>
+            </a:r>
+            <a:endParaRPr lang="fr-FR" sz="2000" dirty="0"/>
+          </a:p>
+        </p:txBody>
+      </p:sp>
+      <p:sp>
+        <p:nvSpPr>
+          <p:cNvPr id="4" name="Espace réservé du numéro de diapositive 3">
+            <a:extLst>
+              <a:ext uri="{FF2B5EF4-FFF2-40B4-BE49-F238E27FC236}">
+                <a16:creationId xmlns:a16="http://schemas.microsoft.com/office/drawing/2014/main" id="{89FCA979-C316-7401-56F9-E495E81DFD0B}"/>
+              </a:ext>
+            </a:extLst>
+          </p:cNvPr>
+          <p:cNvSpPr>
+            <a:spLocks noGrp="1"/>
+          </p:cNvSpPr>
+          <p:nvPr>
+            <p:ph type="sldNum" sz="quarter" idx="12"/>
+          </p:nvPr>
+        </p:nvSpPr>
+        <p:spPr/>
+        <p:txBody>
+          <a:bodyPr/>
+          <a:lstStyle/>
+          <a:p>
+            <a:fld id="{0BD8DA86-C09D-401C-842D-741E230745B4}" type="slidenum">
+              <a:rPr lang="fr-FR" smtClean="0"/>
+              <a:t>3</a:t>
+            </a:fld>
+            <a:endParaRPr lang="fr-FR"/>
+          </a:p>
+        </p:txBody>
+      </p:sp>
+      <p:graphicFrame>
+        <p:nvGraphicFramePr>
+          <p:cNvPr id="7" name="Diagramme 6">
+            <a:extLst>
+              <a:ext uri="{FF2B5EF4-FFF2-40B4-BE49-F238E27FC236}">
+                <a16:creationId xmlns:a16="http://schemas.microsoft.com/office/drawing/2014/main" id="{A699F142-F105-74EF-3607-81267F3F19E7}"/>
+              </a:ext>
+            </a:extLst>
+          </p:cNvPr>
+          <p:cNvGraphicFramePr/>
+          <p:nvPr>
+            <p:extLst>
+              <p:ext uri="{D42A27DB-BD31-4B8C-83A1-F6EECF244321}">
+                <p14:modId xmlns:p14="http://schemas.microsoft.com/office/powerpoint/2010/main" val="853420095"/>
+              </p:ext>
+            </p:extLst>
+          </p:nvPr>
+        </p:nvGraphicFramePr>
+        <p:xfrm>
+          <a:off x="6764818" y="2455756"/>
+          <a:ext cx="4041569" cy="3652943"/>
+        </p:xfrm>
+        <a:graphic>
+          <a:graphicData uri="http://schemas.openxmlformats.org/drawingml/2006/diagram">
+            <dgm:relIds xmlns:dgm="http://schemas.openxmlformats.org/drawingml/2006/diagram" xmlns:r="http://schemas.openxmlformats.org/officeDocument/2006/relationships" r:dm="rId2" r:lo="rId3" r:qs="rId4" r:cs="rId5"/>
+          </a:graphicData>
+        </a:graphic>
+      </p:graphicFrame>
+      <p:sp>
+        <p:nvSpPr>
+          <p:cNvPr id="5" name="Flèche : bas 4">
+            <a:extLst>
+              <a:ext uri="{FF2B5EF4-FFF2-40B4-BE49-F238E27FC236}">
+                <a16:creationId xmlns:a16="http://schemas.microsoft.com/office/drawing/2014/main" id="{FD5CD84C-6F8F-3C8F-0C84-AC4AAD72C05B}"/>
+              </a:ext>
+            </a:extLst>
+          </p:cNvPr>
+          <p:cNvSpPr/>
+          <p:nvPr/>
+        </p:nvSpPr>
+        <p:spPr>
+          <a:xfrm>
+            <a:off x="3090875" y="3866409"/>
+            <a:ext cx="324465" cy="540774"/>
+          </a:xfrm>
+          <a:prstGeom prst="downArrow">
+            <a:avLst/>
+          </a:prstGeom>
+        </p:spPr>
+        <p:style>
+          <a:lnRef idx="2">
+            <a:schemeClr val="accent1">
+              <a:shade val="50000"/>
+            </a:schemeClr>
+          </a:lnRef>
+          <a:fillRef idx="1">
+            <a:schemeClr val="accent1"/>
+          </a:fillRef>
+          <a:effectRef idx="0">
+            <a:schemeClr val="accent1"/>
+          </a:effectRef>
+          <a:fontRef idx="minor">
+            <a:schemeClr val="lt1"/>
+          </a:fontRef>
+        </p:style>
+        <p:txBody>
+          <a:bodyPr rtlCol="0" anchor="ctr"/>
+          <a:lstStyle/>
+          <a:p>
+            <a:pPr algn="ctr"/>
+            <a:endParaRPr lang="fr-FR"/>
+          </a:p>
+        </p:txBody>
+      </p:sp>
+    </p:spTree>
+    <p:extLst>
+      <p:ext uri="{BB962C8B-B14F-4D97-AF65-F5344CB8AC3E}">
+        <p14:creationId xmlns:p14="http://schemas.microsoft.com/office/powerpoint/2010/main" val="776164947"/>
+      </p:ext>
+    </p:extLst>
+  </p:cSld>
+  <p:clrMapOvr>
+    <a:masterClrMapping/>
+  </p:clrMapOvr>
+</p:sld>
+</file>
+
+<file path=ppt/slides/slide30.xml><?xml version="1.0" encoding="utf-8"?>
 <p:sld xmlns:a="http://schemas.openxmlformats.org/drawingml/2006/main" xmlns:r="http://schemas.openxmlformats.org/officeDocument/2006/relationships" xmlns:p="http://schemas.openxmlformats.org/presentationml/2006/main">
   <p:cSld>
     <p:spTree>
@@ -16403,7 +22345,7 @@
           <a:p>
             <a:fld id="{0BD8DA86-C09D-401C-842D-741E230745B4}" type="slidenum">
               <a:rPr lang="fr-FR" smtClean="0"/>
-              <a:t>24</a:t>
+              <a:t>30</a:t>
             </a:fld>
             <a:endParaRPr lang="fr-FR"/>
           </a:p>
@@ -16516,7 +22458,7 @@
 </p:sld>
 </file>
 
-<file path=ppt/slides/slide25.xml><?xml version="1.0" encoding="utf-8"?>
+<file path=ppt/slides/slide31.xml><?xml version="1.0" encoding="utf-8"?>
 <p:sld xmlns:a="http://schemas.openxmlformats.org/drawingml/2006/main" xmlns:r="http://schemas.openxmlformats.org/officeDocument/2006/relationships" xmlns:p="http://schemas.openxmlformats.org/presentationml/2006/main">
   <p:cSld>
     <p:spTree>
@@ -16584,7 +22526,7 @@
           <a:p>
             <a:fld id="{0BD8DA86-C09D-401C-842D-741E230745B4}" type="slidenum">
               <a:rPr lang="fr-FR" smtClean="0"/>
-              <a:t>25</a:t>
+              <a:t>31</a:t>
             </a:fld>
             <a:endParaRPr lang="fr-FR"/>
           </a:p>
@@ -16773,7 +22715,7 @@
 </p:sld>
 </file>
 
-<file path=ppt/slides/slide26.xml><?xml version="1.0" encoding="utf-8"?>
+<file path=ppt/slides/slide32.xml><?xml version="1.0" encoding="utf-8"?>
 <p:sld xmlns:a="http://schemas.openxmlformats.org/drawingml/2006/main" xmlns:r="http://schemas.openxmlformats.org/officeDocument/2006/relationships" xmlns:p="http://schemas.openxmlformats.org/presentationml/2006/main">
   <p:cSld>
     <p:spTree>
@@ -16866,7 +22808,7 @@
           <a:p>
             <a:fld id="{0BD8DA86-C09D-401C-842D-741E230745B4}" type="slidenum">
               <a:rPr lang="fr-FR" smtClean="0"/>
-              <a:t>26</a:t>
+              <a:t>32</a:t>
             </a:fld>
             <a:endParaRPr lang="fr-FR"/>
           </a:p>
@@ -16885,7 +22827,7 @@
 </p:sld>
 </file>
 
-<file path=ppt/slides/slide27.xml><?xml version="1.0" encoding="utf-8"?>
+<file path=ppt/slides/slide33.xml><?xml version="1.0" encoding="utf-8"?>
 <p:sld xmlns:a="http://schemas.openxmlformats.org/drawingml/2006/main" xmlns:r="http://schemas.openxmlformats.org/officeDocument/2006/relationships" xmlns:p="http://schemas.openxmlformats.org/presentationml/2006/main">
   <p:cSld>
     <p:spTree>
@@ -16953,7 +22895,7 @@
           <a:p>
             <a:fld id="{0BD8DA86-C09D-401C-842D-741E230745B4}" type="slidenum">
               <a:rPr lang="fr-FR" smtClean="0"/>
-              <a:t>27</a:t>
+              <a:t>33</a:t>
             </a:fld>
             <a:endParaRPr lang="fr-FR"/>
           </a:p>
@@ -17066,307 +23008,6 @@
 </p:sld>
 </file>
 
-<file path=ppt/slides/slide3.xml><?xml version="1.0" encoding="utf-8"?>
-<p:sld xmlns:a="http://schemas.openxmlformats.org/drawingml/2006/main" xmlns:r="http://schemas.openxmlformats.org/officeDocument/2006/relationships" xmlns:p="http://schemas.openxmlformats.org/presentationml/2006/main">
-  <p:cSld>
-    <p:spTree>
-      <p:nvGrpSpPr>
-        <p:cNvPr id="1" name=""/>
-        <p:cNvGrpSpPr/>
-        <p:nvPr/>
-      </p:nvGrpSpPr>
-      <p:grpSpPr>
-        <a:xfrm>
-          <a:off x="0" y="0"/>
-          <a:ext cx="0" cy="0"/>
-          <a:chOff x="0" y="0"/>
-          <a:chExt cx="0" cy="0"/>
-        </a:xfrm>
-      </p:grpSpPr>
-      <p:sp>
-        <p:nvSpPr>
-          <p:cNvPr id="2" name="Titre 1">
-            <a:extLst>
-              <a:ext uri="{FF2B5EF4-FFF2-40B4-BE49-F238E27FC236}">
-                <a16:creationId xmlns:a16="http://schemas.microsoft.com/office/drawing/2014/main" id="{E7825413-839A-F9EC-608A-2947CA5D5C29}"/>
-              </a:ext>
-            </a:extLst>
-          </p:cNvPr>
-          <p:cNvSpPr>
-            <a:spLocks noGrp="1"/>
-          </p:cNvSpPr>
-          <p:nvPr>
-            <p:ph type="title"/>
-          </p:nvPr>
-        </p:nvSpPr>
-        <p:spPr>
-          <a:xfrm>
-            <a:off x="1295402" y="742102"/>
-            <a:ext cx="9601196" cy="1303867"/>
-          </a:xfrm>
-        </p:spPr>
-        <p:txBody>
-          <a:bodyPr/>
-          <a:lstStyle/>
-          <a:p>
-            <a:r>
-              <a:rPr lang="fr-FR" dirty="0"/>
-              <a:t>1- Qu’est-ce-que la statistique graphique?</a:t>
-            </a:r>
-          </a:p>
-        </p:txBody>
-      </p:sp>
-      <p:sp>
-        <p:nvSpPr>
-          <p:cNvPr id="3" name="Espace réservé du contenu 2">
-            <a:extLst>
-              <a:ext uri="{FF2B5EF4-FFF2-40B4-BE49-F238E27FC236}">
-                <a16:creationId xmlns:a16="http://schemas.microsoft.com/office/drawing/2014/main" id="{C3F21858-6694-1DF1-E0E8-96B64E17F0CD}"/>
-              </a:ext>
-            </a:extLst>
-          </p:cNvPr>
-          <p:cNvSpPr>
-            <a:spLocks noGrp="1"/>
-          </p:cNvSpPr>
-          <p:nvPr>
-            <p:ph idx="1"/>
-          </p:nvPr>
-        </p:nvSpPr>
-        <p:spPr>
-          <a:xfrm>
-            <a:off x="817123" y="2578734"/>
-            <a:ext cx="5398851" cy="3406988"/>
-          </a:xfrm>
-        </p:spPr>
-        <p:txBody>
-          <a:bodyPr>
-            <a:noAutofit/>
-          </a:bodyPr>
-          <a:lstStyle/>
-          <a:p>
-            <a:pPr algn="just" fontAlgn="base"/>
-            <a:r>
-              <a:rPr lang="fr-FR" sz="2000" b="1" i="0" dirty="0">
-                <a:solidFill>
-                  <a:srgbClr val="53565A"/>
-                </a:solidFill>
-                <a:effectLst/>
-                <a:latin typeface="nexussans"/>
-              </a:rPr>
-              <a:t>Un graphique statistique </a:t>
-            </a:r>
-            <a:r>
-              <a:rPr lang="fr-FR" sz="2000" b="1" dirty="0">
-                <a:solidFill>
-                  <a:srgbClr val="53565A"/>
-                </a:solidFill>
-                <a:latin typeface="nexussans"/>
-              </a:rPr>
-              <a:t>: </a:t>
-            </a:r>
-            <a:r>
-              <a:rPr lang="fr-FR" sz="2000" i="0" dirty="0">
-                <a:solidFill>
-                  <a:srgbClr val="53565A"/>
-                </a:solidFill>
-                <a:effectLst/>
-                <a:latin typeface="nexussans"/>
-              </a:rPr>
-              <a:t>figure fondée sur des données recueillies </a:t>
-            </a:r>
-            <a:r>
-              <a:rPr lang="fr-FR" sz="2000" dirty="0">
-                <a:solidFill>
-                  <a:srgbClr val="53565A"/>
-                </a:solidFill>
-                <a:latin typeface="nexussans"/>
-              </a:rPr>
-              <a:t>dans</a:t>
-            </a:r>
-            <a:r>
-              <a:rPr lang="fr-FR" sz="2000" i="0" dirty="0">
-                <a:solidFill>
-                  <a:srgbClr val="53565A"/>
-                </a:solidFill>
-                <a:effectLst/>
-                <a:latin typeface="nexussans"/>
-              </a:rPr>
-              <a:t> des populations ou des échantillons – Représentation visuelle des variables d’une population</a:t>
-            </a:r>
-          </a:p>
-          <a:p>
-            <a:pPr marL="0" indent="0" algn="just" fontAlgn="base">
-              <a:buNone/>
-            </a:pPr>
-            <a:endParaRPr lang="fr-FR" sz="2000" i="0" dirty="0">
-              <a:solidFill>
-                <a:srgbClr val="53565A"/>
-              </a:solidFill>
-              <a:effectLst/>
-              <a:latin typeface="nexussans"/>
-            </a:endParaRPr>
-          </a:p>
-          <a:p>
-            <a:pPr algn="just" fontAlgn="base"/>
-            <a:r>
-              <a:rPr lang="fr-FR" sz="2000" dirty="0">
-                <a:solidFill>
-                  <a:srgbClr val="53565A"/>
-                </a:solidFill>
-                <a:latin typeface="nexussans"/>
-              </a:rPr>
-              <a:t>V</a:t>
-            </a:r>
-            <a:r>
-              <a:rPr lang="fr-FR" sz="2000" b="0" i="0" dirty="0">
-                <a:solidFill>
-                  <a:srgbClr val="53565A"/>
-                </a:solidFill>
-                <a:effectLst/>
-                <a:latin typeface="nexussans"/>
-              </a:rPr>
-              <a:t>ariation </a:t>
-            </a:r>
-            <a:r>
-              <a:rPr lang="fr-FR" sz="2000" b="1" i="0" dirty="0">
-                <a:solidFill>
-                  <a:srgbClr val="53565A"/>
-                </a:solidFill>
-                <a:effectLst/>
-                <a:latin typeface="nexussans"/>
-              </a:rPr>
-              <a:t>nouvelle ou inattendue </a:t>
-            </a:r>
-            <a:r>
-              <a:rPr lang="fr-FR" sz="2000" i="0" dirty="0">
-                <a:solidFill>
-                  <a:srgbClr val="53565A"/>
-                </a:solidFill>
-                <a:effectLst/>
-                <a:latin typeface="nexussans"/>
-              </a:rPr>
-              <a:t>mise en lumière par la représentation en partant de données complexes</a:t>
-            </a:r>
-            <a:endParaRPr lang="fr-FR" sz="2000" dirty="0"/>
-          </a:p>
-        </p:txBody>
-      </p:sp>
-      <p:sp>
-        <p:nvSpPr>
-          <p:cNvPr id="4" name="Espace réservé du numéro de diapositive 3">
-            <a:extLst>
-              <a:ext uri="{FF2B5EF4-FFF2-40B4-BE49-F238E27FC236}">
-                <a16:creationId xmlns:a16="http://schemas.microsoft.com/office/drawing/2014/main" id="{89FCA979-C316-7401-56F9-E495E81DFD0B}"/>
-              </a:ext>
-            </a:extLst>
-          </p:cNvPr>
-          <p:cNvSpPr>
-            <a:spLocks noGrp="1"/>
-          </p:cNvSpPr>
-          <p:nvPr>
-            <p:ph type="sldNum" sz="quarter" idx="12"/>
-          </p:nvPr>
-        </p:nvSpPr>
-        <p:spPr/>
-        <p:txBody>
-          <a:bodyPr/>
-          <a:lstStyle/>
-          <a:p>
-            <a:fld id="{0BD8DA86-C09D-401C-842D-741E230745B4}" type="slidenum">
-              <a:rPr lang="fr-FR" smtClean="0"/>
-              <a:t>3</a:t>
-            </a:fld>
-            <a:endParaRPr lang="fr-FR"/>
-          </a:p>
-        </p:txBody>
-      </p:sp>
-      <p:graphicFrame>
-        <p:nvGraphicFramePr>
-          <p:cNvPr id="7" name="Diagramme 6">
-            <a:extLst>
-              <a:ext uri="{FF2B5EF4-FFF2-40B4-BE49-F238E27FC236}">
-                <a16:creationId xmlns:a16="http://schemas.microsoft.com/office/drawing/2014/main" id="{A699F142-F105-74EF-3607-81267F3F19E7}"/>
-              </a:ext>
-            </a:extLst>
-          </p:cNvPr>
-          <p:cNvGraphicFramePr/>
-          <p:nvPr>
-            <p:extLst>
-              <p:ext uri="{D42A27DB-BD31-4B8C-83A1-F6EECF244321}">
-                <p14:modId xmlns:p14="http://schemas.microsoft.com/office/powerpoint/2010/main" val="2502089517"/>
-              </p:ext>
-            </p:extLst>
-          </p:nvPr>
-        </p:nvGraphicFramePr>
-        <p:xfrm>
-          <a:off x="6764818" y="2455756"/>
-          <a:ext cx="4041569" cy="3652943"/>
-        </p:xfrm>
-        <a:graphic>
-          <a:graphicData uri="http://schemas.openxmlformats.org/drawingml/2006/diagram">
-            <dgm:relIds xmlns:dgm="http://schemas.openxmlformats.org/drawingml/2006/diagram" xmlns:r="http://schemas.openxmlformats.org/officeDocument/2006/relationships" r:dm="rId2" r:lo="rId3" r:qs="rId4" r:cs="rId5"/>
-          </a:graphicData>
-        </a:graphic>
-      </p:graphicFrame>
-      <p:sp>
-        <p:nvSpPr>
-          <p:cNvPr id="5" name="Flèche : bas 4">
-            <a:extLst>
-              <a:ext uri="{FF2B5EF4-FFF2-40B4-BE49-F238E27FC236}">
-                <a16:creationId xmlns:a16="http://schemas.microsoft.com/office/drawing/2014/main" id="{FD5CD84C-6F8F-3C8F-0C84-AC4AAD72C05B}"/>
-              </a:ext>
-            </a:extLst>
-          </p:cNvPr>
-          <p:cNvSpPr/>
-          <p:nvPr/>
-        </p:nvSpPr>
-        <p:spPr>
-          <a:xfrm>
-            <a:off x="3090875" y="3866409"/>
-            <a:ext cx="324465" cy="540774"/>
-          </a:xfrm>
-          <a:prstGeom prst="downArrow">
-            <a:avLst/>
-          </a:prstGeom>
-        </p:spPr>
-        <p:style>
-          <a:lnRef idx="2">
-            <a:schemeClr val="accent1">
-              <a:shade val="50000"/>
-            </a:schemeClr>
-          </a:lnRef>
-          <a:fillRef idx="1">
-            <a:schemeClr val="accent1"/>
-          </a:fillRef>
-          <a:effectRef idx="0">
-            <a:schemeClr val="accent1"/>
-          </a:effectRef>
-          <a:fontRef idx="minor">
-            <a:schemeClr val="lt1"/>
-          </a:fontRef>
-        </p:style>
-        <p:txBody>
-          <a:bodyPr rtlCol="0" anchor="ctr"/>
-          <a:lstStyle/>
-          <a:p>
-            <a:pPr algn="ctr"/>
-            <a:endParaRPr lang="fr-FR"/>
-          </a:p>
-        </p:txBody>
-      </p:sp>
-    </p:spTree>
-    <p:extLst>
-      <p:ext uri="{BB962C8B-B14F-4D97-AF65-F5344CB8AC3E}">
-        <p14:creationId xmlns:p14="http://schemas.microsoft.com/office/powerpoint/2010/main" val="776164947"/>
-      </p:ext>
-    </p:extLst>
-  </p:cSld>
-  <p:clrMapOvr>
-    <a:masterClrMapping/>
-  </p:clrMapOvr>
-</p:sld>
-</file>
-
 <file path=ppt/slides/slide4.xml><?xml version="1.0" encoding="utf-8"?>
 <p:sld xmlns:a="http://schemas.openxmlformats.org/drawingml/2006/main" xmlns:r="http://schemas.openxmlformats.org/officeDocument/2006/relationships" xmlns:p="http://schemas.openxmlformats.org/presentationml/2006/main">
   <p:cSld>
@@ -17428,7 +23069,12 @@
             <p:ph idx="1"/>
           </p:nvPr>
         </p:nvSpPr>
-        <p:spPr/>
+        <p:spPr>
+          <a:xfrm>
+            <a:off x="1295401" y="2556932"/>
+            <a:ext cx="9742713" cy="3318936"/>
+          </a:xfrm>
+        </p:spPr>
         <p:txBody>
           <a:bodyPr>
             <a:normAutofit/>
@@ -17485,7 +23131,7 @@
                 </a:solidFill>
                 <a:latin typeface="nexussans"/>
               </a:rPr>
-              <a:t>Accompagne un ou des tableau</a:t>
+              <a:t>Accompagne un ou des tableau (x)</a:t>
             </a:r>
           </a:p>
           <a:p>
@@ -17543,6 +23189,96 @@
               <a:rPr lang="fr-FR" smtClean="0"/>
               <a:t>4</a:t>
             </a:fld>
+            <a:endParaRPr lang="fr-FR"/>
+          </a:p>
+        </p:txBody>
+      </p:sp>
+      <p:sp>
+        <p:nvSpPr>
+          <p:cNvPr id="5" name="AutoShape 2" descr="Kinesthésique : qu'est-ce que la mémoire kinesthésique ?">
+            <a:extLst>
+              <a:ext uri="{FF2B5EF4-FFF2-40B4-BE49-F238E27FC236}">
+                <a16:creationId xmlns:a16="http://schemas.microsoft.com/office/drawing/2014/main" id="{804BDC35-2AE3-E2B4-7F45-BFF353CF2279}"/>
+              </a:ext>
+            </a:extLst>
+          </p:cNvPr>
+          <p:cNvSpPr>
+            <a:spLocks noChangeAspect="1" noChangeArrowheads="1"/>
+          </p:cNvSpPr>
+          <p:nvPr/>
+        </p:nvSpPr>
+        <p:spPr bwMode="auto">
+          <a:xfrm>
+            <a:off x="5943600" y="3276600"/>
+            <a:ext cx="304800" cy="304800"/>
+          </a:xfrm>
+          <a:prstGeom prst="rect">
+            <a:avLst/>
+          </a:prstGeom>
+          <a:noFill/>
+          <a:extLst>
+            <a:ext uri="{909E8E84-426E-40DD-AFC4-6F175D3DCCD1}">
+              <a14:hiddenFill xmlns:a14="http://schemas.microsoft.com/office/drawing/2010/main">
+                <a:solidFill>
+                  <a:srgbClr val="FFFFFF"/>
+                </a:solidFill>
+              </a14:hiddenFill>
+            </a:ext>
+          </a:extLst>
+        </p:spPr>
+        <p:txBody>
+          <a:bodyPr vert="horz" wrap="square" lIns="91440" tIns="45720" rIns="91440" bIns="45720" numCol="1" anchor="t" anchorCtr="0" compatLnSpc="1">
+            <a:prstTxWarp prst="textNoShape">
+              <a:avLst/>
+            </a:prstTxWarp>
+          </a:bodyPr>
+          <a:lstStyle/>
+          <a:p>
+            <a:endParaRPr lang="fr-FR"/>
+          </a:p>
+        </p:txBody>
+      </p:sp>
+      <p:sp>
+        <p:nvSpPr>
+          <p:cNvPr id="6" name="AutoShape 4" descr="Kinesthésique : qu'est-ce que la mémoire kinesthésique ?">
+            <a:extLst>
+              <a:ext uri="{FF2B5EF4-FFF2-40B4-BE49-F238E27FC236}">
+                <a16:creationId xmlns:a16="http://schemas.microsoft.com/office/drawing/2014/main" id="{001CE7D8-7A22-AD69-0942-DF1AF7698BC1}"/>
+              </a:ext>
+            </a:extLst>
+          </p:cNvPr>
+          <p:cNvSpPr>
+            <a:spLocks noChangeAspect="1" noChangeArrowheads="1"/>
+          </p:cNvSpPr>
+          <p:nvPr/>
+        </p:nvSpPr>
+        <p:spPr bwMode="auto">
+          <a:xfrm>
+            <a:off x="6096000" y="3429000"/>
+            <a:ext cx="304800" cy="304800"/>
+          </a:xfrm>
+          <a:prstGeom prst="rect">
+            <a:avLst/>
+          </a:prstGeom>
+          <a:noFill/>
+          <a:extLst>
+            <a:ext uri="{909E8E84-426E-40DD-AFC4-6F175D3DCCD1}">
+              <a14:hiddenFill xmlns:a14="http://schemas.microsoft.com/office/drawing/2010/main">
+                <a:solidFill>
+                  <a:srgbClr val="FFFFFF"/>
+                </a:solidFill>
+              </a14:hiddenFill>
+            </a:ext>
+          </a:extLst>
+        </p:spPr>
+        <p:txBody>
+          <a:bodyPr vert="horz" wrap="square" lIns="91440" tIns="45720" rIns="91440" bIns="45720" numCol="1" anchor="t" anchorCtr="0" compatLnSpc="1">
+            <a:prstTxWarp prst="textNoShape">
+              <a:avLst/>
+            </a:prstTxWarp>
+          </a:bodyPr>
+          <a:lstStyle/>
+          <a:p>
             <a:endParaRPr lang="fr-FR"/>
           </a:p>
         </p:txBody>
@@ -19037,7 +24773,7 @@
             </a:pPr>
             <a:r>
               <a:rPr lang="fr-FR" dirty="0"/>
-              <a:t>Question métier</a:t>
+              <a:t>Lien entre les variables</a:t>
             </a:r>
           </a:p>
           <a:p>
@@ -19047,17 +24783,7 @@
             </a:pPr>
             <a:r>
               <a:rPr lang="fr-FR" dirty="0"/>
-              <a:t>Lien entre les variables</a:t>
-            </a:r>
-          </a:p>
-          <a:p>
-            <a:pPr>
-              <a:buFontTx/>
-              <a:buChar char="-"/>
-            </a:pPr>
-            <a:r>
-              <a:rPr lang="fr-FR" dirty="0"/>
-              <a:t>Représentation à deux axes</a:t>
+              <a:t>Question métier</a:t>
             </a:r>
           </a:p>
         </p:txBody>
@@ -19681,6 +25407,286 @@
           </a:prstGeom>
         </p:spPr>
       </p:pic>
+      <p:sp>
+        <p:nvSpPr>
+          <p:cNvPr id="5" name="ZoneTexte 4">
+            <a:extLst>
+              <a:ext uri="{FF2B5EF4-FFF2-40B4-BE49-F238E27FC236}">
+                <a16:creationId xmlns:a16="http://schemas.microsoft.com/office/drawing/2014/main" id="{1BF0293D-5950-AC87-A074-D40FD4FB26CD}"/>
+              </a:ext>
+            </a:extLst>
+          </p:cNvPr>
+          <p:cNvSpPr txBox="1"/>
+          <p:nvPr/>
+        </p:nvSpPr>
+        <p:spPr>
+          <a:xfrm>
+            <a:off x="6351639" y="2629237"/>
+            <a:ext cx="227049" cy="369332"/>
+          </a:xfrm>
+          <a:prstGeom prst="rect">
+            <a:avLst/>
+          </a:prstGeom>
+          <a:noFill/>
+        </p:spPr>
+        <p:txBody>
+          <a:bodyPr wrap="square" rtlCol="0">
+            <a:spAutoFit/>
+          </a:bodyPr>
+          <a:lstStyle/>
+          <a:p>
+            <a:r>
+              <a:rPr lang="fr-FR" b="1" dirty="0"/>
+              <a:t>A</a:t>
+            </a:r>
+          </a:p>
+        </p:txBody>
+      </p:sp>
+      <p:sp>
+        <p:nvSpPr>
+          <p:cNvPr id="9" name="ZoneTexte 8">
+            <a:extLst>
+              <a:ext uri="{FF2B5EF4-FFF2-40B4-BE49-F238E27FC236}">
+                <a16:creationId xmlns:a16="http://schemas.microsoft.com/office/drawing/2014/main" id="{80D1236A-A6FF-2FFC-8DA6-A196374F1F17}"/>
+              </a:ext>
+            </a:extLst>
+          </p:cNvPr>
+          <p:cNvSpPr txBox="1"/>
+          <p:nvPr/>
+        </p:nvSpPr>
+        <p:spPr>
+          <a:xfrm>
+            <a:off x="5595671" y="4129870"/>
+            <a:ext cx="352845" cy="369332"/>
+          </a:xfrm>
+          <a:prstGeom prst="rect">
+            <a:avLst/>
+          </a:prstGeom>
+          <a:noFill/>
+        </p:spPr>
+        <p:txBody>
+          <a:bodyPr wrap="square" rtlCol="0">
+            <a:spAutoFit/>
+          </a:bodyPr>
+          <a:lstStyle/>
+          <a:p>
+            <a:r>
+              <a:rPr lang="fr-FR" b="1" dirty="0"/>
+              <a:t>B</a:t>
+            </a:r>
+          </a:p>
+        </p:txBody>
+      </p:sp>
+      <p:sp>
+        <p:nvSpPr>
+          <p:cNvPr id="12" name="ZoneTexte 11">
+            <a:extLst>
+              <a:ext uri="{FF2B5EF4-FFF2-40B4-BE49-F238E27FC236}">
+                <a16:creationId xmlns:a16="http://schemas.microsoft.com/office/drawing/2014/main" id="{F8C7535D-FF0E-7F64-ED55-3A9FDA48C6F7}"/>
+              </a:ext>
+            </a:extLst>
+          </p:cNvPr>
+          <p:cNvSpPr txBox="1"/>
+          <p:nvPr/>
+        </p:nvSpPr>
+        <p:spPr>
+          <a:xfrm>
+            <a:off x="5890988" y="5050026"/>
+            <a:ext cx="352845" cy="369332"/>
+          </a:xfrm>
+          <a:prstGeom prst="rect">
+            <a:avLst/>
+          </a:prstGeom>
+          <a:noFill/>
+        </p:spPr>
+        <p:txBody>
+          <a:bodyPr wrap="square" rtlCol="0">
+            <a:spAutoFit/>
+          </a:bodyPr>
+          <a:lstStyle/>
+          <a:p>
+            <a:r>
+              <a:rPr lang="fr-FR" b="1" dirty="0"/>
+              <a:t>C</a:t>
+            </a:r>
+          </a:p>
+        </p:txBody>
+      </p:sp>
+      <p:sp>
+        <p:nvSpPr>
+          <p:cNvPr id="14" name="ZoneTexte 13">
+            <a:extLst>
+              <a:ext uri="{FF2B5EF4-FFF2-40B4-BE49-F238E27FC236}">
+                <a16:creationId xmlns:a16="http://schemas.microsoft.com/office/drawing/2014/main" id="{66DD62A8-A513-A648-7578-9CC6FC92C24E}"/>
+              </a:ext>
+            </a:extLst>
+          </p:cNvPr>
+          <p:cNvSpPr txBox="1"/>
+          <p:nvPr/>
+        </p:nvSpPr>
+        <p:spPr>
+          <a:xfrm>
+            <a:off x="7706955" y="2458332"/>
+            <a:ext cx="352845" cy="369332"/>
+          </a:xfrm>
+          <a:prstGeom prst="rect">
+            <a:avLst/>
+          </a:prstGeom>
+          <a:noFill/>
+        </p:spPr>
+        <p:txBody>
+          <a:bodyPr wrap="square" rtlCol="0">
+            <a:spAutoFit/>
+          </a:bodyPr>
+          <a:lstStyle/>
+          <a:p>
+            <a:r>
+              <a:rPr lang="fr-FR" b="1" dirty="0"/>
+              <a:t>D</a:t>
+            </a:r>
+          </a:p>
+        </p:txBody>
+      </p:sp>
+      <p:sp>
+        <p:nvSpPr>
+          <p:cNvPr id="16" name="ZoneTexte 15">
+            <a:extLst>
+              <a:ext uri="{FF2B5EF4-FFF2-40B4-BE49-F238E27FC236}">
+                <a16:creationId xmlns:a16="http://schemas.microsoft.com/office/drawing/2014/main" id="{705F201D-0921-4ABD-BD87-D12B7A525B10}"/>
+              </a:ext>
+            </a:extLst>
+          </p:cNvPr>
+          <p:cNvSpPr txBox="1"/>
+          <p:nvPr/>
+        </p:nvSpPr>
+        <p:spPr>
+          <a:xfrm>
+            <a:off x="7330554" y="4177810"/>
+            <a:ext cx="352845" cy="369332"/>
+          </a:xfrm>
+          <a:prstGeom prst="rect">
+            <a:avLst/>
+          </a:prstGeom>
+          <a:noFill/>
+        </p:spPr>
+        <p:txBody>
+          <a:bodyPr wrap="square" rtlCol="0">
+            <a:spAutoFit/>
+          </a:bodyPr>
+          <a:lstStyle/>
+          <a:p>
+            <a:r>
+              <a:rPr lang="fr-FR" b="1" dirty="0"/>
+              <a:t>E</a:t>
+            </a:r>
+          </a:p>
+        </p:txBody>
+      </p:sp>
+      <p:sp>
+        <p:nvSpPr>
+          <p:cNvPr id="18" name="ZoneTexte 17">
+            <a:extLst>
+              <a:ext uri="{FF2B5EF4-FFF2-40B4-BE49-F238E27FC236}">
+                <a16:creationId xmlns:a16="http://schemas.microsoft.com/office/drawing/2014/main" id="{3524202C-DA83-4DA8-1A16-AA0198A55C28}"/>
+              </a:ext>
+            </a:extLst>
+          </p:cNvPr>
+          <p:cNvSpPr txBox="1"/>
+          <p:nvPr/>
+        </p:nvSpPr>
+        <p:spPr>
+          <a:xfrm>
+            <a:off x="7733619" y="5106066"/>
+            <a:ext cx="352845" cy="369332"/>
+          </a:xfrm>
+          <a:prstGeom prst="rect">
+            <a:avLst/>
+          </a:prstGeom>
+          <a:noFill/>
+        </p:spPr>
+        <p:txBody>
+          <a:bodyPr wrap="square" rtlCol="0">
+            <a:spAutoFit/>
+          </a:bodyPr>
+          <a:lstStyle/>
+          <a:p>
+            <a:r>
+              <a:rPr lang="fr-FR" b="1" dirty="0"/>
+              <a:t>F</a:t>
+            </a:r>
+          </a:p>
+        </p:txBody>
+      </p:sp>
+      <p:sp>
+        <p:nvSpPr>
+          <p:cNvPr id="20" name="ZoneTexte 19">
+            <a:extLst>
+              <a:ext uri="{FF2B5EF4-FFF2-40B4-BE49-F238E27FC236}">
+                <a16:creationId xmlns:a16="http://schemas.microsoft.com/office/drawing/2014/main" id="{48263AEB-B79F-E9C1-2561-AF7FD312BE42}"/>
+              </a:ext>
+            </a:extLst>
+          </p:cNvPr>
+          <p:cNvSpPr txBox="1"/>
+          <p:nvPr/>
+        </p:nvSpPr>
+        <p:spPr>
+          <a:xfrm>
+            <a:off x="9418318" y="2668105"/>
+            <a:ext cx="352845" cy="369332"/>
+          </a:xfrm>
+          <a:prstGeom prst="rect">
+            <a:avLst/>
+          </a:prstGeom>
+          <a:noFill/>
+        </p:spPr>
+        <p:txBody>
+          <a:bodyPr wrap="square" rtlCol="0">
+            <a:spAutoFit/>
+          </a:bodyPr>
+          <a:lstStyle/>
+          <a:p>
+            <a:r>
+              <a:rPr lang="fr-FR" b="1" dirty="0"/>
+              <a:t>F</a:t>
+            </a:r>
+          </a:p>
+        </p:txBody>
+      </p:sp>
+      <p:sp>
+        <p:nvSpPr>
+          <p:cNvPr id="21" name="ZoneTexte 20">
+            <a:extLst>
+              <a:ext uri="{FF2B5EF4-FFF2-40B4-BE49-F238E27FC236}">
+                <a16:creationId xmlns:a16="http://schemas.microsoft.com/office/drawing/2014/main" id="{188B33CB-3302-FC30-954D-9BE3434E2636}"/>
+              </a:ext>
+            </a:extLst>
+          </p:cNvPr>
+          <p:cNvSpPr txBox="1"/>
+          <p:nvPr/>
+        </p:nvSpPr>
+        <p:spPr>
+          <a:xfrm>
+            <a:off x="10543427" y="3497484"/>
+            <a:ext cx="352845" cy="369332"/>
+          </a:xfrm>
+          <a:prstGeom prst="rect">
+            <a:avLst/>
+          </a:prstGeom>
+          <a:noFill/>
+        </p:spPr>
+        <p:txBody>
+          <a:bodyPr wrap="square" rtlCol="0">
+            <a:spAutoFit/>
+          </a:bodyPr>
+          <a:lstStyle/>
+          <a:p>
+            <a:r>
+              <a:rPr lang="fr-FR" b="1" dirty="0"/>
+              <a:t>G</a:t>
+            </a:r>
+          </a:p>
+        </p:txBody>
+      </p:sp>
     </p:spTree>
     <p:extLst>
       <p:ext uri="{BB962C8B-B14F-4D97-AF65-F5344CB8AC3E}">
@@ -19736,7 +25742,7 @@
           <a:p>
             <a:r>
               <a:rPr lang="fr-FR" sz="4000" dirty="0"/>
-              <a:t>5- L’histoire: Que raconte-t-on? </a:t>
+              <a:t>5- L’histoire - Que raconte-t-on? </a:t>
             </a:r>
           </a:p>
         </p:txBody>
